--- a/docs/presentacion/Presentacion_RMC_MockupTool.pptx
+++ b/docs/presentacion/Presentacion_RMC_MockupTool.pptx
@@ -5,7 +5,7 @@
     <p:sldMasterId id="2147483648" r:id="rId1"/>
   </p:sldMasterIdLst>
   <p:notesMasterIdLst>
-    <p:notesMasterId r:id="rId13"/>
+    <p:notesMasterId r:id="rId12"/>
   </p:notesMasterIdLst>
   <p:sldIdLst>
     <p:sldId id="256" r:id="rId2"/>
@@ -15,10 +15,9 @@
     <p:sldId id="260" r:id="rId6"/>
     <p:sldId id="261" r:id="rId7"/>
     <p:sldId id="262" r:id="rId8"/>
-    <p:sldId id="263" r:id="rId9"/>
-    <p:sldId id="264" r:id="rId10"/>
-    <p:sldId id="265" r:id="rId11"/>
-    <p:sldId id="266" r:id="rId12"/>
+    <p:sldId id="264" r:id="rId9"/>
+    <p:sldId id="265" r:id="rId10"/>
+    <p:sldId id="266" r:id="rId11"/>
   </p:sldIdLst>
   <p:sldSz cx="12192000" cy="6858000"/>
   <p:notesSz cx="6858000" cy="9144000"/>
@@ -117,6 +116,11 @@
       </a:defRPr>
     </a:lvl9pPr>
   </p:defaultTextStyle>
+  <p:extLst>
+    <p:ext uri="{EFAFB233-063F-42B5-8137-9DF3F51BA10A}">
+      <p15:sldGuideLst xmlns:p15="http://schemas.microsoft.com/office/powerpoint/2012/main"/>
+    </p:ext>
+  </p:extLst>
 </p:presentation>
 </file>
 
@@ -418,88 +422,6 @@
           <a:lstStyle/>
           <a:p>
             <a:r>
-              <a:t>Esta slide debe calmar la preocupacion de mezcla entre repos.</a:t>
-            </a:r>
-          </a:p>
-          <a:p>
-            <a:r>
-              <a:t>La integracion es por la base central y campos persistidos, no por acoplar logica.</a:t>
-            </a:r>
-          </a:p>
-        </p:txBody>
-      </p:sp>
-      <p:sp>
-        <p:nvSpPr>
-          <p:cNvPr id="4" name="Slide Number Placeholder 3"/>
-          <p:cNvSpPr>
-            <a:spLocks noGrp="1"/>
-          </p:cNvSpPr>
-          <p:nvPr>
-            <p:ph type="sldNum" idx="5"/>
-          </p:nvPr>
-        </p:nvSpPr>
-        <p:spPr/>
-        <p:txBody>
-          <a:bodyPr/>
-          <a:lstStyle/>
-          <a:p>
-            <a:endParaRPr/>
-          </a:p>
-        </p:txBody>
-      </p:sp>
-    </p:spTree>
-  </p:cSld>
-  <p:clrMapOvr>
-    <a:masterClrMapping/>
-  </p:clrMapOvr>
-</p:notes>
-</file>
-
-<file path=ppt/notesSlides/notesSlide11.xml><?xml version="1.0" encoding="utf-8"?>
-<p:notes xmlns:a="http://schemas.openxmlformats.org/drawingml/2006/main" xmlns:r="http://schemas.openxmlformats.org/officeDocument/2006/relationships" xmlns:p="http://schemas.openxmlformats.org/presentationml/2006/main">
-  <p:cSld>
-    <p:spTree>
-      <p:nvGrpSpPr>
-        <p:cNvPr id="1" name=""/>
-        <p:cNvGrpSpPr/>
-        <p:nvPr/>
-      </p:nvGrpSpPr>
-      <p:grpSpPr>
-        <a:xfrm>
-          <a:off x="0" y="0"/>
-          <a:ext cx="0" cy="0"/>
-          <a:chOff x="0" y="0"/>
-          <a:chExt cx="0" cy="0"/>
-        </a:xfrm>
-      </p:grpSpPr>
-      <p:sp>
-        <p:nvSpPr>
-          <p:cNvPr id="2" name="Slide Image Placeholder 1"/>
-          <p:cNvSpPr>
-            <a:spLocks noGrp="1" noRot="1" noChangeAspect="1"/>
-          </p:cNvSpPr>
-          <p:nvPr>
-            <p:ph type="sldImg"/>
-          </p:nvPr>
-        </p:nvSpPr>
-        <p:spPr/>
-      </p:sp>
-      <p:sp>
-        <p:nvSpPr>
-          <p:cNvPr id="3" name="Notes Placeholder 2"/>
-          <p:cNvSpPr>
-            <a:spLocks noGrp="1"/>
-          </p:cNvSpPr>
-          <p:nvPr>
-            <p:ph type="body" idx="1"/>
-          </p:nvPr>
-        </p:nvSpPr>
-        <p:spPr/>
-        <p:txBody>
-          <a:bodyPr/>
-          <a:lstStyle/>
-          <a:p>
-            <a:r>
               <a:t>Cerrar con la idea de evidencia recuperable: archivo, ruta, clave y estado.</a:t>
             </a:r>
           </a:p>
@@ -1074,12 +996,106 @@
           <a:lstStyle/>
           <a:p>
             <a:r>
-              <a:t>Explicar que la base es compartida, pero las tablas de MockupTool son propias.</a:t>
-            </a:r>
-          </a:p>
-          <a:p>
-            <a:r>
-              <a:t>No presentar la reestructura recomendada como implementada.</a:t>
+              <a:rPr dirty="0" err="1"/>
+              <a:t>Subrayar</a:t>
+            </a:r>
+            <a:r>
+              <a:rPr dirty="0"/>
+              <a:t> que </a:t>
+            </a:r>
+            <a:r>
+              <a:rPr dirty="0" err="1"/>
+              <a:t>impreso</a:t>
+            </a:r>
+            <a:r>
+              <a:rPr dirty="0"/>
+              <a:t>=1 </a:t>
+            </a:r>
+            <a:r>
+              <a:rPr dirty="0" err="1"/>
+              <a:t>significa</a:t>
+            </a:r>
+            <a:r>
+              <a:rPr dirty="0"/>
+              <a:t> </a:t>
+            </a:r>
+            <a:r>
+              <a:rPr dirty="0" err="1"/>
+              <a:t>aceptado</a:t>
+            </a:r>
+            <a:r>
+              <a:rPr dirty="0"/>
+              <a:t> </a:t>
+            </a:r>
+            <a:r>
+              <a:rPr dirty="0" err="1"/>
+              <a:t>por</a:t>
+            </a:r>
+            <a:r>
+              <a:rPr dirty="0"/>
+              <a:t> macOS, no </a:t>
+            </a:r>
+            <a:r>
+              <a:rPr dirty="0" err="1"/>
+              <a:t>garantia</a:t>
+            </a:r>
+            <a:r>
+              <a:rPr dirty="0"/>
+              <a:t> </a:t>
+            </a:r>
+            <a:r>
+              <a:rPr dirty="0" err="1"/>
+              <a:t>fisica</a:t>
+            </a:r>
+            <a:r>
+              <a:rPr dirty="0"/>
+              <a:t>.</a:t>
+            </a:r>
+          </a:p>
+          <a:p>
+            <a:r>
+              <a:rPr dirty="0"/>
+              <a:t>Items SIN REGISTRO no se </a:t>
+            </a:r>
+            <a:r>
+              <a:rPr dirty="0" err="1"/>
+              <a:t>mandan</a:t>
+            </a:r>
+            <a:r>
+              <a:rPr dirty="0"/>
+              <a:t> </a:t>
+            </a:r>
+            <a:r>
+              <a:rPr dirty="0" err="1"/>
+              <a:t>por</a:t>
+            </a:r>
+            <a:r>
+              <a:rPr dirty="0"/>
+              <a:t> </a:t>
+            </a:r>
+            <a:r>
+              <a:rPr dirty="0" err="1"/>
+              <a:t>defecto</a:t>
+            </a:r>
+            <a:r>
+              <a:rPr dirty="0"/>
+              <a:t> </a:t>
+            </a:r>
+            <a:r>
+              <a:rPr dirty="0" err="1"/>
+              <a:t>porque</a:t>
+            </a:r>
+            <a:r>
+              <a:rPr dirty="0"/>
+              <a:t> no hay clave que </a:t>
+            </a:r>
+            <a:r>
+              <a:rPr dirty="0" err="1"/>
+              <a:t>actualizar</a:t>
+            </a:r>
+            <a:r>
+              <a:rPr dirty="0"/>
+              <a:t>.</a:t>
             </a:r>
           </a:p>
         </p:txBody>
@@ -1156,12 +1172,12 @@
           <a:lstStyle/>
           <a:p>
             <a:r>
-              <a:t>Subrayar que impreso=1 significa aceptado por macOS, no garantia fisica.</a:t>
-            </a:r>
-          </a:p>
-          <a:p>
-            <a:r>
-              <a:t>Items SIN REGISTRO no se mandan por defecto porque no hay clave que actualizar.</a:t>
+              <a:t>Esta slide debe calmar la preocupacion de mezcla entre repos.</a:t>
+            </a:r>
+          </a:p>
+          <a:p>
+            <a:r>
+              <a:t>La integracion es por la base central y campos persistidos, no por acoplar logica.</a:t>
             </a:r>
           </a:p>
         </p:txBody>
@@ -2286,1419 +2302,6 @@
       </p:grpSpPr>
       <p:sp>
         <p:nvSpPr>
-          <p:cNvPr id="26" name="Rectángulo 25">
-            <a:extLst>
-              <a:ext uri="{FF2B5EF4-FFF2-40B4-BE49-F238E27FC236}">
-                <a16:creationId xmlns:a16="http://schemas.microsoft.com/office/drawing/2014/main" id="{9910E5AC-AF93-4C24-8451-B172063BAC00}"/>
-              </a:ext>
-            </a:extLst>
-          </p:cNvPr>
-          <p:cNvSpPr>
-            <a:spLocks noGrp="1"/>
-          </p:cNvSpPr>
-          <p:nvPr/>
-        </p:nvSpPr>
-        <p:spPr>
-          <a:xfrm>
-            <a:off x="590550" y="419100"/>
-            <a:ext cx="4000500" cy="190500"/>
-          </a:xfrm>
-          <a:prstGeom prst="rect">
-            <a:avLst/>
-          </a:prstGeom>
-          <a:noFill/>
-          <a:ln w="0">
-            <a:noFill/>
-            <a:prstDash val="solid"/>
-          </a:ln>
-        </p:spPr>
-        <p:txBody>
-          <a:bodyPr wrap="square" lIns="0" tIns="0" rIns="0" bIns="0" anchor="t"/>
-          <a:lstStyle/>
-          <a:p>
-            <a:pPr algn="l">
-              <a:lnSpc>
-                <a:spcPct val="108000"/>
-              </a:lnSpc>
-              <a:buNone/>
-              <a:defRPr sz="750" b="1">
-                <a:solidFill>
-                  <a:srgbClr val="7D8592"/>
-                </a:solidFill>
-                <a:latin typeface="Calibri"/>
-                <a:ea typeface="Calibri"/>
-                <a:cs typeface="Calibri"/>
-              </a:defRPr>
-            </a:pPr>
-            <a:r>
-              <a:rPr lang="es-ES_tradnl" sz="750" b="1">
-                <a:solidFill>
-                  <a:srgbClr val="7D8592"/>
-                </a:solidFill>
-                <a:latin typeface="Calibri"/>
-                <a:ea typeface="Calibri"/>
-                <a:cs typeface="Calibri"/>
-              </a:rPr>
-              <a:t>INTEGRACION RMC</a:t>
-            </a:r>
-          </a:p>
-        </p:txBody>
-      </p:sp>
-      <p:sp>
-        <p:nvSpPr>
-          <p:cNvPr id="2" name="Rectángulo 1">
-            <a:extLst>
-              <a:ext uri="{FF2B5EF4-FFF2-40B4-BE49-F238E27FC236}">
-                <a16:creationId xmlns:a16="http://schemas.microsoft.com/office/drawing/2014/main" id="{AE1AB351-167A-46EB-B4DB-40C129186456}"/>
-              </a:ext>
-            </a:extLst>
-          </p:cNvPr>
-          <p:cNvSpPr>
-            <a:spLocks noGrp="1"/>
-          </p:cNvSpPr>
-          <p:nvPr/>
-        </p:nvSpPr>
-        <p:spPr>
-          <a:xfrm>
-            <a:off x="590550" y="666750"/>
-            <a:ext cx="7239000" cy="723900"/>
-          </a:xfrm>
-          <a:prstGeom prst="rect">
-            <a:avLst/>
-          </a:prstGeom>
-          <a:noFill/>
-          <a:ln w="0">
-            <a:noFill/>
-            <a:prstDash val="solid"/>
-          </a:ln>
-        </p:spPr>
-        <p:txBody>
-          <a:bodyPr wrap="square" lIns="0" tIns="0" rIns="0" bIns="0" anchor="t"/>
-          <a:lstStyle/>
-          <a:p>
-            <a:pPr algn="l">
-              <a:lnSpc>
-                <a:spcPct val="103000"/>
-              </a:lnSpc>
-              <a:buNone/>
-              <a:defRPr sz="2325" b="1">
-                <a:solidFill>
-                  <a:srgbClr val="F3F4F6"/>
-                </a:solidFill>
-                <a:latin typeface="Calibri"/>
-                <a:ea typeface="Calibri"/>
-                <a:cs typeface="Calibri"/>
-              </a:defRPr>
-            </a:pPr>
-            <a:r>
-              <a:rPr lang="es-ES_tradnl" sz="2325" b="1">
-                <a:solidFill>
-                  <a:srgbClr val="F3F4F6"/>
-                </a:solidFill>
-                <a:latin typeface="Calibri"/>
-                <a:ea typeface="Calibri"/>
-                <a:cs typeface="Calibri"/>
-              </a:rPr>
-              <a:t>Se integra por datos, no mezclando reglas entre herramientas.</a:t>
-            </a:r>
-          </a:p>
-        </p:txBody>
-      </p:sp>
-      <p:sp>
-        <p:nvSpPr>
-          <p:cNvPr id="3" name="Rectángulo 2">
-            <a:extLst>
-              <a:ext uri="{FF2B5EF4-FFF2-40B4-BE49-F238E27FC236}">
-                <a16:creationId xmlns:a16="http://schemas.microsoft.com/office/drawing/2014/main" id="{1BEAF51B-2B5F-47CB-A2E4-C1EF845C6533}"/>
-              </a:ext>
-            </a:extLst>
-          </p:cNvPr>
-          <p:cNvSpPr>
-            <a:spLocks noGrp="1"/>
-          </p:cNvSpPr>
-          <p:nvPr/>
-        </p:nvSpPr>
-        <p:spPr>
-          <a:xfrm>
-            <a:off x="609600" y="1390650"/>
-            <a:ext cx="7334250" cy="457200"/>
-          </a:xfrm>
-          <a:prstGeom prst="rect">
-            <a:avLst/>
-          </a:prstGeom>
-          <a:noFill/>
-          <a:ln w="0">
-            <a:noFill/>
-            <a:prstDash val="solid"/>
-          </a:ln>
-        </p:spPr>
-        <p:txBody>
-          <a:bodyPr wrap="square" lIns="0" tIns="0" rIns="0" bIns="0" anchor="t"/>
-          <a:lstStyle/>
-          <a:p>
-            <a:pPr algn="l">
-              <a:lnSpc>
-                <a:spcPct val="118000"/>
-              </a:lnSpc>
-              <a:buNone/>
-              <a:defRPr sz="1125" b="0">
-                <a:solidFill>
-                  <a:srgbClr val="B8BEC8"/>
-                </a:solidFill>
-                <a:latin typeface="Calibri"/>
-                <a:ea typeface="Calibri"/>
-                <a:cs typeface="Calibri"/>
-              </a:defRPr>
-            </a:pPr>
-            <a:r>
-              <a:rPr lang="es-ES_tradnl" sz="1125" b="0">
-                <a:solidFill>
-                  <a:srgbClr val="B8BEC8"/>
-                </a:solidFill>
-                <a:latin typeface="Calibri"/>
-                <a:ea typeface="Calibri"/>
-                <a:cs typeface="Calibri"/>
-              </a:rPr>
-              <a:t>Control Center puede consultar rutas, claves, fechas e impresion sin que MockupTool toque tablas de RMCOp-Nike.</a:t>
-            </a:r>
-          </a:p>
-        </p:txBody>
-      </p:sp>
-      <p:sp>
-        <p:nvSpPr>
-          <p:cNvPr id="4" name="Rectángulo 3">
-            <a:extLst>
-              <a:ext uri="{FF2B5EF4-FFF2-40B4-BE49-F238E27FC236}">
-                <a16:creationId xmlns:a16="http://schemas.microsoft.com/office/drawing/2014/main" id="{AC33DAE6-DABA-49C8-8D56-928FA3B4EAF3}"/>
-              </a:ext>
-            </a:extLst>
-          </p:cNvPr>
-          <p:cNvSpPr>
-            <a:spLocks noGrp="1"/>
-          </p:cNvSpPr>
-          <p:nvPr/>
-        </p:nvSpPr>
-        <p:spPr>
-          <a:xfrm>
-            <a:off x="590550" y="323850"/>
-            <a:ext cx="514350" cy="38100"/>
-          </a:xfrm>
-          <a:prstGeom prst="rect">
-            <a:avLst/>
-          </a:prstGeom>
-          <a:solidFill>
-            <a:srgbClr val="BD1F36"/>
-          </a:solidFill>
-          <a:ln w="0">
-            <a:solidFill>
-              <a:srgbClr val="BD1F36"/>
-            </a:solidFill>
-            <a:prstDash val="solid"/>
-          </a:ln>
-        </p:spPr>
-      </p:sp>
-      <p:sp>
-        <p:nvSpPr>
-          <p:cNvPr id="5" name="Rectángulo redondeado 4">
-            <a:extLst>
-              <a:ext uri="{FF2B5EF4-FFF2-40B4-BE49-F238E27FC236}">
-                <a16:creationId xmlns:a16="http://schemas.microsoft.com/office/drawing/2014/main" id="{2B5EC554-034C-434A-80C1-E91FB5CDC3C9}"/>
-              </a:ext>
-            </a:extLst>
-          </p:cNvPr>
-          <p:cNvSpPr>
-            <a:spLocks noGrp="1"/>
-          </p:cNvSpPr>
-          <p:nvPr/>
-        </p:nvSpPr>
-        <p:spPr>
-          <a:xfrm>
-            <a:off x="876300" y="2457450"/>
-            <a:ext cx="2381250" cy="1123950"/>
-          </a:xfrm>
-          <a:prstGeom prst="roundRect">
-            <a:avLst>
-              <a:gd name="adj" fmla="val 6780"/>
-            </a:avLst>
-          </a:prstGeom>
-          <a:solidFill>
-            <a:srgbClr val="2B2F35"/>
-          </a:solidFill>
-          <a:ln w="9525">
-            <a:solidFill>
-              <a:srgbClr val="3A3F47"/>
-            </a:solidFill>
-            <a:prstDash val="solid"/>
-          </a:ln>
-        </p:spPr>
-      </p:sp>
-      <p:sp>
-        <p:nvSpPr>
-          <p:cNvPr id="6" name="Rectángulo 5">
-            <a:extLst>
-              <a:ext uri="{FF2B5EF4-FFF2-40B4-BE49-F238E27FC236}">
-                <a16:creationId xmlns:a16="http://schemas.microsoft.com/office/drawing/2014/main" id="{F8B51E9C-18C5-4CB2-8B82-23D77B6FB0BB}"/>
-              </a:ext>
-            </a:extLst>
-          </p:cNvPr>
-          <p:cNvSpPr>
-            <a:spLocks noGrp="1"/>
-          </p:cNvSpPr>
-          <p:nvPr/>
-        </p:nvSpPr>
-        <p:spPr>
-          <a:xfrm>
-            <a:off x="1143000" y="2724150"/>
-            <a:ext cx="1809750" cy="266700"/>
-          </a:xfrm>
-          <a:prstGeom prst="rect">
-            <a:avLst/>
-          </a:prstGeom>
-          <a:noFill/>
-          <a:ln w="0">
-            <a:noFill/>
-            <a:prstDash val="solid"/>
-          </a:ln>
-        </p:spPr>
-        <p:txBody>
-          <a:bodyPr wrap="square" lIns="0" tIns="0" rIns="0" bIns="0" anchor="t"/>
-          <a:lstStyle/>
-          <a:p>
-            <a:pPr algn="ctr">
-              <a:lnSpc>
-                <a:spcPct val="108000"/>
-              </a:lnSpc>
-              <a:buNone/>
-              <a:defRPr sz="1650" b="1">
-                <a:solidFill>
-                  <a:srgbClr val="F3F4F6"/>
-                </a:solidFill>
-                <a:latin typeface="Calibri"/>
-                <a:ea typeface="Calibri"/>
-                <a:cs typeface="Calibri"/>
-              </a:defRPr>
-            </a:pPr>
-            <a:r>
-              <a:rPr lang="es-ES_tradnl" sz="1650" b="1">
-                <a:solidFill>
-                  <a:srgbClr val="F3F4F6"/>
-                </a:solidFill>
-                <a:latin typeface="Calibri"/>
-                <a:ea typeface="Calibri"/>
-                <a:cs typeface="Calibri"/>
-              </a:rPr>
-              <a:t>RMC MockupTool</a:t>
-            </a:r>
-          </a:p>
-        </p:txBody>
-      </p:sp>
-      <p:sp>
-        <p:nvSpPr>
-          <p:cNvPr id="7" name="Rectángulo 6">
-            <a:extLst>
-              <a:ext uri="{FF2B5EF4-FFF2-40B4-BE49-F238E27FC236}">
-                <a16:creationId xmlns:a16="http://schemas.microsoft.com/office/drawing/2014/main" id="{CB61BD9F-5F49-4D6B-8417-51A772E2EAAB}"/>
-              </a:ext>
-            </a:extLst>
-          </p:cNvPr>
-          <p:cNvSpPr>
-            <a:spLocks noGrp="1"/>
-          </p:cNvSpPr>
-          <p:nvPr/>
-        </p:nvSpPr>
-        <p:spPr>
-          <a:xfrm>
-            <a:off x="1162050" y="3143250"/>
-            <a:ext cx="1771650" cy="209550"/>
-          </a:xfrm>
-          <a:prstGeom prst="rect">
-            <a:avLst/>
-          </a:prstGeom>
-          <a:noFill/>
-          <a:ln w="0">
-            <a:noFill/>
-            <a:prstDash val="solid"/>
-          </a:ln>
-        </p:spPr>
-        <p:txBody>
-          <a:bodyPr wrap="square" lIns="0" tIns="0" rIns="0" bIns="0" anchor="t"/>
-          <a:lstStyle/>
-          <a:p>
-            <a:pPr algn="ctr">
-              <a:lnSpc>
-                <a:spcPct val="108000"/>
-              </a:lnSpc>
-              <a:buNone/>
-              <a:defRPr sz="975" b="0">
-                <a:solidFill>
-                  <a:srgbClr val="B8BEC8"/>
-                </a:solidFill>
-                <a:latin typeface="Calibri"/>
-                <a:ea typeface="Calibri"/>
-                <a:cs typeface="Calibri"/>
-              </a:defRPr>
-            </a:pPr>
-            <a:r>
-              <a:rPr lang="es-ES_tradnl" sz="975" b="0">
-                <a:solidFill>
-                  <a:srgbClr val="B8BEC8"/>
-                </a:solidFill>
-                <a:latin typeface="Calibri"/>
-                <a:ea typeface="Calibri"/>
-                <a:cs typeface="Calibri"/>
-              </a:rPr>
-              <a:t>Genera PDFs anotados</a:t>
-            </a:r>
-          </a:p>
-        </p:txBody>
-      </p:sp>
-      <p:sp>
-        <p:nvSpPr>
-          <p:cNvPr id="8" name="Rectángulo redondeado 7">
-            <a:extLst>
-              <a:ext uri="{FF2B5EF4-FFF2-40B4-BE49-F238E27FC236}">
-                <a16:creationId xmlns:a16="http://schemas.microsoft.com/office/drawing/2014/main" id="{433D4C2C-2BC5-4490-A1D4-7ED27A649686}"/>
-              </a:ext>
-            </a:extLst>
-          </p:cNvPr>
-          <p:cNvSpPr>
-            <a:spLocks noGrp="1"/>
-          </p:cNvSpPr>
-          <p:nvPr/>
-        </p:nvSpPr>
-        <p:spPr>
-          <a:xfrm>
-            <a:off x="4857750" y="1962150"/>
-            <a:ext cx="2381250" cy="2133600"/>
-          </a:xfrm>
-          <a:prstGeom prst="roundRect">
-            <a:avLst>
-              <a:gd name="adj" fmla="val 3571"/>
-            </a:avLst>
-          </a:prstGeom>
-          <a:solidFill>
-            <a:srgbClr val="202329"/>
-          </a:solidFill>
-          <a:ln w="9525">
-            <a:solidFill>
-              <a:srgbClr val="3A3F47"/>
-            </a:solidFill>
-            <a:prstDash val="solid"/>
-          </a:ln>
-        </p:spPr>
-      </p:sp>
-      <p:sp>
-        <p:nvSpPr>
-          <p:cNvPr id="9" name="Rectángulo 8">
-            <a:extLst>
-              <a:ext uri="{FF2B5EF4-FFF2-40B4-BE49-F238E27FC236}">
-                <a16:creationId xmlns:a16="http://schemas.microsoft.com/office/drawing/2014/main" id="{3C4F14E1-36D6-437A-9105-E1C0345A2175}"/>
-              </a:ext>
-            </a:extLst>
-          </p:cNvPr>
-          <p:cNvSpPr>
-            <a:spLocks noGrp="1"/>
-          </p:cNvSpPr>
-          <p:nvPr/>
-        </p:nvSpPr>
-        <p:spPr>
-          <a:xfrm>
-            <a:off x="5124450" y="2266950"/>
-            <a:ext cx="1809750" cy="266700"/>
-          </a:xfrm>
-          <a:prstGeom prst="rect">
-            <a:avLst/>
-          </a:prstGeom>
-          <a:noFill/>
-          <a:ln w="0">
-            <a:noFill/>
-            <a:prstDash val="solid"/>
-          </a:ln>
-        </p:spPr>
-        <p:txBody>
-          <a:bodyPr wrap="square" lIns="0" tIns="0" rIns="0" bIns="0" anchor="t"/>
-          <a:lstStyle/>
-          <a:p>
-            <a:pPr algn="ctr">
-              <a:lnSpc>
-                <a:spcPct val="108000"/>
-              </a:lnSpc>
-              <a:buNone/>
-              <a:defRPr sz="1800" b="1">
-                <a:solidFill>
-                  <a:srgbClr val="F3C747"/>
-                </a:solidFill>
-                <a:latin typeface="Calibri"/>
-                <a:ea typeface="Calibri"/>
-                <a:cs typeface="Calibri"/>
-              </a:defRPr>
-            </a:pPr>
-            <a:r>
-              <a:rPr lang="es-ES_tradnl" sz="1800" b="1">
-                <a:solidFill>
-                  <a:srgbClr val="F3C747"/>
-                </a:solidFill>
-                <a:latin typeface="Calibri"/>
-                <a:ea typeface="Calibri"/>
-                <a:cs typeface="Calibri"/>
-              </a:rPr>
-              <a:t>RMC_CEP.sqlite</a:t>
-            </a:r>
-          </a:p>
-        </p:txBody>
-      </p:sp>
-      <p:sp>
-        <p:nvSpPr>
-          <p:cNvPr id="10" name="Rectángulo 9">
-            <a:extLst>
-              <a:ext uri="{FF2B5EF4-FFF2-40B4-BE49-F238E27FC236}">
-                <a16:creationId xmlns:a16="http://schemas.microsoft.com/office/drawing/2014/main" id="{D2CC4EFD-DB1A-4CB2-BBEE-8C1EED14C738}"/>
-              </a:ext>
-            </a:extLst>
-          </p:cNvPr>
-          <p:cNvSpPr>
-            <a:spLocks noGrp="1"/>
-          </p:cNvSpPr>
-          <p:nvPr/>
-        </p:nvSpPr>
-        <p:spPr>
-          <a:xfrm>
-            <a:off x="5314950" y="2857500"/>
-            <a:ext cx="1428750" cy="1047750"/>
-          </a:xfrm>
-          <a:prstGeom prst="rect">
-            <a:avLst/>
-          </a:prstGeom>
-          <a:noFill/>
-          <a:ln w="0">
-            <a:noFill/>
-            <a:prstDash val="solid"/>
-          </a:ln>
-        </p:spPr>
-        <p:txBody>
-          <a:bodyPr wrap="square" lIns="0" tIns="0" rIns="0" bIns="0" anchor="t"/>
-          <a:lstStyle/>
-          <a:p>
-            <a:pPr algn="ctr">
-              <a:lnSpc>
-                <a:spcPct val="118000"/>
-              </a:lnSpc>
-              <a:buNone/>
-              <a:defRPr sz="1500" b="0">
-                <a:solidFill>
-                  <a:srgbClr val="F3F4F6"/>
-                </a:solidFill>
-                <a:latin typeface="Calibri"/>
-                <a:ea typeface="Calibri"/>
-                <a:cs typeface="Calibri"/>
-              </a:defRPr>
-            </a:pPr>
-            <a:r>
-              <a:rPr lang="es-ES_tradnl" sz="1500" b="0">
-                <a:solidFill>
-                  <a:srgbClr val="F3F4F6"/>
-                </a:solidFill>
-                <a:latin typeface="Calibri"/>
-                <a:ea typeface="Calibri"/>
-                <a:cs typeface="Calibri"/>
-              </a:rPr>
-              <a:t>runs</a:t>
-            </a:r>
-          </a:p>
-          <a:p>
-            <a:pPr algn="ctr">
-              <a:lnSpc>
-                <a:spcPct val="118000"/>
-              </a:lnSpc>
-              <a:buNone/>
-              <a:defRPr sz="1500" b="0">
-                <a:solidFill>
-                  <a:srgbClr val="F3F4F6"/>
-                </a:solidFill>
-                <a:latin typeface="Calibri"/>
-                <a:ea typeface="Calibri"/>
-                <a:cs typeface="Calibri"/>
-              </a:defRPr>
-            </a:pPr>
-            <a:r>
-              <a:rPr lang="es-ES_tradnl" sz="1500" b="0">
-                <a:solidFill>
-                  <a:srgbClr val="F3F4F6"/>
-                </a:solidFill>
-                <a:latin typeface="Calibri"/>
-                <a:ea typeface="Calibri"/>
-                <a:cs typeface="Calibri"/>
-              </a:rPr>
-              <a:t>items</a:t>
-            </a:r>
-          </a:p>
-          <a:p>
-            <a:pPr algn="ctr">
-              <a:lnSpc>
-                <a:spcPct val="118000"/>
-              </a:lnSpc>
-              <a:buNone/>
-              <a:defRPr sz="1500" b="0">
-                <a:solidFill>
-                  <a:srgbClr val="F3F4F6"/>
-                </a:solidFill>
-                <a:latin typeface="Calibri"/>
-                <a:ea typeface="Calibri"/>
-                <a:cs typeface="Calibri"/>
-              </a:defRPr>
-            </a:pPr>
-            <a:r>
-              <a:rPr lang="es-ES_tradnl" sz="1500" b="0">
-                <a:solidFill>
-                  <a:srgbClr val="F3F4F6"/>
-                </a:solidFill>
-                <a:latin typeface="Calibri"/>
-                <a:ea typeface="Calibri"/>
-                <a:cs typeface="Calibri"/>
-              </a:rPr>
-              <a:t>cep_registry</a:t>
-            </a:r>
-          </a:p>
-          <a:p>
-            <a:pPr algn="ctr">
-              <a:lnSpc>
-                <a:spcPct val="118000"/>
-              </a:lnSpc>
-              <a:buNone/>
-              <a:defRPr sz="1500" b="0">
-                <a:solidFill>
-                  <a:srgbClr val="F3F4F6"/>
-                </a:solidFill>
-                <a:latin typeface="Calibri"/>
-                <a:ea typeface="Calibri"/>
-                <a:cs typeface="Calibri"/>
-              </a:defRPr>
-            </a:pPr>
-            <a:r>
-              <a:rPr lang="es-ES_tradnl" sz="1500" b="0">
-                <a:solidFill>
-                  <a:srgbClr val="F3F4F6"/>
-                </a:solidFill>
-                <a:latin typeface="Calibri"/>
-                <a:ea typeface="Calibri"/>
-                <a:cs typeface="Calibri"/>
-              </a:rPr>
-              <a:t>variants leidas</a:t>
-            </a:r>
-          </a:p>
-        </p:txBody>
-      </p:sp>
-      <p:sp>
-        <p:nvSpPr>
-          <p:cNvPr id="11" name="Rectángulo redondeado 10">
-            <a:extLst>
-              <a:ext uri="{FF2B5EF4-FFF2-40B4-BE49-F238E27FC236}">
-                <a16:creationId xmlns:a16="http://schemas.microsoft.com/office/drawing/2014/main" id="{5E71290C-6962-4AE9-BFEF-0F783A689B41}"/>
-              </a:ext>
-            </a:extLst>
-          </p:cNvPr>
-          <p:cNvSpPr>
-            <a:spLocks noGrp="1"/>
-          </p:cNvSpPr>
-          <p:nvPr/>
-        </p:nvSpPr>
-        <p:spPr>
-          <a:xfrm>
-            <a:off x="8896350" y="2457450"/>
-            <a:ext cx="2381250" cy="1123950"/>
-          </a:xfrm>
-          <a:prstGeom prst="roundRect">
-            <a:avLst>
-              <a:gd name="adj" fmla="val 6780"/>
-            </a:avLst>
-          </a:prstGeom>
-          <a:solidFill>
-            <a:srgbClr val="2B2F35"/>
-          </a:solidFill>
-          <a:ln w="9525">
-            <a:solidFill>
-              <a:srgbClr val="3A3F47"/>
-            </a:solidFill>
-            <a:prstDash val="solid"/>
-          </a:ln>
-        </p:spPr>
-      </p:sp>
-      <p:sp>
-        <p:nvSpPr>
-          <p:cNvPr id="12" name="Rectángulo 11">
-            <a:extLst>
-              <a:ext uri="{FF2B5EF4-FFF2-40B4-BE49-F238E27FC236}">
-                <a16:creationId xmlns:a16="http://schemas.microsoft.com/office/drawing/2014/main" id="{D98CB3FD-E6C2-40B7-A901-2B4AF26739C9}"/>
-              </a:ext>
-            </a:extLst>
-          </p:cNvPr>
-          <p:cNvSpPr>
-            <a:spLocks noGrp="1"/>
-          </p:cNvSpPr>
-          <p:nvPr/>
-        </p:nvSpPr>
-        <p:spPr>
-          <a:xfrm>
-            <a:off x="9163050" y="2724150"/>
-            <a:ext cx="1809750" cy="266700"/>
-          </a:xfrm>
-          <a:prstGeom prst="rect">
-            <a:avLst/>
-          </a:prstGeom>
-          <a:noFill/>
-          <a:ln w="0">
-            <a:noFill/>
-            <a:prstDash val="solid"/>
-          </a:ln>
-        </p:spPr>
-        <p:txBody>
-          <a:bodyPr wrap="square" lIns="0" tIns="0" rIns="0" bIns="0" anchor="t"/>
-          <a:lstStyle/>
-          <a:p>
-            <a:pPr algn="ctr">
-              <a:lnSpc>
-                <a:spcPct val="108000"/>
-              </a:lnSpc>
-              <a:buNone/>
-              <a:defRPr sz="1650" b="1">
-                <a:solidFill>
-                  <a:srgbClr val="F3F4F6"/>
-                </a:solidFill>
-                <a:latin typeface="Calibri"/>
-                <a:ea typeface="Calibri"/>
-                <a:cs typeface="Calibri"/>
-              </a:defRPr>
-            </a:pPr>
-            <a:r>
-              <a:rPr lang="es-ES_tradnl" sz="1650" b="1">
-                <a:solidFill>
-                  <a:srgbClr val="F3F4F6"/>
-                </a:solidFill>
-                <a:latin typeface="Calibri"/>
-                <a:ea typeface="Calibri"/>
-                <a:cs typeface="Calibri"/>
-              </a:rPr>
-              <a:t>Control Center</a:t>
-            </a:r>
-          </a:p>
-        </p:txBody>
-      </p:sp>
-      <p:sp>
-        <p:nvSpPr>
-          <p:cNvPr id="13" name="Rectángulo 12">
-            <a:extLst>
-              <a:ext uri="{FF2B5EF4-FFF2-40B4-BE49-F238E27FC236}">
-                <a16:creationId xmlns:a16="http://schemas.microsoft.com/office/drawing/2014/main" id="{5EA110A2-3B6F-4273-8930-701591E98603}"/>
-              </a:ext>
-            </a:extLst>
-          </p:cNvPr>
-          <p:cNvSpPr>
-            <a:spLocks noGrp="1"/>
-          </p:cNvSpPr>
-          <p:nvPr/>
-        </p:nvSpPr>
-        <p:spPr>
-          <a:xfrm>
-            <a:off x="9182100" y="3143250"/>
-            <a:ext cx="1771650" cy="209550"/>
-          </a:xfrm>
-          <a:prstGeom prst="rect">
-            <a:avLst/>
-          </a:prstGeom>
-          <a:noFill/>
-          <a:ln w="0">
-            <a:noFill/>
-            <a:prstDash val="solid"/>
-          </a:ln>
-        </p:spPr>
-        <p:txBody>
-          <a:bodyPr wrap="square" lIns="0" tIns="0" rIns="0" bIns="0" anchor="t"/>
-          <a:lstStyle/>
-          <a:p>
-            <a:pPr algn="ctr">
-              <a:lnSpc>
-                <a:spcPct val="108000"/>
-              </a:lnSpc>
-              <a:buNone/>
-              <a:defRPr sz="975" b="0">
-                <a:solidFill>
-                  <a:srgbClr val="B8BEC8"/>
-                </a:solidFill>
-                <a:latin typeface="Calibri"/>
-                <a:ea typeface="Calibri"/>
-                <a:cs typeface="Calibri"/>
-              </a:defRPr>
-            </a:pPr>
-            <a:r>
-              <a:rPr lang="es-ES_tradnl" sz="975" b="0">
-                <a:solidFill>
-                  <a:srgbClr val="B8BEC8"/>
-                </a:solidFill>
-                <a:latin typeface="Calibri"/>
-                <a:ea typeface="Calibri"/>
-                <a:cs typeface="Calibri"/>
-              </a:rPr>
-              <a:t>Consulta paths y estado</a:t>
-            </a:r>
-          </a:p>
-        </p:txBody>
-      </p:sp>
-      <p:sp>
-        <p:nvSpPr>
-          <p:cNvPr id="14" name="Rectángulo 13">
-            <a:extLst>
-              <a:ext uri="{FF2B5EF4-FFF2-40B4-BE49-F238E27FC236}">
-                <a16:creationId xmlns:a16="http://schemas.microsoft.com/office/drawing/2014/main" id="{6DE0FA37-54DA-49D8-9EE3-30CBCD62783E}"/>
-              </a:ext>
-            </a:extLst>
-          </p:cNvPr>
-          <p:cNvSpPr>
-            <a:spLocks noGrp="1"/>
-          </p:cNvSpPr>
-          <p:nvPr/>
-        </p:nvSpPr>
-        <p:spPr>
-          <a:xfrm>
-            <a:off x="3505200" y="2857500"/>
-            <a:ext cx="952500" cy="266700"/>
-          </a:xfrm>
-          <a:prstGeom prst="rect">
-            <a:avLst/>
-          </a:prstGeom>
-          <a:noFill/>
-          <a:ln w="0">
-            <a:noFill/>
-            <a:prstDash val="solid"/>
-          </a:ln>
-        </p:spPr>
-        <p:txBody>
-          <a:bodyPr wrap="square" lIns="0" tIns="0" rIns="0" bIns="0" anchor="t"/>
-          <a:lstStyle/>
-          <a:p>
-            <a:pPr algn="ctr">
-              <a:lnSpc>
-                <a:spcPct val="108000"/>
-              </a:lnSpc>
-              <a:buNone/>
-              <a:defRPr sz="1800" b="1">
-                <a:solidFill>
-                  <a:srgbClr val="7D8592"/>
-                </a:solidFill>
-                <a:latin typeface="Calibri"/>
-                <a:ea typeface="Calibri"/>
-                <a:cs typeface="Calibri"/>
-              </a:defRPr>
-            </a:pPr>
-            <a:r>
-              <a:rPr lang="es-ES_tradnl" sz="1800" b="1">
-                <a:solidFill>
-                  <a:srgbClr val="7D8592"/>
-                </a:solidFill>
-                <a:latin typeface="Calibri"/>
-                <a:ea typeface="Calibri"/>
-                <a:cs typeface="Calibri"/>
-              </a:rPr>
-              <a:t>----&gt;</a:t>
-            </a:r>
-          </a:p>
-        </p:txBody>
-      </p:sp>
-      <p:sp>
-        <p:nvSpPr>
-          <p:cNvPr id="15" name="Rectángulo 14">
-            <a:extLst>
-              <a:ext uri="{FF2B5EF4-FFF2-40B4-BE49-F238E27FC236}">
-                <a16:creationId xmlns:a16="http://schemas.microsoft.com/office/drawing/2014/main" id="{D5B100C9-B43C-4ED6-982C-1404A19255D5}"/>
-              </a:ext>
-            </a:extLst>
-          </p:cNvPr>
-          <p:cNvSpPr>
-            <a:spLocks noGrp="1"/>
-          </p:cNvSpPr>
-          <p:nvPr/>
-        </p:nvSpPr>
-        <p:spPr>
-          <a:xfrm>
-            <a:off x="7524750" y="2857500"/>
-            <a:ext cx="952500" cy="266700"/>
-          </a:xfrm>
-          <a:prstGeom prst="rect">
-            <a:avLst/>
-          </a:prstGeom>
-          <a:noFill/>
-          <a:ln w="0">
-            <a:noFill/>
-            <a:prstDash val="solid"/>
-          </a:ln>
-        </p:spPr>
-        <p:txBody>
-          <a:bodyPr wrap="square" lIns="0" tIns="0" rIns="0" bIns="0" anchor="t"/>
-          <a:lstStyle/>
-          <a:p>
-            <a:pPr algn="ctr">
-              <a:lnSpc>
-                <a:spcPct val="108000"/>
-              </a:lnSpc>
-              <a:buNone/>
-              <a:defRPr sz="1800" b="1">
-                <a:solidFill>
-                  <a:srgbClr val="7D8592"/>
-                </a:solidFill>
-                <a:latin typeface="Calibri"/>
-                <a:ea typeface="Calibri"/>
-                <a:cs typeface="Calibri"/>
-              </a:defRPr>
-            </a:pPr>
-            <a:r>
-              <a:rPr lang="es-ES_tradnl" sz="1800" b="1">
-                <a:solidFill>
-                  <a:srgbClr val="7D8592"/>
-                </a:solidFill>
-                <a:latin typeface="Calibri"/>
-                <a:ea typeface="Calibri"/>
-                <a:cs typeface="Calibri"/>
-              </a:rPr>
-              <a:t>----&gt;</a:t>
-            </a:r>
-          </a:p>
-        </p:txBody>
-      </p:sp>
-      <p:sp>
-        <p:nvSpPr>
-          <p:cNvPr id="16" name="Rectángulo redondeado 15">
-            <a:extLst>
-              <a:ext uri="{FF2B5EF4-FFF2-40B4-BE49-F238E27FC236}">
-                <a16:creationId xmlns:a16="http://schemas.microsoft.com/office/drawing/2014/main" id="{0E275BEB-F9B7-4D07-B6EC-847065505F1A}"/>
-              </a:ext>
-            </a:extLst>
-          </p:cNvPr>
-          <p:cNvSpPr>
-            <a:spLocks noGrp="1"/>
-          </p:cNvSpPr>
-          <p:nvPr/>
-        </p:nvSpPr>
-        <p:spPr>
-          <a:xfrm>
-            <a:off x="1676400" y="4895850"/>
-            <a:ext cx="3143250" cy="742950"/>
-          </a:xfrm>
-          <a:prstGeom prst="roundRect">
-            <a:avLst>
-              <a:gd name="adj" fmla="val 10256"/>
-            </a:avLst>
-          </a:prstGeom>
-          <a:solidFill>
-            <a:srgbClr val="2B2F35"/>
-          </a:solidFill>
-          <a:ln w="9525">
-            <a:solidFill>
-              <a:srgbClr val="3A3F47"/>
-            </a:solidFill>
-            <a:prstDash val="solid"/>
-          </a:ln>
-        </p:spPr>
-      </p:sp>
-      <p:sp>
-        <p:nvSpPr>
-          <p:cNvPr id="17" name="Rectángulo 16">
-            <a:extLst>
-              <a:ext uri="{FF2B5EF4-FFF2-40B4-BE49-F238E27FC236}">
-                <a16:creationId xmlns:a16="http://schemas.microsoft.com/office/drawing/2014/main" id="{6528D271-A71C-4915-896F-11C22AB7BD6C}"/>
-              </a:ext>
-            </a:extLst>
-          </p:cNvPr>
-          <p:cNvSpPr>
-            <a:spLocks noGrp="1"/>
-          </p:cNvSpPr>
-          <p:nvPr/>
-        </p:nvSpPr>
-        <p:spPr>
-          <a:xfrm>
-            <a:off x="1676400" y="4895850"/>
-            <a:ext cx="47625" cy="742950"/>
-          </a:xfrm>
-          <a:prstGeom prst="rect">
-            <a:avLst/>
-          </a:prstGeom>
-          <a:solidFill>
-            <a:srgbClr val="BD1F36"/>
-          </a:solidFill>
-          <a:ln w="0">
-            <a:solidFill>
-              <a:srgbClr val="BD1F36"/>
-            </a:solidFill>
-            <a:prstDash val="solid"/>
-          </a:ln>
-        </p:spPr>
-      </p:sp>
-      <p:sp>
-        <p:nvSpPr>
-          <p:cNvPr id="18" name="Rectángulo 17">
-            <a:extLst>
-              <a:ext uri="{FF2B5EF4-FFF2-40B4-BE49-F238E27FC236}">
-                <a16:creationId xmlns:a16="http://schemas.microsoft.com/office/drawing/2014/main" id="{DA4E09CD-6650-41F8-B421-AEF247B9EDFD}"/>
-              </a:ext>
-            </a:extLst>
-          </p:cNvPr>
-          <p:cNvSpPr>
-            <a:spLocks noGrp="1"/>
-          </p:cNvSpPr>
-          <p:nvPr/>
-        </p:nvSpPr>
-        <p:spPr>
-          <a:xfrm>
-            <a:off x="1847850" y="5048250"/>
-            <a:ext cx="2857500" cy="247650"/>
-          </a:xfrm>
-          <a:prstGeom prst="rect">
-            <a:avLst/>
-          </a:prstGeom>
-          <a:noFill/>
-          <a:ln w="0">
-            <a:noFill/>
-            <a:prstDash val="solid"/>
-          </a:ln>
-        </p:spPr>
-        <p:txBody>
-          <a:bodyPr wrap="square" lIns="0" tIns="0" rIns="0" bIns="0" anchor="t"/>
-          <a:lstStyle/>
-          <a:p>
-            <a:pPr algn="l">
-              <a:lnSpc>
-                <a:spcPct val="108000"/>
-              </a:lnSpc>
-              <a:buNone/>
-              <a:defRPr sz="1350" b="1">
-                <a:solidFill>
-                  <a:srgbClr val="F3F4F6"/>
-                </a:solidFill>
-                <a:latin typeface="Calibri"/>
-                <a:ea typeface="Calibri"/>
-                <a:cs typeface="Calibri"/>
-              </a:defRPr>
-            </a:pPr>
-            <a:r>
-              <a:rPr lang="es-ES_tradnl" sz="1350" b="1">
-                <a:solidFill>
-                  <a:srgbClr val="F3F4F6"/>
-                </a:solidFill>
-                <a:latin typeface="Calibri"/>
-                <a:ea typeface="Calibri"/>
-                <a:cs typeface="Calibri"/>
-              </a:rPr>
-              <a:t>Limite claro</a:t>
-            </a:r>
-          </a:p>
-        </p:txBody>
-      </p:sp>
-      <p:sp>
-        <p:nvSpPr>
-          <p:cNvPr id="19" name="Rectángulo 18">
-            <a:extLst>
-              <a:ext uri="{FF2B5EF4-FFF2-40B4-BE49-F238E27FC236}">
-                <a16:creationId xmlns:a16="http://schemas.microsoft.com/office/drawing/2014/main" id="{00A68344-DDD5-447B-9B73-54E89E8E6BC7}"/>
-              </a:ext>
-            </a:extLst>
-          </p:cNvPr>
-          <p:cNvSpPr>
-            <a:spLocks noGrp="1"/>
-          </p:cNvSpPr>
-          <p:nvPr/>
-        </p:nvSpPr>
-        <p:spPr>
-          <a:xfrm>
-            <a:off x="1847850" y="5353050"/>
-            <a:ext cx="2819400" cy="190500"/>
-          </a:xfrm>
-          <a:prstGeom prst="rect">
-            <a:avLst/>
-          </a:prstGeom>
-          <a:noFill/>
-          <a:ln w="0">
-            <a:noFill/>
-            <a:prstDash val="solid"/>
-          </a:ln>
-        </p:spPr>
-        <p:txBody>
-          <a:bodyPr wrap="square" lIns="0" tIns="0" rIns="0" bIns="0" anchor="t"/>
-          <a:lstStyle/>
-          <a:p>
-            <a:pPr algn="l">
-              <a:lnSpc>
-                <a:spcPct val="114000"/>
-              </a:lnSpc>
-              <a:buNone/>
-              <a:defRPr sz="938" b="0">
-                <a:solidFill>
-                  <a:srgbClr val="B8BEC8"/>
-                </a:solidFill>
-                <a:latin typeface="Calibri"/>
-                <a:ea typeface="Calibri"/>
-                <a:cs typeface="Calibri"/>
-              </a:defRPr>
-            </a:pPr>
-            <a:r>
-              <a:rPr lang="es-ES_tradnl" sz="938" b="0">
-                <a:solidFill>
-                  <a:srgbClr val="B8BEC8"/>
-                </a:solidFill>
-                <a:latin typeface="Calibri"/>
-                <a:ea typeface="Calibri"/>
-                <a:cs typeface="Calibri"/>
-              </a:rPr>
-              <a:t>No modifica tablas rmcop_nike_* ni comparte reglas de escritura.</a:t>
-            </a:r>
-          </a:p>
-        </p:txBody>
-      </p:sp>
-      <p:sp>
-        <p:nvSpPr>
-          <p:cNvPr id="20" name="Rectángulo redondeado 19">
-            <a:extLst>
-              <a:ext uri="{FF2B5EF4-FFF2-40B4-BE49-F238E27FC236}">
-                <a16:creationId xmlns:a16="http://schemas.microsoft.com/office/drawing/2014/main" id="{036B960B-E29F-4E8C-925B-67C5E9A2222B}"/>
-              </a:ext>
-            </a:extLst>
-          </p:cNvPr>
-          <p:cNvSpPr>
-            <a:spLocks noGrp="1"/>
-          </p:cNvSpPr>
-          <p:nvPr/>
-        </p:nvSpPr>
-        <p:spPr>
-          <a:xfrm>
-            <a:off x="6191250" y="4895850"/>
-            <a:ext cx="3143250" cy="742950"/>
-          </a:xfrm>
-          <a:prstGeom prst="roundRect">
-            <a:avLst>
-              <a:gd name="adj" fmla="val 10256"/>
-            </a:avLst>
-          </a:prstGeom>
-          <a:solidFill>
-            <a:srgbClr val="2B2F35"/>
-          </a:solidFill>
-          <a:ln w="9525">
-            <a:solidFill>
-              <a:srgbClr val="3A3F47"/>
-            </a:solidFill>
-            <a:prstDash val="solid"/>
-          </a:ln>
-        </p:spPr>
-      </p:sp>
-      <p:sp>
-        <p:nvSpPr>
-          <p:cNvPr id="21" name="Rectángulo 20">
-            <a:extLst>
-              <a:ext uri="{FF2B5EF4-FFF2-40B4-BE49-F238E27FC236}">
-                <a16:creationId xmlns:a16="http://schemas.microsoft.com/office/drawing/2014/main" id="{788E27C3-5CA4-46DA-8810-DF411FEC9ED1}"/>
-              </a:ext>
-            </a:extLst>
-          </p:cNvPr>
-          <p:cNvSpPr>
-            <a:spLocks noGrp="1"/>
-          </p:cNvSpPr>
-          <p:nvPr/>
-        </p:nvSpPr>
-        <p:spPr>
-          <a:xfrm>
-            <a:off x="6191250" y="4895850"/>
-            <a:ext cx="47625" cy="742950"/>
-          </a:xfrm>
-          <a:prstGeom prst="rect">
-            <a:avLst/>
-          </a:prstGeom>
-          <a:solidFill>
-            <a:srgbClr val="20B26B"/>
-          </a:solidFill>
-          <a:ln w="0">
-            <a:solidFill>
-              <a:srgbClr val="20B26B"/>
-            </a:solidFill>
-            <a:prstDash val="solid"/>
-          </a:ln>
-        </p:spPr>
-      </p:sp>
-      <p:sp>
-        <p:nvSpPr>
-          <p:cNvPr id="22" name="Rectángulo 21">
-            <a:extLst>
-              <a:ext uri="{FF2B5EF4-FFF2-40B4-BE49-F238E27FC236}">
-                <a16:creationId xmlns:a16="http://schemas.microsoft.com/office/drawing/2014/main" id="{1641D752-07F4-4E3D-B558-CA39579DE9B5}"/>
-              </a:ext>
-            </a:extLst>
-          </p:cNvPr>
-          <p:cNvSpPr>
-            <a:spLocks noGrp="1"/>
-          </p:cNvSpPr>
-          <p:nvPr/>
-        </p:nvSpPr>
-        <p:spPr>
-          <a:xfrm>
-            <a:off x="6362700" y="5048250"/>
-            <a:ext cx="2857500" cy="247650"/>
-          </a:xfrm>
-          <a:prstGeom prst="rect">
-            <a:avLst/>
-          </a:prstGeom>
-          <a:noFill/>
-          <a:ln w="0">
-            <a:noFill/>
-            <a:prstDash val="solid"/>
-          </a:ln>
-        </p:spPr>
-        <p:txBody>
-          <a:bodyPr wrap="square" lIns="0" tIns="0" rIns="0" bIns="0" anchor="t"/>
-          <a:lstStyle/>
-          <a:p>
-            <a:pPr algn="l">
-              <a:lnSpc>
-                <a:spcPct val="108000"/>
-              </a:lnSpc>
-              <a:buNone/>
-              <a:defRPr sz="1350" b="1">
-                <a:solidFill>
-                  <a:srgbClr val="F3F4F6"/>
-                </a:solidFill>
-                <a:latin typeface="Calibri"/>
-                <a:ea typeface="Calibri"/>
-                <a:cs typeface="Calibri"/>
-              </a:defRPr>
-            </a:pPr>
-            <a:r>
-              <a:rPr lang="es-ES_tradnl" sz="1350" b="1">
-                <a:solidFill>
-                  <a:srgbClr val="F3F4F6"/>
-                </a:solidFill>
-                <a:latin typeface="Calibri"/>
-                <a:ea typeface="Calibri"/>
-                <a:cs typeface="Calibri"/>
-              </a:rPr>
-              <a:t>Contrato util</a:t>
-            </a:r>
-          </a:p>
-        </p:txBody>
-      </p:sp>
-      <p:sp>
-        <p:nvSpPr>
-          <p:cNvPr id="23" name="Rectángulo 22">
-            <a:extLst>
-              <a:ext uri="{FF2B5EF4-FFF2-40B4-BE49-F238E27FC236}">
-                <a16:creationId xmlns:a16="http://schemas.microsoft.com/office/drawing/2014/main" id="{29C73D38-9E13-4CFD-8276-CB42476D0373}"/>
-              </a:ext>
-            </a:extLst>
-          </p:cNvPr>
-          <p:cNvSpPr>
-            <a:spLocks noGrp="1"/>
-          </p:cNvSpPr>
-          <p:nvPr/>
-        </p:nvSpPr>
-        <p:spPr>
-          <a:xfrm>
-            <a:off x="6362700" y="5353050"/>
-            <a:ext cx="2819400" cy="190500"/>
-          </a:xfrm>
-          <a:prstGeom prst="rect">
-            <a:avLst/>
-          </a:prstGeom>
-          <a:noFill/>
-          <a:ln w="0">
-            <a:noFill/>
-            <a:prstDash val="solid"/>
-          </a:ln>
-        </p:spPr>
-        <p:txBody>
-          <a:bodyPr wrap="square" lIns="0" tIns="0" rIns="0" bIns="0" anchor="t"/>
-          <a:lstStyle/>
-          <a:p>
-            <a:pPr algn="l">
-              <a:lnSpc>
-                <a:spcPct val="114000"/>
-              </a:lnSpc>
-              <a:buNone/>
-              <a:defRPr sz="938" b="0">
-                <a:solidFill>
-                  <a:srgbClr val="B8BEC8"/>
-                </a:solidFill>
-                <a:latin typeface="Calibri"/>
-                <a:ea typeface="Calibri"/>
-                <a:cs typeface="Calibri"/>
-              </a:defRPr>
-            </a:pPr>
-            <a:r>
-              <a:rPr lang="es-ES_tradnl" sz="938" b="0">
-                <a:solidFill>
-                  <a:srgbClr val="B8BEC8"/>
-                </a:solidFill>
-                <a:latin typeface="Calibri"/>
-                <a:ea typeface="Calibri"/>
-                <a:cs typeface="Calibri"/>
-              </a:rPr>
-              <a:t>Control Center debe usar path persistido cuando exista.</a:t>
-            </a:r>
-          </a:p>
-        </p:txBody>
-      </p:sp>
-      <p:sp>
-        <p:nvSpPr>
-          <p:cNvPr id="24" name="Rectángulo 23">
-            <a:extLst>
-              <a:ext uri="{FF2B5EF4-FFF2-40B4-BE49-F238E27FC236}">
-                <a16:creationId xmlns:a16="http://schemas.microsoft.com/office/drawing/2014/main" id="{BBE366D6-91FE-46A8-B3EC-EC1BC112F27A}"/>
-              </a:ext>
-            </a:extLst>
-          </p:cNvPr>
-          <p:cNvSpPr>
-            <a:spLocks noGrp="1"/>
-          </p:cNvSpPr>
-          <p:nvPr/>
-        </p:nvSpPr>
-        <p:spPr>
-          <a:xfrm>
-            <a:off x="533400" y="6515100"/>
-            <a:ext cx="3429000" cy="190500"/>
-          </a:xfrm>
-          <a:prstGeom prst="rect">
-            <a:avLst/>
-          </a:prstGeom>
-          <a:noFill/>
-          <a:ln w="0">
-            <a:noFill/>
-            <a:prstDash val="solid"/>
-          </a:ln>
-        </p:spPr>
-        <p:txBody>
-          <a:bodyPr wrap="square" lIns="0" tIns="0" rIns="0" bIns="0" anchor="t"/>
-          <a:lstStyle/>
-          <a:p>
-            <a:pPr algn="l">
-              <a:lnSpc>
-                <a:spcPct val="108000"/>
-              </a:lnSpc>
-              <a:buNone/>
-              <a:defRPr sz="675" b="0">
-                <a:solidFill>
-                  <a:srgbClr val="7D8592"/>
-                </a:solidFill>
-                <a:latin typeface="Calibri"/>
-                <a:ea typeface="Calibri"/>
-                <a:cs typeface="Calibri"/>
-              </a:defRPr>
-            </a:pPr>
-            <a:r>
-              <a:rPr lang="es-ES_tradnl" sz="675" b="0">
-                <a:solidFill>
-                  <a:srgbClr val="7D8592"/>
-                </a:solidFill>
-                <a:latin typeface="Calibri"/>
-                <a:ea typeface="Calibri"/>
-                <a:cs typeface="Calibri"/>
-              </a:rPr>
-              <a:t>RMC Control System | RMC MockupTool</a:t>
-            </a:r>
-          </a:p>
-        </p:txBody>
-      </p:sp>
-      <p:sp>
-        <p:nvSpPr>
-          <p:cNvPr id="25" name="Rectángulo 24">
-            <a:extLst>
-              <a:ext uri="{FF2B5EF4-FFF2-40B4-BE49-F238E27FC236}">
-                <a16:creationId xmlns:a16="http://schemas.microsoft.com/office/drawing/2014/main" id="{3EB2AAE8-07CC-4EA7-A271-3416883165A6}"/>
-              </a:ext>
-            </a:extLst>
-          </p:cNvPr>
-          <p:cNvSpPr>
-            <a:spLocks noGrp="1"/>
-          </p:cNvSpPr>
-          <p:nvPr/>
-        </p:nvSpPr>
-        <p:spPr>
-          <a:xfrm>
-            <a:off x="11334750" y="6496050"/>
-            <a:ext cx="323850" cy="190500"/>
-          </a:xfrm>
-          <a:prstGeom prst="rect">
-            <a:avLst/>
-          </a:prstGeom>
-          <a:noFill/>
-          <a:ln w="0">
-            <a:noFill/>
-            <a:prstDash val="solid"/>
-          </a:ln>
-        </p:spPr>
-        <p:txBody>
-          <a:bodyPr wrap="square" lIns="0" tIns="0" rIns="0" bIns="0" anchor="t"/>
-          <a:lstStyle/>
-          <a:p>
-            <a:pPr algn="r">
-              <a:lnSpc>
-                <a:spcPct val="108000"/>
-              </a:lnSpc>
-              <a:buNone/>
-              <a:defRPr sz="750" b="0">
-                <a:solidFill>
-                  <a:srgbClr val="7D8592"/>
-                </a:solidFill>
-                <a:latin typeface="Calibri"/>
-                <a:ea typeface="Calibri"/>
-                <a:cs typeface="Calibri"/>
-              </a:defRPr>
-            </a:pPr>
-            <a:r>
-              <a:rPr lang="es-ES_tradnl" sz="750" b="0">
-                <a:solidFill>
-                  <a:srgbClr val="7D8592"/>
-                </a:solidFill>
-                <a:latin typeface="Calibri"/>
-                <a:ea typeface="Calibri"/>
-                <a:cs typeface="Calibri"/>
-              </a:rPr>
-              <a:t>10</a:t>
-            </a:r>
-          </a:p>
-        </p:txBody>
-      </p:sp>
-    </p:spTree>
-    <p:extLst>
-      <p:ext uri="{BB962C8B-B14F-4D97-AF65-F5344CB8AC3E}">
-        <p14:creationId xmlns:p14="http://schemas.microsoft.com/office/powerpoint/2010/main" val="965332522"/>
-      </p:ext>
-    </p:extLst>
-  </p:cSld>
-  <p:clrMapOvr>
-    <a:masterClrMapping/>
-  </p:clrMapOvr>
-</p:sld>
-</file>
-
-<file path=ppt/slides/slide11.xml><?xml version="1.0" encoding="utf-8"?>
-<p:sld xmlns:a="http://schemas.openxmlformats.org/drawingml/2006/main" xmlns:r="http://schemas.openxmlformats.org/officeDocument/2006/relationships" xmlns:p="http://schemas.openxmlformats.org/presentationml/2006/main">
-  <p:cSld>
-    <p:bg>
-      <p:bgPr>
-        <a:solidFill>
-          <a:srgbClr val="1F1F20"/>
-        </a:solidFill>
-        <a:effectLst/>
-      </p:bgPr>
-    </p:bg>
-    <p:spTree>
-      <p:nvGrpSpPr>
-        <p:cNvPr id="1" name=""/>
-        <p:cNvGrpSpPr/>
-        <p:nvPr/>
-      </p:nvGrpSpPr>
-      <p:grpSpPr>
-        <a:xfrm>
-          <a:off x="0" y="0"/>
-          <a:ext cx="0" cy="0"/>
-          <a:chOff x="0" y="0"/>
-          <a:chExt cx="0" cy="0"/>
-        </a:xfrm>
-      </p:grpSpPr>
-      <p:sp>
-        <p:nvSpPr>
           <p:cNvPr id="28" name="Rectángulo 27">
             <a:extLst>
               <a:ext uri="{FF2B5EF4-FFF2-40B4-BE49-F238E27FC236}">
@@ -5667,8 +4270,8 @@
         </p:nvSpPr>
         <p:spPr>
           <a:xfrm>
-            <a:off x="2090734" y="4725788"/>
-            <a:ext cx="2333625" cy="247650"/>
+            <a:off x="2090734" y="4685698"/>
+            <a:ext cx="2333625" cy="272415"/>
           </a:xfrm>
           <a:prstGeom prst="rect">
             <a:avLst/>
@@ -5710,7 +4313,7 @@
         </p:nvSpPr>
         <p:spPr>
           <a:xfrm>
-            <a:off x="2090734" y="5030588"/>
+            <a:off x="2090734" y="4956700"/>
             <a:ext cx="2876550" cy="495300"/>
           </a:xfrm>
           <a:prstGeom prst="rect">
@@ -5732,7 +4335,7 @@
                   <a:srgbClr val="AEB4BF"/>
                 </a:solidFill>
               </a:rPr>
-              <a:t>Mas preguntas entre diseño, producción  o incluso tener que rehacer piezas completas</a:t>
+              <a:t>Mas preguntas entre diseño, producción  o incluso tener que rehacer maquetas completas</a:t>
             </a:r>
           </a:p>
         </p:txBody>
@@ -7652,7 +6255,7 @@
         <p:spPr>
           <a:xfrm>
             <a:off x="3122676" y="4838702"/>
-            <a:ext cx="45719" cy="953451"/>
+            <a:ext cx="70797" cy="953451"/>
           </a:xfrm>
           <a:prstGeom prst="rect">
             <a:avLst/>
@@ -7838,7 +6441,7 @@
         <p:spPr>
           <a:xfrm>
             <a:off x="6551676" y="4838702"/>
-            <a:ext cx="45719" cy="953451"/>
+            <a:ext cx="70797" cy="953451"/>
           </a:xfrm>
           <a:prstGeom prst="rect">
             <a:avLst/>
@@ -8418,8 +7021,8 @@
         </p:nvSpPr>
         <p:spPr>
           <a:xfrm>
-            <a:off x="666750" y="2143125"/>
-            <a:ext cx="4953000" cy="3286125"/>
+            <a:off x="419100" y="2143125"/>
+            <a:ext cx="5448300" cy="3286125"/>
           </a:xfrm>
           <a:prstGeom prst="roundRect">
             <a:avLst>
@@ -8453,8 +7056,8 @@
         </p:nvSpPr>
         <p:spPr>
           <a:xfrm>
-            <a:off x="666750" y="2143125"/>
-            <a:ext cx="4953000" cy="76200"/>
+            <a:off x="419100" y="2143125"/>
+            <a:ext cx="5448300" cy="76200"/>
           </a:xfrm>
           <a:prstGeom prst="rect">
             <a:avLst/>
@@ -8486,7 +7089,7 @@
         </p:nvSpPr>
         <p:spPr>
           <a:xfrm>
-            <a:off x="952500" y="2457450"/>
+            <a:off x="703259" y="2457450"/>
             <a:ext cx="2476500" cy="285750"/>
           </a:xfrm>
           <a:prstGeom prst="rect">
@@ -8546,7 +7149,7 @@
         </p:nvSpPr>
         <p:spPr>
           <a:xfrm>
-            <a:off x="952500" y="2952750"/>
+            <a:off x="703259" y="2952750"/>
             <a:ext cx="1485900" cy="266700"/>
           </a:xfrm>
           <a:prstGeom prst="roundRect">
@@ -8581,7 +7184,7 @@
         </p:nvSpPr>
         <p:spPr>
           <a:xfrm>
-            <a:off x="952500" y="3009900"/>
+            <a:off x="703259" y="3028949"/>
             <a:ext cx="1485900" cy="152400"/>
           </a:xfrm>
           <a:prstGeom prst="rect">
@@ -8612,7 +7215,7 @@
               </a:defRPr>
             </a:pPr>
             <a:r>
-              <a:rPr lang="es-ES_tradnl" sz="788" b="1">
+              <a:rPr lang="es-ES_tradnl" sz="900" b="1" dirty="0">
                 <a:solidFill>
                   <a:srgbClr val="FFFFFF"/>
                 </a:solidFill>
@@ -8641,7 +7244,7 @@
         </p:nvSpPr>
         <p:spPr>
           <a:xfrm>
-            <a:off x="952500" y="3429000"/>
+            <a:off x="703259" y="3429000"/>
             <a:ext cx="4000500" cy="685800"/>
           </a:xfrm>
           <a:prstGeom prst="rect">
@@ -8745,8 +7348,8 @@
         </p:nvSpPr>
         <p:spPr>
           <a:xfrm>
-            <a:off x="952500" y="4400550"/>
-            <a:ext cx="4000500" cy="609600"/>
+            <a:off x="703258" y="4267199"/>
+            <a:ext cx="2017709" cy="609600"/>
           </a:xfrm>
           <a:prstGeom prst="rect">
             <a:avLst/>
@@ -8776,7 +7379,7 @@
               </a:defRPr>
             </a:pPr>
             <a:r>
-              <a:rPr lang="es-ES_tradnl" sz="1200" b="0">
+              <a:rPr lang="es-ES_tradnl" sz="1200" b="0" dirty="0">
                 <a:solidFill>
                   <a:srgbClr val="F3F4F6"/>
                 </a:solidFill>
@@ -8784,7 +7387,51 @@
                 <a:ea typeface="Calibri"/>
                 <a:cs typeface="Calibri"/>
               </a:rPr>
-              <a:t>Consolida por Ship Order + WO + Style + Equipo y combina tallas antes del filtro.</a:t>
+              <a:t>Consolida por </a:t>
+            </a:r>
+            <a:r>
+              <a:rPr lang="es-ES_tradnl" sz="1200" b="0" dirty="0" err="1">
+                <a:solidFill>
+                  <a:srgbClr val="F3F4F6"/>
+                </a:solidFill>
+                <a:latin typeface="Calibri"/>
+                <a:ea typeface="Calibri"/>
+                <a:cs typeface="Calibri"/>
+              </a:rPr>
+              <a:t>Ship</a:t>
+            </a:r>
+            <a:r>
+              <a:rPr lang="es-ES_tradnl" sz="1200" b="0" dirty="0">
+                <a:solidFill>
+                  <a:srgbClr val="F3F4F6"/>
+                </a:solidFill>
+                <a:latin typeface="Calibri"/>
+                <a:ea typeface="Calibri"/>
+                <a:cs typeface="Calibri"/>
+              </a:rPr>
+              <a:t> </a:t>
+            </a:r>
+            <a:r>
+              <a:rPr lang="es-ES_tradnl" sz="1200" b="0" dirty="0" err="1">
+                <a:solidFill>
+                  <a:srgbClr val="F3F4F6"/>
+                </a:solidFill>
+                <a:latin typeface="Calibri"/>
+                <a:ea typeface="Calibri"/>
+                <a:cs typeface="Calibri"/>
+              </a:rPr>
+              <a:t>Order</a:t>
+            </a:r>
+            <a:r>
+              <a:rPr lang="es-ES_tradnl" sz="1200" b="0" dirty="0">
+                <a:solidFill>
+                  <a:srgbClr val="F3F4F6"/>
+                </a:solidFill>
+                <a:latin typeface="Calibri"/>
+                <a:ea typeface="Calibri"/>
+                <a:cs typeface="Calibri"/>
+              </a:rPr>
+              <a:t> + WO + Style + Equipo y combina tallas antes del filtro.</a:t>
             </a:r>
           </a:p>
         </p:txBody>
@@ -8805,8 +7452,8 @@
         </p:nvSpPr>
         <p:spPr>
           <a:xfrm>
-            <a:off x="6572250" y="1619250"/>
-            <a:ext cx="4953000" cy="4191000"/>
+            <a:off x="6324600" y="2143124"/>
+            <a:ext cx="5448300" cy="3286125"/>
           </a:xfrm>
           <a:prstGeom prst="roundRect">
             <a:avLst>
@@ -8840,8 +7487,8 @@
         </p:nvSpPr>
         <p:spPr>
           <a:xfrm>
-            <a:off x="6572250" y="1619250"/>
-            <a:ext cx="4953000" cy="76200"/>
+            <a:off x="6324600" y="2138219"/>
+            <a:ext cx="5448300" cy="76200"/>
           </a:xfrm>
           <a:prstGeom prst="rect">
             <a:avLst/>
@@ -8873,7 +7520,7 @@
         </p:nvSpPr>
         <p:spPr>
           <a:xfrm>
-            <a:off x="6858000" y="1933575"/>
+            <a:off x="6591300" y="2519795"/>
             <a:ext cx="2476500" cy="285750"/>
           </a:xfrm>
           <a:prstGeom prst="rect">
@@ -8904,7 +7551,7 @@
               </a:defRPr>
             </a:pPr>
             <a:r>
-              <a:rPr lang="es-ES_tradnl" sz="2025" b="1">
+              <a:rPr lang="es-ES_tradnl" sz="2025" b="1" dirty="0">
                 <a:solidFill>
                   <a:srgbClr val="F3F4F6"/>
                 </a:solidFill>
@@ -8912,7 +7559,7 @@
                 <a:ea typeface="Calibri"/>
                 <a:cs typeface="Calibri"/>
               </a:rPr>
-              <a:t>Genericas</a:t>
+              <a:t>Genéricas</a:t>
             </a:r>
           </a:p>
         </p:txBody>
@@ -8933,7 +7580,7 @@
         </p:nvSpPr>
         <p:spPr>
           <a:xfrm>
-            <a:off x="6858000" y="2428875"/>
+            <a:off x="6591300" y="3015095"/>
             <a:ext cx="2209800" cy="266700"/>
           </a:xfrm>
           <a:prstGeom prst="roundRect">
@@ -8968,7 +7615,7 @@
         </p:nvSpPr>
         <p:spPr>
           <a:xfrm>
-            <a:off x="6858000" y="2486025"/>
+            <a:off x="6591300" y="3072245"/>
             <a:ext cx="2209800" cy="152400"/>
           </a:xfrm>
           <a:prstGeom prst="rect">
@@ -8999,7 +7646,7 @@
               </a:defRPr>
             </a:pPr>
             <a:r>
-              <a:rPr lang="es-ES_tradnl" sz="788" b="1">
+              <a:rPr lang="es-ES_tradnl" sz="788" b="1" dirty="0">
                 <a:solidFill>
                   <a:srgbClr val="FFFFFF"/>
                 </a:solidFill>
@@ -9028,7 +7675,7 @@
         </p:nvSpPr>
         <p:spPr>
           <a:xfrm>
-            <a:off x="6858000" y="2914650"/>
+            <a:off x="6591300" y="3500870"/>
             <a:ext cx="4000500" cy="685800"/>
           </a:xfrm>
           <a:prstGeom prst="rect">
@@ -9059,7 +7706,7 @@
               </a:defRPr>
             </a:pPr>
             <a:r>
-              <a:rPr lang="es-ES_tradnl" sz="1200" b="0">
+              <a:rPr lang="es-ES_tradnl" sz="1200" b="0" dirty="0">
                 <a:solidFill>
                   <a:srgbClr val="B8BEC8"/>
                 </a:solidFill>
@@ -9067,29 +7714,51 @@
                 <a:ea typeface="Calibri"/>
                 <a:cs typeface="Calibri"/>
               </a:rPr>
-              <a:t>Busca encabezados WO, Style, Roster, cantidad, equipo y Emb dentro de las primeras 25 filas.</a:t>
-            </a:r>
-          </a:p>
-        </p:txBody>
-      </p:sp>
-      <p:sp>
-        <p:nvSpPr>
-          <p:cNvPr id="18" name="Rectángulo 17">
-            <a:extLst>
-              <a:ext uri="{FF2B5EF4-FFF2-40B4-BE49-F238E27FC236}">
-                <a16:creationId xmlns:a16="http://schemas.microsoft.com/office/drawing/2014/main" id="{9B1946D3-93B3-4171-A508-3AD6F984EBB6}"/>
-              </a:ext>
-            </a:extLst>
-          </p:cNvPr>
-          <p:cNvSpPr>
-            <a:spLocks noGrp="1"/>
-          </p:cNvSpPr>
-          <p:nvPr/>
-        </p:nvSpPr>
-        <p:spPr>
-          <a:xfrm>
-            <a:off x="6858000" y="3886200"/>
-            <a:ext cx="4000500" cy="666750"/>
+              <a:t>Busca encabezados WO, Style, Roster, cantidad, equipo y </a:t>
+            </a:r>
+            <a:r>
+              <a:rPr lang="es-ES_tradnl" sz="1200" b="0" dirty="0" err="1">
+                <a:solidFill>
+                  <a:srgbClr val="B8BEC8"/>
+                </a:solidFill>
+                <a:latin typeface="Calibri"/>
+                <a:ea typeface="Calibri"/>
+                <a:cs typeface="Calibri"/>
+              </a:rPr>
+              <a:t>Emb</a:t>
+            </a:r>
+            <a:r>
+              <a:rPr lang="es-ES_tradnl" sz="1200" b="0" dirty="0">
+                <a:solidFill>
+                  <a:srgbClr val="B8BEC8"/>
+                </a:solidFill>
+                <a:latin typeface="Calibri"/>
+                <a:ea typeface="Calibri"/>
+                <a:cs typeface="Calibri"/>
+              </a:rPr>
+              <a:t> dentro de las primeras filas.</a:t>
+            </a:r>
+          </a:p>
+        </p:txBody>
+      </p:sp>
+      <p:sp>
+        <p:nvSpPr>
+          <p:cNvPr id="19" name="Rectángulo 18">
+            <a:extLst>
+              <a:ext uri="{FF2B5EF4-FFF2-40B4-BE49-F238E27FC236}">
+                <a16:creationId xmlns:a16="http://schemas.microsoft.com/office/drawing/2014/main" id="{941C7435-B086-4434-9023-8933A3915DF3}"/>
+              </a:ext>
+            </a:extLst>
+          </p:cNvPr>
+          <p:cNvSpPr>
+            <a:spLocks noGrp="1"/>
+          </p:cNvSpPr>
+          <p:nvPr/>
+        </p:nvSpPr>
+        <p:spPr>
+          <a:xfrm>
+            <a:off x="6511574" y="4311071"/>
+            <a:ext cx="2697456" cy="514350"/>
           </a:xfrm>
           <a:prstGeom prst="rect">
             <a:avLst/>
@@ -9119,67 +7788,7 @@
               </a:defRPr>
             </a:pPr>
             <a:r>
-              <a:rPr lang="es-ES_tradnl" sz="1200" b="0">
-                <a:solidFill>
-                  <a:srgbClr val="F3F4F6"/>
-                </a:solidFill>
-                <a:latin typeface="Calibri"/>
-                <a:ea typeface="Calibri"/>
-                <a:cs typeface="Calibri"/>
-              </a:rPr>
-              <a:t>A1500 y Y1500 representan shorts. Las variantes activas se leen desde rmc_nike_style_variants.</a:t>
-            </a:r>
-          </a:p>
-        </p:txBody>
-      </p:sp>
-      <p:sp>
-        <p:nvSpPr>
-          <p:cNvPr id="19" name="Rectángulo 18">
-            <a:extLst>
-              <a:ext uri="{FF2B5EF4-FFF2-40B4-BE49-F238E27FC236}">
-                <a16:creationId xmlns:a16="http://schemas.microsoft.com/office/drawing/2014/main" id="{941C7435-B086-4434-9023-8933A3915DF3}"/>
-              </a:ext>
-            </a:extLst>
-          </p:cNvPr>
-          <p:cNvSpPr>
-            <a:spLocks noGrp="1"/>
-          </p:cNvSpPr>
-          <p:nvPr/>
-        </p:nvSpPr>
-        <p:spPr>
-          <a:xfrm>
-            <a:off x="6858000" y="4857750"/>
-            <a:ext cx="4000500" cy="514350"/>
-          </a:xfrm>
-          <a:prstGeom prst="rect">
-            <a:avLst/>
-          </a:prstGeom>
-          <a:noFill/>
-          <a:ln w="0">
-            <a:noFill/>
-            <a:prstDash val="solid"/>
-          </a:ln>
-        </p:spPr>
-        <p:txBody>
-          <a:bodyPr wrap="square" lIns="0" tIns="0" rIns="0" bIns="0" anchor="t"/>
-          <a:lstStyle/>
-          <a:p>
-            <a:pPr algn="l">
-              <a:lnSpc>
-                <a:spcPct val="115000"/>
-              </a:lnSpc>
-              <a:buNone/>
-              <a:defRPr sz="1200" b="0">
-                <a:solidFill>
-                  <a:srgbClr val="F3F4F6"/>
-                </a:solidFill>
-                <a:latin typeface="Calibri"/>
-                <a:ea typeface="Calibri"/>
-                <a:cs typeface="Calibri"/>
-              </a:defRPr>
-            </a:pPr>
-            <a:r>
-              <a:rPr lang="es-ES_tradnl" sz="1200" b="0">
+              <a:rPr lang="es-ES_tradnl" sz="1200" b="0" dirty="0">
                 <a:solidFill>
                   <a:srgbClr val="F3F4F6"/>
                 </a:solidFill>
@@ -9441,6 +8050,66 @@
           </a:p>
         </p:txBody>
       </p:sp>
+      <p:pic>
+        <p:nvPicPr>
+          <p:cNvPr id="26" name="Imagen 25">
+            <a:extLst>
+              <a:ext uri="{FF2B5EF4-FFF2-40B4-BE49-F238E27FC236}">
+                <a16:creationId xmlns:a16="http://schemas.microsoft.com/office/drawing/2014/main" id="{3AE8AE7F-AB5D-F3FB-9CE7-0E21287FD109}"/>
+              </a:ext>
+            </a:extLst>
+          </p:cNvPr>
+          <p:cNvPicPr>
+            <a:picLocks noChangeAspect="1"/>
+          </p:cNvPicPr>
+          <p:nvPr/>
+        </p:nvPicPr>
+        <p:blipFill>
+          <a:blip r:embed="rId3"/>
+          <a:stretch>
+            <a:fillRect/>
+          </a:stretch>
+        </p:blipFill>
+        <p:spPr>
+          <a:xfrm>
+            <a:off x="3143250" y="4173245"/>
+            <a:ext cx="2259602" cy="797507"/>
+          </a:xfrm>
+          <a:prstGeom prst="rect">
+            <a:avLst/>
+          </a:prstGeom>
+        </p:spPr>
+      </p:pic>
+      <p:pic>
+        <p:nvPicPr>
+          <p:cNvPr id="27" name="Imagen 26">
+            <a:extLst>
+              <a:ext uri="{FF2B5EF4-FFF2-40B4-BE49-F238E27FC236}">
+                <a16:creationId xmlns:a16="http://schemas.microsoft.com/office/drawing/2014/main" id="{02ABEA17-1DF9-0F79-A8E7-BBE7BFB983F9}"/>
+              </a:ext>
+            </a:extLst>
+          </p:cNvPr>
+          <p:cNvPicPr>
+            <a:picLocks noChangeAspect="1"/>
+          </p:cNvPicPr>
+          <p:nvPr/>
+        </p:nvPicPr>
+        <p:blipFill>
+          <a:blip r:embed="rId4"/>
+          <a:stretch>
+            <a:fillRect/>
+          </a:stretch>
+        </p:blipFill>
+        <p:spPr>
+          <a:xfrm>
+            <a:off x="9209030" y="4205044"/>
+            <a:ext cx="2230012" cy="877076"/>
+          </a:xfrm>
+          <a:prstGeom prst="rect">
+            <a:avLst/>
+          </a:prstGeom>
+        </p:spPr>
+      </p:pic>
     </p:spTree>
     <p:extLst>
       <p:ext uri="{BB962C8B-B14F-4D97-AF65-F5344CB8AC3E}">
@@ -9495,7 +8164,7 @@
         </p:nvSpPr>
         <p:spPr>
           <a:xfrm>
-            <a:off x="590550" y="419100"/>
+            <a:off x="533400" y="383021"/>
             <a:ext cx="4000500" cy="190500"/>
           </a:xfrm>
           <a:prstGeom prst="rect">
@@ -9508,31 +8177,14 @@
           </a:ln>
         </p:spPr>
         <p:txBody>
-          <a:bodyPr wrap="square" lIns="0" tIns="0" rIns="0" bIns="0" anchor="t"/>
-          <a:lstStyle/>
-          <a:p>
-            <a:pPr algn="l">
-              <a:lnSpc>
-                <a:spcPct val="108000"/>
-              </a:lnSpc>
-              <a:buNone/>
-              <a:defRPr sz="750" b="1">
-                <a:solidFill>
-                  <a:srgbClr val="7D8592"/>
-                </a:solidFill>
-                <a:latin typeface="Calibri"/>
-                <a:ea typeface="Calibri"/>
-                <a:cs typeface="Calibri"/>
-              </a:defRPr>
-            </a:pPr>
-            <a:r>
-              <a:rPr lang="es-ES_tradnl" sz="750" b="1">
-                <a:solidFill>
-                  <a:srgbClr val="7D8592"/>
-                </a:solidFill>
-                <a:latin typeface="Calibri"/>
-                <a:ea typeface="Calibri"/>
-                <a:cs typeface="Calibri"/>
+          <a:bodyPr anchor="t"/>
+          <a:lstStyle/>
+          <a:p>
+            <a:r>
+              <a:rPr lang="es-ES_tradnl" sz="975" b="1" dirty="0">
+                <a:solidFill>
+                  <a:srgbClr val="AEB4BF"/>
+                </a:solidFill>
               </a:rPr>
               <a:t>VALIDACION INCREMENTAL</a:t>
             </a:r>
@@ -9555,44 +8207,27 @@
         </p:nvSpPr>
         <p:spPr>
           <a:xfrm>
-            <a:off x="590550" y="666750"/>
-            <a:ext cx="7239000" cy="723900"/>
-          </a:xfrm>
-          <a:prstGeom prst="rect">
-            <a:avLst/>
-          </a:prstGeom>
-          <a:noFill/>
-          <a:ln w="0">
-            <a:noFill/>
-            <a:prstDash val="solid"/>
-          </a:ln>
-        </p:spPr>
-        <p:txBody>
-          <a:bodyPr wrap="square" lIns="0" tIns="0" rIns="0" bIns="0" anchor="t"/>
-          <a:lstStyle/>
-          <a:p>
-            <a:pPr algn="l">
-              <a:lnSpc>
-                <a:spcPct val="103000"/>
-              </a:lnSpc>
-              <a:buNone/>
-              <a:defRPr sz="2325" b="1">
-                <a:solidFill>
-                  <a:srgbClr val="F3F4F6"/>
-                </a:solidFill>
-                <a:latin typeface="Calibri"/>
-                <a:ea typeface="Calibri"/>
-                <a:cs typeface="Calibri"/>
-              </a:defRPr>
-            </a:pPr>
-            <a:r>
-              <a:rPr lang="es-ES_tradnl" sz="2325" b="1">
-                <a:solidFill>
-                  <a:srgbClr val="F3F4F6"/>
-                </a:solidFill>
-                <a:latin typeface="Calibri"/>
-                <a:ea typeface="Calibri"/>
-                <a:cs typeface="Calibri"/>
+            <a:off x="533400" y="630671"/>
+            <a:ext cx="10363200" cy="723900"/>
+          </a:xfrm>
+          <a:prstGeom prst="rect">
+            <a:avLst/>
+          </a:prstGeom>
+          <a:noFill/>
+          <a:ln w="0">
+            <a:noFill/>
+            <a:prstDash val="solid"/>
+          </a:ln>
+        </p:spPr>
+        <p:txBody>
+          <a:bodyPr/>
+          <a:lstStyle/>
+          <a:p>
+            <a:r>
+              <a:rPr lang="es-ES_tradnl" sz="2700" b="1" dirty="0">
+                <a:solidFill>
+                  <a:schemeClr val="bg1"/>
+                </a:solidFill>
               </a:rPr>
               <a:t>Validar convierte cada pedido en un estado accionable.</a:t>
             </a:r>
@@ -9615,7 +8250,7 @@
         </p:nvSpPr>
         <p:spPr>
           <a:xfrm>
-            <a:off x="609600" y="1390650"/>
+            <a:off x="552450" y="1125970"/>
             <a:ext cx="7334250" cy="457200"/>
           </a:xfrm>
           <a:prstGeom prst="rect">
@@ -9628,31 +8263,14 @@
           </a:ln>
         </p:spPr>
         <p:txBody>
-          <a:bodyPr wrap="square" lIns="0" tIns="0" rIns="0" bIns="0" anchor="t"/>
-          <a:lstStyle/>
-          <a:p>
-            <a:pPr algn="l">
-              <a:lnSpc>
-                <a:spcPct val="118000"/>
-              </a:lnSpc>
-              <a:buNone/>
-              <a:defRPr sz="1125" b="0">
-                <a:solidFill>
-                  <a:srgbClr val="B8BEC8"/>
-                </a:solidFill>
-                <a:latin typeface="Calibri"/>
-                <a:ea typeface="Calibri"/>
-                <a:cs typeface="Calibri"/>
-              </a:defRPr>
-            </a:pPr>
-            <a:r>
-              <a:rPr lang="es-ES_tradnl" sz="1125" b="0">
-                <a:solidFill>
-                  <a:srgbClr val="B8BEC8"/>
-                </a:solidFill>
-                <a:latin typeface="Calibri"/>
-                <a:ea typeface="Calibri"/>
-                <a:cs typeface="Calibri"/>
+          <a:bodyPr anchor="t"/>
+          <a:lstStyle/>
+          <a:p>
+            <a:r>
+              <a:rPr lang="es-ES_tradnl" sz="1350">
+                <a:solidFill>
+                  <a:srgbClr val="AEB4BF"/>
+                </a:solidFill>
               </a:rPr>
               <a:t>La herramienta compara el archivo esperado y la clave SQLite antes de decidir si algo puede generarse.</a:t>
             </a:r>
@@ -9717,11 +8335,11 @@
             </a:avLst>
           </a:prstGeom>
           <a:solidFill>
-            <a:srgbClr val="202329"/>
+            <a:srgbClr val="292B30"/>
           </a:solidFill>
           <a:ln w="9525">
             <a:solidFill>
-              <a:srgbClr val="3A3F47"/>
+              <a:srgbClr val="444952"/>
             </a:solidFill>
             <a:prstDash val="solid"/>
           </a:ln>
@@ -9867,7 +8485,7 @@
               </a:defRPr>
             </a:pPr>
             <a:r>
-              <a:rPr lang="es-ES_tradnl" sz="1125" b="0">
+              <a:rPr lang="es-ES_tradnl" sz="1200" b="0">
                 <a:solidFill>
                   <a:srgbClr val="F3F4F6"/>
                 </a:solidFill>
@@ -9909,31 +8527,14 @@
           </a:ln>
         </p:spPr>
         <p:txBody>
-          <a:bodyPr wrap="square" lIns="0" tIns="0" rIns="0" bIns="0" anchor="t"/>
-          <a:lstStyle/>
-          <a:p>
-            <a:pPr algn="l">
-              <a:lnSpc>
-                <a:spcPct val="108000"/>
-              </a:lnSpc>
-              <a:buNone/>
-              <a:defRPr sz="1125" b="0">
-                <a:solidFill>
-                  <a:srgbClr val="B8BEC8"/>
-                </a:solidFill>
-                <a:latin typeface="Calibri"/>
-                <a:ea typeface="Calibri"/>
-                <a:cs typeface="Calibri"/>
-              </a:defRPr>
-            </a:pPr>
-            <a:r>
-              <a:rPr lang="es-ES_tradnl" sz="1125" b="0">
-                <a:solidFill>
-                  <a:srgbClr val="B8BEC8"/>
-                </a:solidFill>
-                <a:latin typeface="Calibri"/>
-                <a:ea typeface="Calibri"/>
-                <a:cs typeface="Calibri"/>
+          <a:bodyPr anchor="t"/>
+          <a:lstStyle/>
+          <a:p>
+            <a:r>
+              <a:rPr lang="es-ES_tradnl" sz="1200">
+                <a:solidFill>
+                  <a:srgbClr val="AEB4BF"/>
+                </a:solidFill>
               </a:rPr>
               <a:t>Puede generarse.</a:t>
             </a:r>
@@ -10098,27 +8699,17 @@
           <a:bodyPr wrap="square" lIns="0" tIns="0" rIns="0" bIns="0" anchor="t"/>
           <a:lstStyle/>
           <a:p>
-            <a:pPr algn="l">
+            <a:pPr>
               <a:lnSpc>
                 <a:spcPct val="108000"/>
               </a:lnSpc>
-              <a:buNone/>
-              <a:defRPr sz="1125" b="0">
+            </a:pPr>
+            <a:r>
+              <a:rPr lang="es-ES_tradnl" sz="1200">
                 <a:solidFill>
                   <a:srgbClr val="F3F4F6"/>
                 </a:solidFill>
                 <a:latin typeface="Calibri"/>
-                <a:ea typeface="Calibri"/>
-                <a:cs typeface="Calibri"/>
-              </a:defRPr>
-            </a:pPr>
-            <a:r>
-              <a:rPr lang="es-ES_tradnl" sz="1125" b="0">
-                <a:solidFill>
-                  <a:srgbClr val="F3F4F6"/>
-                </a:solidFill>
-                <a:latin typeface="Calibri"/>
-                <a:ea typeface="Calibri"/>
                 <a:cs typeface="Calibri"/>
               </a:rPr>
               <a:t>Existe archivo y clave.</a:t>
@@ -10155,31 +8746,14 @@
           </a:ln>
         </p:spPr>
         <p:txBody>
-          <a:bodyPr wrap="square" lIns="0" tIns="0" rIns="0" bIns="0" anchor="t"/>
-          <a:lstStyle/>
-          <a:p>
-            <a:pPr algn="l">
-              <a:lnSpc>
-                <a:spcPct val="108000"/>
-              </a:lnSpc>
-              <a:buNone/>
-              <a:defRPr sz="1125" b="0">
-                <a:solidFill>
-                  <a:srgbClr val="B8BEC8"/>
-                </a:solidFill>
-                <a:latin typeface="Calibri"/>
-                <a:ea typeface="Calibri"/>
-                <a:cs typeface="Calibri"/>
-              </a:defRPr>
-            </a:pPr>
-            <a:r>
-              <a:rPr lang="es-ES_tradnl" sz="1125" b="0">
-                <a:solidFill>
-                  <a:srgbClr val="B8BEC8"/>
-                </a:solidFill>
-                <a:latin typeface="Calibri"/>
-                <a:ea typeface="Calibri"/>
-                <a:cs typeface="Calibri"/>
+          <a:bodyPr anchor="t"/>
+          <a:lstStyle/>
+          <a:p>
+            <a:r>
+              <a:rPr lang="es-ES_tradnl" sz="1200">
+                <a:solidFill>
+                  <a:srgbClr val="AEB4BF"/>
+                </a:solidFill>
               </a:rPr>
               <a:t>Se omite.</a:t>
             </a:r>
@@ -10344,27 +8918,17 @@
           <a:bodyPr wrap="square" lIns="0" tIns="0" rIns="0" bIns="0" anchor="t"/>
           <a:lstStyle/>
           <a:p>
-            <a:pPr algn="l">
+            <a:pPr>
               <a:lnSpc>
                 <a:spcPct val="108000"/>
               </a:lnSpc>
-              <a:buNone/>
-              <a:defRPr sz="1125" b="0">
+            </a:pPr>
+            <a:r>
+              <a:rPr lang="es-ES_tradnl" sz="1200">
                 <a:solidFill>
                   <a:srgbClr val="F3F4F6"/>
                 </a:solidFill>
                 <a:latin typeface="Calibri"/>
-                <a:ea typeface="Calibri"/>
-                <a:cs typeface="Calibri"/>
-              </a:defRPr>
-            </a:pPr>
-            <a:r>
-              <a:rPr lang="es-ES_tradnl" sz="1125" b="0">
-                <a:solidFill>
-                  <a:srgbClr val="F3F4F6"/>
-                </a:solidFill>
-                <a:latin typeface="Calibri"/>
-                <a:ea typeface="Calibri"/>
                 <a:cs typeface="Calibri"/>
               </a:rPr>
               <a:t>Existe PDF, falta SQLite.</a:t>
@@ -10401,33 +8965,16 @@
           </a:ln>
         </p:spPr>
         <p:txBody>
-          <a:bodyPr wrap="square" lIns="0" tIns="0" rIns="0" bIns="0" anchor="t"/>
-          <a:lstStyle/>
-          <a:p>
-            <a:pPr algn="l">
-              <a:lnSpc>
-                <a:spcPct val="108000"/>
-              </a:lnSpc>
-              <a:buNone/>
-              <a:defRPr sz="1125" b="0">
-                <a:solidFill>
-                  <a:srgbClr val="B8BEC8"/>
-                </a:solidFill>
-                <a:latin typeface="Calibri"/>
-                <a:ea typeface="Calibri"/>
-                <a:cs typeface="Calibri"/>
-              </a:defRPr>
-            </a:pPr>
-            <a:r>
-              <a:rPr lang="es-ES_tradnl" sz="1125" b="0">
-                <a:solidFill>
-                  <a:srgbClr val="B8BEC8"/>
-                </a:solidFill>
-                <a:latin typeface="Calibri"/>
-                <a:ea typeface="Calibri"/>
-                <a:cs typeface="Calibri"/>
-              </a:rPr>
-              <a:t>Revision/backfill.</a:t>
+          <a:bodyPr anchor="t"/>
+          <a:lstStyle/>
+          <a:p>
+            <a:r>
+              <a:rPr lang="es-ES_tradnl" sz="1200">
+                <a:solidFill>
+                  <a:srgbClr val="AEB4BF"/>
+                </a:solidFill>
+              </a:rPr>
+              <a:t>Revisión/backfill.</a:t>
             </a:r>
           </a:p>
         </p:txBody>
@@ -10590,27 +9137,17 @@
           <a:bodyPr wrap="square" lIns="0" tIns="0" rIns="0" bIns="0" anchor="t"/>
           <a:lstStyle/>
           <a:p>
-            <a:pPr algn="l">
+            <a:pPr>
               <a:lnSpc>
                 <a:spcPct val="108000"/>
               </a:lnSpc>
-              <a:buNone/>
-              <a:defRPr sz="1125" b="0">
+            </a:pPr>
+            <a:r>
+              <a:rPr lang="es-ES_tradnl" sz="1200">
                 <a:solidFill>
                   <a:srgbClr val="F3F4F6"/>
                 </a:solidFill>
                 <a:latin typeface="Calibri"/>
-                <a:ea typeface="Calibri"/>
-                <a:cs typeface="Calibri"/>
-              </a:defRPr>
-            </a:pPr>
-            <a:r>
-              <a:rPr lang="es-ES_tradnl" sz="1125" b="0">
-                <a:solidFill>
-                  <a:srgbClr val="F3F4F6"/>
-                </a:solidFill>
-                <a:latin typeface="Calibri"/>
-                <a:ea typeface="Calibri"/>
                 <a:cs typeface="Calibri"/>
               </a:rPr>
               <a:t>Existe clave, falta PDF.</a:t>
@@ -10647,33 +9184,16 @@
           </a:ln>
         </p:spPr>
         <p:txBody>
-          <a:bodyPr wrap="square" lIns="0" tIns="0" rIns="0" bIns="0" anchor="t"/>
-          <a:lstStyle/>
-          <a:p>
-            <a:pPr algn="l">
-              <a:lnSpc>
-                <a:spcPct val="108000"/>
-              </a:lnSpc>
-              <a:buNone/>
-              <a:defRPr sz="1125" b="0">
-                <a:solidFill>
-                  <a:srgbClr val="B8BEC8"/>
-                </a:solidFill>
-                <a:latin typeface="Calibri"/>
-                <a:ea typeface="Calibri"/>
-                <a:cs typeface="Calibri"/>
-              </a:defRPr>
-            </a:pPr>
-            <a:r>
-              <a:rPr lang="es-ES_tradnl" sz="1125" b="0">
-                <a:solidFill>
-                  <a:srgbClr val="B8BEC8"/>
-                </a:solidFill>
-                <a:latin typeface="Calibri"/>
-                <a:ea typeface="Calibri"/>
-                <a:cs typeface="Calibri"/>
-              </a:rPr>
-              <a:t>Revision.</a:t>
+          <a:bodyPr anchor="t"/>
+          <a:lstStyle/>
+          <a:p>
+            <a:r>
+              <a:rPr lang="es-ES_tradnl" sz="1200">
+                <a:solidFill>
+                  <a:srgbClr val="AEB4BF"/>
+                </a:solidFill>
+              </a:rPr>
+              <a:t>Revisión.</a:t>
             </a:r>
           </a:p>
         </p:txBody>
@@ -10836,27 +9356,17 @@
           <a:bodyPr wrap="square" lIns="0" tIns="0" rIns="0" bIns="0" anchor="t"/>
           <a:lstStyle/>
           <a:p>
-            <a:pPr algn="l">
+            <a:pPr>
               <a:lnSpc>
                 <a:spcPct val="108000"/>
               </a:lnSpc>
-              <a:buNone/>
-              <a:defRPr sz="1125" b="0">
+            </a:pPr>
+            <a:r>
+              <a:rPr lang="es-ES_tradnl" sz="1200">
                 <a:solidFill>
                   <a:srgbClr val="F3F4F6"/>
                 </a:solidFill>
                 <a:latin typeface="Calibri"/>
-                <a:ea typeface="Calibri"/>
-                <a:cs typeface="Calibri"/>
-              </a:defRPr>
-            </a:pPr>
-            <a:r>
-              <a:rPr lang="es-ES_tradnl" sz="1125" b="0">
-                <a:solidFill>
-                  <a:srgbClr val="F3F4F6"/>
-                </a:solidFill>
-                <a:latin typeface="Calibri"/>
-                <a:ea typeface="Calibri"/>
                 <a:cs typeface="Calibri"/>
               </a:rPr>
               <a:t>Duplicado de clave o archivo.</a:t>
@@ -10893,31 +9403,14 @@
           </a:ln>
         </p:spPr>
         <p:txBody>
-          <a:bodyPr wrap="square" lIns="0" tIns="0" rIns="0" bIns="0" anchor="t"/>
-          <a:lstStyle/>
-          <a:p>
-            <a:pPr algn="l">
-              <a:lnSpc>
-                <a:spcPct val="108000"/>
-              </a:lnSpc>
-              <a:buNone/>
-              <a:defRPr sz="1125" b="0">
-                <a:solidFill>
-                  <a:srgbClr val="B8BEC8"/>
-                </a:solidFill>
-                <a:latin typeface="Calibri"/>
-                <a:ea typeface="Calibri"/>
-                <a:cs typeface="Calibri"/>
-              </a:defRPr>
-            </a:pPr>
-            <a:r>
-              <a:rPr lang="es-ES_tradnl" sz="1125" b="0">
-                <a:solidFill>
-                  <a:srgbClr val="B8BEC8"/>
-                </a:solidFill>
-                <a:latin typeface="Calibri"/>
-                <a:ea typeface="Calibri"/>
-                <a:cs typeface="Calibri"/>
+          <a:bodyPr anchor="t"/>
+          <a:lstStyle/>
+          <a:p>
+            <a:r>
+              <a:rPr lang="es-ES_tradnl" sz="1200">
+                <a:solidFill>
+                  <a:srgbClr val="AEB4BF"/>
+                </a:solidFill>
               </a:rPr>
               <a:t>Bloquea generar.</a:t>
             </a:r>
@@ -10973,8 +9466,8 @@
         </p:nvSpPr>
         <p:spPr>
           <a:xfrm>
-            <a:off x="8477250" y="2286000"/>
-            <a:ext cx="2476500" cy="895350"/>
+            <a:off x="8448675" y="2049112"/>
+            <a:ext cx="2476500" cy="1083375"/>
           </a:xfrm>
           <a:prstGeom prst="roundRect">
             <a:avLst>
@@ -10982,11 +9475,11 @@
             </a:avLst>
           </a:prstGeom>
           <a:solidFill>
-            <a:srgbClr val="2B2F35"/>
+            <a:srgbClr val="292B30"/>
           </a:solidFill>
           <a:ln w="9525">
             <a:solidFill>
-              <a:srgbClr val="3A3F47"/>
+              <a:srgbClr val="444952"/>
             </a:solidFill>
             <a:prstDash val="solid"/>
           </a:ln>
@@ -11008,8 +9501,8 @@
         </p:nvSpPr>
         <p:spPr>
           <a:xfrm>
-            <a:off x="8477250" y="2286000"/>
-            <a:ext cx="47625" cy="895350"/>
+            <a:off x="8448675" y="2049112"/>
+            <a:ext cx="104198" cy="1083374"/>
           </a:xfrm>
           <a:prstGeom prst="rect">
             <a:avLst/>
@@ -11041,7 +9534,7 @@
         </p:nvSpPr>
         <p:spPr>
           <a:xfrm>
-            <a:off x="8648700" y="2438400"/>
+            <a:off x="8620125" y="2101563"/>
             <a:ext cx="2190750" cy="247650"/>
           </a:xfrm>
           <a:prstGeom prst="rect">
@@ -11054,33 +9547,16 @@
           </a:ln>
         </p:spPr>
         <p:txBody>
-          <a:bodyPr wrap="square" lIns="0" tIns="0" rIns="0" bIns="0" anchor="t"/>
-          <a:lstStyle/>
-          <a:p>
-            <a:pPr algn="l">
-              <a:lnSpc>
-                <a:spcPct val="108000"/>
-              </a:lnSpc>
-              <a:buNone/>
-              <a:defRPr sz="1350" b="1">
-                <a:solidFill>
-                  <a:srgbClr val="F3F4F6"/>
-                </a:solidFill>
-                <a:latin typeface="Calibri"/>
-                <a:ea typeface="Calibri"/>
-                <a:cs typeface="Calibri"/>
-              </a:defRPr>
-            </a:pPr>
-            <a:r>
-              <a:rPr lang="es-ES_tradnl" sz="1350" b="1">
-                <a:solidFill>
-                  <a:srgbClr val="F3F4F6"/>
-                </a:solidFill>
-                <a:latin typeface="Calibri"/>
-                <a:ea typeface="Calibri"/>
-                <a:cs typeface="Calibri"/>
-              </a:rPr>
-              <a:t>Impresion aparte</a:t>
+          <a:bodyPr/>
+          <a:lstStyle/>
+          <a:p>
+            <a:r>
+              <a:rPr lang="es-ES_tradnl" b="1" dirty="0">
+                <a:solidFill>
+                  <a:schemeClr val="bg1"/>
+                </a:solidFill>
+              </a:rPr>
+              <a:t>Impresión aparte</a:t>
             </a:r>
           </a:p>
         </p:txBody>
@@ -11101,7 +9577,7 @@
         </p:nvSpPr>
         <p:spPr>
           <a:xfrm>
-            <a:off x="8648700" y="2743200"/>
+            <a:off x="8620125" y="2406363"/>
             <a:ext cx="2152650" cy="342900"/>
           </a:xfrm>
           <a:prstGeom prst="rect">
@@ -11114,33 +9590,16 @@
           </a:ln>
         </p:spPr>
         <p:txBody>
-          <a:bodyPr wrap="square" lIns="0" tIns="0" rIns="0" bIns="0" anchor="t"/>
-          <a:lstStyle/>
-          <a:p>
-            <a:pPr algn="l">
-              <a:lnSpc>
-                <a:spcPct val="114000"/>
-              </a:lnSpc>
-              <a:buNone/>
-              <a:defRPr sz="938" b="0">
-                <a:solidFill>
-                  <a:srgbClr val="B8BEC8"/>
-                </a:solidFill>
-                <a:latin typeface="Calibri"/>
-                <a:ea typeface="Calibri"/>
-                <a:cs typeface="Calibri"/>
-              </a:defRPr>
-            </a:pPr>
-            <a:r>
-              <a:rPr lang="es-ES_tradnl" sz="938" b="0">
-                <a:solidFill>
-                  <a:srgbClr val="B8BEC8"/>
-                </a:solidFill>
-                <a:latin typeface="Calibri"/>
-                <a:ea typeface="Calibri"/>
-                <a:cs typeface="Calibri"/>
-              </a:rPr>
-              <a:t>`impreso` no convierte un PDF en faltante ni fuerza regeneracion.</a:t>
+          <a:bodyPr anchor="t"/>
+          <a:lstStyle/>
+          <a:p>
+            <a:r>
+              <a:rPr lang="es-ES_tradnl" sz="1200">
+                <a:solidFill>
+                  <a:srgbClr val="AEB4BF"/>
+                </a:solidFill>
+              </a:rPr>
+              <a:t>`impreso` no convierte un PDF en faltante ni fuerza regeneración.</a:t>
             </a:r>
           </a:p>
         </p:txBody>
@@ -11161,8 +9620,8 @@
         </p:nvSpPr>
         <p:spPr>
           <a:xfrm>
-            <a:off x="8477250" y="3562350"/>
-            <a:ext cx="2476500" cy="895350"/>
+            <a:off x="8448675" y="3325462"/>
+            <a:ext cx="2476500" cy="1083375"/>
           </a:xfrm>
           <a:prstGeom prst="roundRect">
             <a:avLst>
@@ -11170,11 +9629,11 @@
             </a:avLst>
           </a:prstGeom>
           <a:solidFill>
-            <a:srgbClr val="2B2F35"/>
+            <a:srgbClr val="292B30"/>
           </a:solidFill>
           <a:ln w="9525">
             <a:solidFill>
-              <a:srgbClr val="3A3F47"/>
+              <a:srgbClr val="444952"/>
             </a:solidFill>
             <a:prstDash val="solid"/>
           </a:ln>
@@ -11196,8 +9655,8 @@
         </p:nvSpPr>
         <p:spPr>
           <a:xfrm>
-            <a:off x="8477250" y="3562350"/>
-            <a:ext cx="47625" cy="895350"/>
+            <a:off x="8448675" y="3325462"/>
+            <a:ext cx="104198" cy="1083374"/>
           </a:xfrm>
           <a:prstGeom prst="rect">
             <a:avLst/>
@@ -11229,7 +9688,7 @@
         </p:nvSpPr>
         <p:spPr>
           <a:xfrm>
-            <a:off x="8648700" y="3714750"/>
+            <a:off x="8620125" y="3377913"/>
             <a:ext cx="2190750" cy="247650"/>
           </a:xfrm>
           <a:prstGeom prst="rect">
@@ -11242,31 +9701,14 @@
           </a:ln>
         </p:spPr>
         <p:txBody>
-          <a:bodyPr wrap="square" lIns="0" tIns="0" rIns="0" bIns="0" anchor="t"/>
-          <a:lstStyle/>
-          <a:p>
-            <a:pPr algn="l">
-              <a:lnSpc>
-                <a:spcPct val="108000"/>
-              </a:lnSpc>
-              <a:buNone/>
-              <a:defRPr sz="1350" b="1">
-                <a:solidFill>
-                  <a:srgbClr val="F3F4F6"/>
-                </a:solidFill>
-                <a:latin typeface="Calibri"/>
-                <a:ea typeface="Calibri"/>
-                <a:cs typeface="Calibri"/>
-              </a:defRPr>
-            </a:pPr>
-            <a:r>
-              <a:rPr lang="es-ES_tradnl" sz="1350" b="1">
-                <a:solidFill>
-                  <a:srgbClr val="F3F4F6"/>
-                </a:solidFill>
-                <a:latin typeface="Calibri"/>
-                <a:ea typeface="Calibri"/>
-                <a:cs typeface="Calibri"/>
+          <a:bodyPr/>
+          <a:lstStyle/>
+          <a:p>
+            <a:r>
+              <a:rPr lang="es-ES_tradnl" b="1">
+                <a:solidFill>
+                  <a:schemeClr val="bg1"/>
+                </a:solidFill>
               </a:rPr>
               <a:t>Regla critica</a:t>
             </a:r>
@@ -11289,7 +9731,7 @@
         </p:nvSpPr>
         <p:spPr>
           <a:xfrm>
-            <a:off x="8648700" y="4019550"/>
+            <a:off x="8620125" y="3682713"/>
             <a:ext cx="2152650" cy="342900"/>
           </a:xfrm>
           <a:prstGeom prst="rect">
@@ -11302,31 +9744,14 @@
           </a:ln>
         </p:spPr>
         <p:txBody>
-          <a:bodyPr wrap="square" lIns="0" tIns="0" rIns="0" bIns="0" anchor="t"/>
-          <a:lstStyle/>
-          <a:p>
-            <a:pPr algn="l">
-              <a:lnSpc>
-                <a:spcPct val="114000"/>
-              </a:lnSpc>
-              <a:buNone/>
-              <a:defRPr sz="938" b="0">
-                <a:solidFill>
-                  <a:srgbClr val="B8BEC8"/>
-                </a:solidFill>
-                <a:latin typeface="Calibri"/>
-                <a:ea typeface="Calibri"/>
-                <a:cs typeface="Calibri"/>
-              </a:defRPr>
-            </a:pPr>
-            <a:r>
-              <a:rPr lang="es-ES_tradnl" sz="938" b="0">
-                <a:solidFill>
-                  <a:srgbClr val="B8BEC8"/>
-                </a:solidFill>
-                <a:latin typeface="Calibri"/>
-                <a:ea typeface="Calibri"/>
-                <a:cs typeface="Calibri"/>
+          <a:bodyPr anchor="t"/>
+          <a:lstStyle/>
+          <a:p>
+            <a:r>
+              <a:rPr lang="es-ES_tradnl" sz="1200">
+                <a:solidFill>
+                  <a:srgbClr val="AEB4BF"/>
+                </a:solidFill>
               </a:rPr>
               <a:t>Si hay conflicto, no se genera nada hasta resolverlo.</a:t>
             </a:r>
@@ -11349,8 +9774,8 @@
         </p:nvSpPr>
         <p:spPr>
           <a:xfrm>
-            <a:off x="8477250" y="4838700"/>
-            <a:ext cx="2476500" cy="895350"/>
+            <a:off x="8448675" y="4601812"/>
+            <a:ext cx="2476500" cy="1083375"/>
           </a:xfrm>
           <a:prstGeom prst="roundRect">
             <a:avLst>
@@ -11358,11 +9783,11 @@
             </a:avLst>
           </a:prstGeom>
           <a:solidFill>
-            <a:srgbClr val="2B2F35"/>
+            <a:srgbClr val="292B30"/>
           </a:solidFill>
           <a:ln w="9525">
             <a:solidFill>
-              <a:srgbClr val="3A3F47"/>
+              <a:srgbClr val="444952"/>
             </a:solidFill>
             <a:prstDash val="solid"/>
           </a:ln>
@@ -11384,8 +9809,8 @@
         </p:nvSpPr>
         <p:spPr>
           <a:xfrm>
-            <a:off x="8477250" y="4838700"/>
-            <a:ext cx="47625" cy="895350"/>
+            <a:off x="8448675" y="4601812"/>
+            <a:ext cx="104198" cy="1083374"/>
           </a:xfrm>
           <a:prstGeom prst="rect">
             <a:avLst/>
@@ -11417,7 +9842,7 @@
         </p:nvSpPr>
         <p:spPr>
           <a:xfrm>
-            <a:off x="8648700" y="4991100"/>
+            <a:off x="8620125" y="4654263"/>
             <a:ext cx="2190750" cy="247650"/>
           </a:xfrm>
           <a:prstGeom prst="rect">
@@ -11430,31 +9855,14 @@
           </a:ln>
         </p:spPr>
         <p:txBody>
-          <a:bodyPr wrap="square" lIns="0" tIns="0" rIns="0" bIns="0" anchor="t"/>
-          <a:lstStyle/>
-          <a:p>
-            <a:pPr algn="l">
-              <a:lnSpc>
-                <a:spcPct val="108000"/>
-              </a:lnSpc>
-              <a:buNone/>
-              <a:defRPr sz="1350" b="1">
-                <a:solidFill>
-                  <a:srgbClr val="F3F4F6"/>
-                </a:solidFill>
-                <a:latin typeface="Calibri"/>
-                <a:ea typeface="Calibri"/>
-                <a:cs typeface="Calibri"/>
-              </a:defRPr>
-            </a:pPr>
-            <a:r>
-              <a:rPr lang="es-ES_tradnl" sz="1350" b="1">
-                <a:solidFill>
-                  <a:srgbClr val="F3F4F6"/>
-                </a:solidFill>
-                <a:latin typeface="Calibri"/>
-                <a:ea typeface="Calibri"/>
-                <a:cs typeface="Calibri"/>
+          <a:bodyPr/>
+          <a:lstStyle/>
+          <a:p>
+            <a:r>
+              <a:rPr lang="es-ES_tradnl" b="1">
+                <a:solidFill>
+                  <a:schemeClr val="bg1"/>
+                </a:solidFill>
               </a:rPr>
               <a:t>Resultado</a:t>
             </a:r>
@@ -11477,7 +9885,7 @@
         </p:nvSpPr>
         <p:spPr>
           <a:xfrm>
-            <a:off x="8648700" y="5295900"/>
+            <a:off x="8620125" y="4959063"/>
             <a:ext cx="2152650" cy="342900"/>
           </a:xfrm>
           <a:prstGeom prst="rect">
@@ -11490,31 +9898,14 @@
           </a:ln>
         </p:spPr>
         <p:txBody>
-          <a:bodyPr wrap="square" lIns="0" tIns="0" rIns="0" bIns="0" anchor="t"/>
-          <a:lstStyle/>
-          <a:p>
-            <a:pPr algn="l">
-              <a:lnSpc>
-                <a:spcPct val="114000"/>
-              </a:lnSpc>
-              <a:buNone/>
-              <a:defRPr sz="938" b="0">
-                <a:solidFill>
-                  <a:srgbClr val="B8BEC8"/>
-                </a:solidFill>
-                <a:latin typeface="Calibri"/>
-                <a:ea typeface="Calibri"/>
-                <a:cs typeface="Calibri"/>
-              </a:defRPr>
-            </a:pPr>
-            <a:r>
-              <a:rPr lang="es-ES_tradnl" sz="938" b="0">
-                <a:solidFill>
-                  <a:srgbClr val="B8BEC8"/>
-                </a:solidFill>
-                <a:latin typeface="Calibri"/>
-                <a:ea typeface="Calibri"/>
-                <a:cs typeface="Calibri"/>
+          <a:bodyPr anchor="t"/>
+          <a:lstStyle/>
+          <a:p>
+            <a:r>
+              <a:rPr lang="es-ES_tradnl" sz="1200">
+                <a:solidFill>
+                  <a:srgbClr val="AEB4BF"/>
+                </a:solidFill>
               </a:rPr>
               <a:t>El operador ve conteos, warnings, BD y log antes de continuar.</a:t>
             </a:r>
@@ -11695,7 +10086,7 @@
         </p:nvSpPr>
         <p:spPr>
           <a:xfrm>
-            <a:off x="590550" y="419100"/>
+            <a:off x="533400" y="355600"/>
             <a:ext cx="4000500" cy="190500"/>
           </a:xfrm>
           <a:prstGeom prst="rect">
@@ -11708,31 +10099,14 @@
           </a:ln>
         </p:spPr>
         <p:txBody>
-          <a:bodyPr wrap="square" lIns="0" tIns="0" rIns="0" bIns="0" anchor="t"/>
-          <a:lstStyle/>
-          <a:p>
-            <a:pPr algn="l">
-              <a:lnSpc>
-                <a:spcPct val="108000"/>
-              </a:lnSpc>
-              <a:buNone/>
-              <a:defRPr sz="750" b="1">
-                <a:solidFill>
-                  <a:srgbClr val="7D8592"/>
-                </a:solidFill>
-                <a:latin typeface="Calibri"/>
-                <a:ea typeface="Calibri"/>
-                <a:cs typeface="Calibri"/>
-              </a:defRPr>
-            </a:pPr>
-            <a:r>
-              <a:rPr lang="es-ES_tradnl" sz="750" b="1">
-                <a:solidFill>
-                  <a:srgbClr val="7D8592"/>
-                </a:solidFill>
-                <a:latin typeface="Calibri"/>
-                <a:ea typeface="Calibri"/>
-                <a:cs typeface="Calibri"/>
+          <a:bodyPr anchor="t"/>
+          <a:lstStyle/>
+          <a:p>
+            <a:r>
+              <a:rPr lang="es-ES_tradnl" sz="975" b="1" dirty="0">
+                <a:solidFill>
+                  <a:srgbClr val="AEB4BF"/>
+                </a:solidFill>
               </a:rPr>
               <a:t>PDF ANOTADO</a:t>
             </a:r>
@@ -11755,46 +10129,29 @@
         </p:nvSpPr>
         <p:spPr>
           <a:xfrm>
-            <a:off x="590550" y="666750"/>
-            <a:ext cx="7239000" cy="723900"/>
-          </a:xfrm>
-          <a:prstGeom prst="rect">
-            <a:avLst/>
-          </a:prstGeom>
-          <a:noFill/>
-          <a:ln w="0">
-            <a:noFill/>
-            <a:prstDash val="solid"/>
-          </a:ln>
-        </p:spPr>
-        <p:txBody>
-          <a:bodyPr wrap="square" lIns="0" tIns="0" rIns="0" bIns="0" anchor="t"/>
-          <a:lstStyle/>
-          <a:p>
-            <a:pPr algn="l">
-              <a:lnSpc>
-                <a:spcPct val="103000"/>
-              </a:lnSpc>
-              <a:buNone/>
-              <a:defRPr sz="2325" b="1">
-                <a:solidFill>
-                  <a:srgbClr val="F3F4F6"/>
-                </a:solidFill>
-                <a:latin typeface="Calibri"/>
-                <a:ea typeface="Calibri"/>
-                <a:cs typeface="Calibri"/>
-              </a:defRPr>
-            </a:pPr>
-            <a:r>
-              <a:rPr lang="es-ES_tradnl" sz="2325" b="1">
-                <a:solidFill>
-                  <a:srgbClr val="F3F4F6"/>
-                </a:solidFill>
-                <a:latin typeface="Calibri"/>
-                <a:ea typeface="Calibri"/>
-                <a:cs typeface="Calibri"/>
-              </a:rPr>
-              <a:t>El mockup es evidencia visual, no el arte final de produccion.</a:t>
+            <a:off x="533400" y="522186"/>
+            <a:ext cx="9677400" cy="723900"/>
+          </a:xfrm>
+          <a:prstGeom prst="rect">
+            <a:avLst/>
+          </a:prstGeom>
+          <a:noFill/>
+          <a:ln w="0">
+            <a:noFill/>
+            <a:prstDash val="solid"/>
+          </a:ln>
+        </p:spPr>
+        <p:txBody>
+          <a:bodyPr/>
+          <a:lstStyle/>
+          <a:p>
+            <a:r>
+              <a:rPr lang="es-ES_tradnl" sz="2700" b="1" dirty="0">
+                <a:solidFill>
+                  <a:schemeClr val="bg1"/>
+                </a:solidFill>
+              </a:rPr>
+              <a:t>El mockup es evidencia visual, no el arte final de producción.</a:t>
             </a:r>
           </a:p>
         </p:txBody>
@@ -11815,7 +10172,7 @@
         </p:nvSpPr>
         <p:spPr>
           <a:xfrm>
-            <a:off x="609600" y="1390650"/>
+            <a:off x="533400" y="997484"/>
             <a:ext cx="7334250" cy="457200"/>
           </a:xfrm>
           <a:prstGeom prst="rect">
@@ -11828,33 +10185,16 @@
           </a:ln>
         </p:spPr>
         <p:txBody>
-          <a:bodyPr wrap="square" lIns="0" tIns="0" rIns="0" bIns="0" anchor="t"/>
-          <a:lstStyle/>
-          <a:p>
-            <a:pPr algn="l">
-              <a:lnSpc>
-                <a:spcPct val="118000"/>
-              </a:lnSpc>
-              <a:buNone/>
-              <a:defRPr sz="1125" b="0">
-                <a:solidFill>
-                  <a:srgbClr val="B8BEC8"/>
-                </a:solidFill>
-                <a:latin typeface="Calibri"/>
-                <a:ea typeface="Calibri"/>
-                <a:cs typeface="Calibri"/>
-              </a:defRPr>
-            </a:pPr>
-            <a:r>
-              <a:rPr lang="es-ES_tradnl" sz="1125" b="0">
-                <a:solidFill>
-                  <a:srgbClr val="B8BEC8"/>
-                </a:solidFill>
-                <a:latin typeface="Calibri"/>
-                <a:ea typeface="Calibri"/>
-                <a:cs typeface="Calibri"/>
-              </a:rPr>
-              <a:t>El PDF se anota con datos operativos para revision, validacion, consulta e impresion controlada.</a:t>
+          <a:bodyPr anchor="t"/>
+          <a:lstStyle/>
+          <a:p>
+            <a:r>
+              <a:rPr lang="es-ES_tradnl" sz="1350" dirty="0">
+                <a:solidFill>
+                  <a:srgbClr val="AEB4BF"/>
+                </a:solidFill>
+              </a:rPr>
+              <a:t>El PDF se anota con datos operativos para revisión, validación, consulta e impresión controlada.</a:t>
             </a:r>
           </a:p>
         </p:txBody>
@@ -11894,41 +10234,6 @@
       </p:sp>
       <p:sp>
         <p:nvSpPr>
-          <p:cNvPr id="5" name="Rectángulo redondeado 4">
-            <a:extLst>
-              <a:ext uri="{FF2B5EF4-FFF2-40B4-BE49-F238E27FC236}">
-                <a16:creationId xmlns:a16="http://schemas.microsoft.com/office/drawing/2014/main" id="{D2A7BA75-ED5B-4256-A5E4-F02FF2CFCAA5}"/>
-              </a:ext>
-            </a:extLst>
-          </p:cNvPr>
-          <p:cNvSpPr>
-            <a:spLocks noGrp="1"/>
-          </p:cNvSpPr>
-          <p:nvPr/>
-        </p:nvSpPr>
-        <p:spPr>
-          <a:xfrm>
-            <a:off x="1047750" y="1809750"/>
-            <a:ext cx="5905500" cy="4191000"/>
-          </a:xfrm>
-          <a:prstGeom prst="roundRect">
-            <a:avLst>
-              <a:gd name="adj" fmla="val 1818"/>
-            </a:avLst>
-          </a:prstGeom>
-          <a:solidFill>
-            <a:srgbClr val="F3F4F6"/>
-          </a:solidFill>
-          <a:ln w="9525">
-            <a:solidFill>
-              <a:srgbClr val="F3F4F6"/>
-            </a:solidFill>
-            <a:prstDash val="solid"/>
-          </a:ln>
-        </p:spPr>
-      </p:sp>
-      <p:sp>
-        <p:nvSpPr>
           <p:cNvPr id="6" name="Rectángulo 5">
             <a:extLst>
               <a:ext uri="{FF2B5EF4-FFF2-40B4-BE49-F238E27FC236}">
@@ -11943,8 +10248,8 @@
         </p:nvSpPr>
         <p:spPr>
           <a:xfrm>
-            <a:off x="1047750" y="1809750"/>
-            <a:ext cx="5905500" cy="133350"/>
+            <a:off x="1267403" y="1697470"/>
+            <a:ext cx="5371522" cy="129310"/>
           </a:xfrm>
           <a:prstGeom prst="rect">
             <a:avLst/>
@@ -11962,339 +10267,6 @@
       </p:sp>
       <p:sp>
         <p:nvSpPr>
-          <p:cNvPr id="7" name="Rectángulo 6">
-            <a:extLst>
-              <a:ext uri="{FF2B5EF4-FFF2-40B4-BE49-F238E27FC236}">
-                <a16:creationId xmlns:a16="http://schemas.microsoft.com/office/drawing/2014/main" id="{D0E87DA9-394B-484C-B4EB-25771577B2C4}"/>
-              </a:ext>
-            </a:extLst>
-          </p:cNvPr>
-          <p:cNvSpPr>
-            <a:spLocks noGrp="1"/>
-          </p:cNvSpPr>
-          <p:nvPr/>
-        </p:nvSpPr>
-        <p:spPr>
-          <a:xfrm>
-            <a:off x="1390650" y="2152650"/>
-            <a:ext cx="2095500" cy="266700"/>
-          </a:xfrm>
-          <a:prstGeom prst="rect">
-            <a:avLst/>
-          </a:prstGeom>
-          <a:noFill/>
-          <a:ln w="0">
-            <a:noFill/>
-            <a:prstDash val="solid"/>
-          </a:ln>
-        </p:spPr>
-        <p:txBody>
-          <a:bodyPr wrap="square" lIns="0" tIns="0" rIns="0" bIns="0" anchor="t"/>
-          <a:lstStyle/>
-          <a:p>
-            <a:pPr algn="l">
-              <a:lnSpc>
-                <a:spcPct val="108000"/>
-              </a:lnSpc>
-              <a:buNone/>
-              <a:defRPr sz="1500" b="1">
-                <a:solidFill>
-                  <a:srgbClr val="25282E"/>
-                </a:solidFill>
-                <a:latin typeface="Calibri"/>
-                <a:ea typeface="Calibri"/>
-                <a:cs typeface="Calibri"/>
-              </a:defRPr>
-            </a:pPr>
-            <a:r>
-              <a:rPr lang="es-ES_tradnl" sz="1500" b="1">
-                <a:solidFill>
-                  <a:srgbClr val="25282E"/>
-                </a:solidFill>
-                <a:latin typeface="Calibri"/>
-                <a:ea typeface="Calibri"/>
-                <a:cs typeface="Calibri"/>
-              </a:rPr>
-              <a:t>MOCKUP VISUAL</a:t>
-            </a:r>
-          </a:p>
-        </p:txBody>
-      </p:sp>
-      <p:sp>
-        <p:nvSpPr>
-          <p:cNvPr id="8" name="Rectángulo 7">
-            <a:extLst>
-              <a:ext uri="{FF2B5EF4-FFF2-40B4-BE49-F238E27FC236}">
-                <a16:creationId xmlns:a16="http://schemas.microsoft.com/office/drawing/2014/main" id="{3B90A745-34E9-4643-B22A-1D9BDAEB69C3}"/>
-              </a:ext>
-            </a:extLst>
-          </p:cNvPr>
-          <p:cNvSpPr>
-            <a:spLocks noGrp="1"/>
-          </p:cNvSpPr>
-          <p:nvPr/>
-        </p:nvSpPr>
-        <p:spPr>
-          <a:xfrm>
-            <a:off x="1390650" y="2781300"/>
-            <a:ext cx="3048000" cy="342900"/>
-          </a:xfrm>
-          <a:prstGeom prst="rect">
-            <a:avLst/>
-          </a:prstGeom>
-          <a:noFill/>
-          <a:ln w="0">
-            <a:noFill/>
-            <a:prstDash val="solid"/>
-          </a:ln>
-        </p:spPr>
-        <p:txBody>
-          <a:bodyPr wrap="square" lIns="0" tIns="0" rIns="0" bIns="0" anchor="t"/>
-          <a:lstStyle/>
-          <a:p>
-            <a:pPr algn="l">
-              <a:lnSpc>
-                <a:spcPct val="108000"/>
-              </a:lnSpc>
-              <a:buNone/>
-              <a:defRPr sz="2100" b="1">
-                <a:solidFill>
-                  <a:srgbClr val="25282E"/>
-                </a:solidFill>
-                <a:latin typeface="Calibri"/>
-                <a:ea typeface="Calibri"/>
-                <a:cs typeface="Calibri"/>
-              </a:defRPr>
-            </a:pPr>
-            <a:r>
-              <a:rPr lang="es-ES_tradnl" sz="2100" b="1">
-                <a:solidFill>
-                  <a:srgbClr val="25282E"/>
-                </a:solidFill>
-                <a:latin typeface="Calibri"/>
-                <a:ea typeface="Calibri"/>
-                <a:cs typeface="Calibri"/>
-              </a:rPr>
-              <a:t>Equipo / Style / Variante</a:t>
-            </a:r>
-          </a:p>
-        </p:txBody>
-      </p:sp>
-      <p:sp>
-        <p:nvSpPr>
-          <p:cNvPr id="9" name="Rectángulo 8">
-            <a:extLst>
-              <a:ext uri="{FF2B5EF4-FFF2-40B4-BE49-F238E27FC236}">
-                <a16:creationId xmlns:a16="http://schemas.microsoft.com/office/drawing/2014/main" id="{A44AE84E-D048-46FF-861A-B31E435B9236}"/>
-              </a:ext>
-            </a:extLst>
-          </p:cNvPr>
-          <p:cNvSpPr>
-            <a:spLocks noGrp="1"/>
-          </p:cNvSpPr>
-          <p:nvPr/>
-        </p:nvSpPr>
-        <p:spPr>
-          <a:xfrm>
-            <a:off x="1390650" y="3524250"/>
-            <a:ext cx="1809750" cy="266700"/>
-          </a:xfrm>
-          <a:prstGeom prst="rect">
-            <a:avLst/>
-          </a:prstGeom>
-          <a:noFill/>
-          <a:ln w="0">
-            <a:noFill/>
-            <a:prstDash val="solid"/>
-          </a:ln>
-        </p:spPr>
-        <p:txBody>
-          <a:bodyPr wrap="square" lIns="0" tIns="0" rIns="0" bIns="0" anchor="t"/>
-          <a:lstStyle/>
-          <a:p>
-            <a:pPr algn="l">
-              <a:lnSpc>
-                <a:spcPct val="108000"/>
-              </a:lnSpc>
-              <a:buNone/>
-              <a:defRPr sz="1425" b="0">
-                <a:solidFill>
-                  <a:srgbClr val="3A3F47"/>
-                </a:solidFill>
-                <a:latin typeface="Calibri"/>
-                <a:ea typeface="Calibri"/>
-                <a:cs typeface="Calibri"/>
-              </a:defRPr>
-            </a:pPr>
-            <a:r>
-              <a:rPr lang="es-ES_tradnl" sz="1425" b="0">
-                <a:solidFill>
-                  <a:srgbClr val="3A3F47"/>
-                </a:solidFill>
-                <a:latin typeface="Calibri"/>
-                <a:ea typeface="Calibri"/>
-                <a:cs typeface="Calibri"/>
-              </a:rPr>
-              <a:t>WO o Roster</a:t>
-            </a:r>
-          </a:p>
-        </p:txBody>
-      </p:sp>
-      <p:sp>
-        <p:nvSpPr>
-          <p:cNvPr id="10" name="Rectángulo 9">
-            <a:extLst>
-              <a:ext uri="{FF2B5EF4-FFF2-40B4-BE49-F238E27FC236}">
-                <a16:creationId xmlns:a16="http://schemas.microsoft.com/office/drawing/2014/main" id="{EF0CA693-63AC-4D64-9412-D1A8290856C5}"/>
-              </a:ext>
-            </a:extLst>
-          </p:cNvPr>
-          <p:cNvSpPr>
-            <a:spLocks noGrp="1"/>
-          </p:cNvSpPr>
-          <p:nvPr/>
-        </p:nvSpPr>
-        <p:spPr>
-          <a:xfrm>
-            <a:off x="4476750" y="3524250"/>
-            <a:ext cx="1143000" cy="266700"/>
-          </a:xfrm>
-          <a:prstGeom prst="rect">
-            <a:avLst/>
-          </a:prstGeom>
-          <a:noFill/>
-          <a:ln w="0">
-            <a:noFill/>
-            <a:prstDash val="solid"/>
-          </a:ln>
-        </p:spPr>
-        <p:txBody>
-          <a:bodyPr wrap="square" lIns="0" tIns="0" rIns="0" bIns="0" anchor="t"/>
-          <a:lstStyle/>
-          <a:p>
-            <a:pPr algn="l">
-              <a:lnSpc>
-                <a:spcPct val="108000"/>
-              </a:lnSpc>
-              <a:buNone/>
-              <a:defRPr sz="1425" b="0">
-                <a:solidFill>
-                  <a:srgbClr val="3A3F47"/>
-                </a:solidFill>
-                <a:latin typeface="Calibri"/>
-                <a:ea typeface="Calibri"/>
-                <a:cs typeface="Calibri"/>
-              </a:defRPr>
-            </a:pPr>
-            <a:r>
-              <a:rPr lang="es-ES_tradnl" sz="1425" b="0">
-                <a:solidFill>
-                  <a:srgbClr val="3A3F47"/>
-                </a:solidFill>
-                <a:latin typeface="Calibri"/>
-                <a:ea typeface="Calibri"/>
-                <a:cs typeface="Calibri"/>
-              </a:rPr>
-              <a:t>Piezas</a:t>
-            </a:r>
-          </a:p>
-        </p:txBody>
-      </p:sp>
-      <p:sp>
-        <p:nvSpPr>
-          <p:cNvPr id="11" name="Rectángulo 10">
-            <a:extLst>
-              <a:ext uri="{FF2B5EF4-FFF2-40B4-BE49-F238E27FC236}">
-                <a16:creationId xmlns:a16="http://schemas.microsoft.com/office/drawing/2014/main" id="{341D73DD-70D2-4063-9634-95DDF235AC20}"/>
-              </a:ext>
-            </a:extLst>
-          </p:cNvPr>
-          <p:cNvSpPr>
-            <a:spLocks noGrp="1"/>
-          </p:cNvSpPr>
-          <p:nvPr/>
-        </p:nvSpPr>
-        <p:spPr>
-          <a:xfrm>
-            <a:off x="1390650" y="4362450"/>
-            <a:ext cx="4191000" cy="19050"/>
-          </a:xfrm>
-          <a:prstGeom prst="rect">
-            <a:avLst/>
-          </a:prstGeom>
-          <a:solidFill>
-            <a:srgbClr val="D6D9DE"/>
-          </a:solidFill>
-          <a:ln w="0">
-            <a:solidFill>
-              <a:srgbClr val="D6D9DE"/>
-            </a:solidFill>
-            <a:prstDash val="solid"/>
-          </a:ln>
-        </p:spPr>
-      </p:sp>
-      <p:sp>
-        <p:nvSpPr>
-          <p:cNvPr id="12" name="Rectángulo 11">
-            <a:extLst>
-              <a:ext uri="{FF2B5EF4-FFF2-40B4-BE49-F238E27FC236}">
-                <a16:creationId xmlns:a16="http://schemas.microsoft.com/office/drawing/2014/main" id="{4E87C785-C20D-4A9F-B8F7-348224AA4E3F}"/>
-              </a:ext>
-            </a:extLst>
-          </p:cNvPr>
-          <p:cNvSpPr>
-            <a:spLocks noGrp="1"/>
-          </p:cNvSpPr>
-          <p:nvPr/>
-        </p:nvSpPr>
-        <p:spPr>
-          <a:xfrm>
-            <a:off x="1390650" y="4629150"/>
-            <a:ext cx="2667000" cy="247650"/>
-          </a:xfrm>
-          <a:prstGeom prst="rect">
-            <a:avLst/>
-          </a:prstGeom>
-          <a:noFill/>
-          <a:ln w="0">
-            <a:noFill/>
-            <a:prstDash val="solid"/>
-          </a:ln>
-        </p:spPr>
-        <p:txBody>
-          <a:bodyPr wrap="square" lIns="0" tIns="0" rIns="0" bIns="0" anchor="t"/>
-          <a:lstStyle/>
-          <a:p>
-            <a:pPr algn="l">
-              <a:lnSpc>
-                <a:spcPct val="108000"/>
-              </a:lnSpc>
-              <a:buNone/>
-              <a:defRPr sz="1350" b="0">
-                <a:solidFill>
-                  <a:srgbClr val="3A3F47"/>
-                </a:solidFill>
-                <a:latin typeface="Calibri"/>
-                <a:ea typeface="Calibri"/>
-                <a:cs typeface="Calibri"/>
-              </a:defRPr>
-            </a:pPr>
-            <a:r>
-              <a:rPr lang="es-ES_tradnl" sz="1350" b="0">
-                <a:solidFill>
-                  <a:srgbClr val="3A3F47"/>
-                </a:solidFill>
-                <a:latin typeface="Calibri"/>
-                <a:ea typeface="Calibri"/>
-                <a:cs typeface="Calibri"/>
-              </a:rPr>
-              <a:t>Firma del disenador</a:t>
-            </a:r>
-          </a:p>
-        </p:txBody>
-      </p:sp>
-      <p:sp>
-        <p:nvSpPr>
           <p:cNvPr id="13" name="Rectángulo redondeado 12">
             <a:extLst>
               <a:ext uri="{FF2B5EF4-FFF2-40B4-BE49-F238E27FC236}">
@@ -12309,8 +10281,8 @@
         </p:nvSpPr>
         <p:spPr>
           <a:xfrm>
-            <a:off x="7524750" y="2000250"/>
-            <a:ext cx="2857500" cy="857250"/>
+            <a:off x="7524750" y="1910239"/>
+            <a:ext cx="2857500" cy="1037273"/>
           </a:xfrm>
           <a:prstGeom prst="roundRect">
             <a:avLst>
@@ -12318,11 +10290,11 @@
             </a:avLst>
           </a:prstGeom>
           <a:solidFill>
-            <a:srgbClr val="2B2F35"/>
+            <a:srgbClr val="292B30"/>
           </a:solidFill>
           <a:ln w="9525">
             <a:solidFill>
-              <a:srgbClr val="3A3F47"/>
+              <a:srgbClr val="444952"/>
             </a:solidFill>
             <a:prstDash val="solid"/>
           </a:ln>
@@ -12344,8 +10316,8 @@
         </p:nvSpPr>
         <p:spPr>
           <a:xfrm>
-            <a:off x="7524750" y="2000250"/>
-            <a:ext cx="47625" cy="857250"/>
+            <a:off x="7524750" y="1910239"/>
+            <a:ext cx="105641" cy="1037273"/>
           </a:xfrm>
           <a:prstGeom prst="rect">
             <a:avLst/>
@@ -12377,7 +10349,7 @@
         </p:nvSpPr>
         <p:spPr>
           <a:xfrm>
-            <a:off x="7696200" y="2152650"/>
+            <a:off x="7696200" y="2014110"/>
             <a:ext cx="2571750" cy="247650"/>
           </a:xfrm>
           <a:prstGeom prst="rect">
@@ -12390,31 +10362,14 @@
           </a:ln>
         </p:spPr>
         <p:txBody>
-          <a:bodyPr wrap="square" lIns="0" tIns="0" rIns="0" bIns="0" anchor="t"/>
-          <a:lstStyle/>
-          <a:p>
-            <a:pPr algn="l">
-              <a:lnSpc>
-                <a:spcPct val="108000"/>
-              </a:lnSpc>
-              <a:buNone/>
-              <a:defRPr sz="1350" b="1">
-                <a:solidFill>
-                  <a:srgbClr val="F3F4F6"/>
-                </a:solidFill>
-                <a:latin typeface="Calibri"/>
-                <a:ea typeface="Calibri"/>
-                <a:cs typeface="Calibri"/>
-              </a:defRPr>
-            </a:pPr>
-            <a:r>
-              <a:rPr lang="es-ES_tradnl" sz="1350" b="1">
-                <a:solidFill>
-                  <a:srgbClr val="F3F4F6"/>
-                </a:solidFill>
-                <a:latin typeface="Calibri"/>
-                <a:ea typeface="Calibri"/>
-                <a:cs typeface="Calibri"/>
+          <a:bodyPr/>
+          <a:lstStyle/>
+          <a:p>
+            <a:r>
+              <a:rPr lang="es-ES_tradnl" b="1" dirty="0">
+                <a:solidFill>
+                  <a:schemeClr val="bg1"/>
+                </a:solidFill>
               </a:rPr>
               <a:t>Personalizadas</a:t>
             </a:r>
@@ -12437,7 +10392,7 @@
         </p:nvSpPr>
         <p:spPr>
           <a:xfrm>
-            <a:off x="7696200" y="2457450"/>
+            <a:off x="7696200" y="2318910"/>
             <a:ext cx="2533650" cy="304800"/>
           </a:xfrm>
           <a:prstGeom prst="rect">
@@ -12450,31 +10405,14 @@
           </a:ln>
         </p:spPr>
         <p:txBody>
-          <a:bodyPr wrap="square" lIns="0" tIns="0" rIns="0" bIns="0" anchor="t"/>
-          <a:lstStyle/>
-          <a:p>
-            <a:pPr algn="l">
-              <a:lnSpc>
-                <a:spcPct val="114000"/>
-              </a:lnSpc>
-              <a:buNone/>
-              <a:defRPr sz="938" b="0">
-                <a:solidFill>
-                  <a:srgbClr val="B8BEC8"/>
-                </a:solidFill>
-                <a:latin typeface="Calibri"/>
-                <a:ea typeface="Calibri"/>
-                <a:cs typeface="Calibri"/>
-              </a:defRPr>
-            </a:pPr>
-            <a:r>
-              <a:rPr lang="es-ES_tradnl" sz="938" b="0">
-                <a:solidFill>
-                  <a:srgbClr val="B8BEC8"/>
-                </a:solidFill>
-                <a:latin typeface="Calibri"/>
-                <a:ea typeface="Calibri"/>
-                <a:cs typeface="Calibri"/>
+          <a:bodyPr anchor="t"/>
+          <a:lstStyle/>
+          <a:p>
+            <a:r>
+              <a:rPr lang="es-ES_tradnl" sz="1200" dirty="0">
+                <a:solidFill>
+                  <a:srgbClr val="AEB4BF"/>
+                </a:solidFill>
               </a:rPr>
               <a:t>Fecha del titulo, WO, Style, piezas, talla y firma.</a:t>
             </a:r>
@@ -12497,8 +10435,8 @@
         </p:nvSpPr>
         <p:spPr>
           <a:xfrm>
-            <a:off x="8096250" y="3238500"/>
-            <a:ext cx="2857500" cy="857250"/>
+            <a:off x="8096250" y="3148489"/>
+            <a:ext cx="2857500" cy="1037273"/>
           </a:xfrm>
           <a:prstGeom prst="roundRect">
             <a:avLst>
@@ -12506,11 +10444,11 @@
             </a:avLst>
           </a:prstGeom>
           <a:solidFill>
-            <a:srgbClr val="2B2F35"/>
+            <a:srgbClr val="292B30"/>
           </a:solidFill>
           <a:ln w="9525">
             <a:solidFill>
-              <a:srgbClr val="3A3F47"/>
+              <a:srgbClr val="444952"/>
             </a:solidFill>
             <a:prstDash val="solid"/>
           </a:ln>
@@ -12532,8 +10470,8 @@
         </p:nvSpPr>
         <p:spPr>
           <a:xfrm>
-            <a:off x="8096250" y="3238500"/>
-            <a:ext cx="47625" cy="857250"/>
+            <a:off x="8096250" y="3148489"/>
+            <a:ext cx="105641" cy="1037273"/>
           </a:xfrm>
           <a:prstGeom prst="rect">
             <a:avLst/>
@@ -12565,7 +10503,7 @@
         </p:nvSpPr>
         <p:spPr>
           <a:xfrm>
-            <a:off x="8267700" y="3390900"/>
+            <a:off x="8267700" y="3252360"/>
             <a:ext cx="2571750" cy="247650"/>
           </a:xfrm>
           <a:prstGeom prst="rect">
@@ -12578,33 +10516,16 @@
           </a:ln>
         </p:spPr>
         <p:txBody>
-          <a:bodyPr wrap="square" lIns="0" tIns="0" rIns="0" bIns="0" anchor="t"/>
-          <a:lstStyle/>
-          <a:p>
-            <a:pPr algn="l">
-              <a:lnSpc>
-                <a:spcPct val="108000"/>
-              </a:lnSpc>
-              <a:buNone/>
-              <a:defRPr sz="1350" b="1">
-                <a:solidFill>
-                  <a:srgbClr val="F3F4F6"/>
-                </a:solidFill>
-                <a:latin typeface="Calibri"/>
-                <a:ea typeface="Calibri"/>
-                <a:cs typeface="Calibri"/>
-              </a:defRPr>
-            </a:pPr>
-            <a:r>
-              <a:rPr lang="es-ES_tradnl" sz="1350" b="1">
-                <a:solidFill>
-                  <a:srgbClr val="F3F4F6"/>
-                </a:solidFill>
-                <a:latin typeface="Calibri"/>
-                <a:ea typeface="Calibri"/>
-                <a:cs typeface="Calibri"/>
-              </a:rPr>
-              <a:t>Genericas</a:t>
+          <a:bodyPr/>
+          <a:lstStyle/>
+          <a:p>
+            <a:r>
+              <a:rPr lang="es-ES_tradnl" b="1" dirty="0">
+                <a:solidFill>
+                  <a:schemeClr val="bg1"/>
+                </a:solidFill>
+              </a:rPr>
+              <a:t>Genéricas</a:t>
             </a:r>
           </a:p>
         </p:txBody>
@@ -12625,7 +10546,7 @@
         </p:nvSpPr>
         <p:spPr>
           <a:xfrm>
-            <a:off x="8267700" y="3695700"/>
+            <a:off x="8267700" y="3557160"/>
             <a:ext cx="2533650" cy="304800"/>
           </a:xfrm>
           <a:prstGeom prst="rect">
@@ -12638,33 +10559,32 @@
           </a:ln>
         </p:spPr>
         <p:txBody>
-          <a:bodyPr wrap="square" lIns="0" tIns="0" rIns="0" bIns="0" anchor="t"/>
-          <a:lstStyle/>
-          <a:p>
-            <a:pPr algn="l">
-              <a:lnSpc>
-                <a:spcPct val="114000"/>
-              </a:lnSpc>
-              <a:buNone/>
-              <a:defRPr sz="938" b="0">
-                <a:solidFill>
-                  <a:srgbClr val="B8BEC8"/>
-                </a:solidFill>
-                <a:latin typeface="Calibri"/>
-                <a:ea typeface="Calibri"/>
-                <a:cs typeface="Calibri"/>
-              </a:defRPr>
-            </a:pPr>
-            <a:r>
-              <a:rPr lang="es-ES_tradnl" sz="938" b="0">
-                <a:solidFill>
-                  <a:srgbClr val="B8BEC8"/>
-                </a:solidFill>
-                <a:latin typeface="Calibri"/>
-                <a:ea typeface="Calibri"/>
-                <a:cs typeface="Calibri"/>
-              </a:rPr>
-              <a:t>Fecha Emb, WO, Roster, Style, piezas y firma.</a:t>
+          <a:bodyPr anchor="t"/>
+          <a:lstStyle/>
+          <a:p>
+            <a:r>
+              <a:rPr lang="es-ES_tradnl" sz="1200" dirty="0">
+                <a:solidFill>
+                  <a:srgbClr val="AEB4BF"/>
+                </a:solidFill>
+              </a:rPr>
+              <a:t>Fecha </a:t>
+            </a:r>
+            <a:r>
+              <a:rPr lang="es-ES_tradnl" sz="1200" dirty="0" err="1">
+                <a:solidFill>
+                  <a:srgbClr val="AEB4BF"/>
+                </a:solidFill>
+              </a:rPr>
+              <a:t>Emb</a:t>
+            </a:r>
+            <a:r>
+              <a:rPr lang="es-ES_tradnl" sz="1200" dirty="0">
+                <a:solidFill>
+                  <a:srgbClr val="AEB4BF"/>
+                </a:solidFill>
+              </a:rPr>
+              <a:t>, WO, Roster, Style, piezas y firma.</a:t>
             </a:r>
           </a:p>
         </p:txBody>
@@ -12685,8 +10605,8 @@
         </p:nvSpPr>
         <p:spPr>
           <a:xfrm>
-            <a:off x="7524750" y="4476750"/>
-            <a:ext cx="2857500" cy="857250"/>
+            <a:off x="7524750" y="4386739"/>
+            <a:ext cx="2857500" cy="1037273"/>
           </a:xfrm>
           <a:prstGeom prst="roundRect">
             <a:avLst>
@@ -12694,11 +10614,11 @@
             </a:avLst>
           </a:prstGeom>
           <a:solidFill>
-            <a:srgbClr val="2B2F35"/>
+            <a:srgbClr val="292B30"/>
           </a:solidFill>
           <a:ln w="9525">
             <a:solidFill>
-              <a:srgbClr val="3A3F47"/>
+              <a:srgbClr val="444952"/>
             </a:solidFill>
             <a:prstDash val="solid"/>
           </a:ln>
@@ -12720,8 +10640,8 @@
         </p:nvSpPr>
         <p:spPr>
           <a:xfrm>
-            <a:off x="7524750" y="4476750"/>
-            <a:ext cx="47625" cy="857250"/>
+            <a:off x="7524750" y="4386739"/>
+            <a:ext cx="105641" cy="1037273"/>
           </a:xfrm>
           <a:prstGeom prst="rect">
             <a:avLst/>
@@ -12753,7 +10673,7 @@
         </p:nvSpPr>
         <p:spPr>
           <a:xfrm>
-            <a:off x="7696200" y="4629150"/>
+            <a:off x="7696200" y="4490610"/>
             <a:ext cx="2571750" cy="247650"/>
           </a:xfrm>
           <a:prstGeom prst="rect">
@@ -12766,31 +10686,14 @@
           </a:ln>
         </p:spPr>
         <p:txBody>
-          <a:bodyPr wrap="square" lIns="0" tIns="0" rIns="0" bIns="0" anchor="t"/>
-          <a:lstStyle/>
-          <a:p>
-            <a:pPr algn="l">
-              <a:lnSpc>
-                <a:spcPct val="108000"/>
-              </a:lnSpc>
-              <a:buNone/>
-              <a:defRPr sz="1350" b="1">
-                <a:solidFill>
-                  <a:srgbClr val="F3F4F6"/>
-                </a:solidFill>
-                <a:latin typeface="Calibri"/>
-                <a:ea typeface="Calibri"/>
-                <a:cs typeface="Calibri"/>
-              </a:defRPr>
-            </a:pPr>
-            <a:r>
-              <a:rPr lang="es-ES_tradnl" sz="1350" b="1">
-                <a:solidFill>
-                  <a:srgbClr val="F3F4F6"/>
-                </a:solidFill>
-                <a:latin typeface="Calibri"/>
-                <a:ea typeface="Calibri"/>
-                <a:cs typeface="Calibri"/>
+          <a:bodyPr/>
+          <a:lstStyle/>
+          <a:p>
+            <a:r>
+              <a:rPr lang="es-ES_tradnl" b="1" dirty="0">
+                <a:solidFill>
+                  <a:schemeClr val="bg1"/>
+                </a:solidFill>
               </a:rPr>
               <a:t>Limite</a:t>
             </a:r>
@@ -12813,7 +10716,7 @@
         </p:nvSpPr>
         <p:spPr>
           <a:xfrm>
-            <a:off x="7696200" y="4933950"/>
+            <a:off x="7696200" y="4795410"/>
             <a:ext cx="2533650" cy="304800"/>
           </a:xfrm>
           <a:prstGeom prst="rect">
@@ -12826,33 +10729,16 @@
           </a:ln>
         </p:spPr>
         <p:txBody>
-          <a:bodyPr wrap="square" lIns="0" tIns="0" rIns="0" bIns="0" anchor="t"/>
-          <a:lstStyle/>
-          <a:p>
-            <a:pPr algn="l">
-              <a:lnSpc>
-                <a:spcPct val="114000"/>
-              </a:lnSpc>
-              <a:buNone/>
-              <a:defRPr sz="938" b="0">
-                <a:solidFill>
-                  <a:srgbClr val="B8BEC8"/>
-                </a:solidFill>
-                <a:latin typeface="Calibri"/>
-                <a:ea typeface="Calibri"/>
-                <a:cs typeface="Calibri"/>
-              </a:defRPr>
-            </a:pPr>
-            <a:r>
-              <a:rPr lang="es-ES_tradnl" sz="938" b="0">
-                <a:solidFill>
-                  <a:srgbClr val="B8BEC8"/>
-                </a:solidFill>
-                <a:latin typeface="Calibri"/>
-                <a:ea typeface="Calibri"/>
-                <a:cs typeface="Calibri"/>
-              </a:rPr>
-              <a:t>Solo anota mockups base PDF; JPG requiere conversion o flujo adicional.</a:t>
+          <a:bodyPr anchor="t"/>
+          <a:lstStyle/>
+          <a:p>
+            <a:r>
+              <a:rPr lang="es-ES_tradnl" sz="1200" dirty="0">
+                <a:solidFill>
+                  <a:srgbClr val="AEB4BF"/>
+                </a:solidFill>
+              </a:rPr>
+              <a:t>Solo anota mockups base PDF; JPG requiere conversión o flujo adicional.</a:t>
             </a:r>
           </a:p>
         </p:txBody>
@@ -12977,6 +10863,46 @@
           </a:p>
         </p:txBody>
       </p:sp>
+      <p:pic>
+        <p:nvPicPr>
+          <p:cNvPr id="40" name="Imagen 39">
+            <a:extLst>
+              <a:ext uri="{FF2B5EF4-FFF2-40B4-BE49-F238E27FC236}">
+                <a16:creationId xmlns:a16="http://schemas.microsoft.com/office/drawing/2014/main" id="{BF51D358-F240-7046-4722-2A4DF8FE4643}"/>
+              </a:ext>
+            </a:extLst>
+          </p:cNvPr>
+          <p:cNvPicPr>
+            <a:picLocks noChangeAspect="1"/>
+          </p:cNvPicPr>
+          <p:nvPr/>
+        </p:nvPicPr>
+        <p:blipFill>
+          <a:blip r:embed="rId3"/>
+          <a:stretch>
+            <a:fillRect/>
+          </a:stretch>
+        </p:blipFill>
+        <p:spPr>
+          <a:xfrm>
+            <a:off x="1267402" y="1830820"/>
+            <a:ext cx="5371523" cy="4079874"/>
+          </a:xfrm>
+          <a:prstGeom prst="rect">
+            <a:avLst/>
+          </a:prstGeom>
+          <a:ln>
+            <a:noFill/>
+          </a:ln>
+          <a:effectLst>
+            <a:outerShdw blurRad="292100" dist="139700" dir="2700000" algn="tl" rotWithShape="0">
+              <a:srgbClr val="333333">
+                <a:alpha val="65000"/>
+              </a:srgbClr>
+            </a:outerShdw>
+          </a:effectLst>
+        </p:spPr>
+      </p:pic>
     </p:spTree>
     <p:extLst>
       <p:ext uri="{BB962C8B-B14F-4D97-AF65-F5344CB8AC3E}">
@@ -13031,7 +10957,7 @@
         </p:nvSpPr>
         <p:spPr>
           <a:xfrm>
-            <a:off x="590550" y="419100"/>
+            <a:off x="533400" y="381000"/>
             <a:ext cx="4000500" cy="190500"/>
           </a:xfrm>
           <a:prstGeom prst="rect">
@@ -13044,31 +10970,14 @@
           </a:ln>
         </p:spPr>
         <p:txBody>
-          <a:bodyPr wrap="square" lIns="0" tIns="0" rIns="0" bIns="0" anchor="t"/>
-          <a:lstStyle/>
-          <a:p>
-            <a:pPr algn="l">
-              <a:lnSpc>
-                <a:spcPct val="108000"/>
-              </a:lnSpc>
-              <a:buNone/>
-              <a:defRPr sz="750" b="1">
-                <a:solidFill>
-                  <a:srgbClr val="7D8592"/>
-                </a:solidFill>
-                <a:latin typeface="Calibri"/>
-                <a:ea typeface="Calibri"/>
-                <a:cs typeface="Calibri"/>
-              </a:defRPr>
-            </a:pPr>
-            <a:r>
-              <a:rPr lang="es-ES_tradnl" sz="750" b="1">
-                <a:solidFill>
-                  <a:srgbClr val="7D8592"/>
-                </a:solidFill>
-                <a:latin typeface="Calibri"/>
-                <a:ea typeface="Calibri"/>
-                <a:cs typeface="Calibri"/>
+          <a:bodyPr anchor="t"/>
+          <a:lstStyle/>
+          <a:p>
+            <a:r>
+              <a:rPr lang="es-ES_tradnl" sz="975" b="1" dirty="0">
+                <a:solidFill>
+                  <a:srgbClr val="AEB4BF"/>
+                </a:solidFill>
               </a:rPr>
               <a:t>RUTAS Y NOMBRES</a:t>
             </a:r>
@@ -13091,46 +11000,29 @@
         </p:nvSpPr>
         <p:spPr>
           <a:xfrm>
-            <a:off x="590550" y="666750"/>
-            <a:ext cx="7239000" cy="723900"/>
-          </a:xfrm>
-          <a:prstGeom prst="rect">
-            <a:avLst/>
-          </a:prstGeom>
-          <a:noFill/>
-          <a:ln w="0">
-            <a:noFill/>
-            <a:prstDash val="solid"/>
-          </a:ln>
-        </p:spPr>
-        <p:txBody>
-          <a:bodyPr wrap="square" lIns="0" tIns="0" rIns="0" bIns="0" anchor="t"/>
-          <a:lstStyle/>
-          <a:p>
-            <a:pPr algn="l">
-              <a:lnSpc>
-                <a:spcPct val="103000"/>
-              </a:lnSpc>
-              <a:buNone/>
-              <a:defRPr sz="2325" b="1">
-                <a:solidFill>
-                  <a:srgbClr val="F3F4F6"/>
-                </a:solidFill>
-                <a:latin typeface="Calibri"/>
-                <a:ea typeface="Calibri"/>
-                <a:cs typeface="Calibri"/>
-              </a:defRPr>
-            </a:pPr>
-            <a:r>
-              <a:rPr lang="es-ES_tradnl" sz="2325" b="1">
-                <a:solidFill>
-                  <a:srgbClr val="F3F4F6"/>
-                </a:solidFill>
-                <a:latin typeface="Calibri"/>
-                <a:ea typeface="Calibri"/>
-                <a:cs typeface="Calibri"/>
-              </a:rPr>
-              <a:t>La salida queda ordenada para encontrar el PDF despues.</a:t>
+            <a:off x="533400" y="592859"/>
+            <a:ext cx="8590395" cy="723900"/>
+          </a:xfrm>
+          <a:prstGeom prst="rect">
+            <a:avLst/>
+          </a:prstGeom>
+          <a:noFill/>
+          <a:ln w="0">
+            <a:noFill/>
+            <a:prstDash val="solid"/>
+          </a:ln>
+        </p:spPr>
+        <p:txBody>
+          <a:bodyPr/>
+          <a:lstStyle/>
+          <a:p>
+            <a:r>
+              <a:rPr lang="es-ES_tradnl" sz="2700" b="1" dirty="0">
+                <a:solidFill>
+                  <a:schemeClr val="bg1"/>
+                </a:solidFill>
+              </a:rPr>
+              <a:t>La salida queda ordenada para encontrar el PDF después.</a:t>
             </a:r>
           </a:p>
         </p:txBody>
@@ -13151,7 +11043,7 @@
         </p:nvSpPr>
         <p:spPr>
           <a:xfrm>
-            <a:off x="609600" y="1390650"/>
+            <a:off x="533400" y="1076325"/>
             <a:ext cx="7334250" cy="457200"/>
           </a:xfrm>
           <a:prstGeom prst="rect">
@@ -13164,33 +11056,16 @@
           </a:ln>
         </p:spPr>
         <p:txBody>
-          <a:bodyPr wrap="square" lIns="0" tIns="0" rIns="0" bIns="0" anchor="t"/>
-          <a:lstStyle/>
-          <a:p>
-            <a:pPr algn="l">
-              <a:lnSpc>
-                <a:spcPct val="118000"/>
-              </a:lnSpc>
-              <a:buNone/>
-              <a:defRPr sz="1125" b="0">
-                <a:solidFill>
-                  <a:srgbClr val="B8BEC8"/>
-                </a:solidFill>
-                <a:latin typeface="Calibri"/>
-                <a:ea typeface="Calibri"/>
-                <a:cs typeface="Calibri"/>
-              </a:defRPr>
-            </a:pPr>
-            <a:r>
-              <a:rPr lang="es-ES_tradnl" sz="1125" b="0">
-                <a:solidFill>
-                  <a:srgbClr val="B8BEC8"/>
-                </a:solidFill>
-                <a:latin typeface="Calibri"/>
-                <a:ea typeface="Calibri"/>
-                <a:cs typeface="Calibri"/>
-              </a:rPr>
-              <a:t>Personalizadas usa una raiz operativa. Genericas sale junto al Excel seleccionado, dentro de la seccion Genericas.</a:t>
+          <a:bodyPr anchor="t"/>
+          <a:lstStyle/>
+          <a:p>
+            <a:r>
+              <a:rPr lang="es-ES_tradnl" sz="1350" dirty="0">
+                <a:solidFill>
+                  <a:srgbClr val="AEB4BF"/>
+                </a:solidFill>
+              </a:rPr>
+              <a:t>Personalizadas usa una raíz operativa. Genéricas sale junto al Excel seleccionado, dentro de la sección Genéricas.</a:t>
             </a:r>
           </a:p>
         </p:txBody>
@@ -13244,8 +11119,8 @@
         </p:nvSpPr>
         <p:spPr>
           <a:xfrm>
-            <a:off x="685800" y="2095500"/>
-            <a:ext cx="5048250" cy="3238500"/>
+            <a:off x="685800" y="1762125"/>
+            <a:ext cx="5048250" cy="2364331"/>
           </a:xfrm>
           <a:prstGeom prst="roundRect">
             <a:avLst>
@@ -13253,11 +11128,11 @@
             </a:avLst>
           </a:prstGeom>
           <a:solidFill>
-            <a:srgbClr val="202329"/>
+            <a:srgbClr val="292B30"/>
           </a:solidFill>
           <a:ln w="9525">
             <a:solidFill>
-              <a:srgbClr val="3A3F47"/>
+              <a:srgbClr val="444952"/>
             </a:solidFill>
             <a:prstDash val="solid"/>
           </a:ln>
@@ -13279,7 +11154,7 @@
         </p:nvSpPr>
         <p:spPr>
           <a:xfrm>
-            <a:off x="685800" y="2095500"/>
+            <a:off x="685800" y="1762125"/>
             <a:ext cx="5048250" cy="76200"/>
           </a:xfrm>
           <a:prstGeom prst="rect">
@@ -13312,7 +11187,7 @@
         </p:nvSpPr>
         <p:spPr>
           <a:xfrm>
-            <a:off x="971550" y="2419350"/>
+            <a:off x="829252" y="1908001"/>
             <a:ext cx="2095500" cy="266700"/>
           </a:xfrm>
           <a:prstGeom prst="rect">
@@ -13325,31 +11200,14 @@
           </a:ln>
         </p:spPr>
         <p:txBody>
-          <a:bodyPr wrap="square" lIns="0" tIns="0" rIns="0" bIns="0" anchor="t"/>
-          <a:lstStyle/>
-          <a:p>
-            <a:pPr algn="l">
-              <a:lnSpc>
-                <a:spcPct val="108000"/>
-              </a:lnSpc>
-              <a:buNone/>
-              <a:defRPr sz="1725" b="1">
-                <a:solidFill>
-                  <a:srgbClr val="F3F4F6"/>
-                </a:solidFill>
-                <a:latin typeface="Calibri"/>
-                <a:ea typeface="Calibri"/>
-                <a:cs typeface="Calibri"/>
-              </a:defRPr>
-            </a:pPr>
-            <a:r>
-              <a:rPr lang="es-ES_tradnl" sz="1725" b="1">
-                <a:solidFill>
-                  <a:srgbClr val="F3F4F6"/>
-                </a:solidFill>
-                <a:latin typeface="Calibri"/>
-                <a:ea typeface="Calibri"/>
-                <a:cs typeface="Calibri"/>
+          <a:bodyPr/>
+          <a:lstStyle/>
+          <a:p>
+            <a:r>
+              <a:rPr lang="es-ES_tradnl" b="1" dirty="0">
+                <a:solidFill>
+                  <a:schemeClr val="bg1"/>
+                </a:solidFill>
               </a:rPr>
               <a:t>Personalizadas</a:t>
             </a:r>
@@ -13372,7 +11230,7 @@
         </p:nvSpPr>
         <p:spPr>
           <a:xfrm>
-            <a:off x="990600" y="2971800"/>
+            <a:off x="972127" y="2441401"/>
             <a:ext cx="4095750" cy="1714500"/>
           </a:xfrm>
           <a:prstGeom prst="rect">
@@ -13403,7 +11261,7 @@
               </a:defRPr>
             </a:pPr>
             <a:r>
-              <a:rPr lang="es-ES_tradnl" sz="1275" b="0">
+              <a:rPr lang="es-ES_tradnl" sz="1275" b="0" dirty="0" err="1">
                 <a:solidFill>
                   <a:srgbClr val="B8BEC8"/>
                 </a:solidFill>
@@ -13411,7 +11269,18 @@
                 <a:ea typeface="Calibri"/>
                 <a:cs typeface="Calibri"/>
               </a:rPr>
-              <a:t>raiz seleccionada</a:t>
+              <a:t>raiz</a:t>
+            </a:r>
+            <a:r>
+              <a:rPr lang="es-ES_tradnl" sz="1275" b="0" dirty="0">
+                <a:solidFill>
+                  <a:srgbClr val="B8BEC8"/>
+                </a:solidFill>
+                <a:latin typeface="Calibri"/>
+                <a:ea typeface="Calibri"/>
+                <a:cs typeface="Calibri"/>
+              </a:rPr>
+              <a:t> seleccionada</a:t>
             </a:r>
           </a:p>
           <a:p>
@@ -13430,7 +11299,7 @@
               </a:defRPr>
             </a:pPr>
             <a:r>
-              <a:rPr lang="es-ES_tradnl" sz="1275" b="0">
+              <a:rPr lang="es-ES_tradnl" sz="1275" b="0" dirty="0">
                 <a:solidFill>
                   <a:srgbClr val="B8BEC8"/>
                 </a:solidFill>
@@ -13457,7 +11326,7 @@
               </a:defRPr>
             </a:pPr>
             <a:r>
-              <a:rPr lang="es-ES_tradnl" sz="1275" b="0">
+              <a:rPr lang="es-ES_tradnl" sz="1275" b="0" dirty="0">
                 <a:solidFill>
                   <a:srgbClr val="B8BEC8"/>
                 </a:solidFill>
@@ -13465,7 +11334,7 @@
                 <a:ea typeface="Calibri"/>
                 <a:cs typeface="Calibri"/>
               </a:rPr>
-              <a:t>    /&lt;Excel sin extension&gt;</a:t>
+              <a:t>    /&lt;Nombre con base de Excel&gt;</a:t>
             </a:r>
           </a:p>
           <a:p>
@@ -13484,7 +11353,7 @@
               </a:defRPr>
             </a:pPr>
             <a:r>
-              <a:rPr lang="es-ES_tradnl" sz="1275" b="0">
+              <a:rPr lang="es-ES_tradnl" sz="1275" b="0" dirty="0">
                 <a:solidFill>
                   <a:srgbClr val="B8BEC8"/>
                 </a:solidFill>
@@ -13492,7 +11361,29 @@
                 <a:ea typeface="Calibri"/>
                 <a:cs typeface="Calibri"/>
               </a:rPr>
-              <a:t>      /&lt;StyleFamily&gt;</a:t>
+              <a:t>      /&lt;</a:t>
+            </a:r>
+            <a:r>
+              <a:rPr lang="es-ES_tradnl" sz="1275" b="0" dirty="0" err="1">
+                <a:solidFill>
+                  <a:srgbClr val="B8BEC8"/>
+                </a:solidFill>
+                <a:latin typeface="Calibri"/>
+                <a:ea typeface="Calibri"/>
+                <a:cs typeface="Calibri"/>
+              </a:rPr>
+              <a:t>StyleFamily</a:t>
+            </a:r>
+            <a:r>
+              <a:rPr lang="es-ES_tradnl" sz="1275" b="0" dirty="0">
+                <a:solidFill>
+                  <a:srgbClr val="B8BEC8"/>
+                </a:solidFill>
+                <a:latin typeface="Calibri"/>
+                <a:ea typeface="Calibri"/>
+                <a:cs typeface="Calibri"/>
+              </a:rPr>
+              <a:t>&gt;</a:t>
             </a:r>
           </a:p>
           <a:p>
@@ -13511,7 +11402,7 @@
               </a:defRPr>
             </a:pPr>
             <a:r>
-              <a:rPr lang="es-ES_tradnl" sz="1275" b="0">
+              <a:rPr lang="es-ES_tradnl" sz="1275" b="0" dirty="0">
                 <a:solidFill>
                   <a:srgbClr val="B8BEC8"/>
                 </a:solidFill>
@@ -13538,7 +11429,7 @@
               </a:defRPr>
             </a:pPr>
             <a:r>
-              <a:rPr lang="es-ES_tradnl" sz="1275" b="0">
+              <a:rPr lang="es-ES_tradnl" sz="1275" b="0" dirty="0">
                 <a:solidFill>
                   <a:srgbClr val="B8BEC8"/>
                 </a:solidFill>
@@ -13546,8 +11437,27 @@
                 <a:ea typeface="Calibri"/>
                 <a:cs typeface="Calibri"/>
               </a:rPr>
-              <a:t>          &lt;WO&gt; - &lt;Equipo&gt; - &lt;Style&gt; - &lt;Piezas&gt;pz.pdf</a:t>
-            </a:r>
+              <a:t>          &lt;WO&gt; - &lt;Equipo&gt; - &lt;Style&gt; - &lt;Piezas&gt;</a:t>
+            </a:r>
+            <a:r>
+              <a:rPr lang="es-ES_tradnl" sz="1275" b="0" dirty="0" err="1">
+                <a:solidFill>
+                  <a:srgbClr val="B8BEC8"/>
+                </a:solidFill>
+                <a:latin typeface="Calibri"/>
+                <a:ea typeface="Calibri"/>
+                <a:cs typeface="Calibri"/>
+              </a:rPr>
+              <a:t>pz.pdf</a:t>
+            </a:r>
+            <a:endParaRPr lang="es-ES_tradnl" sz="1275" b="0" dirty="0">
+              <a:solidFill>
+                <a:srgbClr val="B8BEC8"/>
+              </a:solidFill>
+              <a:latin typeface="Calibri"/>
+              <a:ea typeface="Calibri"/>
+              <a:cs typeface="Calibri"/>
+            </a:endParaRPr>
           </a:p>
         </p:txBody>
       </p:sp>
@@ -13567,8 +11477,8 @@
         </p:nvSpPr>
         <p:spPr>
           <a:xfrm>
-            <a:off x="6457950" y="1562100"/>
-            <a:ext cx="5048250" cy="3981450"/>
+            <a:off x="6457950" y="1762125"/>
+            <a:ext cx="5048250" cy="2364331"/>
           </a:xfrm>
           <a:prstGeom prst="roundRect">
             <a:avLst>
@@ -13576,11 +11486,11 @@
             </a:avLst>
           </a:prstGeom>
           <a:solidFill>
-            <a:srgbClr val="202329"/>
+            <a:srgbClr val="292B30"/>
           </a:solidFill>
           <a:ln w="9525">
             <a:solidFill>
-              <a:srgbClr val="3A3F47"/>
+              <a:srgbClr val="444952"/>
             </a:solidFill>
             <a:prstDash val="solid"/>
           </a:ln>
@@ -13602,7 +11512,7 @@
         </p:nvSpPr>
         <p:spPr>
           <a:xfrm>
-            <a:off x="6457950" y="1562100"/>
+            <a:off x="6457950" y="1762125"/>
             <a:ext cx="5048250" cy="76200"/>
           </a:xfrm>
           <a:prstGeom prst="rect">
@@ -13635,7 +11545,7 @@
         </p:nvSpPr>
         <p:spPr>
           <a:xfrm>
-            <a:off x="6743700" y="1885950"/>
+            <a:off x="6696652" y="1908001"/>
             <a:ext cx="2095500" cy="266700"/>
           </a:xfrm>
           <a:prstGeom prst="rect">
@@ -13648,33 +11558,16 @@
           </a:ln>
         </p:spPr>
         <p:txBody>
-          <a:bodyPr wrap="square" lIns="0" tIns="0" rIns="0" bIns="0" anchor="t"/>
-          <a:lstStyle/>
-          <a:p>
-            <a:pPr algn="l">
-              <a:lnSpc>
-                <a:spcPct val="108000"/>
-              </a:lnSpc>
-              <a:buNone/>
-              <a:defRPr sz="1725" b="1">
-                <a:solidFill>
-                  <a:srgbClr val="F3F4F6"/>
-                </a:solidFill>
-                <a:latin typeface="Calibri"/>
-                <a:ea typeface="Calibri"/>
-                <a:cs typeface="Calibri"/>
-              </a:defRPr>
-            </a:pPr>
-            <a:r>
-              <a:rPr lang="es-ES_tradnl" sz="1725" b="1">
-                <a:solidFill>
-                  <a:srgbClr val="F3F4F6"/>
-                </a:solidFill>
-                <a:latin typeface="Calibri"/>
-                <a:ea typeface="Calibri"/>
-                <a:cs typeface="Calibri"/>
-              </a:rPr>
-              <a:t>Genericas</a:t>
+          <a:bodyPr/>
+          <a:lstStyle/>
+          <a:p>
+            <a:r>
+              <a:rPr lang="es-ES_tradnl" b="1" dirty="0">
+                <a:solidFill>
+                  <a:schemeClr val="bg1"/>
+                </a:solidFill>
+              </a:rPr>
+              <a:t>Genéricas</a:t>
             </a:r>
           </a:p>
         </p:txBody>
@@ -13695,7 +11588,7 @@
         </p:nvSpPr>
         <p:spPr>
           <a:xfrm>
-            <a:off x="6762750" y="2438400"/>
+            <a:off x="6744277" y="2431006"/>
             <a:ext cx="4095750" cy="1695450"/>
           </a:xfrm>
           <a:prstGeom prst="rect">
@@ -13726,7 +11619,7 @@
               </a:defRPr>
             </a:pPr>
             <a:r>
-              <a:rPr lang="es-ES_tradnl" sz="1275" b="0">
+              <a:rPr lang="es-ES_tradnl" sz="1275" b="0" dirty="0">
                 <a:solidFill>
                   <a:srgbClr val="B8BEC8"/>
                 </a:solidFill>
@@ -13753,7 +11646,7 @@
               </a:defRPr>
             </a:pPr>
             <a:r>
-              <a:rPr lang="es-ES_tradnl" sz="1275" b="0">
+              <a:rPr lang="es-ES_tradnl" sz="1275" b="0" dirty="0">
                 <a:solidFill>
                   <a:srgbClr val="B8BEC8"/>
                 </a:solidFill>
@@ -13761,8 +11654,27 @@
                 <a:ea typeface="Calibri"/>
                 <a:cs typeface="Calibri"/>
               </a:rPr>
-              <a:t>  /Genericas</a:t>
-            </a:r>
+              <a:t>  /</a:t>
+            </a:r>
+            <a:r>
+              <a:rPr lang="es-ES_tradnl" sz="1275" b="0" dirty="0" err="1">
+                <a:solidFill>
+                  <a:srgbClr val="B8BEC8"/>
+                </a:solidFill>
+                <a:latin typeface="Calibri"/>
+                <a:ea typeface="Calibri"/>
+                <a:cs typeface="Calibri"/>
+              </a:rPr>
+              <a:t>Genericas</a:t>
+            </a:r>
+            <a:endParaRPr lang="es-ES_tradnl" sz="1275" b="0" dirty="0">
+              <a:solidFill>
+                <a:srgbClr val="B8BEC8"/>
+              </a:solidFill>
+              <a:latin typeface="Calibri"/>
+              <a:ea typeface="Calibri"/>
+              <a:cs typeface="Calibri"/>
+            </a:endParaRPr>
           </a:p>
           <a:p>
             <a:pPr algn="l">
@@ -13780,7 +11692,7 @@
               </a:defRPr>
             </a:pPr>
             <a:r>
-              <a:rPr lang="es-ES_tradnl" sz="1275" b="0">
+              <a:rPr lang="es-ES_tradnl" sz="1275" b="0" dirty="0">
                 <a:solidFill>
                   <a:srgbClr val="B8BEC8"/>
                 </a:solidFill>
@@ -13788,7 +11700,7 @@
                 <a:ea typeface="Calibri"/>
                 <a:cs typeface="Calibri"/>
               </a:rPr>
-              <a:t>    /&lt;Excel sin extension&gt;</a:t>
+              <a:t>    /&lt; Nombre con base de Excel&gt;</a:t>
             </a:r>
           </a:p>
           <a:p>
@@ -13807,7 +11719,7 @@
               </a:defRPr>
             </a:pPr>
             <a:r>
-              <a:rPr lang="es-ES_tradnl" sz="1275" b="0">
+              <a:rPr lang="es-ES_tradnl" sz="1275" b="0" dirty="0">
                 <a:solidFill>
                   <a:srgbClr val="B8BEC8"/>
                 </a:solidFill>
@@ -13815,7 +11727,29 @@
                 <a:ea typeface="Calibri"/>
                 <a:cs typeface="Calibri"/>
               </a:rPr>
-              <a:t>      /&lt;StyleFamily&gt;</a:t>
+              <a:t>      /&lt;</a:t>
+            </a:r>
+            <a:r>
+              <a:rPr lang="es-ES_tradnl" sz="1275" b="0" dirty="0" err="1">
+                <a:solidFill>
+                  <a:srgbClr val="B8BEC8"/>
+                </a:solidFill>
+                <a:latin typeface="Calibri"/>
+                <a:ea typeface="Calibri"/>
+                <a:cs typeface="Calibri"/>
+              </a:rPr>
+              <a:t>StyleFamily</a:t>
+            </a:r>
+            <a:r>
+              <a:rPr lang="es-ES_tradnl" sz="1275" b="0" dirty="0">
+                <a:solidFill>
+                  <a:srgbClr val="B8BEC8"/>
+                </a:solidFill>
+                <a:latin typeface="Calibri"/>
+                <a:ea typeface="Calibri"/>
+                <a:cs typeface="Calibri"/>
+              </a:rPr>
+              <a:t>&gt;</a:t>
             </a:r>
           </a:p>
           <a:p>
@@ -13834,7 +11768,7 @@
               </a:defRPr>
             </a:pPr>
             <a:r>
-              <a:rPr lang="es-ES_tradnl" sz="1275" b="0">
+              <a:rPr lang="es-ES_tradnl" sz="1275" b="0" dirty="0">
                 <a:solidFill>
                   <a:srgbClr val="B8BEC8"/>
                 </a:solidFill>
@@ -13842,7 +11776,29 @@
                 <a:ea typeface="Calibri"/>
                 <a:cs typeface="Calibri"/>
               </a:rPr>
-              <a:t>        /&lt;Emb&gt;</a:t>
+              <a:t>        /&lt;</a:t>
+            </a:r>
+            <a:r>
+              <a:rPr lang="es-ES_tradnl" sz="1275" b="0" dirty="0" err="1">
+                <a:solidFill>
+                  <a:srgbClr val="B8BEC8"/>
+                </a:solidFill>
+                <a:latin typeface="Calibri"/>
+                <a:ea typeface="Calibri"/>
+                <a:cs typeface="Calibri"/>
+              </a:rPr>
+              <a:t>Emb</a:t>
+            </a:r>
+            <a:r>
+              <a:rPr lang="es-ES_tradnl" sz="1275" b="0" dirty="0">
+                <a:solidFill>
+                  <a:srgbClr val="B8BEC8"/>
+                </a:solidFill>
+                <a:latin typeface="Calibri"/>
+                <a:ea typeface="Calibri"/>
+                <a:cs typeface="Calibri"/>
+              </a:rPr>
+              <a:t>&gt;</a:t>
             </a:r>
           </a:p>
           <a:p>
@@ -13861,7 +11817,7 @@
               </a:defRPr>
             </a:pPr>
             <a:r>
-              <a:rPr lang="es-ES_tradnl" sz="1275" b="0">
+              <a:rPr lang="es-ES_tradnl" sz="1275" b="0" dirty="0">
                 <a:solidFill>
                   <a:srgbClr val="B8BEC8"/>
                 </a:solidFill>
@@ -13869,196 +11825,27 @@
                 <a:ea typeface="Calibri"/>
                 <a:cs typeface="Calibri"/>
               </a:rPr>
-              <a:t>          &lt;Roster&gt; - &lt;Equipo&gt; - &lt;Style&gt; - &lt;Piezas&gt;pz.pdf</a:t>
-            </a:r>
-          </a:p>
-        </p:txBody>
-      </p:sp>
-      <p:sp>
-        <p:nvSpPr>
-          <p:cNvPr id="13" name="Rectángulo redondeado 12">
-            <a:extLst>
-              <a:ext uri="{FF2B5EF4-FFF2-40B4-BE49-F238E27FC236}">
-                <a16:creationId xmlns:a16="http://schemas.microsoft.com/office/drawing/2014/main" id="{7F316371-6C5C-4622-ABA4-EF7E47D2E999}"/>
-              </a:ext>
-            </a:extLst>
-          </p:cNvPr>
-          <p:cNvSpPr>
-            <a:spLocks noGrp="1"/>
-          </p:cNvSpPr>
-          <p:nvPr/>
-        </p:nvSpPr>
-        <p:spPr>
-          <a:xfrm>
-            <a:off x="7429500" y="4610100"/>
-            <a:ext cx="3048000" cy="609600"/>
-          </a:xfrm>
-          <a:prstGeom prst="roundRect">
-            <a:avLst>
-              <a:gd name="adj" fmla="val 12500"/>
-            </a:avLst>
-          </a:prstGeom>
-          <a:solidFill>
-            <a:srgbClr val="2B2F35"/>
-          </a:solidFill>
-          <a:ln w="9525">
-            <a:solidFill>
-              <a:srgbClr val="3A3F47"/>
-            </a:solidFill>
-            <a:prstDash val="solid"/>
-          </a:ln>
-        </p:spPr>
-      </p:sp>
-      <p:sp>
-        <p:nvSpPr>
-          <p:cNvPr id="14" name="Rectángulo 13">
-            <a:extLst>
-              <a:ext uri="{FF2B5EF4-FFF2-40B4-BE49-F238E27FC236}">
-                <a16:creationId xmlns:a16="http://schemas.microsoft.com/office/drawing/2014/main" id="{FBF457A5-A0C2-4118-8DD2-1114D3FADC86}"/>
-              </a:ext>
-            </a:extLst>
-          </p:cNvPr>
-          <p:cNvSpPr>
-            <a:spLocks noGrp="1"/>
-          </p:cNvSpPr>
-          <p:nvPr/>
-        </p:nvSpPr>
-        <p:spPr>
-          <a:xfrm>
-            <a:off x="7429500" y="4610100"/>
-            <a:ext cx="47625" cy="609600"/>
-          </a:xfrm>
-          <a:prstGeom prst="rect">
-            <a:avLst/>
-          </a:prstGeom>
-          <a:solidFill>
-            <a:srgbClr val="20B26B"/>
-          </a:solidFill>
-          <a:ln w="0">
-            <a:solidFill>
-              <a:srgbClr val="20B26B"/>
-            </a:solidFill>
-            <a:prstDash val="solid"/>
-          </a:ln>
-        </p:spPr>
-      </p:sp>
-      <p:sp>
-        <p:nvSpPr>
-          <p:cNvPr id="15" name="Rectángulo 14">
-            <a:extLst>
-              <a:ext uri="{FF2B5EF4-FFF2-40B4-BE49-F238E27FC236}">
-                <a16:creationId xmlns:a16="http://schemas.microsoft.com/office/drawing/2014/main" id="{AB03EBCB-FD5D-4867-B102-E6EA3C2ED403}"/>
-              </a:ext>
-            </a:extLst>
-          </p:cNvPr>
-          <p:cNvSpPr>
-            <a:spLocks noGrp="1"/>
-          </p:cNvSpPr>
-          <p:nvPr/>
-        </p:nvSpPr>
-        <p:spPr>
-          <a:xfrm>
-            <a:off x="7600950" y="4762500"/>
-            <a:ext cx="2762250" cy="247650"/>
-          </a:xfrm>
-          <a:prstGeom prst="rect">
-            <a:avLst/>
-          </a:prstGeom>
-          <a:noFill/>
-          <a:ln w="0">
-            <a:noFill/>
-            <a:prstDash val="solid"/>
-          </a:ln>
-        </p:spPr>
-        <p:txBody>
-          <a:bodyPr wrap="square" lIns="0" tIns="0" rIns="0" bIns="0" anchor="t"/>
-          <a:lstStyle/>
-          <a:p>
-            <a:pPr algn="l">
-              <a:lnSpc>
-                <a:spcPct val="108000"/>
-              </a:lnSpc>
-              <a:buNone/>
-              <a:defRPr sz="1275" b="1">
-                <a:solidFill>
-                  <a:srgbClr val="F3F4F6"/>
-                </a:solidFill>
-                <a:latin typeface="Calibri"/>
-                <a:ea typeface="Calibri"/>
-                <a:cs typeface="Calibri"/>
-              </a:defRPr>
-            </a:pPr>
-            <a:r>
-              <a:rPr lang="es-ES_tradnl" sz="1275" b="1">
-                <a:solidFill>
-                  <a:srgbClr val="F3F4F6"/>
-                </a:solidFill>
-                <a:latin typeface="Calibri"/>
-                <a:ea typeface="Calibri"/>
-                <a:cs typeface="Calibri"/>
-              </a:rPr>
-              <a:t>Dato clave</a:t>
-            </a:r>
-          </a:p>
-        </p:txBody>
-      </p:sp>
-      <p:sp>
-        <p:nvSpPr>
-          <p:cNvPr id="16" name="Rectángulo 15">
-            <a:extLst>
-              <a:ext uri="{FF2B5EF4-FFF2-40B4-BE49-F238E27FC236}">
-                <a16:creationId xmlns:a16="http://schemas.microsoft.com/office/drawing/2014/main" id="{BDBC729F-3ECA-461E-9241-5036D1B743B4}"/>
-              </a:ext>
-            </a:extLst>
-          </p:cNvPr>
-          <p:cNvSpPr>
-            <a:spLocks noGrp="1"/>
-          </p:cNvSpPr>
-          <p:nvPr/>
-        </p:nvSpPr>
-        <p:spPr>
-          <a:xfrm>
-            <a:off x="7600950" y="5067300"/>
-            <a:ext cx="2724150" cy="57150"/>
-          </a:xfrm>
-          <a:prstGeom prst="rect">
-            <a:avLst/>
-          </a:prstGeom>
-          <a:noFill/>
-          <a:ln w="0">
-            <a:noFill/>
-            <a:prstDash val="solid"/>
-          </a:ln>
-        </p:spPr>
-        <p:txBody>
-          <a:bodyPr wrap="square" lIns="0" tIns="0" rIns="0" bIns="0" anchor="t"/>
-          <a:lstStyle/>
-          <a:p>
-            <a:pPr algn="l">
-              <a:lnSpc>
-                <a:spcPct val="114000"/>
-              </a:lnSpc>
-              <a:buNone/>
-              <a:defRPr sz="900" b="0">
+              <a:t>          &lt;Roster&gt; - &lt;Equipo&gt; - &lt;Style&gt; - &lt;Piezas&gt;</a:t>
+            </a:r>
+            <a:r>
+              <a:rPr lang="es-ES_tradnl" sz="1275" b="0" dirty="0" err="1">
                 <a:solidFill>
                   <a:srgbClr val="B8BEC8"/>
                 </a:solidFill>
                 <a:latin typeface="Calibri"/>
                 <a:ea typeface="Calibri"/>
                 <a:cs typeface="Calibri"/>
-              </a:defRPr>
-            </a:pPr>
-            <a:r>
-              <a:rPr lang="es-ES_tradnl" sz="900" b="0">
-                <a:solidFill>
-                  <a:srgbClr val="B8BEC8"/>
-                </a:solidFill>
-                <a:latin typeface="Calibri"/>
-                <a:ea typeface="Calibri"/>
-                <a:cs typeface="Calibri"/>
-              </a:rPr>
-              <a:t>runs.path e items.path guardan rutas completas.</a:t>
-            </a:r>
+              </a:rPr>
+              <a:t>pz.pdf</a:t>
+            </a:r>
+            <a:endParaRPr lang="es-ES_tradnl" sz="1275" b="0" dirty="0">
+              <a:solidFill>
+                <a:srgbClr val="B8BEC8"/>
+              </a:solidFill>
+              <a:latin typeface="Calibri"/>
+              <a:ea typeface="Calibri"/>
+              <a:cs typeface="Calibri"/>
+            </a:endParaRPr>
           </a:p>
         </p:txBody>
       </p:sp>
@@ -14182,6 +11969,51 @@
           </a:p>
         </p:txBody>
       </p:sp>
+      <p:pic>
+        <p:nvPicPr>
+          <p:cNvPr id="27" name="Imagen 26">
+            <a:extLst>
+              <a:ext uri="{FF2B5EF4-FFF2-40B4-BE49-F238E27FC236}">
+                <a16:creationId xmlns:a16="http://schemas.microsoft.com/office/drawing/2014/main" id="{D6908391-F792-3088-2F95-25BC4D816220}"/>
+              </a:ext>
+            </a:extLst>
+          </p:cNvPr>
+          <p:cNvPicPr>
+            <a:picLocks noChangeAspect="1"/>
+          </p:cNvPicPr>
+          <p:nvPr/>
+        </p:nvPicPr>
+        <p:blipFill>
+          <a:blip r:embed="rId3"/>
+          <a:stretch>
+            <a:fillRect/>
+          </a:stretch>
+        </p:blipFill>
+        <p:spPr>
+          <a:xfrm>
+            <a:off x="2081645" y="4243216"/>
+            <a:ext cx="7772400" cy="2184569"/>
+          </a:xfrm>
+          <a:prstGeom prst="roundRect">
+            <a:avLst>
+              <a:gd name="adj" fmla="val 8594"/>
+            </a:avLst>
+          </a:prstGeom>
+          <a:solidFill>
+            <a:srgbClr val="FFFFFF">
+              <a:shade val="85000"/>
+            </a:srgbClr>
+          </a:solidFill>
+          <a:ln>
+            <a:solidFill>
+              <a:srgbClr val="C00000"/>
+            </a:solidFill>
+          </a:ln>
+          <a:effectLst>
+            <a:reflection blurRad="12700" stA="38000" endPos="28000" dist="5000" dir="5400000" sy="-100000" algn="bl" rotWithShape="0"/>
+          </a:effectLst>
+        </p:spPr>
+      </p:pic>
     </p:spTree>
     <p:extLst>
       <p:ext uri="{BB962C8B-B14F-4D97-AF65-F5344CB8AC3E}">
@@ -14222,21 +12054,21 @@
       </p:grpSpPr>
       <p:sp>
         <p:nvSpPr>
-          <p:cNvPr id="20" name="Rectángulo 19">
-            <a:extLst>
-              <a:ext uri="{FF2B5EF4-FFF2-40B4-BE49-F238E27FC236}">
-                <a16:creationId xmlns:a16="http://schemas.microsoft.com/office/drawing/2014/main" id="{0C8651B6-1C6A-4987-9E92-FAEC16671541}"/>
-              </a:ext>
-            </a:extLst>
-          </p:cNvPr>
-          <p:cNvSpPr>
-            <a:spLocks noGrp="1"/>
-          </p:cNvSpPr>
-          <p:nvPr/>
-        </p:nvSpPr>
-        <p:spPr>
-          <a:xfrm>
-            <a:off x="590550" y="419100"/>
+          <p:cNvPr id="31" name="Rectángulo 30">
+            <a:extLst>
+              <a:ext uri="{FF2B5EF4-FFF2-40B4-BE49-F238E27FC236}">
+                <a16:creationId xmlns:a16="http://schemas.microsoft.com/office/drawing/2014/main" id="{54CE218E-CEC7-4F49-AA89-37E59244BCB5}"/>
+              </a:ext>
+            </a:extLst>
+          </p:cNvPr>
+          <p:cNvSpPr>
+            <a:spLocks noGrp="1"/>
+          </p:cNvSpPr>
+          <p:nvPr/>
+        </p:nvSpPr>
+        <p:spPr>
+          <a:xfrm>
+            <a:off x="533400" y="401385"/>
             <a:ext cx="4000500" cy="190500"/>
           </a:xfrm>
           <a:prstGeom prst="rect">
@@ -14249,33 +12081,16 @@
           </a:ln>
         </p:spPr>
         <p:txBody>
-          <a:bodyPr wrap="square" lIns="0" tIns="0" rIns="0" bIns="0" anchor="t"/>
-          <a:lstStyle/>
-          <a:p>
-            <a:pPr algn="l">
-              <a:lnSpc>
-                <a:spcPct val="108000"/>
-              </a:lnSpc>
-              <a:buNone/>
-              <a:defRPr sz="750" b="1">
-                <a:solidFill>
-                  <a:srgbClr val="7D8592"/>
-                </a:solidFill>
-                <a:latin typeface="Calibri"/>
-                <a:ea typeface="Calibri"/>
-                <a:cs typeface="Calibri"/>
-              </a:defRPr>
-            </a:pPr>
-            <a:r>
-              <a:rPr lang="es-ES_tradnl" sz="750" b="1">
-                <a:solidFill>
-                  <a:srgbClr val="7D8592"/>
-                </a:solidFill>
-                <a:latin typeface="Calibri"/>
-                <a:ea typeface="Calibri"/>
-                <a:cs typeface="Calibri"/>
-              </a:rPr>
-              <a:t>SQLITE Y LOGS</a:t>
+          <a:bodyPr anchor="t"/>
+          <a:lstStyle/>
+          <a:p>
+            <a:r>
+              <a:rPr lang="es-ES_tradnl" sz="975" b="1" dirty="0">
+                <a:solidFill>
+                  <a:srgbClr val="AEB4BF"/>
+                </a:solidFill>
+              </a:rPr>
+              <a:t>IMPRESION CONTROLADA</a:t>
             </a:r>
           </a:p>
         </p:txBody>
@@ -14285,57 +12100,40 @@
           <p:cNvPr id="2" name="Rectángulo 1">
             <a:extLst>
               <a:ext uri="{FF2B5EF4-FFF2-40B4-BE49-F238E27FC236}">
-                <a16:creationId xmlns:a16="http://schemas.microsoft.com/office/drawing/2014/main" id="{03CAC6FE-9BB6-4A4E-BFA4-0F6A03AB4380}"/>
-              </a:ext>
-            </a:extLst>
-          </p:cNvPr>
-          <p:cNvSpPr>
-            <a:spLocks noGrp="1"/>
-          </p:cNvSpPr>
-          <p:nvPr/>
-        </p:nvSpPr>
-        <p:spPr>
-          <a:xfrm>
-            <a:off x="590550" y="666750"/>
-            <a:ext cx="7239000" cy="723900"/>
-          </a:xfrm>
-          <a:prstGeom prst="rect">
-            <a:avLst/>
-          </a:prstGeom>
-          <a:noFill/>
-          <a:ln w="0">
-            <a:noFill/>
-            <a:prstDash val="solid"/>
-          </a:ln>
-        </p:spPr>
-        <p:txBody>
-          <a:bodyPr wrap="square" lIns="0" tIns="0" rIns="0" bIns="0" anchor="t"/>
-          <a:lstStyle/>
-          <a:p>
-            <a:pPr algn="l">
-              <a:lnSpc>
-                <a:spcPct val="103000"/>
-              </a:lnSpc>
-              <a:buNone/>
-              <a:defRPr sz="2325" b="1">
-                <a:solidFill>
-                  <a:srgbClr val="F3F4F6"/>
-                </a:solidFill>
-                <a:latin typeface="Calibri"/>
-                <a:ea typeface="Calibri"/>
-                <a:cs typeface="Calibri"/>
-              </a:defRPr>
-            </a:pPr>
-            <a:r>
-              <a:rPr lang="es-ES_tradnl" sz="2325" b="1">
-                <a:solidFill>
-                  <a:srgbClr val="F3F4F6"/>
-                </a:solidFill>
-                <a:latin typeface="Calibri"/>
-                <a:ea typeface="Calibri"/>
-                <a:cs typeface="Calibri"/>
-              </a:rPr>
-              <a:t>La base guarda el contexto que luego consulta el sistema.</a:t>
+                <a16:creationId xmlns:a16="http://schemas.microsoft.com/office/drawing/2014/main" id="{A86979ED-53B7-4F1E-9704-F8007BD7183A}"/>
+              </a:ext>
+            </a:extLst>
+          </p:cNvPr>
+          <p:cNvSpPr>
+            <a:spLocks noGrp="1"/>
+          </p:cNvSpPr>
+          <p:nvPr/>
+        </p:nvSpPr>
+        <p:spPr>
+          <a:xfrm>
+            <a:off x="533399" y="649035"/>
+            <a:ext cx="8941377" cy="723900"/>
+          </a:xfrm>
+          <a:prstGeom prst="rect">
+            <a:avLst/>
+          </a:prstGeom>
+          <a:noFill/>
+          <a:ln w="0">
+            <a:noFill/>
+            <a:prstDash val="solid"/>
+          </a:ln>
+        </p:spPr>
+        <p:txBody>
+          <a:bodyPr/>
+          <a:lstStyle/>
+          <a:p>
+            <a:r>
+              <a:rPr lang="es-ES_tradnl" sz="2700" b="1" dirty="0">
+                <a:solidFill>
+                  <a:schemeClr val="bg1"/>
+                </a:solidFill>
+              </a:rPr>
+              <a:t>Revisar cola e imprimir cola no hacen lo mismo.</a:t>
             </a:r>
           </a:p>
         </p:txBody>
@@ -14345,18 +12143,18 @@
           <p:cNvPr id="3" name="Rectángulo 2">
             <a:extLst>
               <a:ext uri="{FF2B5EF4-FFF2-40B4-BE49-F238E27FC236}">
-                <a16:creationId xmlns:a16="http://schemas.microsoft.com/office/drawing/2014/main" id="{6645E7F2-9114-458E-AE64-EAE325E9142E}"/>
-              </a:ext>
-            </a:extLst>
-          </p:cNvPr>
-          <p:cNvSpPr>
-            <a:spLocks noGrp="1"/>
-          </p:cNvSpPr>
-          <p:nvPr/>
-        </p:nvSpPr>
-        <p:spPr>
-          <a:xfrm>
-            <a:off x="609600" y="1390650"/>
+                <a16:creationId xmlns:a16="http://schemas.microsoft.com/office/drawing/2014/main" id="{44B291AD-82E4-45B0-A53D-7C5E1C127C44}"/>
+              </a:ext>
+            </a:extLst>
+          </p:cNvPr>
+          <p:cNvSpPr>
+            <a:spLocks noGrp="1"/>
+          </p:cNvSpPr>
+          <p:nvPr/>
+        </p:nvSpPr>
+        <p:spPr>
+          <a:xfrm>
+            <a:off x="552450" y="1142933"/>
             <a:ext cx="7334250" cy="457200"/>
           </a:xfrm>
           <a:prstGeom prst="rect">
@@ -14369,33 +12167,16 @@
           </a:ln>
         </p:spPr>
         <p:txBody>
-          <a:bodyPr wrap="square" lIns="0" tIns="0" rIns="0" bIns="0" anchor="t"/>
-          <a:lstStyle/>
-          <a:p>
-            <a:pPr algn="l">
-              <a:lnSpc>
-                <a:spcPct val="118000"/>
-              </a:lnSpc>
-              <a:buNone/>
-              <a:defRPr sz="1125" b="0">
-                <a:solidFill>
-                  <a:srgbClr val="B8BEC8"/>
-                </a:solidFill>
-                <a:latin typeface="Calibri"/>
-                <a:ea typeface="Calibri"/>
-                <a:cs typeface="Calibri"/>
-              </a:defRPr>
-            </a:pPr>
-            <a:r>
-              <a:rPr lang="es-ES_tradnl" sz="1125" b="0">
-                <a:solidFill>
-                  <a:srgbClr val="B8BEC8"/>
-                </a:solidFill>
-                <a:latin typeface="Calibri"/>
-                <a:ea typeface="Calibri"/>
-                <a:cs typeface="Calibri"/>
-              </a:rPr>
-              <a:t>MockupTool escribe tablas propias en la base central y conserva rutas exactas de Excel, corrida y PDF.</a:t>
+          <a:bodyPr anchor="t"/>
+          <a:lstStyle/>
+          <a:p>
+            <a:r>
+              <a:rPr lang="es-ES_tradnl" sz="1350" dirty="0">
+                <a:solidFill>
+                  <a:srgbClr val="AEB4BF"/>
+                </a:solidFill>
+              </a:rPr>
+              <a:t>La cola se recalcula con filtros y estado SQLite; solo se envía lo pendiente y registrable.</a:t>
             </a:r>
           </a:p>
         </p:txBody>
@@ -14405,7 +12186,7 @@
           <p:cNvPr id="4" name="Rectángulo 3">
             <a:extLst>
               <a:ext uri="{FF2B5EF4-FFF2-40B4-BE49-F238E27FC236}">
-                <a16:creationId xmlns:a16="http://schemas.microsoft.com/office/drawing/2014/main" id="{914C1D77-4407-4332-8197-758F3C60A105}"/>
+                <a16:creationId xmlns:a16="http://schemas.microsoft.com/office/drawing/2014/main" id="{FBF9ED57-140C-44D7-BF1E-004F8BDFEEC0}"/>
               </a:ext>
             </a:extLst>
           </p:cNvPr>
@@ -14435,672 +12216,34 @@
       </p:sp>
       <p:sp>
         <p:nvSpPr>
-          <p:cNvPr id="5" name="Rectángulo redondeado 4">
-            <a:extLst>
-              <a:ext uri="{FF2B5EF4-FFF2-40B4-BE49-F238E27FC236}">
-                <a16:creationId xmlns:a16="http://schemas.microsoft.com/office/drawing/2014/main" id="{9C014348-561F-4EE1-AB99-2F5D9F302FCB}"/>
-              </a:ext>
-            </a:extLst>
-          </p:cNvPr>
-          <p:cNvSpPr>
-            <a:spLocks noGrp="1"/>
-          </p:cNvSpPr>
-          <p:nvPr/>
-        </p:nvSpPr>
-        <p:spPr>
-          <a:xfrm>
-            <a:off x="762000" y="2190750"/>
-            <a:ext cx="2857500" cy="2381250"/>
-          </a:xfrm>
-          <a:prstGeom prst="roundRect">
-            <a:avLst>
-              <a:gd name="adj" fmla="val 3200"/>
-            </a:avLst>
-          </a:prstGeom>
-          <a:solidFill>
-            <a:srgbClr val="2B2F35"/>
-          </a:solidFill>
-          <a:ln w="9525">
-            <a:solidFill>
-              <a:srgbClr val="3A3F47"/>
-            </a:solidFill>
-            <a:prstDash val="solid"/>
-          </a:ln>
-        </p:spPr>
-      </p:sp>
-      <p:sp>
-        <p:nvSpPr>
-          <p:cNvPr id="6" name="Rectángulo 5">
-            <a:extLst>
-              <a:ext uri="{FF2B5EF4-FFF2-40B4-BE49-F238E27FC236}">
-                <a16:creationId xmlns:a16="http://schemas.microsoft.com/office/drawing/2014/main" id="{8D170CEA-1F56-4B94-BC7A-C32F102DF8CA}"/>
-              </a:ext>
-            </a:extLst>
-          </p:cNvPr>
-          <p:cNvSpPr>
-            <a:spLocks noGrp="1"/>
-          </p:cNvSpPr>
-          <p:nvPr/>
-        </p:nvSpPr>
-        <p:spPr>
-          <a:xfrm>
-            <a:off x="762000" y="2190750"/>
-            <a:ext cx="47625" cy="2381250"/>
-          </a:xfrm>
-          <a:prstGeom prst="rect">
-            <a:avLst/>
-          </a:prstGeom>
-          <a:solidFill>
-            <a:srgbClr val="BD1F36"/>
-          </a:solidFill>
-          <a:ln w="0">
-            <a:solidFill>
-              <a:srgbClr val="BD1F36"/>
-            </a:solidFill>
-            <a:prstDash val="solid"/>
-          </a:ln>
-        </p:spPr>
-      </p:sp>
-      <p:sp>
-        <p:nvSpPr>
           <p:cNvPr id="7" name="Rectángulo 6">
             <a:extLst>
               <a:ext uri="{FF2B5EF4-FFF2-40B4-BE49-F238E27FC236}">
-                <a16:creationId xmlns:a16="http://schemas.microsoft.com/office/drawing/2014/main" id="{AEC6F4C8-5531-48F7-AD1B-AF431C136F55}"/>
-              </a:ext>
-            </a:extLst>
-          </p:cNvPr>
-          <p:cNvSpPr>
-            <a:spLocks noGrp="1"/>
-          </p:cNvSpPr>
-          <p:nvPr/>
-        </p:nvSpPr>
-        <p:spPr>
-          <a:xfrm>
-            <a:off x="933450" y="2343150"/>
-            <a:ext cx="2571750" cy="247650"/>
-          </a:xfrm>
-          <a:prstGeom prst="rect">
-            <a:avLst/>
-          </a:prstGeom>
-          <a:noFill/>
-          <a:ln w="0">
-            <a:noFill/>
-            <a:prstDash val="solid"/>
-          </a:ln>
-        </p:spPr>
-        <p:txBody>
-          <a:bodyPr wrap="square" lIns="0" tIns="0" rIns="0" bIns="0" anchor="t"/>
-          <a:lstStyle/>
-          <a:p>
-            <a:pPr algn="l">
-              <a:lnSpc>
-                <a:spcPct val="108000"/>
-              </a:lnSpc>
-              <a:buNone/>
-              <a:defRPr sz="1500" b="1">
-                <a:solidFill>
-                  <a:srgbClr val="F3F4F6"/>
-                </a:solidFill>
-                <a:latin typeface="Calibri"/>
-                <a:ea typeface="Calibri"/>
-                <a:cs typeface="Calibri"/>
-              </a:defRPr>
-            </a:pPr>
-            <a:r>
-              <a:rPr lang="es-ES_tradnl" sz="1500" b="1">
-                <a:solidFill>
-                  <a:srgbClr val="F3F4F6"/>
-                </a:solidFill>
-                <a:latin typeface="Calibri"/>
-                <a:ea typeface="Calibri"/>
-                <a:cs typeface="Calibri"/>
-              </a:rPr>
-              <a:t>rmc_mockuptool_runs</a:t>
-            </a:r>
-          </a:p>
-        </p:txBody>
-      </p:sp>
-      <p:sp>
-        <p:nvSpPr>
-          <p:cNvPr id="8" name="Rectángulo 7">
-            <a:extLst>
-              <a:ext uri="{FF2B5EF4-FFF2-40B4-BE49-F238E27FC236}">
-                <a16:creationId xmlns:a16="http://schemas.microsoft.com/office/drawing/2014/main" id="{DA05EDC8-BC69-4926-8010-0BDFCC4EADB6}"/>
-              </a:ext>
-            </a:extLst>
-          </p:cNvPr>
-          <p:cNvSpPr>
-            <a:spLocks noGrp="1"/>
-          </p:cNvSpPr>
-          <p:nvPr/>
-        </p:nvSpPr>
-        <p:spPr>
-          <a:xfrm>
-            <a:off x="933450" y="2647950"/>
-            <a:ext cx="2533650" cy="1828800"/>
-          </a:xfrm>
-          <a:prstGeom prst="rect">
-            <a:avLst/>
-          </a:prstGeom>
-          <a:noFill/>
-          <a:ln w="0">
-            <a:noFill/>
-            <a:prstDash val="solid"/>
-          </a:ln>
-        </p:spPr>
-        <p:txBody>
-          <a:bodyPr wrap="square" lIns="0" tIns="0" rIns="0" bIns="0" anchor="t"/>
-          <a:lstStyle/>
-          <a:p>
-            <a:pPr algn="l">
-              <a:lnSpc>
-                <a:spcPct val="114000"/>
-              </a:lnSpc>
-              <a:buNone/>
-              <a:defRPr sz="975" b="0">
-                <a:solidFill>
-                  <a:srgbClr val="B8BEC8"/>
-                </a:solidFill>
-                <a:latin typeface="Calibri"/>
-                <a:ea typeface="Calibri"/>
-                <a:cs typeface="Calibri"/>
-              </a:defRPr>
-            </a:pPr>
-            <a:r>
-              <a:rPr lang="es-ES_tradnl" sz="975" b="0">
-                <a:solidFill>
-                  <a:srgbClr val="B8BEC8"/>
-                </a:solidFill>
-                <a:latin typeface="Calibri"/>
-                <a:ea typeface="Calibri"/>
-                <a:cs typeface="Calibri"/>
-              </a:rPr>
-              <a:t>Una fila por generacion real.</a:t>
-            </a:r>
-          </a:p>
-          <a:p>
-            <a:endParaRPr lang="es-ES_tradnl" sz="975" b="0">
-              <a:solidFill>
-                <a:srgbClr val="B8BEC8"/>
-              </a:solidFill>
-              <a:latin typeface="Calibri"/>
-              <a:ea typeface="Calibri"/>
-              <a:cs typeface="Calibri"/>
-            </a:endParaRPr>
-          </a:p>
-          <a:p>
-            <a:pPr algn="l">
-              <a:lnSpc>
-                <a:spcPct val="114000"/>
-              </a:lnSpc>
-              <a:buNone/>
-              <a:defRPr sz="975" b="0">
-                <a:solidFill>
-                  <a:srgbClr val="B8BEC8"/>
-                </a:solidFill>
-                <a:latin typeface="Calibri"/>
-                <a:ea typeface="Calibri"/>
-                <a:cs typeface="Calibri"/>
-              </a:defRPr>
-            </a:pPr>
-            <a:r>
-              <a:rPr lang="es-ES_tradnl" sz="975" b="0">
-                <a:solidFill>
-                  <a:srgbClr val="B8BEC8"/>
-                </a:solidFill>
-                <a:latin typeface="Calibri"/>
-                <a:ea typeface="Calibri"/>
-                <a:cs typeface="Calibri"/>
-              </a:rPr>
-              <a:t>Guarda fecha, hora, seccion, herramienta, excel_path, path, disenador, estilos, tallas y conteos.</a:t>
-            </a:r>
-          </a:p>
-        </p:txBody>
-      </p:sp>
-      <p:sp>
-        <p:nvSpPr>
-          <p:cNvPr id="9" name="Rectángulo redondeado 8">
-            <a:extLst>
-              <a:ext uri="{FF2B5EF4-FFF2-40B4-BE49-F238E27FC236}">
-                <a16:creationId xmlns:a16="http://schemas.microsoft.com/office/drawing/2014/main" id="{30439494-2DA6-4F0F-8C95-333CA017333B}"/>
-              </a:ext>
-            </a:extLst>
-          </p:cNvPr>
-          <p:cNvSpPr>
-            <a:spLocks noGrp="1"/>
-          </p:cNvSpPr>
-          <p:nvPr/>
-        </p:nvSpPr>
-        <p:spPr>
-          <a:xfrm>
-            <a:off x="4667250" y="1809750"/>
-            <a:ext cx="2857500" cy="3143250"/>
-          </a:xfrm>
-          <a:prstGeom prst="roundRect">
-            <a:avLst>
-              <a:gd name="adj" fmla="val 2667"/>
-            </a:avLst>
-          </a:prstGeom>
-          <a:solidFill>
-            <a:srgbClr val="2B2F35"/>
-          </a:solidFill>
-          <a:ln w="9525">
-            <a:solidFill>
-              <a:srgbClr val="3A3F47"/>
-            </a:solidFill>
-            <a:prstDash val="solid"/>
-          </a:ln>
-        </p:spPr>
-      </p:sp>
-      <p:sp>
-        <p:nvSpPr>
-          <p:cNvPr id="10" name="Rectángulo 9">
-            <a:extLst>
-              <a:ext uri="{FF2B5EF4-FFF2-40B4-BE49-F238E27FC236}">
-                <a16:creationId xmlns:a16="http://schemas.microsoft.com/office/drawing/2014/main" id="{0065C9DF-555E-4511-B0CF-6FE30E3989B2}"/>
-              </a:ext>
-            </a:extLst>
-          </p:cNvPr>
-          <p:cNvSpPr>
-            <a:spLocks noGrp="1"/>
-          </p:cNvSpPr>
-          <p:nvPr/>
-        </p:nvSpPr>
-        <p:spPr>
-          <a:xfrm>
-            <a:off x="4667250" y="1809750"/>
-            <a:ext cx="47625" cy="3143250"/>
-          </a:xfrm>
-          <a:prstGeom prst="rect">
-            <a:avLst/>
-          </a:prstGeom>
-          <a:solidFill>
-            <a:srgbClr val="2D7FF9"/>
-          </a:solidFill>
-          <a:ln w="0">
-            <a:solidFill>
-              <a:srgbClr val="2D7FF9"/>
-            </a:solidFill>
-            <a:prstDash val="solid"/>
-          </a:ln>
-        </p:spPr>
-      </p:sp>
-      <p:sp>
-        <p:nvSpPr>
-          <p:cNvPr id="11" name="Rectángulo 10">
-            <a:extLst>
-              <a:ext uri="{FF2B5EF4-FFF2-40B4-BE49-F238E27FC236}">
-                <a16:creationId xmlns:a16="http://schemas.microsoft.com/office/drawing/2014/main" id="{3ECE00F6-D074-4D6B-AC6F-7A3C0FAE4FF9}"/>
-              </a:ext>
-            </a:extLst>
-          </p:cNvPr>
-          <p:cNvSpPr>
-            <a:spLocks noGrp="1"/>
-          </p:cNvSpPr>
-          <p:nvPr/>
-        </p:nvSpPr>
-        <p:spPr>
-          <a:xfrm>
-            <a:off x="4838700" y="1962150"/>
-            <a:ext cx="2571750" cy="247650"/>
-          </a:xfrm>
-          <a:prstGeom prst="rect">
-            <a:avLst/>
-          </a:prstGeom>
-          <a:noFill/>
-          <a:ln w="0">
-            <a:noFill/>
-            <a:prstDash val="solid"/>
-          </a:ln>
-        </p:spPr>
-        <p:txBody>
-          <a:bodyPr wrap="square" lIns="0" tIns="0" rIns="0" bIns="0" anchor="t"/>
-          <a:lstStyle/>
-          <a:p>
-            <a:pPr algn="l">
-              <a:lnSpc>
-                <a:spcPct val="108000"/>
-              </a:lnSpc>
-              <a:buNone/>
-              <a:defRPr sz="1500" b="1">
-                <a:solidFill>
-                  <a:srgbClr val="F3F4F6"/>
-                </a:solidFill>
-                <a:latin typeface="Calibri"/>
-                <a:ea typeface="Calibri"/>
-                <a:cs typeface="Calibri"/>
-              </a:defRPr>
-            </a:pPr>
-            <a:r>
-              <a:rPr lang="es-ES_tradnl" sz="1500" b="1">
-                <a:solidFill>
-                  <a:srgbClr val="F3F4F6"/>
-                </a:solidFill>
-                <a:latin typeface="Calibri"/>
-                <a:ea typeface="Calibri"/>
-                <a:cs typeface="Calibri"/>
-              </a:rPr>
-              <a:t>rmc_mockuptool_items</a:t>
-            </a:r>
-          </a:p>
-        </p:txBody>
-      </p:sp>
-      <p:sp>
-        <p:nvSpPr>
-          <p:cNvPr id="12" name="Rectángulo 11">
-            <a:extLst>
-              <a:ext uri="{FF2B5EF4-FFF2-40B4-BE49-F238E27FC236}">
-                <a16:creationId xmlns:a16="http://schemas.microsoft.com/office/drawing/2014/main" id="{587D28A2-A5BB-4F64-8216-2D993790B463}"/>
-              </a:ext>
-            </a:extLst>
-          </p:cNvPr>
-          <p:cNvSpPr>
-            <a:spLocks noGrp="1"/>
-          </p:cNvSpPr>
-          <p:nvPr/>
-        </p:nvSpPr>
-        <p:spPr>
-          <a:xfrm>
-            <a:off x="4838700" y="2266950"/>
-            <a:ext cx="2533650" cy="2590800"/>
-          </a:xfrm>
-          <a:prstGeom prst="rect">
-            <a:avLst/>
-          </a:prstGeom>
-          <a:noFill/>
-          <a:ln w="0">
-            <a:noFill/>
-            <a:prstDash val="solid"/>
-          </a:ln>
-        </p:spPr>
-        <p:txBody>
-          <a:bodyPr wrap="square" lIns="0" tIns="0" rIns="0" bIns="0" anchor="t"/>
-          <a:lstStyle/>
-          <a:p>
-            <a:pPr algn="l">
-              <a:lnSpc>
-                <a:spcPct val="114000"/>
-              </a:lnSpc>
-              <a:buNone/>
-              <a:defRPr sz="975" b="0">
-                <a:solidFill>
-                  <a:srgbClr val="B8BEC8"/>
-                </a:solidFill>
-                <a:latin typeface="Calibri"/>
-                <a:ea typeface="Calibri"/>
-                <a:cs typeface="Calibri"/>
-              </a:defRPr>
-            </a:pPr>
-            <a:r>
-              <a:rPr lang="es-ES_tradnl" sz="975" b="0">
-                <a:solidFill>
-                  <a:srgbClr val="B8BEC8"/>
-                </a:solidFill>
-                <a:latin typeface="Calibri"/>
-                <a:ea typeface="Calibri"/>
-                <a:cs typeface="Calibri"/>
-              </a:rPr>
-              <a:t>Una fila vigente por PDF generado.</a:t>
-            </a:r>
-          </a:p>
-          <a:p>
-            <a:endParaRPr lang="es-ES_tradnl" sz="975" b="0">
-              <a:solidFill>
-                <a:srgbClr val="B8BEC8"/>
-              </a:solidFill>
-              <a:latin typeface="Calibri"/>
-              <a:ea typeface="Calibri"/>
-              <a:cs typeface="Calibri"/>
-            </a:endParaRPr>
-          </a:p>
-          <a:p>
-            <a:pPr algn="l">
-              <a:lnSpc>
-                <a:spcPct val="114000"/>
-              </a:lnSpc>
-              <a:buNone/>
-              <a:defRPr sz="975" b="0">
-                <a:solidFill>
-                  <a:srgbClr val="B8BEC8"/>
-                </a:solidFill>
-                <a:latin typeface="Calibri"/>
-                <a:ea typeface="Calibri"/>
-                <a:cs typeface="Calibri"/>
-              </a:defRPr>
-            </a:pPr>
-            <a:r>
-              <a:rPr lang="es-ES_tradnl" sz="975" b="0">
-                <a:solidFill>
-                  <a:srgbClr val="B8BEC8"/>
-                </a:solidFill>
-                <a:latin typeface="Calibri"/>
-                <a:ea typeface="Calibri"/>
-                <a:cs typeface="Calibri"/>
-              </a:rPr>
-              <a:t>Guarda WO, roster, style, equipo, variante, talla, piezas, archivo, path, clave, fecha_embarque e impreso.</a:t>
-            </a:r>
-          </a:p>
-        </p:txBody>
-      </p:sp>
-      <p:sp>
-        <p:nvSpPr>
-          <p:cNvPr id="13" name="Rectángulo redondeado 12">
-            <a:extLst>
-              <a:ext uri="{FF2B5EF4-FFF2-40B4-BE49-F238E27FC236}">
-                <a16:creationId xmlns:a16="http://schemas.microsoft.com/office/drawing/2014/main" id="{3130DA9A-226F-497F-8EE5-471A9822E2B0}"/>
-              </a:ext>
-            </a:extLst>
-          </p:cNvPr>
-          <p:cNvSpPr>
-            <a:spLocks noGrp="1"/>
-          </p:cNvSpPr>
-          <p:nvPr/>
-        </p:nvSpPr>
-        <p:spPr>
-          <a:xfrm>
-            <a:off x="8572500" y="2381250"/>
-            <a:ext cx="2857500" cy="1905000"/>
-          </a:xfrm>
-          <a:prstGeom prst="roundRect">
-            <a:avLst>
-              <a:gd name="adj" fmla="val 4000"/>
-            </a:avLst>
-          </a:prstGeom>
-          <a:solidFill>
-            <a:srgbClr val="2B2F35"/>
-          </a:solidFill>
-          <a:ln w="9525">
-            <a:solidFill>
-              <a:srgbClr val="3A3F47"/>
-            </a:solidFill>
-            <a:prstDash val="solid"/>
-          </a:ln>
-        </p:spPr>
-      </p:sp>
-      <p:sp>
-        <p:nvSpPr>
-          <p:cNvPr id="14" name="Rectángulo 13">
-            <a:extLst>
-              <a:ext uri="{FF2B5EF4-FFF2-40B4-BE49-F238E27FC236}">
-                <a16:creationId xmlns:a16="http://schemas.microsoft.com/office/drawing/2014/main" id="{39CCE6F8-85AE-46FB-8E77-78687C8F9E96}"/>
-              </a:ext>
-            </a:extLst>
-          </p:cNvPr>
-          <p:cNvSpPr>
-            <a:spLocks noGrp="1"/>
-          </p:cNvSpPr>
-          <p:nvPr/>
-        </p:nvSpPr>
-        <p:spPr>
-          <a:xfrm>
-            <a:off x="8572500" y="2381250"/>
-            <a:ext cx="47625" cy="1905000"/>
-          </a:xfrm>
-          <a:prstGeom prst="rect">
-            <a:avLst/>
-          </a:prstGeom>
-          <a:solidFill>
-            <a:srgbClr val="20B26B"/>
-          </a:solidFill>
-          <a:ln w="0">
-            <a:solidFill>
-              <a:srgbClr val="20B26B"/>
-            </a:solidFill>
-            <a:prstDash val="solid"/>
-          </a:ln>
-        </p:spPr>
-      </p:sp>
-      <p:sp>
-        <p:nvSpPr>
-          <p:cNvPr id="15" name="Rectángulo 14">
-            <a:extLst>
-              <a:ext uri="{FF2B5EF4-FFF2-40B4-BE49-F238E27FC236}">
-                <a16:creationId xmlns:a16="http://schemas.microsoft.com/office/drawing/2014/main" id="{BA7C2A09-4A6F-41C3-AD81-0262A8FC40B8}"/>
-              </a:ext>
-            </a:extLst>
-          </p:cNvPr>
-          <p:cNvSpPr>
-            <a:spLocks noGrp="1"/>
-          </p:cNvSpPr>
-          <p:nvPr/>
-        </p:nvSpPr>
-        <p:spPr>
-          <a:xfrm>
-            <a:off x="8743950" y="2533650"/>
-            <a:ext cx="2571750" cy="247650"/>
-          </a:xfrm>
-          <a:prstGeom prst="rect">
-            <a:avLst/>
-          </a:prstGeom>
-          <a:noFill/>
-          <a:ln w="0">
-            <a:noFill/>
-            <a:prstDash val="solid"/>
-          </a:ln>
-        </p:spPr>
-        <p:txBody>
-          <a:bodyPr wrap="square" lIns="0" tIns="0" rIns="0" bIns="0" anchor="t"/>
-          <a:lstStyle/>
-          <a:p>
-            <a:pPr algn="l">
-              <a:lnSpc>
-                <a:spcPct val="108000"/>
-              </a:lnSpc>
-              <a:buNone/>
-              <a:defRPr sz="1500" b="1">
-                <a:solidFill>
-                  <a:srgbClr val="F3F4F6"/>
-                </a:solidFill>
-                <a:latin typeface="Calibri"/>
-                <a:ea typeface="Calibri"/>
-                <a:cs typeface="Calibri"/>
-              </a:defRPr>
-            </a:pPr>
-            <a:r>
-              <a:rPr lang="es-ES_tradnl" sz="1500" b="1">
-                <a:solidFill>
-                  <a:srgbClr val="F3F4F6"/>
-                </a:solidFill>
-                <a:latin typeface="Calibri"/>
-                <a:ea typeface="Calibri"/>
-                <a:cs typeface="Calibri"/>
-              </a:rPr>
-              <a:t>Log JSON</a:t>
-            </a:r>
-          </a:p>
-        </p:txBody>
-      </p:sp>
-      <p:sp>
-        <p:nvSpPr>
-          <p:cNvPr id="16" name="Rectángulo 15">
-            <a:extLst>
-              <a:ext uri="{FF2B5EF4-FFF2-40B4-BE49-F238E27FC236}">
-                <a16:creationId xmlns:a16="http://schemas.microsoft.com/office/drawing/2014/main" id="{12B9DCAA-AFB1-46E0-AFC1-1FA766D5BEB1}"/>
-              </a:ext>
-            </a:extLst>
-          </p:cNvPr>
-          <p:cNvSpPr>
-            <a:spLocks noGrp="1"/>
-          </p:cNvSpPr>
-          <p:nvPr/>
-        </p:nvSpPr>
-        <p:spPr>
-          <a:xfrm>
-            <a:off x="8743950" y="2838450"/>
-            <a:ext cx="2533650" cy="1352550"/>
-          </a:xfrm>
-          <a:prstGeom prst="rect">
-            <a:avLst/>
-          </a:prstGeom>
-          <a:noFill/>
-          <a:ln w="0">
-            <a:noFill/>
-            <a:prstDash val="solid"/>
-          </a:ln>
-        </p:spPr>
-        <p:txBody>
-          <a:bodyPr wrap="square" lIns="0" tIns="0" rIns="0" bIns="0" anchor="t"/>
-          <a:lstStyle/>
-          <a:p>
-            <a:pPr algn="l">
-              <a:lnSpc>
-                <a:spcPct val="114000"/>
-              </a:lnSpc>
-              <a:buNone/>
-              <a:defRPr sz="975" b="0">
-                <a:solidFill>
-                  <a:srgbClr val="B8BEC8"/>
-                </a:solidFill>
-                <a:latin typeface="Calibri"/>
-                <a:ea typeface="Calibri"/>
-                <a:cs typeface="Calibri"/>
-              </a:defRPr>
-            </a:pPr>
-            <a:r>
-              <a:rPr lang="es-ES_tradnl" sz="975" b="0">
-                <a:solidFill>
-                  <a:srgbClr val="B8BEC8"/>
-                </a:solidFill>
-                <a:latin typeface="Calibri"/>
-                <a:ea typeface="Calibri"/>
-                <a:cs typeface="Calibri"/>
-              </a:rPr>
-              <a:t>Respaldo tecnico por corrida para diagnostico y reconciliacion si SQLite falla despues del PDF.</a:t>
-            </a:r>
-          </a:p>
-        </p:txBody>
-      </p:sp>
-      <p:sp>
-        <p:nvSpPr>
-          <p:cNvPr id="17" name="Rectángulo 16">
-            <a:extLst>
-              <a:ext uri="{FF2B5EF4-FFF2-40B4-BE49-F238E27FC236}">
-                <a16:creationId xmlns:a16="http://schemas.microsoft.com/office/drawing/2014/main" id="{D8164B12-230C-4A0A-BE0F-2E0E1187C395}"/>
-              </a:ext>
-            </a:extLst>
-          </p:cNvPr>
-          <p:cNvSpPr>
-            <a:spLocks noGrp="1"/>
-          </p:cNvSpPr>
-          <p:nvPr/>
-        </p:nvSpPr>
-        <p:spPr>
-          <a:xfrm>
-            <a:off x="4114800" y="5467350"/>
-            <a:ext cx="3905250" cy="266700"/>
-          </a:xfrm>
-          <a:prstGeom prst="rect">
-            <a:avLst/>
-          </a:prstGeom>
-          <a:noFill/>
-          <a:ln w="0">
-            <a:noFill/>
-            <a:prstDash val="solid"/>
-          </a:ln>
-        </p:spPr>
-        <p:txBody>
-          <a:bodyPr wrap="square" lIns="0" tIns="0" rIns="0" bIns="0" anchor="t"/>
+                <a16:creationId xmlns:a16="http://schemas.microsoft.com/office/drawing/2014/main" id="{C0F01829-186E-482E-9C0B-3091F6DD55B7}"/>
+              </a:ext>
+            </a:extLst>
+          </p:cNvPr>
+          <p:cNvSpPr>
+            <a:spLocks noGrp="1"/>
+          </p:cNvSpPr>
+          <p:nvPr/>
+        </p:nvSpPr>
+        <p:spPr>
+          <a:xfrm>
+            <a:off x="933450" y="3162300"/>
+            <a:ext cx="3638550" cy="342900"/>
+          </a:xfrm>
+          <a:prstGeom prst="rect">
+            <a:avLst/>
+          </a:prstGeom>
+          <a:noFill/>
+          <a:ln w="0">
+            <a:noFill/>
+            <a:prstDash val="solid"/>
+          </a:ln>
+        </p:spPr>
+        <p:txBody>
+          <a:bodyPr wrap="square" lIns="0" tIns="0" rIns="0" bIns="0" anchor="ctr"/>
           <a:lstStyle/>
           <a:p>
             <a:pPr algn="ctr">
@@ -15108,9 +12251,9 @@
                 <a:spcPct val="108000"/>
               </a:lnSpc>
               <a:buNone/>
-              <a:defRPr sz="1425" b="1">
-                <a:solidFill>
-                  <a:srgbClr val="F3C747"/>
+              <a:defRPr sz="1200" b="1">
+                <a:solidFill>
+                  <a:srgbClr val="F3F4F6"/>
                 </a:solidFill>
                 <a:latin typeface="Calibri"/>
                 <a:ea typeface="Calibri"/>
@@ -15118,25 +12261,951 @@
               </a:defRPr>
             </a:pPr>
             <a:r>
-              <a:rPr lang="es-ES_tradnl" sz="1425" b="1">
-                <a:solidFill>
-                  <a:srgbClr val="F3C747"/>
-                </a:solidFill>
-                <a:latin typeface="Calibri"/>
-                <a:ea typeface="Calibri"/>
-                <a:cs typeface="Calibri"/>
-              </a:rPr>
-              <a:t>clave UNIQUE evita duplicados mediante upsert</a:t>
-            </a:r>
-          </a:p>
-        </p:txBody>
+              <a:rPr lang="es-ES_tradnl" sz="1200" b="1">
+                <a:solidFill>
+                  <a:srgbClr val="F3F4F6"/>
+                </a:solidFill>
+                <a:latin typeface="Calibri"/>
+                <a:ea typeface="Calibri"/>
+                <a:cs typeface="Calibri"/>
+              </a:rPr>
+              <a:t>[INSERTAR CAPTURA: Revisar cola]</a:t>
+            </a:r>
+          </a:p>
+        </p:txBody>
+      </p:sp>
+      <p:sp>
+        <p:nvSpPr>
+          <p:cNvPr id="8" name="Rectángulo 7">
+            <a:extLst>
+              <a:ext uri="{FF2B5EF4-FFF2-40B4-BE49-F238E27FC236}">
+                <a16:creationId xmlns:a16="http://schemas.microsoft.com/office/drawing/2014/main" id="{D6C437AE-B0A7-4D55-BDC1-9E59A4A77DC0}"/>
+              </a:ext>
+            </a:extLst>
+          </p:cNvPr>
+          <p:cNvSpPr>
+            <a:spLocks noGrp="1"/>
+          </p:cNvSpPr>
+          <p:nvPr/>
+        </p:nvSpPr>
+        <p:spPr>
+          <a:xfrm>
+            <a:off x="1085850" y="3533775"/>
+            <a:ext cx="3333750" cy="381000"/>
+          </a:xfrm>
+          <a:prstGeom prst="rect">
+            <a:avLst/>
+          </a:prstGeom>
+          <a:noFill/>
+          <a:ln w="0">
+            <a:noFill/>
+            <a:prstDash val="solid"/>
+          </a:ln>
+        </p:spPr>
+        <p:txBody>
+          <a:bodyPr wrap="square" lIns="0" tIns="0" rIns="0" bIns="0" anchor="t"/>
+          <a:lstStyle/>
+          <a:p>
+            <a:pPr algn="ctr">
+              <a:lnSpc>
+                <a:spcPct val="110000"/>
+              </a:lnSpc>
+              <a:buNone/>
+              <a:defRPr sz="825" b="0">
+                <a:solidFill>
+                  <a:srgbClr val="B8BEC8"/>
+                </a:solidFill>
+                <a:latin typeface="Calibri"/>
+                <a:ea typeface="Calibri"/>
+                <a:cs typeface="Calibri"/>
+              </a:defRPr>
+            </a:pPr>
+            <a:r>
+              <a:rPr lang="es-ES_tradnl" sz="825" b="0">
+                <a:solidFill>
+                  <a:srgbClr val="B8BEC8"/>
+                </a:solidFill>
+                <a:latin typeface="Calibri"/>
+                <a:ea typeface="Calibri"/>
+                <a:cs typeface="Calibri"/>
+              </a:rPr>
+              <a:t>Lista de PDFs encontrados, faltantes, duplicados y estados.</a:t>
+            </a:r>
+          </a:p>
+        </p:txBody>
+      </p:sp>
+      <p:sp>
+        <p:nvSpPr>
+          <p:cNvPr id="9" name="Rectángulo redondeado 8">
+            <a:extLst>
+              <a:ext uri="{FF2B5EF4-FFF2-40B4-BE49-F238E27FC236}">
+                <a16:creationId xmlns:a16="http://schemas.microsoft.com/office/drawing/2014/main" id="{FFD6986B-1D10-4057-B53D-66ED74F2049D}"/>
+              </a:ext>
+            </a:extLst>
+          </p:cNvPr>
+          <p:cNvSpPr>
+            <a:spLocks noGrp="1"/>
+          </p:cNvSpPr>
+          <p:nvPr/>
+        </p:nvSpPr>
+        <p:spPr>
+          <a:xfrm>
+            <a:off x="5734050" y="2242185"/>
+            <a:ext cx="2190750" cy="963930"/>
+          </a:xfrm>
+          <a:prstGeom prst="roundRect">
+            <a:avLst>
+              <a:gd name="adj" fmla="val 8696"/>
+            </a:avLst>
+          </a:prstGeom>
+          <a:solidFill>
+            <a:srgbClr val="292B30"/>
+          </a:solidFill>
+          <a:ln w="9525">
+            <a:solidFill>
+              <a:srgbClr val="444952"/>
+            </a:solidFill>
+            <a:prstDash val="solid"/>
+          </a:ln>
+        </p:spPr>
+      </p:sp>
+      <p:sp>
+        <p:nvSpPr>
+          <p:cNvPr id="10" name="Rectángulo 9">
+            <a:extLst>
+              <a:ext uri="{FF2B5EF4-FFF2-40B4-BE49-F238E27FC236}">
+                <a16:creationId xmlns:a16="http://schemas.microsoft.com/office/drawing/2014/main" id="{4B5133F2-C1BC-4CC2-B3B0-8E2E52A9B9A9}"/>
+              </a:ext>
+            </a:extLst>
+          </p:cNvPr>
+          <p:cNvSpPr>
+            <a:spLocks noGrp="1"/>
+          </p:cNvSpPr>
+          <p:nvPr/>
+        </p:nvSpPr>
+        <p:spPr>
+          <a:xfrm>
+            <a:off x="5734050" y="2242185"/>
+            <a:ext cx="47625" cy="963930"/>
+          </a:xfrm>
+          <a:prstGeom prst="rect">
+            <a:avLst/>
+          </a:prstGeom>
+          <a:solidFill>
+            <a:srgbClr val="2D7FF9"/>
+          </a:solidFill>
+          <a:ln w="0">
+            <a:solidFill>
+              <a:srgbClr val="2D7FF9"/>
+            </a:solidFill>
+            <a:prstDash val="solid"/>
+          </a:ln>
+        </p:spPr>
+      </p:sp>
+      <p:sp>
+        <p:nvSpPr>
+          <p:cNvPr id="11" name="Rectángulo 10">
+            <a:extLst>
+              <a:ext uri="{FF2B5EF4-FFF2-40B4-BE49-F238E27FC236}">
+                <a16:creationId xmlns:a16="http://schemas.microsoft.com/office/drawing/2014/main" id="{3CE9F986-C04D-413F-9220-CB7C8924DF25}"/>
+              </a:ext>
+            </a:extLst>
+          </p:cNvPr>
+          <p:cNvSpPr>
+            <a:spLocks noGrp="1"/>
+          </p:cNvSpPr>
+          <p:nvPr/>
+        </p:nvSpPr>
+        <p:spPr>
+          <a:xfrm>
+            <a:off x="5905500" y="2327563"/>
+            <a:ext cx="1905000" cy="247650"/>
+          </a:xfrm>
+          <a:prstGeom prst="rect">
+            <a:avLst/>
+          </a:prstGeom>
+          <a:noFill/>
+          <a:ln w="0">
+            <a:noFill/>
+            <a:prstDash val="solid"/>
+          </a:ln>
+        </p:spPr>
+        <p:txBody>
+          <a:bodyPr/>
+          <a:lstStyle/>
+          <a:p>
+            <a:r>
+              <a:rPr lang="es-ES_tradnl" b="1" dirty="0">
+                <a:solidFill>
+                  <a:schemeClr val="bg1"/>
+                </a:solidFill>
+              </a:rPr>
+              <a:t>Revisar cola</a:t>
+            </a:r>
+          </a:p>
+        </p:txBody>
+      </p:sp>
+      <p:sp>
+        <p:nvSpPr>
+          <p:cNvPr id="12" name="Rectángulo 11">
+            <a:extLst>
+              <a:ext uri="{FF2B5EF4-FFF2-40B4-BE49-F238E27FC236}">
+                <a16:creationId xmlns:a16="http://schemas.microsoft.com/office/drawing/2014/main" id="{0135BA19-70CB-4047-A59B-B8CF589AE40D}"/>
+              </a:ext>
+            </a:extLst>
+          </p:cNvPr>
+          <p:cNvSpPr>
+            <a:spLocks noGrp="1"/>
+          </p:cNvSpPr>
+          <p:nvPr/>
+        </p:nvSpPr>
+        <p:spPr>
+          <a:xfrm>
+            <a:off x="5905500" y="2632363"/>
+            <a:ext cx="1866900" cy="323850"/>
+          </a:xfrm>
+          <a:prstGeom prst="rect">
+            <a:avLst/>
+          </a:prstGeom>
+          <a:noFill/>
+          <a:ln w="0">
+            <a:noFill/>
+            <a:prstDash val="solid"/>
+          </a:ln>
+        </p:spPr>
+        <p:txBody>
+          <a:bodyPr anchor="t"/>
+          <a:lstStyle/>
+          <a:p>
+            <a:r>
+              <a:rPr lang="es-ES_tradnl" sz="1200" dirty="0">
+                <a:solidFill>
+                  <a:srgbClr val="AEB4BF"/>
+                </a:solidFill>
+              </a:rPr>
+              <a:t>No imprime. Solo localiza y ordena </a:t>
+            </a:r>
+            <a:r>
+              <a:rPr lang="es-ES_tradnl" sz="1200" dirty="0" err="1">
+                <a:solidFill>
+                  <a:srgbClr val="AEB4BF"/>
+                </a:solidFill>
+              </a:rPr>
+              <a:t>PDFs</a:t>
+            </a:r>
+            <a:r>
+              <a:rPr lang="es-ES_tradnl" sz="1200" dirty="0">
+                <a:solidFill>
+                  <a:srgbClr val="AEB4BF"/>
+                </a:solidFill>
+              </a:rPr>
+              <a:t>.</a:t>
+            </a:r>
+          </a:p>
+        </p:txBody>
+      </p:sp>
+      <p:sp>
+        <p:nvSpPr>
+          <p:cNvPr id="13" name="Rectángulo redondeado 12">
+            <a:extLst>
+              <a:ext uri="{FF2B5EF4-FFF2-40B4-BE49-F238E27FC236}">
+                <a16:creationId xmlns:a16="http://schemas.microsoft.com/office/drawing/2014/main" id="{86FAA7FB-EE7B-4B52-A7B9-091000AA22FB}"/>
+              </a:ext>
+            </a:extLst>
+          </p:cNvPr>
+          <p:cNvSpPr>
+            <a:spLocks noGrp="1"/>
+          </p:cNvSpPr>
+          <p:nvPr/>
+        </p:nvSpPr>
+        <p:spPr>
+          <a:xfrm>
+            <a:off x="5734050" y="3404235"/>
+            <a:ext cx="2190750" cy="963930"/>
+          </a:xfrm>
+          <a:prstGeom prst="roundRect">
+            <a:avLst>
+              <a:gd name="adj" fmla="val 8696"/>
+            </a:avLst>
+          </a:prstGeom>
+          <a:solidFill>
+            <a:srgbClr val="292B30"/>
+          </a:solidFill>
+          <a:ln w="9525">
+            <a:solidFill>
+              <a:srgbClr val="444952"/>
+            </a:solidFill>
+            <a:prstDash val="solid"/>
+          </a:ln>
+        </p:spPr>
+      </p:sp>
+      <p:sp>
+        <p:nvSpPr>
+          <p:cNvPr id="14" name="Rectángulo 13">
+            <a:extLst>
+              <a:ext uri="{FF2B5EF4-FFF2-40B4-BE49-F238E27FC236}">
+                <a16:creationId xmlns:a16="http://schemas.microsoft.com/office/drawing/2014/main" id="{E8970AD6-514F-450F-9BFE-21482C81D306}"/>
+              </a:ext>
+            </a:extLst>
+          </p:cNvPr>
+          <p:cNvSpPr>
+            <a:spLocks noGrp="1"/>
+          </p:cNvSpPr>
+          <p:nvPr/>
+        </p:nvSpPr>
+        <p:spPr>
+          <a:xfrm>
+            <a:off x="5734050" y="3404235"/>
+            <a:ext cx="47625" cy="963930"/>
+          </a:xfrm>
+          <a:prstGeom prst="rect">
+            <a:avLst/>
+          </a:prstGeom>
+          <a:solidFill>
+            <a:srgbClr val="F3C747"/>
+          </a:solidFill>
+          <a:ln w="0">
+            <a:solidFill>
+              <a:srgbClr val="F3C747"/>
+            </a:solidFill>
+            <a:prstDash val="solid"/>
+          </a:ln>
+        </p:spPr>
+      </p:sp>
+      <p:sp>
+        <p:nvSpPr>
+          <p:cNvPr id="15" name="Rectángulo 14">
+            <a:extLst>
+              <a:ext uri="{FF2B5EF4-FFF2-40B4-BE49-F238E27FC236}">
+                <a16:creationId xmlns:a16="http://schemas.microsoft.com/office/drawing/2014/main" id="{8792B3F4-BB88-4C90-900A-65017B67C973}"/>
+              </a:ext>
+            </a:extLst>
+          </p:cNvPr>
+          <p:cNvSpPr>
+            <a:spLocks noGrp="1"/>
+          </p:cNvSpPr>
+          <p:nvPr/>
+        </p:nvSpPr>
+        <p:spPr>
+          <a:xfrm>
+            <a:off x="5905500" y="3489613"/>
+            <a:ext cx="1905000" cy="247650"/>
+          </a:xfrm>
+          <a:prstGeom prst="rect">
+            <a:avLst/>
+          </a:prstGeom>
+          <a:noFill/>
+          <a:ln w="0">
+            <a:noFill/>
+            <a:prstDash val="solid"/>
+          </a:ln>
+        </p:spPr>
+        <p:txBody>
+          <a:bodyPr/>
+          <a:lstStyle/>
+          <a:p>
+            <a:r>
+              <a:rPr lang="es-ES_tradnl" b="1" dirty="0">
+                <a:solidFill>
+                  <a:schemeClr val="bg1"/>
+                </a:solidFill>
+              </a:rPr>
+              <a:t>Confirmar</a:t>
+            </a:r>
+          </a:p>
+        </p:txBody>
+      </p:sp>
+      <p:sp>
+        <p:nvSpPr>
+          <p:cNvPr id="16" name="Rectángulo 15">
+            <a:extLst>
+              <a:ext uri="{FF2B5EF4-FFF2-40B4-BE49-F238E27FC236}">
+                <a16:creationId xmlns:a16="http://schemas.microsoft.com/office/drawing/2014/main" id="{EB08D61A-F9C1-4C29-9841-66A15A0077EC}"/>
+              </a:ext>
+            </a:extLst>
+          </p:cNvPr>
+          <p:cNvSpPr>
+            <a:spLocks noGrp="1"/>
+          </p:cNvSpPr>
+          <p:nvPr/>
+        </p:nvSpPr>
+        <p:spPr>
+          <a:xfrm>
+            <a:off x="5905500" y="3794413"/>
+            <a:ext cx="1866900" cy="323850"/>
+          </a:xfrm>
+          <a:prstGeom prst="rect">
+            <a:avLst/>
+          </a:prstGeom>
+          <a:noFill/>
+          <a:ln w="0">
+            <a:noFill/>
+            <a:prstDash val="solid"/>
+          </a:ln>
+        </p:spPr>
+        <p:txBody>
+          <a:bodyPr anchor="t"/>
+          <a:lstStyle/>
+          <a:p>
+            <a:r>
+              <a:rPr lang="es-ES_tradnl" sz="1200" dirty="0">
+                <a:solidFill>
+                  <a:srgbClr val="AEB4BF"/>
+                </a:solidFill>
+              </a:rPr>
+              <a:t>Muestra cantidad, </a:t>
+            </a:r>
+            <a:r>
+              <a:rPr lang="es-ES_tradnl" sz="1200" dirty="0" err="1">
+                <a:solidFill>
+                  <a:srgbClr val="AEB4BF"/>
+                </a:solidFill>
+              </a:rPr>
+              <a:t>warnings</a:t>
+            </a:r>
+            <a:r>
+              <a:rPr lang="es-ES_tradnl" sz="1200" dirty="0">
+                <a:solidFill>
+                  <a:srgbClr val="AEB4BF"/>
+                </a:solidFill>
+              </a:rPr>
+              <a:t> y pendientes.</a:t>
+            </a:r>
+          </a:p>
+        </p:txBody>
+      </p:sp>
+      <p:sp>
+        <p:nvSpPr>
+          <p:cNvPr id="17" name="Rectángulo redondeado 16">
+            <a:extLst>
+              <a:ext uri="{FF2B5EF4-FFF2-40B4-BE49-F238E27FC236}">
+                <a16:creationId xmlns:a16="http://schemas.microsoft.com/office/drawing/2014/main" id="{B0A6F8DA-28F2-4D10-8F39-C424C459A170}"/>
+              </a:ext>
+            </a:extLst>
+          </p:cNvPr>
+          <p:cNvSpPr>
+            <a:spLocks noGrp="1"/>
+          </p:cNvSpPr>
+          <p:nvPr/>
+        </p:nvSpPr>
+        <p:spPr>
+          <a:xfrm>
+            <a:off x="5734050" y="4566285"/>
+            <a:ext cx="2190750" cy="963930"/>
+          </a:xfrm>
+          <a:prstGeom prst="roundRect">
+            <a:avLst>
+              <a:gd name="adj" fmla="val 8696"/>
+            </a:avLst>
+          </a:prstGeom>
+          <a:solidFill>
+            <a:srgbClr val="292B30"/>
+          </a:solidFill>
+          <a:ln w="9525">
+            <a:solidFill>
+              <a:srgbClr val="444952"/>
+            </a:solidFill>
+            <a:prstDash val="solid"/>
+          </a:ln>
+        </p:spPr>
       </p:sp>
       <p:sp>
         <p:nvSpPr>
           <p:cNvPr id="18" name="Rectángulo 17">
             <a:extLst>
               <a:ext uri="{FF2B5EF4-FFF2-40B4-BE49-F238E27FC236}">
-                <a16:creationId xmlns:a16="http://schemas.microsoft.com/office/drawing/2014/main" id="{F66BD8B5-0C29-4DF4-AAD9-1DB137095C96}"/>
+                <a16:creationId xmlns:a16="http://schemas.microsoft.com/office/drawing/2014/main" id="{81F08885-0EAE-4573-97F2-8C06ED02CB48}"/>
+              </a:ext>
+            </a:extLst>
+          </p:cNvPr>
+          <p:cNvSpPr>
+            <a:spLocks noGrp="1"/>
+          </p:cNvSpPr>
+          <p:nvPr/>
+        </p:nvSpPr>
+        <p:spPr>
+          <a:xfrm>
+            <a:off x="5734050" y="4566285"/>
+            <a:ext cx="47625" cy="963930"/>
+          </a:xfrm>
+          <a:prstGeom prst="rect">
+            <a:avLst/>
+          </a:prstGeom>
+          <a:solidFill>
+            <a:srgbClr val="BD1F36"/>
+          </a:solidFill>
+          <a:ln w="0">
+            <a:solidFill>
+              <a:srgbClr val="BD1F36"/>
+            </a:solidFill>
+            <a:prstDash val="solid"/>
+          </a:ln>
+        </p:spPr>
+      </p:sp>
+      <p:sp>
+        <p:nvSpPr>
+          <p:cNvPr id="19" name="Rectángulo 18">
+            <a:extLst>
+              <a:ext uri="{FF2B5EF4-FFF2-40B4-BE49-F238E27FC236}">
+                <a16:creationId xmlns:a16="http://schemas.microsoft.com/office/drawing/2014/main" id="{B7E65CFA-6A84-4E09-AEBF-F95CA4938283}"/>
+              </a:ext>
+            </a:extLst>
+          </p:cNvPr>
+          <p:cNvSpPr>
+            <a:spLocks noGrp="1"/>
+          </p:cNvSpPr>
+          <p:nvPr/>
+        </p:nvSpPr>
+        <p:spPr>
+          <a:xfrm>
+            <a:off x="5905500" y="4651663"/>
+            <a:ext cx="1905000" cy="247650"/>
+          </a:xfrm>
+          <a:prstGeom prst="rect">
+            <a:avLst/>
+          </a:prstGeom>
+          <a:noFill/>
+          <a:ln w="0">
+            <a:noFill/>
+            <a:prstDash val="solid"/>
+          </a:ln>
+        </p:spPr>
+        <p:txBody>
+          <a:bodyPr/>
+          <a:lstStyle/>
+          <a:p>
+            <a:r>
+              <a:rPr lang="es-ES_tradnl" b="1" dirty="0">
+                <a:solidFill>
+                  <a:schemeClr val="bg1"/>
+                </a:solidFill>
+              </a:rPr>
+              <a:t>Imprimir cola</a:t>
+            </a:r>
+          </a:p>
+        </p:txBody>
+      </p:sp>
+      <p:sp>
+        <p:nvSpPr>
+          <p:cNvPr id="20" name="Rectángulo 19">
+            <a:extLst>
+              <a:ext uri="{FF2B5EF4-FFF2-40B4-BE49-F238E27FC236}">
+                <a16:creationId xmlns:a16="http://schemas.microsoft.com/office/drawing/2014/main" id="{225EB2ED-8F69-4B4B-B367-439CBC2AC0BD}"/>
+              </a:ext>
+            </a:extLst>
+          </p:cNvPr>
+          <p:cNvSpPr>
+            <a:spLocks noGrp="1"/>
+          </p:cNvSpPr>
+          <p:nvPr/>
+        </p:nvSpPr>
+        <p:spPr>
+          <a:xfrm>
+            <a:off x="5905500" y="4956463"/>
+            <a:ext cx="1866900" cy="323850"/>
+          </a:xfrm>
+          <a:prstGeom prst="rect">
+            <a:avLst/>
+          </a:prstGeom>
+          <a:noFill/>
+          <a:ln w="0">
+            <a:noFill/>
+            <a:prstDash val="solid"/>
+          </a:ln>
+        </p:spPr>
+        <p:txBody>
+          <a:bodyPr anchor="t"/>
+          <a:lstStyle/>
+          <a:p>
+            <a:r>
+              <a:rPr lang="es-ES_tradnl" sz="1200" dirty="0">
+                <a:solidFill>
+                  <a:srgbClr val="AEB4BF"/>
+                </a:solidFill>
+              </a:rPr>
+              <a:t>Ejecuta </a:t>
+            </a:r>
+            <a:r>
+              <a:rPr lang="es-ES_tradnl" sz="1200" dirty="0" err="1">
+                <a:solidFill>
+                  <a:srgbClr val="AEB4BF"/>
+                </a:solidFill>
+              </a:rPr>
+              <a:t>lp</a:t>
+            </a:r>
+            <a:r>
+              <a:rPr lang="es-ES_tradnl" sz="1200" dirty="0">
+                <a:solidFill>
+                  <a:srgbClr val="AEB4BF"/>
+                </a:solidFill>
+              </a:rPr>
+              <a:t> con </a:t>
+            </a:r>
+            <a:r>
+              <a:rPr lang="es-ES_tradnl" sz="1200" dirty="0" err="1">
+                <a:solidFill>
+                  <a:srgbClr val="AEB4BF"/>
+                </a:solidFill>
+              </a:rPr>
+              <a:t>fit</a:t>
+            </a:r>
+            <a:r>
+              <a:rPr lang="es-ES_tradnl" sz="1200" dirty="0">
+                <a:solidFill>
+                  <a:srgbClr val="AEB4BF"/>
+                </a:solidFill>
+              </a:rPr>
+              <a:t>-</a:t>
+            </a:r>
+            <a:r>
+              <a:rPr lang="es-ES_tradnl" sz="1200" dirty="0" err="1">
+                <a:solidFill>
+                  <a:srgbClr val="AEB4BF"/>
+                </a:solidFill>
+              </a:rPr>
+              <a:t>to</a:t>
+            </a:r>
+            <a:r>
+              <a:rPr lang="es-ES_tradnl" sz="1200" dirty="0">
+                <a:solidFill>
+                  <a:srgbClr val="AEB4BF"/>
+                </a:solidFill>
+              </a:rPr>
+              <a:t>-page y </a:t>
+            </a:r>
+            <a:r>
+              <a:rPr lang="es-ES_tradnl" sz="1200" dirty="0" err="1">
+                <a:solidFill>
+                  <a:srgbClr val="AEB4BF"/>
+                </a:solidFill>
+              </a:rPr>
+              <a:t>landscape</a:t>
+            </a:r>
+            <a:r>
+              <a:rPr lang="es-ES_tradnl" sz="1200" dirty="0">
+                <a:solidFill>
+                  <a:srgbClr val="AEB4BF"/>
+                </a:solidFill>
+              </a:rPr>
+              <a:t>.</a:t>
+            </a:r>
+          </a:p>
+        </p:txBody>
+      </p:sp>
+      <p:sp>
+        <p:nvSpPr>
+          <p:cNvPr id="21" name="Rectángulo redondeado 20">
+            <a:extLst>
+              <a:ext uri="{FF2B5EF4-FFF2-40B4-BE49-F238E27FC236}">
+                <a16:creationId xmlns:a16="http://schemas.microsoft.com/office/drawing/2014/main" id="{B7C5C076-562B-4455-A16F-ED9F6AFBF37F}"/>
+              </a:ext>
+            </a:extLst>
+          </p:cNvPr>
+          <p:cNvSpPr>
+            <a:spLocks noGrp="1"/>
+          </p:cNvSpPr>
+          <p:nvPr/>
+        </p:nvSpPr>
+        <p:spPr>
+          <a:xfrm>
+            <a:off x="8660248" y="2517832"/>
+            <a:ext cx="2381250" cy="1173480"/>
+          </a:xfrm>
+          <a:prstGeom prst="roundRect">
+            <a:avLst>
+              <a:gd name="adj" fmla="val 7143"/>
+            </a:avLst>
+          </a:prstGeom>
+          <a:solidFill>
+            <a:srgbClr val="292B30"/>
+          </a:solidFill>
+          <a:ln w="9525">
+            <a:solidFill>
+              <a:srgbClr val="444952"/>
+            </a:solidFill>
+            <a:prstDash val="solid"/>
+          </a:ln>
+        </p:spPr>
+      </p:sp>
+      <p:sp>
+        <p:nvSpPr>
+          <p:cNvPr id="22" name="Rectángulo 21">
+            <a:extLst>
+              <a:ext uri="{FF2B5EF4-FFF2-40B4-BE49-F238E27FC236}">
+                <a16:creationId xmlns:a16="http://schemas.microsoft.com/office/drawing/2014/main" id="{65A5E3D0-0E98-4118-8A00-15FAF4614EC2}"/>
+              </a:ext>
+            </a:extLst>
+          </p:cNvPr>
+          <p:cNvSpPr>
+            <a:spLocks noGrp="1"/>
+          </p:cNvSpPr>
+          <p:nvPr/>
+        </p:nvSpPr>
+        <p:spPr>
+          <a:xfrm>
+            <a:off x="8660248" y="2517832"/>
+            <a:ext cx="47625" cy="1173480"/>
+          </a:xfrm>
+          <a:prstGeom prst="rect">
+            <a:avLst/>
+          </a:prstGeom>
+          <a:solidFill>
+            <a:srgbClr val="20B26B"/>
+          </a:solidFill>
+          <a:ln w="0">
+            <a:solidFill>
+              <a:srgbClr val="20B26B"/>
+            </a:solidFill>
+            <a:prstDash val="solid"/>
+          </a:ln>
+        </p:spPr>
+      </p:sp>
+      <p:sp>
+        <p:nvSpPr>
+          <p:cNvPr id="23" name="Rectángulo 22">
+            <a:extLst>
+              <a:ext uri="{FF2B5EF4-FFF2-40B4-BE49-F238E27FC236}">
+                <a16:creationId xmlns:a16="http://schemas.microsoft.com/office/drawing/2014/main" id="{98C9F4F5-5AA4-4553-8C5D-7878969F8947}"/>
+              </a:ext>
+            </a:extLst>
+          </p:cNvPr>
+          <p:cNvSpPr>
+            <a:spLocks noGrp="1"/>
+          </p:cNvSpPr>
+          <p:nvPr/>
+        </p:nvSpPr>
+        <p:spPr>
+          <a:xfrm>
+            <a:off x="8831698" y="2621976"/>
+            <a:ext cx="2095500" cy="247650"/>
+          </a:xfrm>
+          <a:prstGeom prst="rect">
+            <a:avLst/>
+          </a:prstGeom>
+          <a:noFill/>
+          <a:ln w="0">
+            <a:noFill/>
+            <a:prstDash val="solid"/>
+          </a:ln>
+        </p:spPr>
+        <p:txBody>
+          <a:bodyPr/>
+          <a:lstStyle/>
+          <a:p>
+            <a:r>
+              <a:rPr lang="es-ES_tradnl" b="1" dirty="0">
+                <a:solidFill>
+                  <a:schemeClr val="bg1"/>
+                </a:solidFill>
+              </a:rPr>
+              <a:t>Marca impreso=1</a:t>
+            </a:r>
+          </a:p>
+        </p:txBody>
+      </p:sp>
+      <p:sp>
+        <p:nvSpPr>
+          <p:cNvPr id="24" name="Rectángulo 23">
+            <a:extLst>
+              <a:ext uri="{FF2B5EF4-FFF2-40B4-BE49-F238E27FC236}">
+                <a16:creationId xmlns:a16="http://schemas.microsoft.com/office/drawing/2014/main" id="{F7A74C90-6350-43A5-AD5A-F8158A6C59FD}"/>
+              </a:ext>
+            </a:extLst>
+          </p:cNvPr>
+          <p:cNvSpPr>
+            <a:spLocks noGrp="1"/>
+          </p:cNvSpPr>
+          <p:nvPr/>
+        </p:nvSpPr>
+        <p:spPr>
+          <a:xfrm>
+            <a:off x="8831698" y="2926776"/>
+            <a:ext cx="2057400" cy="514350"/>
+          </a:xfrm>
+          <a:prstGeom prst="rect">
+            <a:avLst/>
+          </a:prstGeom>
+          <a:noFill/>
+          <a:ln w="0">
+            <a:noFill/>
+            <a:prstDash val="solid"/>
+          </a:ln>
+        </p:spPr>
+        <p:txBody>
+          <a:bodyPr anchor="t"/>
+          <a:lstStyle/>
+          <a:p>
+            <a:r>
+              <a:rPr lang="es-ES_tradnl" sz="1200" dirty="0">
+                <a:solidFill>
+                  <a:srgbClr val="AEB4BF"/>
+                </a:solidFill>
+              </a:rPr>
+              <a:t>Solo cuando macOS acepta el trabajo y manda a la EPSON</a:t>
+            </a:r>
+          </a:p>
+        </p:txBody>
+      </p:sp>
+      <p:sp>
+        <p:nvSpPr>
+          <p:cNvPr id="25" name="Rectángulo redondeado 24">
+            <a:extLst>
+              <a:ext uri="{FF2B5EF4-FFF2-40B4-BE49-F238E27FC236}">
+                <a16:creationId xmlns:a16="http://schemas.microsoft.com/office/drawing/2014/main" id="{05592C34-C207-45AE-83CD-5D4856E0E7FC}"/>
+              </a:ext>
+            </a:extLst>
+          </p:cNvPr>
+          <p:cNvSpPr>
+            <a:spLocks noGrp="1"/>
+          </p:cNvSpPr>
+          <p:nvPr/>
+        </p:nvSpPr>
+        <p:spPr>
+          <a:xfrm>
+            <a:off x="8660248" y="4041832"/>
+            <a:ext cx="2381250" cy="1173480"/>
+          </a:xfrm>
+          <a:prstGeom prst="roundRect">
+            <a:avLst>
+              <a:gd name="adj" fmla="val 7143"/>
+            </a:avLst>
+          </a:prstGeom>
+          <a:solidFill>
+            <a:srgbClr val="292B30"/>
+          </a:solidFill>
+          <a:ln w="9525">
+            <a:solidFill>
+              <a:srgbClr val="444952"/>
+            </a:solidFill>
+            <a:prstDash val="solid"/>
+          </a:ln>
+        </p:spPr>
+      </p:sp>
+      <p:sp>
+        <p:nvSpPr>
+          <p:cNvPr id="26" name="Rectángulo 25">
+            <a:extLst>
+              <a:ext uri="{FF2B5EF4-FFF2-40B4-BE49-F238E27FC236}">
+                <a16:creationId xmlns:a16="http://schemas.microsoft.com/office/drawing/2014/main" id="{F852ED95-C8DC-4C66-A75B-1EF313C7FF03}"/>
+              </a:ext>
+            </a:extLst>
+          </p:cNvPr>
+          <p:cNvSpPr>
+            <a:spLocks noGrp="1"/>
+          </p:cNvSpPr>
+          <p:nvPr/>
+        </p:nvSpPr>
+        <p:spPr>
+          <a:xfrm>
+            <a:off x="8660248" y="4041832"/>
+            <a:ext cx="47625" cy="1173480"/>
+          </a:xfrm>
+          <a:prstGeom prst="rect">
+            <a:avLst/>
+          </a:prstGeom>
+          <a:solidFill>
+            <a:srgbClr val="F28C28"/>
+          </a:solidFill>
+          <a:ln w="0">
+            <a:solidFill>
+              <a:srgbClr val="F28C28"/>
+            </a:solidFill>
+            <a:prstDash val="solid"/>
+          </a:ln>
+        </p:spPr>
+      </p:sp>
+      <p:sp>
+        <p:nvSpPr>
+          <p:cNvPr id="27" name="Rectángulo 26">
+            <a:extLst>
+              <a:ext uri="{FF2B5EF4-FFF2-40B4-BE49-F238E27FC236}">
+                <a16:creationId xmlns:a16="http://schemas.microsoft.com/office/drawing/2014/main" id="{A2B71D66-0270-443F-853B-F22DBB1FAB53}"/>
+              </a:ext>
+            </a:extLst>
+          </p:cNvPr>
+          <p:cNvSpPr>
+            <a:spLocks noGrp="1"/>
+          </p:cNvSpPr>
+          <p:nvPr/>
+        </p:nvSpPr>
+        <p:spPr>
+          <a:xfrm>
+            <a:off x="8831698" y="4145976"/>
+            <a:ext cx="2095500" cy="247650"/>
+          </a:xfrm>
+          <a:prstGeom prst="rect">
+            <a:avLst/>
+          </a:prstGeom>
+          <a:noFill/>
+          <a:ln w="0">
+            <a:noFill/>
+            <a:prstDash val="solid"/>
+          </a:ln>
+        </p:spPr>
+        <p:txBody>
+          <a:bodyPr/>
+          <a:lstStyle/>
+          <a:p>
+            <a:r>
+              <a:rPr lang="es-ES_tradnl" b="1" dirty="0">
+                <a:solidFill>
+                  <a:schemeClr val="bg1"/>
+                </a:solidFill>
+              </a:rPr>
+              <a:t>Orden operativo</a:t>
+            </a:r>
+          </a:p>
+        </p:txBody>
+      </p:sp>
+      <p:sp>
+        <p:nvSpPr>
+          <p:cNvPr id="28" name="Rectángulo 27">
+            <a:extLst>
+              <a:ext uri="{FF2B5EF4-FFF2-40B4-BE49-F238E27FC236}">
+                <a16:creationId xmlns:a16="http://schemas.microsoft.com/office/drawing/2014/main" id="{8F5E9F00-199E-4B91-A361-DAC5783BA7C0}"/>
+              </a:ext>
+            </a:extLst>
+          </p:cNvPr>
+          <p:cNvSpPr>
+            <a:spLocks noGrp="1"/>
+          </p:cNvSpPr>
+          <p:nvPr/>
+        </p:nvSpPr>
+        <p:spPr>
+          <a:xfrm>
+            <a:off x="8831698" y="4450776"/>
+            <a:ext cx="2057400" cy="514350"/>
+          </a:xfrm>
+          <a:prstGeom prst="rect">
+            <a:avLst/>
+          </a:prstGeom>
+          <a:noFill/>
+          <a:ln w="0">
+            <a:noFill/>
+            <a:prstDash val="solid"/>
+          </a:ln>
+        </p:spPr>
+        <p:txBody>
+          <a:bodyPr anchor="t"/>
+          <a:lstStyle/>
+          <a:p>
+            <a:r>
+              <a:rPr lang="es-ES_tradnl" sz="1200" dirty="0">
+                <a:solidFill>
+                  <a:srgbClr val="AEB4BF"/>
+                </a:solidFill>
+              </a:rPr>
+              <a:t>Envía en orden inverso al Excel para conservar la pila física.</a:t>
+            </a:r>
+          </a:p>
+        </p:txBody>
+      </p:sp>
+      <p:sp>
+        <p:nvSpPr>
+          <p:cNvPr id="29" name="Rectángulo 28">
+            <a:extLst>
+              <a:ext uri="{FF2B5EF4-FFF2-40B4-BE49-F238E27FC236}">
+                <a16:creationId xmlns:a16="http://schemas.microsoft.com/office/drawing/2014/main" id="{3E69F1A1-9EF4-411B-9EF4-8E8E6308795E}"/>
               </a:ext>
             </a:extLst>
           </p:cNvPr>
@@ -15193,10 +13262,10 @@
       </p:sp>
       <p:sp>
         <p:nvSpPr>
-          <p:cNvPr id="19" name="Rectángulo 18">
-            <a:extLst>
-              <a:ext uri="{FF2B5EF4-FFF2-40B4-BE49-F238E27FC236}">
-                <a16:creationId xmlns:a16="http://schemas.microsoft.com/office/drawing/2014/main" id="{166C7F3A-D95D-4160-92B8-A53A0B83E6B2}"/>
+          <p:cNvPr id="30" name="Rectángulo 29">
+            <a:extLst>
+              <a:ext uri="{FF2B5EF4-FFF2-40B4-BE49-F238E27FC236}">
+                <a16:creationId xmlns:a16="http://schemas.microsoft.com/office/drawing/2014/main" id="{F2FCAF91-3DB9-4755-98FD-56EE80C53EFE}"/>
               </a:ext>
             </a:extLst>
           </p:cNvPr>
@@ -15246,15 +13315,65 @@
                 <a:ea typeface="Calibri"/>
                 <a:cs typeface="Calibri"/>
               </a:rPr>
-              <a:t>08</a:t>
-            </a:r>
-          </a:p>
-        </p:txBody>
-      </p:sp>
+              <a:t>09</a:t>
+            </a:r>
+          </a:p>
+        </p:txBody>
+      </p:sp>
+      <p:pic>
+        <p:nvPicPr>
+          <p:cNvPr id="33" name="Imagen 32">
+            <a:extLst>
+              <a:ext uri="{FF2B5EF4-FFF2-40B4-BE49-F238E27FC236}">
+                <a16:creationId xmlns:a16="http://schemas.microsoft.com/office/drawing/2014/main" id="{A86AC3EF-B482-17FB-DDA3-6D2DC82EACFF}"/>
+              </a:ext>
+            </a:extLst>
+          </p:cNvPr>
+          <p:cNvPicPr>
+            <a:picLocks noChangeAspect="1"/>
+          </p:cNvPicPr>
+          <p:nvPr/>
+        </p:nvPicPr>
+        <p:blipFill rotWithShape="1">
+          <a:blip r:embed="rId3">
+            <a:extLst>
+              <a:ext uri="{28A0092B-C50C-407E-A947-70E740481C1C}">
+                <a14:useLocalDpi xmlns:a14="http://schemas.microsoft.com/office/drawing/2010/main" val="0"/>
+              </a:ext>
+            </a:extLst>
+          </a:blip>
+          <a:srcRect l="23648" r="24882"/>
+          <a:stretch/>
+        </p:blipFill>
+        <p:spPr>
+          <a:xfrm>
+            <a:off x="946148" y="1900696"/>
+            <a:ext cx="4000500" cy="3833354"/>
+          </a:xfrm>
+          <a:prstGeom prst="roundRect">
+            <a:avLst>
+              <a:gd name="adj" fmla="val 8594"/>
+            </a:avLst>
+          </a:prstGeom>
+          <a:solidFill>
+            <a:srgbClr val="FFFFFF">
+              <a:shade val="85000"/>
+            </a:srgbClr>
+          </a:solidFill>
+          <a:ln>
+            <a:solidFill>
+              <a:srgbClr val="C00000"/>
+            </a:solidFill>
+          </a:ln>
+          <a:effectLst>
+            <a:reflection blurRad="12700" stA="38000" endPos="28000" dist="5000" dir="5400000" sy="-100000" algn="bl" rotWithShape="0"/>
+          </a:effectLst>
+        </p:spPr>
+      </p:pic>
     </p:spTree>
     <p:extLst>
       <p:ext uri="{BB962C8B-B14F-4D97-AF65-F5344CB8AC3E}">
-        <p14:creationId xmlns:p14="http://schemas.microsoft.com/office/powerpoint/2010/main" val="1891460172"/>
+        <p14:creationId xmlns:p14="http://schemas.microsoft.com/office/powerpoint/2010/main" val="1548908400"/>
       </p:ext>
     </p:extLst>
   </p:cSld>
@@ -15291,10 +13410,10 @@
       </p:grpSpPr>
       <p:sp>
         <p:nvSpPr>
-          <p:cNvPr id="31" name="Rectángulo 30">
-            <a:extLst>
-              <a:ext uri="{FF2B5EF4-FFF2-40B4-BE49-F238E27FC236}">
-                <a16:creationId xmlns:a16="http://schemas.microsoft.com/office/drawing/2014/main" id="{54CE218E-CEC7-4F49-AA89-37E59244BCB5}"/>
+          <p:cNvPr id="26" name="Rectángulo 25">
+            <a:extLst>
+              <a:ext uri="{FF2B5EF4-FFF2-40B4-BE49-F238E27FC236}">
+                <a16:creationId xmlns:a16="http://schemas.microsoft.com/office/drawing/2014/main" id="{9910E5AC-AF93-4C24-8451-B172063BAC00}"/>
               </a:ext>
             </a:extLst>
           </p:cNvPr>
@@ -15344,7 +13463,7 @@
                 <a:ea typeface="Calibri"/>
                 <a:cs typeface="Calibri"/>
               </a:rPr>
-              <a:t>IMPRESION CONTROLADA</a:t>
+              <a:t>INTEGRACION RMC</a:t>
             </a:r>
           </a:p>
         </p:txBody>
@@ -15354,7 +13473,7 @@
           <p:cNvPr id="2" name="Rectángulo 1">
             <a:extLst>
               <a:ext uri="{FF2B5EF4-FFF2-40B4-BE49-F238E27FC236}">
-                <a16:creationId xmlns:a16="http://schemas.microsoft.com/office/drawing/2014/main" id="{A86979ED-53B7-4F1E-9704-F8007BD7183A}"/>
+                <a16:creationId xmlns:a16="http://schemas.microsoft.com/office/drawing/2014/main" id="{AE1AB351-167A-46EB-B4DB-40C129186456}"/>
               </a:ext>
             </a:extLst>
           </p:cNvPr>
@@ -15404,7 +13523,7 @@
                 <a:ea typeface="Calibri"/>
                 <a:cs typeface="Calibri"/>
               </a:rPr>
-              <a:t>Revisar cola y imprimir cola no hacen lo mismo.</a:t>
+              <a:t>Se integra por datos, no mezclando reglas entre herramientas.</a:t>
             </a:r>
           </a:p>
         </p:txBody>
@@ -15414,7 +13533,7 @@
           <p:cNvPr id="3" name="Rectángulo 2">
             <a:extLst>
               <a:ext uri="{FF2B5EF4-FFF2-40B4-BE49-F238E27FC236}">
-                <a16:creationId xmlns:a16="http://schemas.microsoft.com/office/drawing/2014/main" id="{44B291AD-82E4-45B0-A53D-7C5E1C127C44}"/>
+                <a16:creationId xmlns:a16="http://schemas.microsoft.com/office/drawing/2014/main" id="{1BEAF51B-2B5F-47CB-A2E4-C1EF845C6533}"/>
               </a:ext>
             </a:extLst>
           </p:cNvPr>
@@ -15464,7 +13583,7 @@
                 <a:ea typeface="Calibri"/>
                 <a:cs typeface="Calibri"/>
               </a:rPr>
-              <a:t>La cola se recalcula con filtros y estado SQLite; solo se envia lo pendiente y registrable.</a:t>
+              <a:t>Control Center puede consultar rutas, claves, fechas e impresion sin que MockupTool toque tablas de RMCOp-Nike.</a:t>
             </a:r>
           </a:p>
         </p:txBody>
@@ -15474,7 +13593,7 @@
           <p:cNvPr id="4" name="Rectángulo 3">
             <a:extLst>
               <a:ext uri="{FF2B5EF4-FFF2-40B4-BE49-F238E27FC236}">
-                <a16:creationId xmlns:a16="http://schemas.microsoft.com/office/drawing/2014/main" id="{FBF9ED57-140C-44D7-BF1E-004F8BDFEEC0}"/>
+                <a16:creationId xmlns:a16="http://schemas.microsoft.com/office/drawing/2014/main" id="{AC33DAE6-DABA-49C8-8D56-928FA3B4EAF3}"/>
               </a:ext>
             </a:extLst>
           </p:cNvPr>
@@ -15507,23 +13626,178 @@
           <p:cNvPr id="5" name="Rectángulo redondeado 4">
             <a:extLst>
               <a:ext uri="{FF2B5EF4-FFF2-40B4-BE49-F238E27FC236}">
-                <a16:creationId xmlns:a16="http://schemas.microsoft.com/office/drawing/2014/main" id="{CB09650A-C35D-4952-A569-3453E8D91044}"/>
-              </a:ext>
-            </a:extLst>
-          </p:cNvPr>
-          <p:cNvSpPr>
-            <a:spLocks noGrp="1"/>
-          </p:cNvSpPr>
-          <p:nvPr/>
-        </p:nvSpPr>
-        <p:spPr>
-          <a:xfrm>
-            <a:off x="704850" y="2019300"/>
-            <a:ext cx="4095750" cy="2857500"/>
+                <a16:creationId xmlns:a16="http://schemas.microsoft.com/office/drawing/2014/main" id="{2B5EC554-034C-434A-80C1-E91FB5CDC3C9}"/>
+              </a:ext>
+            </a:extLst>
+          </p:cNvPr>
+          <p:cNvSpPr>
+            <a:spLocks noGrp="1"/>
+          </p:cNvSpPr>
+          <p:nvPr/>
+        </p:nvSpPr>
+        <p:spPr>
+          <a:xfrm>
+            <a:off x="876300" y="2457450"/>
+            <a:ext cx="2381250" cy="1123950"/>
           </a:xfrm>
           <a:prstGeom prst="roundRect">
             <a:avLst>
-              <a:gd name="adj" fmla="val 2667"/>
+              <a:gd name="adj" fmla="val 6780"/>
+            </a:avLst>
+          </a:prstGeom>
+          <a:solidFill>
+            <a:srgbClr val="2B2F35"/>
+          </a:solidFill>
+          <a:ln w="9525">
+            <a:solidFill>
+              <a:srgbClr val="3A3F47"/>
+            </a:solidFill>
+            <a:prstDash val="solid"/>
+          </a:ln>
+        </p:spPr>
+      </p:sp>
+      <p:sp>
+        <p:nvSpPr>
+          <p:cNvPr id="6" name="Rectángulo 5">
+            <a:extLst>
+              <a:ext uri="{FF2B5EF4-FFF2-40B4-BE49-F238E27FC236}">
+                <a16:creationId xmlns:a16="http://schemas.microsoft.com/office/drawing/2014/main" id="{F8B51E9C-18C5-4CB2-8B82-23D77B6FB0BB}"/>
+              </a:ext>
+            </a:extLst>
+          </p:cNvPr>
+          <p:cNvSpPr>
+            <a:spLocks noGrp="1"/>
+          </p:cNvSpPr>
+          <p:nvPr/>
+        </p:nvSpPr>
+        <p:spPr>
+          <a:xfrm>
+            <a:off x="1143000" y="2724150"/>
+            <a:ext cx="1809750" cy="266700"/>
+          </a:xfrm>
+          <a:prstGeom prst="rect">
+            <a:avLst/>
+          </a:prstGeom>
+          <a:noFill/>
+          <a:ln w="0">
+            <a:noFill/>
+            <a:prstDash val="solid"/>
+          </a:ln>
+        </p:spPr>
+        <p:txBody>
+          <a:bodyPr wrap="square" lIns="0" tIns="0" rIns="0" bIns="0" anchor="t"/>
+          <a:lstStyle/>
+          <a:p>
+            <a:pPr algn="ctr">
+              <a:lnSpc>
+                <a:spcPct val="108000"/>
+              </a:lnSpc>
+              <a:buNone/>
+              <a:defRPr sz="1650" b="1">
+                <a:solidFill>
+                  <a:srgbClr val="F3F4F6"/>
+                </a:solidFill>
+                <a:latin typeface="Calibri"/>
+                <a:ea typeface="Calibri"/>
+                <a:cs typeface="Calibri"/>
+              </a:defRPr>
+            </a:pPr>
+            <a:r>
+              <a:rPr lang="es-ES_tradnl" sz="1650" b="1">
+                <a:solidFill>
+                  <a:srgbClr val="F3F4F6"/>
+                </a:solidFill>
+                <a:latin typeface="Calibri"/>
+                <a:ea typeface="Calibri"/>
+                <a:cs typeface="Calibri"/>
+              </a:rPr>
+              <a:t>RMC MockupTool</a:t>
+            </a:r>
+          </a:p>
+        </p:txBody>
+      </p:sp>
+      <p:sp>
+        <p:nvSpPr>
+          <p:cNvPr id="7" name="Rectángulo 6">
+            <a:extLst>
+              <a:ext uri="{FF2B5EF4-FFF2-40B4-BE49-F238E27FC236}">
+                <a16:creationId xmlns:a16="http://schemas.microsoft.com/office/drawing/2014/main" id="{CB61BD9F-5F49-4D6B-8417-51A772E2EAAB}"/>
+              </a:ext>
+            </a:extLst>
+          </p:cNvPr>
+          <p:cNvSpPr>
+            <a:spLocks noGrp="1"/>
+          </p:cNvSpPr>
+          <p:nvPr/>
+        </p:nvSpPr>
+        <p:spPr>
+          <a:xfrm>
+            <a:off x="1162050" y="3143250"/>
+            <a:ext cx="1771650" cy="209550"/>
+          </a:xfrm>
+          <a:prstGeom prst="rect">
+            <a:avLst/>
+          </a:prstGeom>
+          <a:noFill/>
+          <a:ln w="0">
+            <a:noFill/>
+            <a:prstDash val="solid"/>
+          </a:ln>
+        </p:spPr>
+        <p:txBody>
+          <a:bodyPr wrap="square" lIns="0" tIns="0" rIns="0" bIns="0" anchor="t"/>
+          <a:lstStyle/>
+          <a:p>
+            <a:pPr algn="ctr">
+              <a:lnSpc>
+                <a:spcPct val="108000"/>
+              </a:lnSpc>
+              <a:buNone/>
+              <a:defRPr sz="975" b="0">
+                <a:solidFill>
+                  <a:srgbClr val="B8BEC8"/>
+                </a:solidFill>
+                <a:latin typeface="Calibri"/>
+                <a:ea typeface="Calibri"/>
+                <a:cs typeface="Calibri"/>
+              </a:defRPr>
+            </a:pPr>
+            <a:r>
+              <a:rPr lang="es-ES_tradnl" sz="975" b="0">
+                <a:solidFill>
+                  <a:srgbClr val="B8BEC8"/>
+                </a:solidFill>
+                <a:latin typeface="Calibri"/>
+                <a:ea typeface="Calibri"/>
+                <a:cs typeface="Calibri"/>
+              </a:rPr>
+              <a:t>Genera PDFs anotados</a:t>
+            </a:r>
+          </a:p>
+        </p:txBody>
+      </p:sp>
+      <p:sp>
+        <p:nvSpPr>
+          <p:cNvPr id="8" name="Rectángulo redondeado 7">
+            <a:extLst>
+              <a:ext uri="{FF2B5EF4-FFF2-40B4-BE49-F238E27FC236}">
+                <a16:creationId xmlns:a16="http://schemas.microsoft.com/office/drawing/2014/main" id="{433D4C2C-2BC5-4490-A1D4-7ED27A649686}"/>
+              </a:ext>
+            </a:extLst>
+          </p:cNvPr>
+          <p:cNvSpPr>
+            <a:spLocks noGrp="1"/>
+          </p:cNvSpPr>
+          <p:nvPr/>
+        </p:nvSpPr>
+        <p:spPr>
+          <a:xfrm>
+            <a:off x="4857750" y="1962150"/>
+            <a:ext cx="2381250" cy="2133600"/>
+          </a:xfrm>
+          <a:prstGeom prst="roundRect">
+            <a:avLst>
+              <a:gd name="adj" fmla="val 3571"/>
             </a:avLst>
           </a:prstGeom>
           <a:solidFill>
@@ -15539,67 +13813,34 @@
       </p:sp>
       <p:sp>
         <p:nvSpPr>
-          <p:cNvPr id="6" name="Rectángulo 5">
-            <a:extLst>
-              <a:ext uri="{FF2B5EF4-FFF2-40B4-BE49-F238E27FC236}">
-                <a16:creationId xmlns:a16="http://schemas.microsoft.com/office/drawing/2014/main" id="{C304DE1D-E6E9-42A6-9E97-3C5B8DA0DECA}"/>
-              </a:ext>
-            </a:extLst>
-          </p:cNvPr>
-          <p:cNvSpPr>
-            <a:spLocks noGrp="1"/>
-          </p:cNvSpPr>
-          <p:nvPr/>
-        </p:nvSpPr>
-        <p:spPr>
-          <a:xfrm>
-            <a:off x="704850" y="2019300"/>
-            <a:ext cx="57150" cy="2857500"/>
-          </a:xfrm>
-          <a:prstGeom prst="rect">
-            <a:avLst/>
-          </a:prstGeom>
-          <a:solidFill>
-            <a:srgbClr val="BD1F36"/>
-          </a:solidFill>
-          <a:ln w="0">
-            <a:solidFill>
-              <a:srgbClr val="BD1F36"/>
-            </a:solidFill>
-            <a:prstDash val="solid"/>
-          </a:ln>
-        </p:spPr>
-      </p:sp>
-      <p:sp>
-        <p:nvSpPr>
-          <p:cNvPr id="7" name="Rectángulo 6">
-            <a:extLst>
-              <a:ext uri="{FF2B5EF4-FFF2-40B4-BE49-F238E27FC236}">
-                <a16:creationId xmlns:a16="http://schemas.microsoft.com/office/drawing/2014/main" id="{C0F01829-186E-482E-9C0B-3091F6DD55B7}"/>
-              </a:ext>
-            </a:extLst>
-          </p:cNvPr>
-          <p:cNvSpPr>
-            <a:spLocks noGrp="1"/>
-          </p:cNvSpPr>
-          <p:nvPr/>
-        </p:nvSpPr>
-        <p:spPr>
-          <a:xfrm>
-            <a:off x="933450" y="3162300"/>
-            <a:ext cx="3638550" cy="342900"/>
-          </a:xfrm>
-          <a:prstGeom prst="rect">
-            <a:avLst/>
-          </a:prstGeom>
-          <a:noFill/>
-          <a:ln w="0">
-            <a:noFill/>
-            <a:prstDash val="solid"/>
-          </a:ln>
-        </p:spPr>
-        <p:txBody>
-          <a:bodyPr wrap="square" lIns="0" tIns="0" rIns="0" bIns="0" anchor="ctr"/>
+          <p:cNvPr id="9" name="Rectángulo 8">
+            <a:extLst>
+              <a:ext uri="{FF2B5EF4-FFF2-40B4-BE49-F238E27FC236}">
+                <a16:creationId xmlns:a16="http://schemas.microsoft.com/office/drawing/2014/main" id="{3C4F14E1-36D6-437A-9105-E1C0345A2175}"/>
+              </a:ext>
+            </a:extLst>
+          </p:cNvPr>
+          <p:cNvSpPr>
+            <a:spLocks noGrp="1"/>
+          </p:cNvSpPr>
+          <p:nvPr/>
+        </p:nvSpPr>
+        <p:spPr>
+          <a:xfrm>
+            <a:off x="5124450" y="2266950"/>
+            <a:ext cx="1809750" cy="266700"/>
+          </a:xfrm>
+          <a:prstGeom prst="rect">
+            <a:avLst/>
+          </a:prstGeom>
+          <a:noFill/>
+          <a:ln w="0">
+            <a:noFill/>
+            <a:prstDash val="solid"/>
+          </a:ln>
+        </p:spPr>
+        <p:txBody>
+          <a:bodyPr wrap="square" lIns="0" tIns="0" rIns="0" bIns="0" anchor="t"/>
           <a:lstStyle/>
           <a:p>
             <a:pPr algn="ctr">
@@ -15607,9 +13848,9 @@
                 <a:spcPct val="108000"/>
               </a:lnSpc>
               <a:buNone/>
-              <a:defRPr sz="1200" b="1">
-                <a:solidFill>
-                  <a:srgbClr val="F3F4F6"/>
+              <a:defRPr sz="1800" b="1">
+                <a:solidFill>
+                  <a:srgbClr val="F3C747"/>
                 </a:solidFill>
                 <a:latin typeface="Calibri"/>
                 <a:ea typeface="Calibri"/>
@@ -15617,37 +13858,37 @@
               </a:defRPr>
             </a:pPr>
             <a:r>
-              <a:rPr lang="es-ES_tradnl" sz="1200" b="1">
-                <a:solidFill>
-                  <a:srgbClr val="F3F4F6"/>
-                </a:solidFill>
-                <a:latin typeface="Calibri"/>
-                <a:ea typeface="Calibri"/>
-                <a:cs typeface="Calibri"/>
-              </a:rPr>
-              <a:t>[INSERTAR CAPTURA: Revisar cola]</a:t>
-            </a:r>
-          </a:p>
-        </p:txBody>
-      </p:sp>
-      <p:sp>
-        <p:nvSpPr>
-          <p:cNvPr id="8" name="Rectángulo 7">
-            <a:extLst>
-              <a:ext uri="{FF2B5EF4-FFF2-40B4-BE49-F238E27FC236}">
-                <a16:creationId xmlns:a16="http://schemas.microsoft.com/office/drawing/2014/main" id="{D6C437AE-B0A7-4D55-BDC1-9E59A4A77DC0}"/>
-              </a:ext>
-            </a:extLst>
-          </p:cNvPr>
-          <p:cNvSpPr>
-            <a:spLocks noGrp="1"/>
-          </p:cNvSpPr>
-          <p:nvPr/>
-        </p:nvSpPr>
-        <p:spPr>
-          <a:xfrm>
-            <a:off x="1085850" y="3533775"/>
-            <a:ext cx="3333750" cy="381000"/>
+              <a:rPr lang="es-ES_tradnl" sz="1800" b="1">
+                <a:solidFill>
+                  <a:srgbClr val="F3C747"/>
+                </a:solidFill>
+                <a:latin typeface="Calibri"/>
+                <a:ea typeface="Calibri"/>
+                <a:cs typeface="Calibri"/>
+              </a:rPr>
+              <a:t>RMC_CEP.sqlite</a:t>
+            </a:r>
+          </a:p>
+        </p:txBody>
+      </p:sp>
+      <p:sp>
+        <p:nvSpPr>
+          <p:cNvPr id="10" name="Rectángulo 9">
+            <a:extLst>
+              <a:ext uri="{FF2B5EF4-FFF2-40B4-BE49-F238E27FC236}">
+                <a16:creationId xmlns:a16="http://schemas.microsoft.com/office/drawing/2014/main" id="{D2CC4EFD-DB1A-4CB2-BBEE-8C1EED14C738}"/>
+              </a:ext>
+            </a:extLst>
+          </p:cNvPr>
+          <p:cNvSpPr>
+            <a:spLocks noGrp="1"/>
+          </p:cNvSpPr>
+          <p:nvPr/>
+        </p:nvSpPr>
+        <p:spPr>
+          <a:xfrm>
+            <a:off x="5314950" y="2857500"/>
+            <a:ext cx="1428750" cy="1047750"/>
           </a:xfrm>
           <a:prstGeom prst="rect">
             <a:avLst/>
@@ -15664,12 +13905,12 @@
           <a:p>
             <a:pPr algn="ctr">
               <a:lnSpc>
-                <a:spcPct val="110000"/>
+                <a:spcPct val="118000"/>
               </a:lnSpc>
               <a:buNone/>
-              <a:defRPr sz="825" b="0">
-                <a:solidFill>
-                  <a:srgbClr val="B8BEC8"/>
+              <a:defRPr sz="1500" b="0">
+                <a:solidFill>
+                  <a:srgbClr val="F3F4F6"/>
                 </a:solidFill>
                 <a:latin typeface="Calibri"/>
                 <a:ea typeface="Calibri"/>
@@ -15677,41 +13918,122 @@
               </a:defRPr>
             </a:pPr>
             <a:r>
-              <a:rPr lang="es-ES_tradnl" sz="825" b="0">
-                <a:solidFill>
-                  <a:srgbClr val="B8BEC8"/>
-                </a:solidFill>
-                <a:latin typeface="Calibri"/>
-                <a:ea typeface="Calibri"/>
-                <a:cs typeface="Calibri"/>
-              </a:rPr>
-              <a:t>Lista de PDFs encontrados, faltantes, duplicados y estados.</a:t>
-            </a:r>
-          </a:p>
-        </p:txBody>
-      </p:sp>
-      <p:sp>
-        <p:nvSpPr>
-          <p:cNvPr id="9" name="Rectángulo redondeado 8">
-            <a:extLst>
-              <a:ext uri="{FF2B5EF4-FFF2-40B4-BE49-F238E27FC236}">
-                <a16:creationId xmlns:a16="http://schemas.microsoft.com/office/drawing/2014/main" id="{FFD6986B-1D10-4057-B53D-66ED74F2049D}"/>
-              </a:ext>
-            </a:extLst>
-          </p:cNvPr>
-          <p:cNvSpPr>
-            <a:spLocks noGrp="1"/>
-          </p:cNvSpPr>
-          <p:nvPr/>
-        </p:nvSpPr>
-        <p:spPr>
-          <a:xfrm>
-            <a:off x="5334000" y="1866900"/>
-            <a:ext cx="2190750" cy="876300"/>
+              <a:rPr lang="es-ES_tradnl" sz="1500" b="0">
+                <a:solidFill>
+                  <a:srgbClr val="F3F4F6"/>
+                </a:solidFill>
+                <a:latin typeface="Calibri"/>
+                <a:ea typeface="Calibri"/>
+                <a:cs typeface="Calibri"/>
+              </a:rPr>
+              <a:t>runs</a:t>
+            </a:r>
+          </a:p>
+          <a:p>
+            <a:pPr algn="ctr">
+              <a:lnSpc>
+                <a:spcPct val="118000"/>
+              </a:lnSpc>
+              <a:buNone/>
+              <a:defRPr sz="1500" b="0">
+                <a:solidFill>
+                  <a:srgbClr val="F3F4F6"/>
+                </a:solidFill>
+                <a:latin typeface="Calibri"/>
+                <a:ea typeface="Calibri"/>
+                <a:cs typeface="Calibri"/>
+              </a:defRPr>
+            </a:pPr>
+            <a:r>
+              <a:rPr lang="es-ES_tradnl" sz="1500" b="0">
+                <a:solidFill>
+                  <a:srgbClr val="F3F4F6"/>
+                </a:solidFill>
+                <a:latin typeface="Calibri"/>
+                <a:ea typeface="Calibri"/>
+                <a:cs typeface="Calibri"/>
+              </a:rPr>
+              <a:t>items</a:t>
+            </a:r>
+          </a:p>
+          <a:p>
+            <a:pPr algn="ctr">
+              <a:lnSpc>
+                <a:spcPct val="118000"/>
+              </a:lnSpc>
+              <a:buNone/>
+              <a:defRPr sz="1500" b="0">
+                <a:solidFill>
+                  <a:srgbClr val="F3F4F6"/>
+                </a:solidFill>
+                <a:latin typeface="Calibri"/>
+                <a:ea typeface="Calibri"/>
+                <a:cs typeface="Calibri"/>
+              </a:defRPr>
+            </a:pPr>
+            <a:r>
+              <a:rPr lang="es-ES_tradnl" sz="1500" b="0">
+                <a:solidFill>
+                  <a:srgbClr val="F3F4F6"/>
+                </a:solidFill>
+                <a:latin typeface="Calibri"/>
+                <a:ea typeface="Calibri"/>
+                <a:cs typeface="Calibri"/>
+              </a:rPr>
+              <a:t>cep_registry</a:t>
+            </a:r>
+          </a:p>
+          <a:p>
+            <a:pPr algn="ctr">
+              <a:lnSpc>
+                <a:spcPct val="118000"/>
+              </a:lnSpc>
+              <a:buNone/>
+              <a:defRPr sz="1500" b="0">
+                <a:solidFill>
+                  <a:srgbClr val="F3F4F6"/>
+                </a:solidFill>
+                <a:latin typeface="Calibri"/>
+                <a:ea typeface="Calibri"/>
+                <a:cs typeface="Calibri"/>
+              </a:defRPr>
+            </a:pPr>
+            <a:r>
+              <a:rPr lang="es-ES_tradnl" sz="1500" b="0">
+                <a:solidFill>
+                  <a:srgbClr val="F3F4F6"/>
+                </a:solidFill>
+                <a:latin typeface="Calibri"/>
+                <a:ea typeface="Calibri"/>
+                <a:cs typeface="Calibri"/>
+              </a:rPr>
+              <a:t>variants leidas</a:t>
+            </a:r>
+          </a:p>
+        </p:txBody>
+      </p:sp>
+      <p:sp>
+        <p:nvSpPr>
+          <p:cNvPr id="11" name="Rectángulo redondeado 10">
+            <a:extLst>
+              <a:ext uri="{FF2B5EF4-FFF2-40B4-BE49-F238E27FC236}">
+                <a16:creationId xmlns:a16="http://schemas.microsoft.com/office/drawing/2014/main" id="{5E71290C-6962-4AE9-BFEF-0F783A689B41}"/>
+              </a:ext>
+            </a:extLst>
+          </p:cNvPr>
+          <p:cNvSpPr>
+            <a:spLocks noGrp="1"/>
+          </p:cNvSpPr>
+          <p:nvPr/>
+        </p:nvSpPr>
+        <p:spPr>
+          <a:xfrm>
+            <a:off x="8896350" y="2457450"/>
+            <a:ext cx="2381250" cy="1123950"/>
           </a:xfrm>
           <a:prstGeom prst="roundRect">
             <a:avLst>
-              <a:gd name="adj" fmla="val 8696"/>
+              <a:gd name="adj" fmla="val 6780"/>
             </a:avLst>
           </a:prstGeom>
           <a:solidFill>
@@ -15727,55 +14049,22 @@
       </p:sp>
       <p:sp>
         <p:nvSpPr>
-          <p:cNvPr id="10" name="Rectángulo 9">
-            <a:extLst>
-              <a:ext uri="{FF2B5EF4-FFF2-40B4-BE49-F238E27FC236}">
-                <a16:creationId xmlns:a16="http://schemas.microsoft.com/office/drawing/2014/main" id="{4B5133F2-C1BC-4CC2-B3B0-8E2E52A9B9A9}"/>
-              </a:ext>
-            </a:extLst>
-          </p:cNvPr>
-          <p:cNvSpPr>
-            <a:spLocks noGrp="1"/>
-          </p:cNvSpPr>
-          <p:nvPr/>
-        </p:nvSpPr>
-        <p:spPr>
-          <a:xfrm>
-            <a:off x="5334000" y="1866900"/>
-            <a:ext cx="47625" cy="876300"/>
-          </a:xfrm>
-          <a:prstGeom prst="rect">
-            <a:avLst/>
-          </a:prstGeom>
-          <a:solidFill>
-            <a:srgbClr val="2D7FF9"/>
-          </a:solidFill>
-          <a:ln w="0">
-            <a:solidFill>
-              <a:srgbClr val="2D7FF9"/>
-            </a:solidFill>
-            <a:prstDash val="solid"/>
-          </a:ln>
-        </p:spPr>
-      </p:sp>
-      <p:sp>
-        <p:nvSpPr>
-          <p:cNvPr id="11" name="Rectángulo 10">
-            <a:extLst>
-              <a:ext uri="{FF2B5EF4-FFF2-40B4-BE49-F238E27FC236}">
-                <a16:creationId xmlns:a16="http://schemas.microsoft.com/office/drawing/2014/main" id="{3CE9F986-C04D-413F-9220-CB7C8924DF25}"/>
-              </a:ext>
-            </a:extLst>
-          </p:cNvPr>
-          <p:cNvSpPr>
-            <a:spLocks noGrp="1"/>
-          </p:cNvSpPr>
-          <p:nvPr/>
-        </p:nvSpPr>
-        <p:spPr>
-          <a:xfrm>
-            <a:off x="5505450" y="2019300"/>
-            <a:ext cx="1905000" cy="247650"/>
+          <p:cNvPr id="12" name="Rectángulo 11">
+            <a:extLst>
+              <a:ext uri="{FF2B5EF4-FFF2-40B4-BE49-F238E27FC236}">
+                <a16:creationId xmlns:a16="http://schemas.microsoft.com/office/drawing/2014/main" id="{D98CB3FD-E6C2-40B7-A901-2B4AF26739C9}"/>
+              </a:ext>
+            </a:extLst>
+          </p:cNvPr>
+          <p:cNvSpPr>
+            <a:spLocks noGrp="1"/>
+          </p:cNvSpPr>
+          <p:nvPr/>
+        </p:nvSpPr>
+        <p:spPr>
+          <a:xfrm>
+            <a:off x="9163050" y="2724150"/>
+            <a:ext cx="1809750" cy="266700"/>
           </a:xfrm>
           <a:prstGeom prst="rect">
             <a:avLst/>
@@ -15790,12 +14079,12 @@
           <a:bodyPr wrap="square" lIns="0" tIns="0" rIns="0" bIns="0" anchor="t"/>
           <a:lstStyle/>
           <a:p>
-            <a:pPr algn="l">
+            <a:pPr algn="ctr">
               <a:lnSpc>
                 <a:spcPct val="108000"/>
               </a:lnSpc>
               <a:buNone/>
-              <a:defRPr sz="1350" b="1">
+              <a:defRPr sz="1650" b="1">
                 <a:solidFill>
                   <a:srgbClr val="F3F4F6"/>
                 </a:solidFill>
@@ -15805,7 +14094,7 @@
               </a:defRPr>
             </a:pPr>
             <a:r>
-              <a:rPr lang="es-ES_tradnl" sz="1350" b="1">
+              <a:rPr lang="es-ES_tradnl" sz="1650" b="1">
                 <a:solidFill>
                   <a:srgbClr val="F3F4F6"/>
                 </a:solidFill>
@@ -15813,29 +14102,29 @@
                 <a:ea typeface="Calibri"/>
                 <a:cs typeface="Calibri"/>
               </a:rPr>
-              <a:t>Revisar cola</a:t>
-            </a:r>
-          </a:p>
-        </p:txBody>
-      </p:sp>
-      <p:sp>
-        <p:nvSpPr>
-          <p:cNvPr id="12" name="Rectángulo 11">
-            <a:extLst>
-              <a:ext uri="{FF2B5EF4-FFF2-40B4-BE49-F238E27FC236}">
-                <a16:creationId xmlns:a16="http://schemas.microsoft.com/office/drawing/2014/main" id="{0135BA19-70CB-4047-A59B-B8CF589AE40D}"/>
-              </a:ext>
-            </a:extLst>
-          </p:cNvPr>
-          <p:cNvSpPr>
-            <a:spLocks noGrp="1"/>
-          </p:cNvSpPr>
-          <p:nvPr/>
-        </p:nvSpPr>
-        <p:spPr>
-          <a:xfrm>
-            <a:off x="5505450" y="2324100"/>
-            <a:ext cx="1866900" cy="323850"/>
+              <a:t>Control Center</a:t>
+            </a:r>
+          </a:p>
+        </p:txBody>
+      </p:sp>
+      <p:sp>
+        <p:nvSpPr>
+          <p:cNvPr id="13" name="Rectángulo 12">
+            <a:extLst>
+              <a:ext uri="{FF2B5EF4-FFF2-40B4-BE49-F238E27FC236}">
+                <a16:creationId xmlns:a16="http://schemas.microsoft.com/office/drawing/2014/main" id="{5EA110A2-3B6F-4273-8930-701591E98603}"/>
+              </a:ext>
+            </a:extLst>
+          </p:cNvPr>
+          <p:cNvSpPr>
+            <a:spLocks noGrp="1"/>
+          </p:cNvSpPr>
+          <p:nvPr/>
+        </p:nvSpPr>
+        <p:spPr>
+          <a:xfrm>
+            <a:off x="9182100" y="3143250"/>
+            <a:ext cx="1771650" cy="209550"/>
           </a:xfrm>
           <a:prstGeom prst="rect">
             <a:avLst/>
@@ -15850,12 +14139,12 @@
           <a:bodyPr wrap="square" lIns="0" tIns="0" rIns="0" bIns="0" anchor="t"/>
           <a:lstStyle/>
           <a:p>
-            <a:pPr algn="l">
+            <a:pPr algn="ctr">
               <a:lnSpc>
-                <a:spcPct val="114000"/>
+                <a:spcPct val="108000"/>
               </a:lnSpc>
               <a:buNone/>
-              <a:defRPr sz="938" b="0">
+              <a:defRPr sz="975" b="0">
                 <a:solidFill>
                   <a:srgbClr val="B8BEC8"/>
                 </a:solidFill>
@@ -15865,7 +14154,7 @@
               </a:defRPr>
             </a:pPr>
             <a:r>
-              <a:rPr lang="es-ES_tradnl" sz="938" b="0">
+              <a:rPr lang="es-ES_tradnl" sz="975" b="0">
                 <a:solidFill>
                   <a:srgbClr val="B8BEC8"/>
                 </a:solidFill>
@@ -15873,33 +14162,153 @@
                 <a:ea typeface="Calibri"/>
                 <a:cs typeface="Calibri"/>
               </a:rPr>
-              <a:t>No imprime. Solo localiza y ordena PDFs.</a:t>
-            </a:r>
-          </a:p>
-        </p:txBody>
-      </p:sp>
-      <p:sp>
-        <p:nvSpPr>
-          <p:cNvPr id="13" name="Rectángulo redondeado 12">
-            <a:extLst>
-              <a:ext uri="{FF2B5EF4-FFF2-40B4-BE49-F238E27FC236}">
-                <a16:creationId xmlns:a16="http://schemas.microsoft.com/office/drawing/2014/main" id="{86FAA7FB-EE7B-4B52-A7B9-091000AA22FB}"/>
-              </a:ext>
-            </a:extLst>
-          </p:cNvPr>
-          <p:cNvSpPr>
-            <a:spLocks noGrp="1"/>
-          </p:cNvSpPr>
-          <p:nvPr/>
-        </p:nvSpPr>
-        <p:spPr>
-          <a:xfrm>
-            <a:off x="5334000" y="3028950"/>
-            <a:ext cx="2190750" cy="876300"/>
+              <a:t>Consulta paths y estado</a:t>
+            </a:r>
+          </a:p>
+        </p:txBody>
+      </p:sp>
+      <p:sp>
+        <p:nvSpPr>
+          <p:cNvPr id="14" name="Rectángulo 13">
+            <a:extLst>
+              <a:ext uri="{FF2B5EF4-FFF2-40B4-BE49-F238E27FC236}">
+                <a16:creationId xmlns:a16="http://schemas.microsoft.com/office/drawing/2014/main" id="{6DE0FA37-54DA-49D8-9EE3-30CBCD62783E}"/>
+              </a:ext>
+            </a:extLst>
+          </p:cNvPr>
+          <p:cNvSpPr>
+            <a:spLocks noGrp="1"/>
+          </p:cNvSpPr>
+          <p:nvPr/>
+        </p:nvSpPr>
+        <p:spPr>
+          <a:xfrm>
+            <a:off x="3505200" y="2857500"/>
+            <a:ext cx="952500" cy="266700"/>
+          </a:xfrm>
+          <a:prstGeom prst="rect">
+            <a:avLst/>
+          </a:prstGeom>
+          <a:noFill/>
+          <a:ln w="0">
+            <a:noFill/>
+            <a:prstDash val="solid"/>
+          </a:ln>
+        </p:spPr>
+        <p:txBody>
+          <a:bodyPr wrap="square" lIns="0" tIns="0" rIns="0" bIns="0" anchor="t"/>
+          <a:lstStyle/>
+          <a:p>
+            <a:pPr algn="ctr">
+              <a:lnSpc>
+                <a:spcPct val="108000"/>
+              </a:lnSpc>
+              <a:buNone/>
+              <a:defRPr sz="1800" b="1">
+                <a:solidFill>
+                  <a:srgbClr val="7D8592"/>
+                </a:solidFill>
+                <a:latin typeface="Calibri"/>
+                <a:ea typeface="Calibri"/>
+                <a:cs typeface="Calibri"/>
+              </a:defRPr>
+            </a:pPr>
+            <a:r>
+              <a:rPr lang="es-ES_tradnl" sz="1800" b="1">
+                <a:solidFill>
+                  <a:srgbClr val="7D8592"/>
+                </a:solidFill>
+                <a:latin typeface="Calibri"/>
+                <a:ea typeface="Calibri"/>
+                <a:cs typeface="Calibri"/>
+              </a:rPr>
+              <a:t>----&gt;</a:t>
+            </a:r>
+          </a:p>
+        </p:txBody>
+      </p:sp>
+      <p:sp>
+        <p:nvSpPr>
+          <p:cNvPr id="15" name="Rectángulo 14">
+            <a:extLst>
+              <a:ext uri="{FF2B5EF4-FFF2-40B4-BE49-F238E27FC236}">
+                <a16:creationId xmlns:a16="http://schemas.microsoft.com/office/drawing/2014/main" id="{D5B100C9-B43C-4ED6-982C-1404A19255D5}"/>
+              </a:ext>
+            </a:extLst>
+          </p:cNvPr>
+          <p:cNvSpPr>
+            <a:spLocks noGrp="1"/>
+          </p:cNvSpPr>
+          <p:nvPr/>
+        </p:nvSpPr>
+        <p:spPr>
+          <a:xfrm>
+            <a:off x="7524750" y="2857500"/>
+            <a:ext cx="952500" cy="266700"/>
+          </a:xfrm>
+          <a:prstGeom prst="rect">
+            <a:avLst/>
+          </a:prstGeom>
+          <a:noFill/>
+          <a:ln w="0">
+            <a:noFill/>
+            <a:prstDash val="solid"/>
+          </a:ln>
+        </p:spPr>
+        <p:txBody>
+          <a:bodyPr wrap="square" lIns="0" tIns="0" rIns="0" bIns="0" anchor="t"/>
+          <a:lstStyle/>
+          <a:p>
+            <a:pPr algn="ctr">
+              <a:lnSpc>
+                <a:spcPct val="108000"/>
+              </a:lnSpc>
+              <a:buNone/>
+              <a:defRPr sz="1800" b="1">
+                <a:solidFill>
+                  <a:srgbClr val="7D8592"/>
+                </a:solidFill>
+                <a:latin typeface="Calibri"/>
+                <a:ea typeface="Calibri"/>
+                <a:cs typeface="Calibri"/>
+              </a:defRPr>
+            </a:pPr>
+            <a:r>
+              <a:rPr lang="es-ES_tradnl" sz="1800" b="1">
+                <a:solidFill>
+                  <a:srgbClr val="7D8592"/>
+                </a:solidFill>
+                <a:latin typeface="Calibri"/>
+                <a:ea typeface="Calibri"/>
+                <a:cs typeface="Calibri"/>
+              </a:rPr>
+              <a:t>----&gt;</a:t>
+            </a:r>
+          </a:p>
+        </p:txBody>
+      </p:sp>
+      <p:sp>
+        <p:nvSpPr>
+          <p:cNvPr id="16" name="Rectángulo redondeado 15">
+            <a:extLst>
+              <a:ext uri="{FF2B5EF4-FFF2-40B4-BE49-F238E27FC236}">
+                <a16:creationId xmlns:a16="http://schemas.microsoft.com/office/drawing/2014/main" id="{0E275BEB-F9B7-4D07-B6EC-847065505F1A}"/>
+              </a:ext>
+            </a:extLst>
+          </p:cNvPr>
+          <p:cNvSpPr>
+            <a:spLocks noGrp="1"/>
+          </p:cNvSpPr>
+          <p:nvPr/>
+        </p:nvSpPr>
+        <p:spPr>
+          <a:xfrm>
+            <a:off x="1676400" y="4895850"/>
+            <a:ext cx="3143250" cy="742950"/>
           </a:xfrm>
           <a:prstGeom prst="roundRect">
             <a:avLst>
-              <a:gd name="adj" fmla="val 8696"/>
+              <a:gd name="adj" fmla="val 10256"/>
             </a:avLst>
           </a:prstGeom>
           <a:solidFill>
@@ -15915,32 +14324,32 @@
       </p:sp>
       <p:sp>
         <p:nvSpPr>
-          <p:cNvPr id="14" name="Rectángulo 13">
-            <a:extLst>
-              <a:ext uri="{FF2B5EF4-FFF2-40B4-BE49-F238E27FC236}">
-                <a16:creationId xmlns:a16="http://schemas.microsoft.com/office/drawing/2014/main" id="{E8970AD6-514F-450F-9BFE-21482C81D306}"/>
-              </a:ext>
-            </a:extLst>
-          </p:cNvPr>
-          <p:cNvSpPr>
-            <a:spLocks noGrp="1"/>
-          </p:cNvSpPr>
-          <p:nvPr/>
-        </p:nvSpPr>
-        <p:spPr>
-          <a:xfrm>
-            <a:off x="5334000" y="3028950"/>
-            <a:ext cx="47625" cy="876300"/>
+          <p:cNvPr id="17" name="Rectángulo 16">
+            <a:extLst>
+              <a:ext uri="{FF2B5EF4-FFF2-40B4-BE49-F238E27FC236}">
+                <a16:creationId xmlns:a16="http://schemas.microsoft.com/office/drawing/2014/main" id="{6528D271-A71C-4915-896F-11C22AB7BD6C}"/>
+              </a:ext>
+            </a:extLst>
+          </p:cNvPr>
+          <p:cNvSpPr>
+            <a:spLocks noGrp="1"/>
+          </p:cNvSpPr>
+          <p:nvPr/>
+        </p:nvSpPr>
+        <p:spPr>
+          <a:xfrm>
+            <a:off x="1676400" y="4895850"/>
+            <a:ext cx="47625" cy="742950"/>
           </a:xfrm>
           <a:prstGeom prst="rect">
             <a:avLst/>
           </a:prstGeom>
           <a:solidFill>
-            <a:srgbClr val="F3C747"/>
+            <a:srgbClr val="BD1F36"/>
           </a:solidFill>
           <a:ln w="0">
             <a:solidFill>
-              <a:srgbClr val="F3C747"/>
+              <a:srgbClr val="BD1F36"/>
             </a:solidFill>
             <a:prstDash val="solid"/>
           </a:ln>
@@ -15948,22 +14357,22 @@
       </p:sp>
       <p:sp>
         <p:nvSpPr>
-          <p:cNvPr id="15" name="Rectángulo 14">
-            <a:extLst>
-              <a:ext uri="{FF2B5EF4-FFF2-40B4-BE49-F238E27FC236}">
-                <a16:creationId xmlns:a16="http://schemas.microsoft.com/office/drawing/2014/main" id="{8792B3F4-BB88-4C90-900A-65017B67C973}"/>
-              </a:ext>
-            </a:extLst>
-          </p:cNvPr>
-          <p:cNvSpPr>
-            <a:spLocks noGrp="1"/>
-          </p:cNvSpPr>
-          <p:nvPr/>
-        </p:nvSpPr>
-        <p:spPr>
-          <a:xfrm>
-            <a:off x="5505450" y="3181350"/>
-            <a:ext cx="1905000" cy="247650"/>
+          <p:cNvPr id="18" name="Rectángulo 17">
+            <a:extLst>
+              <a:ext uri="{FF2B5EF4-FFF2-40B4-BE49-F238E27FC236}">
+                <a16:creationId xmlns:a16="http://schemas.microsoft.com/office/drawing/2014/main" id="{DA4E09CD-6650-41F8-B421-AEF247B9EDFD}"/>
+              </a:ext>
+            </a:extLst>
+          </p:cNvPr>
+          <p:cNvSpPr>
+            <a:spLocks noGrp="1"/>
+          </p:cNvSpPr>
+          <p:nvPr/>
+        </p:nvSpPr>
+        <p:spPr>
+          <a:xfrm>
+            <a:off x="1847850" y="5048250"/>
+            <a:ext cx="2857500" cy="247650"/>
           </a:xfrm>
           <a:prstGeom prst="rect">
             <a:avLst/>
@@ -16001,29 +14410,29 @@
                 <a:ea typeface="Calibri"/>
                 <a:cs typeface="Calibri"/>
               </a:rPr>
-              <a:t>Confirmar</a:t>
-            </a:r>
-          </a:p>
-        </p:txBody>
-      </p:sp>
-      <p:sp>
-        <p:nvSpPr>
-          <p:cNvPr id="16" name="Rectángulo 15">
-            <a:extLst>
-              <a:ext uri="{FF2B5EF4-FFF2-40B4-BE49-F238E27FC236}">
-                <a16:creationId xmlns:a16="http://schemas.microsoft.com/office/drawing/2014/main" id="{EB08D61A-F9C1-4C29-9841-66A15A0077EC}"/>
-              </a:ext>
-            </a:extLst>
-          </p:cNvPr>
-          <p:cNvSpPr>
-            <a:spLocks noGrp="1"/>
-          </p:cNvSpPr>
-          <p:nvPr/>
-        </p:nvSpPr>
-        <p:spPr>
-          <a:xfrm>
-            <a:off x="5505450" y="3486150"/>
-            <a:ext cx="1866900" cy="323850"/>
+              <a:t>Limite claro</a:t>
+            </a:r>
+          </a:p>
+        </p:txBody>
+      </p:sp>
+      <p:sp>
+        <p:nvSpPr>
+          <p:cNvPr id="19" name="Rectángulo 18">
+            <a:extLst>
+              <a:ext uri="{FF2B5EF4-FFF2-40B4-BE49-F238E27FC236}">
+                <a16:creationId xmlns:a16="http://schemas.microsoft.com/office/drawing/2014/main" id="{00A68344-DDD5-447B-9B73-54E89E8E6BC7}"/>
+              </a:ext>
+            </a:extLst>
+          </p:cNvPr>
+          <p:cNvSpPr>
+            <a:spLocks noGrp="1"/>
+          </p:cNvSpPr>
+          <p:nvPr/>
+        </p:nvSpPr>
+        <p:spPr>
+          <a:xfrm>
+            <a:off x="1847850" y="5353050"/>
+            <a:ext cx="2819400" cy="190500"/>
           </a:xfrm>
           <a:prstGeom prst="rect">
             <a:avLst/>
@@ -16061,33 +14470,33 @@
                 <a:ea typeface="Calibri"/>
                 <a:cs typeface="Calibri"/>
               </a:rPr>
-              <a:t>Muestra cantidad, warnings y pendientes.</a:t>
-            </a:r>
-          </a:p>
-        </p:txBody>
-      </p:sp>
-      <p:sp>
-        <p:nvSpPr>
-          <p:cNvPr id="17" name="Rectángulo redondeado 16">
-            <a:extLst>
-              <a:ext uri="{FF2B5EF4-FFF2-40B4-BE49-F238E27FC236}">
-                <a16:creationId xmlns:a16="http://schemas.microsoft.com/office/drawing/2014/main" id="{B0A6F8DA-28F2-4D10-8F39-C424C459A170}"/>
-              </a:ext>
-            </a:extLst>
-          </p:cNvPr>
-          <p:cNvSpPr>
-            <a:spLocks noGrp="1"/>
-          </p:cNvSpPr>
-          <p:nvPr/>
-        </p:nvSpPr>
-        <p:spPr>
-          <a:xfrm>
-            <a:off x="5334000" y="4191000"/>
-            <a:ext cx="2190750" cy="876300"/>
+              <a:t>No modifica tablas rmcop_nike_* ni comparte reglas de escritura.</a:t>
+            </a:r>
+          </a:p>
+        </p:txBody>
+      </p:sp>
+      <p:sp>
+        <p:nvSpPr>
+          <p:cNvPr id="20" name="Rectángulo redondeado 19">
+            <a:extLst>
+              <a:ext uri="{FF2B5EF4-FFF2-40B4-BE49-F238E27FC236}">
+                <a16:creationId xmlns:a16="http://schemas.microsoft.com/office/drawing/2014/main" id="{036B960B-E29F-4E8C-925B-67C5E9A2222B}"/>
+              </a:ext>
+            </a:extLst>
+          </p:cNvPr>
+          <p:cNvSpPr>
+            <a:spLocks noGrp="1"/>
+          </p:cNvSpPr>
+          <p:nvPr/>
+        </p:nvSpPr>
+        <p:spPr>
+          <a:xfrm>
+            <a:off x="6191250" y="4895850"/>
+            <a:ext cx="3143250" cy="742950"/>
           </a:xfrm>
           <a:prstGeom prst="roundRect">
             <a:avLst>
-              <a:gd name="adj" fmla="val 8696"/>
+              <a:gd name="adj" fmla="val 10256"/>
             </a:avLst>
           </a:prstGeom>
           <a:solidFill>
@@ -16103,32 +14512,32 @@
       </p:sp>
       <p:sp>
         <p:nvSpPr>
-          <p:cNvPr id="18" name="Rectángulo 17">
-            <a:extLst>
-              <a:ext uri="{FF2B5EF4-FFF2-40B4-BE49-F238E27FC236}">
-                <a16:creationId xmlns:a16="http://schemas.microsoft.com/office/drawing/2014/main" id="{81F08885-0EAE-4573-97F2-8C06ED02CB48}"/>
-              </a:ext>
-            </a:extLst>
-          </p:cNvPr>
-          <p:cNvSpPr>
-            <a:spLocks noGrp="1"/>
-          </p:cNvSpPr>
-          <p:nvPr/>
-        </p:nvSpPr>
-        <p:spPr>
-          <a:xfrm>
-            <a:off x="5334000" y="4191000"/>
-            <a:ext cx="47625" cy="876300"/>
+          <p:cNvPr id="21" name="Rectángulo 20">
+            <a:extLst>
+              <a:ext uri="{FF2B5EF4-FFF2-40B4-BE49-F238E27FC236}">
+                <a16:creationId xmlns:a16="http://schemas.microsoft.com/office/drawing/2014/main" id="{788E27C3-5CA4-46DA-8810-DF411FEC9ED1}"/>
+              </a:ext>
+            </a:extLst>
+          </p:cNvPr>
+          <p:cNvSpPr>
+            <a:spLocks noGrp="1"/>
+          </p:cNvSpPr>
+          <p:nvPr/>
+        </p:nvSpPr>
+        <p:spPr>
+          <a:xfrm>
+            <a:off x="6191250" y="4895850"/>
+            <a:ext cx="47625" cy="742950"/>
           </a:xfrm>
           <a:prstGeom prst="rect">
             <a:avLst/>
           </a:prstGeom>
           <a:solidFill>
-            <a:srgbClr val="BD1F36"/>
+            <a:srgbClr val="20B26B"/>
           </a:solidFill>
           <a:ln w="0">
             <a:solidFill>
-              <a:srgbClr val="BD1F36"/>
+              <a:srgbClr val="20B26B"/>
             </a:solidFill>
             <a:prstDash val="solid"/>
           </a:ln>
@@ -16136,22 +14545,22 @@
       </p:sp>
       <p:sp>
         <p:nvSpPr>
-          <p:cNvPr id="19" name="Rectángulo 18">
-            <a:extLst>
-              <a:ext uri="{FF2B5EF4-FFF2-40B4-BE49-F238E27FC236}">
-                <a16:creationId xmlns:a16="http://schemas.microsoft.com/office/drawing/2014/main" id="{B7E65CFA-6A84-4E09-AEBF-F95CA4938283}"/>
-              </a:ext>
-            </a:extLst>
-          </p:cNvPr>
-          <p:cNvSpPr>
-            <a:spLocks noGrp="1"/>
-          </p:cNvSpPr>
-          <p:nvPr/>
-        </p:nvSpPr>
-        <p:spPr>
-          <a:xfrm>
-            <a:off x="5505450" y="4343400"/>
-            <a:ext cx="1905000" cy="247650"/>
+          <p:cNvPr id="22" name="Rectángulo 21">
+            <a:extLst>
+              <a:ext uri="{FF2B5EF4-FFF2-40B4-BE49-F238E27FC236}">
+                <a16:creationId xmlns:a16="http://schemas.microsoft.com/office/drawing/2014/main" id="{1641D752-07F4-4E3D-B558-CA39579DE9B5}"/>
+              </a:ext>
+            </a:extLst>
+          </p:cNvPr>
+          <p:cNvSpPr>
+            <a:spLocks noGrp="1"/>
+          </p:cNvSpPr>
+          <p:nvPr/>
+        </p:nvSpPr>
+        <p:spPr>
+          <a:xfrm>
+            <a:off x="6362700" y="5048250"/>
+            <a:ext cx="2857500" cy="247650"/>
           </a:xfrm>
           <a:prstGeom prst="rect">
             <a:avLst/>
@@ -16189,29 +14598,29 @@
                 <a:ea typeface="Calibri"/>
                 <a:cs typeface="Calibri"/>
               </a:rPr>
-              <a:t>Imprimir cola</a:t>
-            </a:r>
-          </a:p>
-        </p:txBody>
-      </p:sp>
-      <p:sp>
-        <p:nvSpPr>
-          <p:cNvPr id="20" name="Rectángulo 19">
-            <a:extLst>
-              <a:ext uri="{FF2B5EF4-FFF2-40B4-BE49-F238E27FC236}">
-                <a16:creationId xmlns:a16="http://schemas.microsoft.com/office/drawing/2014/main" id="{225EB2ED-8F69-4B4B-B367-439CBC2AC0BD}"/>
-              </a:ext>
-            </a:extLst>
-          </p:cNvPr>
-          <p:cNvSpPr>
-            <a:spLocks noGrp="1"/>
-          </p:cNvSpPr>
-          <p:nvPr/>
-        </p:nvSpPr>
-        <p:spPr>
-          <a:xfrm>
-            <a:off x="5505450" y="4648200"/>
-            <a:ext cx="1866900" cy="323850"/>
+              <a:t>Contrato util</a:t>
+            </a:r>
+          </a:p>
+        </p:txBody>
+      </p:sp>
+      <p:sp>
+        <p:nvSpPr>
+          <p:cNvPr id="23" name="Rectángulo 22">
+            <a:extLst>
+              <a:ext uri="{FF2B5EF4-FFF2-40B4-BE49-F238E27FC236}">
+                <a16:creationId xmlns:a16="http://schemas.microsoft.com/office/drawing/2014/main" id="{29C73D38-9E13-4CFD-8276-CB42476D0373}"/>
+              </a:ext>
+            </a:extLst>
+          </p:cNvPr>
+          <p:cNvSpPr>
+            <a:spLocks noGrp="1"/>
+          </p:cNvSpPr>
+          <p:nvPr/>
+        </p:nvSpPr>
+        <p:spPr>
+          <a:xfrm>
+            <a:off x="6362700" y="5353050"/>
+            <a:ext cx="2819400" cy="190500"/>
           </a:xfrm>
           <a:prstGeom prst="rect">
             <a:avLst/>
@@ -16249,135 +14658,7 @@
                 <a:ea typeface="Calibri"/>
                 <a:cs typeface="Calibri"/>
               </a:rPr>
-              <a:t>Ejecuta lp con fit-to-page y landscape.</a:t>
-            </a:r>
-          </a:p>
-        </p:txBody>
-      </p:sp>
-      <p:sp>
-        <p:nvSpPr>
-          <p:cNvPr id="21" name="Rectángulo redondeado 20">
-            <a:extLst>
-              <a:ext uri="{FF2B5EF4-FFF2-40B4-BE49-F238E27FC236}">
-                <a16:creationId xmlns:a16="http://schemas.microsoft.com/office/drawing/2014/main" id="{B7C5C076-562B-4455-A16F-ED9F6AFBF37F}"/>
-              </a:ext>
-            </a:extLst>
-          </p:cNvPr>
-          <p:cNvSpPr>
-            <a:spLocks noGrp="1"/>
-          </p:cNvSpPr>
-          <p:nvPr/>
-        </p:nvSpPr>
-        <p:spPr>
-          <a:xfrm>
-            <a:off x="8477250" y="2571750"/>
-            <a:ext cx="2381250" cy="1066800"/>
-          </a:xfrm>
-          <a:prstGeom prst="roundRect">
-            <a:avLst>
-              <a:gd name="adj" fmla="val 7143"/>
-            </a:avLst>
-          </a:prstGeom>
-          <a:solidFill>
-            <a:srgbClr val="2B2F35"/>
-          </a:solidFill>
-          <a:ln w="9525">
-            <a:solidFill>
-              <a:srgbClr val="3A3F47"/>
-            </a:solidFill>
-            <a:prstDash val="solid"/>
-          </a:ln>
-        </p:spPr>
-      </p:sp>
-      <p:sp>
-        <p:nvSpPr>
-          <p:cNvPr id="22" name="Rectángulo 21">
-            <a:extLst>
-              <a:ext uri="{FF2B5EF4-FFF2-40B4-BE49-F238E27FC236}">
-                <a16:creationId xmlns:a16="http://schemas.microsoft.com/office/drawing/2014/main" id="{65A5E3D0-0E98-4118-8A00-15FAF4614EC2}"/>
-              </a:ext>
-            </a:extLst>
-          </p:cNvPr>
-          <p:cNvSpPr>
-            <a:spLocks noGrp="1"/>
-          </p:cNvSpPr>
-          <p:nvPr/>
-        </p:nvSpPr>
-        <p:spPr>
-          <a:xfrm>
-            <a:off x="8477250" y="2571750"/>
-            <a:ext cx="47625" cy="1066800"/>
-          </a:xfrm>
-          <a:prstGeom prst="rect">
-            <a:avLst/>
-          </a:prstGeom>
-          <a:solidFill>
-            <a:srgbClr val="20B26B"/>
-          </a:solidFill>
-          <a:ln w="0">
-            <a:solidFill>
-              <a:srgbClr val="20B26B"/>
-            </a:solidFill>
-            <a:prstDash val="solid"/>
-          </a:ln>
-        </p:spPr>
-      </p:sp>
-      <p:sp>
-        <p:nvSpPr>
-          <p:cNvPr id="23" name="Rectángulo 22">
-            <a:extLst>
-              <a:ext uri="{FF2B5EF4-FFF2-40B4-BE49-F238E27FC236}">
-                <a16:creationId xmlns:a16="http://schemas.microsoft.com/office/drawing/2014/main" id="{98C9F4F5-5AA4-4553-8C5D-7878969F8947}"/>
-              </a:ext>
-            </a:extLst>
-          </p:cNvPr>
-          <p:cNvSpPr>
-            <a:spLocks noGrp="1"/>
-          </p:cNvSpPr>
-          <p:nvPr/>
-        </p:nvSpPr>
-        <p:spPr>
-          <a:xfrm>
-            <a:off x="8648700" y="2724150"/>
-            <a:ext cx="2095500" cy="247650"/>
-          </a:xfrm>
-          <a:prstGeom prst="rect">
-            <a:avLst/>
-          </a:prstGeom>
-          <a:noFill/>
-          <a:ln w="0">
-            <a:noFill/>
-            <a:prstDash val="solid"/>
-          </a:ln>
-        </p:spPr>
-        <p:txBody>
-          <a:bodyPr wrap="square" lIns="0" tIns="0" rIns="0" bIns="0" anchor="t"/>
-          <a:lstStyle/>
-          <a:p>
-            <a:pPr algn="l">
-              <a:lnSpc>
-                <a:spcPct val="108000"/>
-              </a:lnSpc>
-              <a:buNone/>
-              <a:defRPr sz="1350" b="1">
-                <a:solidFill>
-                  <a:srgbClr val="F3F4F6"/>
-                </a:solidFill>
-                <a:latin typeface="Calibri"/>
-                <a:ea typeface="Calibri"/>
-                <a:cs typeface="Calibri"/>
-              </a:defRPr>
-            </a:pPr>
-            <a:r>
-              <a:rPr lang="es-ES_tradnl" sz="1350" b="1">
-                <a:solidFill>
-                  <a:srgbClr val="F3F4F6"/>
-                </a:solidFill>
-                <a:latin typeface="Calibri"/>
-                <a:ea typeface="Calibri"/>
-                <a:cs typeface="Calibri"/>
-              </a:rPr>
-              <a:t>Marca impreso=1</a:t>
+              <a:t>Control Center debe usar path persistido cuando exista.</a:t>
             </a:r>
           </a:p>
         </p:txBody>
@@ -16387,255 +14668,7 @@
           <p:cNvPr id="24" name="Rectángulo 23">
             <a:extLst>
               <a:ext uri="{FF2B5EF4-FFF2-40B4-BE49-F238E27FC236}">
-                <a16:creationId xmlns:a16="http://schemas.microsoft.com/office/drawing/2014/main" id="{F7A74C90-6350-43A5-AD5A-F8158A6C59FD}"/>
-              </a:ext>
-            </a:extLst>
-          </p:cNvPr>
-          <p:cNvSpPr>
-            <a:spLocks noGrp="1"/>
-          </p:cNvSpPr>
-          <p:nvPr/>
-        </p:nvSpPr>
-        <p:spPr>
-          <a:xfrm>
-            <a:off x="8648700" y="3028950"/>
-            <a:ext cx="2057400" cy="514350"/>
-          </a:xfrm>
-          <a:prstGeom prst="rect">
-            <a:avLst/>
-          </a:prstGeom>
-          <a:noFill/>
-          <a:ln w="0">
-            <a:noFill/>
-            <a:prstDash val="solid"/>
-          </a:ln>
-        </p:spPr>
-        <p:txBody>
-          <a:bodyPr wrap="square" lIns="0" tIns="0" rIns="0" bIns="0" anchor="t"/>
-          <a:lstStyle/>
-          <a:p>
-            <a:pPr algn="l">
-              <a:lnSpc>
-                <a:spcPct val="114000"/>
-              </a:lnSpc>
-              <a:buNone/>
-              <a:defRPr sz="938" b="0">
-                <a:solidFill>
-                  <a:srgbClr val="B8BEC8"/>
-                </a:solidFill>
-                <a:latin typeface="Calibri"/>
-                <a:ea typeface="Calibri"/>
-                <a:cs typeface="Calibri"/>
-              </a:defRPr>
-            </a:pPr>
-            <a:r>
-              <a:rPr lang="es-ES_tradnl" sz="938" b="0">
-                <a:solidFill>
-                  <a:srgbClr val="B8BEC8"/>
-                </a:solidFill>
-                <a:latin typeface="Calibri"/>
-                <a:ea typeface="Calibri"/>
-                <a:cs typeface="Calibri"/>
-              </a:rPr>
-              <a:t>Solo cuando macOS acepta el trabajo en cola.</a:t>
-            </a:r>
-          </a:p>
-        </p:txBody>
-      </p:sp>
-      <p:sp>
-        <p:nvSpPr>
-          <p:cNvPr id="25" name="Rectángulo redondeado 24">
-            <a:extLst>
-              <a:ext uri="{FF2B5EF4-FFF2-40B4-BE49-F238E27FC236}">
-                <a16:creationId xmlns:a16="http://schemas.microsoft.com/office/drawing/2014/main" id="{05592C34-C207-45AE-83CD-5D4856E0E7FC}"/>
-              </a:ext>
-            </a:extLst>
-          </p:cNvPr>
-          <p:cNvSpPr>
-            <a:spLocks noGrp="1"/>
-          </p:cNvSpPr>
-          <p:nvPr/>
-        </p:nvSpPr>
-        <p:spPr>
-          <a:xfrm>
-            <a:off x="8477250" y="4095750"/>
-            <a:ext cx="2381250" cy="1066800"/>
-          </a:xfrm>
-          <a:prstGeom prst="roundRect">
-            <a:avLst>
-              <a:gd name="adj" fmla="val 7143"/>
-            </a:avLst>
-          </a:prstGeom>
-          <a:solidFill>
-            <a:srgbClr val="2B2F35"/>
-          </a:solidFill>
-          <a:ln w="9525">
-            <a:solidFill>
-              <a:srgbClr val="3A3F47"/>
-            </a:solidFill>
-            <a:prstDash val="solid"/>
-          </a:ln>
-        </p:spPr>
-      </p:sp>
-      <p:sp>
-        <p:nvSpPr>
-          <p:cNvPr id="26" name="Rectángulo 25">
-            <a:extLst>
-              <a:ext uri="{FF2B5EF4-FFF2-40B4-BE49-F238E27FC236}">
-                <a16:creationId xmlns:a16="http://schemas.microsoft.com/office/drawing/2014/main" id="{F852ED95-C8DC-4C66-A75B-1EF313C7FF03}"/>
-              </a:ext>
-            </a:extLst>
-          </p:cNvPr>
-          <p:cNvSpPr>
-            <a:spLocks noGrp="1"/>
-          </p:cNvSpPr>
-          <p:nvPr/>
-        </p:nvSpPr>
-        <p:spPr>
-          <a:xfrm>
-            <a:off x="8477250" y="4095750"/>
-            <a:ext cx="47625" cy="1066800"/>
-          </a:xfrm>
-          <a:prstGeom prst="rect">
-            <a:avLst/>
-          </a:prstGeom>
-          <a:solidFill>
-            <a:srgbClr val="F28C28"/>
-          </a:solidFill>
-          <a:ln w="0">
-            <a:solidFill>
-              <a:srgbClr val="F28C28"/>
-            </a:solidFill>
-            <a:prstDash val="solid"/>
-          </a:ln>
-        </p:spPr>
-      </p:sp>
-      <p:sp>
-        <p:nvSpPr>
-          <p:cNvPr id="27" name="Rectángulo 26">
-            <a:extLst>
-              <a:ext uri="{FF2B5EF4-FFF2-40B4-BE49-F238E27FC236}">
-                <a16:creationId xmlns:a16="http://schemas.microsoft.com/office/drawing/2014/main" id="{A2B71D66-0270-443F-853B-F22DBB1FAB53}"/>
-              </a:ext>
-            </a:extLst>
-          </p:cNvPr>
-          <p:cNvSpPr>
-            <a:spLocks noGrp="1"/>
-          </p:cNvSpPr>
-          <p:nvPr/>
-        </p:nvSpPr>
-        <p:spPr>
-          <a:xfrm>
-            <a:off x="8648700" y="4248150"/>
-            <a:ext cx="2095500" cy="247650"/>
-          </a:xfrm>
-          <a:prstGeom prst="rect">
-            <a:avLst/>
-          </a:prstGeom>
-          <a:noFill/>
-          <a:ln w="0">
-            <a:noFill/>
-            <a:prstDash val="solid"/>
-          </a:ln>
-        </p:spPr>
-        <p:txBody>
-          <a:bodyPr wrap="square" lIns="0" tIns="0" rIns="0" bIns="0" anchor="t"/>
-          <a:lstStyle/>
-          <a:p>
-            <a:pPr algn="l">
-              <a:lnSpc>
-                <a:spcPct val="108000"/>
-              </a:lnSpc>
-              <a:buNone/>
-              <a:defRPr sz="1350" b="1">
-                <a:solidFill>
-                  <a:srgbClr val="F3F4F6"/>
-                </a:solidFill>
-                <a:latin typeface="Calibri"/>
-                <a:ea typeface="Calibri"/>
-                <a:cs typeface="Calibri"/>
-              </a:defRPr>
-            </a:pPr>
-            <a:r>
-              <a:rPr lang="es-ES_tradnl" sz="1350" b="1">
-                <a:solidFill>
-                  <a:srgbClr val="F3F4F6"/>
-                </a:solidFill>
-                <a:latin typeface="Calibri"/>
-                <a:ea typeface="Calibri"/>
-                <a:cs typeface="Calibri"/>
-              </a:rPr>
-              <a:t>Orden operativo</a:t>
-            </a:r>
-          </a:p>
-        </p:txBody>
-      </p:sp>
-      <p:sp>
-        <p:nvSpPr>
-          <p:cNvPr id="28" name="Rectángulo 27">
-            <a:extLst>
-              <a:ext uri="{FF2B5EF4-FFF2-40B4-BE49-F238E27FC236}">
-                <a16:creationId xmlns:a16="http://schemas.microsoft.com/office/drawing/2014/main" id="{8F5E9F00-199E-4B91-A361-DAC5783BA7C0}"/>
-              </a:ext>
-            </a:extLst>
-          </p:cNvPr>
-          <p:cNvSpPr>
-            <a:spLocks noGrp="1"/>
-          </p:cNvSpPr>
-          <p:nvPr/>
-        </p:nvSpPr>
-        <p:spPr>
-          <a:xfrm>
-            <a:off x="8648700" y="4552950"/>
-            <a:ext cx="2057400" cy="514350"/>
-          </a:xfrm>
-          <a:prstGeom prst="rect">
-            <a:avLst/>
-          </a:prstGeom>
-          <a:noFill/>
-          <a:ln w="0">
-            <a:noFill/>
-            <a:prstDash val="solid"/>
-          </a:ln>
-        </p:spPr>
-        <p:txBody>
-          <a:bodyPr wrap="square" lIns="0" tIns="0" rIns="0" bIns="0" anchor="t"/>
-          <a:lstStyle/>
-          <a:p>
-            <a:pPr algn="l">
-              <a:lnSpc>
-                <a:spcPct val="114000"/>
-              </a:lnSpc>
-              <a:buNone/>
-              <a:defRPr sz="938" b="0">
-                <a:solidFill>
-                  <a:srgbClr val="B8BEC8"/>
-                </a:solidFill>
-                <a:latin typeface="Calibri"/>
-                <a:ea typeface="Calibri"/>
-                <a:cs typeface="Calibri"/>
-              </a:defRPr>
-            </a:pPr>
-            <a:r>
-              <a:rPr lang="es-ES_tradnl" sz="938" b="0">
-                <a:solidFill>
-                  <a:srgbClr val="B8BEC8"/>
-                </a:solidFill>
-                <a:latin typeface="Calibri"/>
-                <a:ea typeface="Calibri"/>
-                <a:cs typeface="Calibri"/>
-              </a:rPr>
-              <a:t>Envia en orden inverso al Excel para conservar la pila fisica.</a:t>
-            </a:r>
-          </a:p>
-        </p:txBody>
-      </p:sp>
-      <p:sp>
-        <p:nvSpPr>
-          <p:cNvPr id="29" name="Rectángulo 28">
-            <a:extLst>
-              <a:ext uri="{FF2B5EF4-FFF2-40B4-BE49-F238E27FC236}">
-                <a16:creationId xmlns:a16="http://schemas.microsoft.com/office/drawing/2014/main" id="{3E69F1A1-9EF4-411B-9EF4-8E8E6308795E}"/>
+                <a16:creationId xmlns:a16="http://schemas.microsoft.com/office/drawing/2014/main" id="{BBE366D6-91FE-46A8-B3EC-EC1BC112F27A}"/>
               </a:ext>
             </a:extLst>
           </p:cNvPr>
@@ -16692,10 +14725,10 @@
       </p:sp>
       <p:sp>
         <p:nvSpPr>
-          <p:cNvPr id="30" name="Rectángulo 29">
-            <a:extLst>
-              <a:ext uri="{FF2B5EF4-FFF2-40B4-BE49-F238E27FC236}">
-                <a16:creationId xmlns:a16="http://schemas.microsoft.com/office/drawing/2014/main" id="{F2FCAF91-3DB9-4755-98FD-56EE80C53EFE}"/>
+          <p:cNvPr id="25" name="Rectángulo 24">
+            <a:extLst>
+              <a:ext uri="{FF2B5EF4-FFF2-40B4-BE49-F238E27FC236}">
+                <a16:creationId xmlns:a16="http://schemas.microsoft.com/office/drawing/2014/main" id="{3EB2AAE8-07CC-4EA7-A271-3416883165A6}"/>
               </a:ext>
             </a:extLst>
           </p:cNvPr>
@@ -16745,7 +14778,7 @@
                 <a:ea typeface="Calibri"/>
                 <a:cs typeface="Calibri"/>
               </a:rPr>
-              <a:t>09</a:t>
+              <a:t>10</a:t>
             </a:r>
           </a:p>
         </p:txBody>
@@ -16753,7 +14786,7 @@
     </p:spTree>
     <p:extLst>
       <p:ext uri="{BB962C8B-B14F-4D97-AF65-F5344CB8AC3E}">
-        <p14:creationId xmlns:p14="http://schemas.microsoft.com/office/powerpoint/2010/main" val="1548908400"/>
+        <p14:creationId xmlns:p14="http://schemas.microsoft.com/office/powerpoint/2010/main" val="965332522"/>
       </p:ext>
     </p:extLst>
   </p:cSld>

--- a/docs/presentacion/Presentacion_RMC_MockupTool.pptx
+++ b/docs/presentacion/Presentacion_RMC_MockupTool.pptx
@@ -5,7 +5,7 @@
     <p:sldMasterId id="2147483648" r:id="rId1"/>
   </p:sldMasterIdLst>
   <p:notesMasterIdLst>
-    <p:notesMasterId r:id="rId12"/>
+    <p:notesMasterId r:id="rId11"/>
   </p:notesMasterIdLst>
   <p:sldIdLst>
     <p:sldId id="256" r:id="rId2"/>
@@ -16,8 +16,7 @@
     <p:sldId id="261" r:id="rId7"/>
     <p:sldId id="262" r:id="rId8"/>
     <p:sldId id="264" r:id="rId9"/>
-    <p:sldId id="265" r:id="rId10"/>
-    <p:sldId id="266" r:id="rId11"/>
+    <p:sldId id="266" r:id="rId10"/>
   </p:sldIdLst>
   <p:sldSz cx="12192000" cy="6858000"/>
   <p:notesSz cx="6858000" cy="9144000"/>
@@ -377,88 +376,6 @@
 </p:notes>
 </file>
 
-<file path=ppt/notesSlides/notesSlide10.xml><?xml version="1.0" encoding="utf-8"?>
-<p:notes xmlns:a="http://schemas.openxmlformats.org/drawingml/2006/main" xmlns:r="http://schemas.openxmlformats.org/officeDocument/2006/relationships" xmlns:p="http://schemas.openxmlformats.org/presentationml/2006/main">
-  <p:cSld>
-    <p:spTree>
-      <p:nvGrpSpPr>
-        <p:cNvPr id="1" name=""/>
-        <p:cNvGrpSpPr/>
-        <p:nvPr/>
-      </p:nvGrpSpPr>
-      <p:grpSpPr>
-        <a:xfrm>
-          <a:off x="0" y="0"/>
-          <a:ext cx="0" cy="0"/>
-          <a:chOff x="0" y="0"/>
-          <a:chExt cx="0" cy="0"/>
-        </a:xfrm>
-      </p:grpSpPr>
-      <p:sp>
-        <p:nvSpPr>
-          <p:cNvPr id="2" name="Slide Image Placeholder 1"/>
-          <p:cNvSpPr>
-            <a:spLocks noGrp="1" noRot="1" noChangeAspect="1"/>
-          </p:cNvSpPr>
-          <p:nvPr>
-            <p:ph type="sldImg"/>
-          </p:nvPr>
-        </p:nvSpPr>
-        <p:spPr/>
-      </p:sp>
-      <p:sp>
-        <p:nvSpPr>
-          <p:cNvPr id="3" name="Notes Placeholder 2"/>
-          <p:cNvSpPr>
-            <a:spLocks noGrp="1"/>
-          </p:cNvSpPr>
-          <p:nvPr>
-            <p:ph type="body" idx="1"/>
-          </p:nvPr>
-        </p:nvSpPr>
-        <p:spPr/>
-        <p:txBody>
-          <a:bodyPr/>
-          <a:lstStyle/>
-          <a:p>
-            <a:r>
-              <a:t>Cerrar con la idea de evidencia recuperable: archivo, ruta, clave y estado.</a:t>
-            </a:r>
-          </a:p>
-          <a:p>
-            <a:r>
-              <a:t>Las mejoras abiertas son oportunidades, no trabajo ya implementado.</a:t>
-            </a:r>
-          </a:p>
-        </p:txBody>
-      </p:sp>
-      <p:sp>
-        <p:nvSpPr>
-          <p:cNvPr id="4" name="Slide Number Placeholder 3"/>
-          <p:cNvSpPr>
-            <a:spLocks noGrp="1"/>
-          </p:cNvSpPr>
-          <p:nvPr>
-            <p:ph type="sldNum" idx="5"/>
-          </p:nvPr>
-        </p:nvSpPr>
-        <p:spPr/>
-        <p:txBody>
-          <a:bodyPr/>
-          <a:lstStyle/>
-          <a:p>
-            <a:endParaRPr/>
-          </a:p>
-        </p:txBody>
-      </p:sp>
-    </p:spTree>
-  </p:cSld>
-  <p:clrMapOvr>
-    <a:masterClrMapping/>
-  </p:clrMapOvr>
-</p:notes>
-</file>
-
 <file path=ppt/notesSlides/notesSlide2.xml><?xml version="1.0" encoding="utf-8"?>
 <p:notes xmlns:a="http://schemas.openxmlformats.org/drawingml/2006/main" xmlns:r="http://schemas.openxmlformats.org/officeDocument/2006/relationships" xmlns:p="http://schemas.openxmlformats.org/presentationml/2006/main">
   <p:cSld>
@@ -1172,12 +1089,12 @@
           <a:lstStyle/>
           <a:p>
             <a:r>
-              <a:t>Esta slide debe calmar la preocupacion de mezcla entre repos.</a:t>
-            </a:r>
-          </a:p>
-          <a:p>
-            <a:r>
-              <a:t>La integracion es por la base central y campos persistidos, no por acoplar logica.</a:t>
+              <a:t>Cerrar con la idea de evidencia recuperable: archivo, ruta, clave y estado.</a:t>
+            </a:r>
+          </a:p>
+          <a:p>
+            <a:r>
+              <a:t>Las mejoras abiertas son oportunidades, no trabajo ya implementado.</a:t>
             </a:r>
           </a:p>
         </p:txBody>
@@ -2275,1458 +2192,6 @@
 </p:sld>
 </file>
 
-<file path=ppt/slides/slide10.xml><?xml version="1.0" encoding="utf-8"?>
-<p:sld xmlns:a="http://schemas.openxmlformats.org/drawingml/2006/main" xmlns:r="http://schemas.openxmlformats.org/officeDocument/2006/relationships" xmlns:p="http://schemas.openxmlformats.org/presentationml/2006/main">
-  <p:cSld>
-    <p:bg>
-      <p:bgPr>
-        <a:solidFill>
-          <a:srgbClr val="1F1F20"/>
-        </a:solidFill>
-        <a:effectLst/>
-      </p:bgPr>
-    </p:bg>
-    <p:spTree>
-      <p:nvGrpSpPr>
-        <p:cNvPr id="1" name=""/>
-        <p:cNvGrpSpPr/>
-        <p:nvPr/>
-      </p:nvGrpSpPr>
-      <p:grpSpPr>
-        <a:xfrm>
-          <a:off x="0" y="0"/>
-          <a:ext cx="0" cy="0"/>
-          <a:chOff x="0" y="0"/>
-          <a:chExt cx="0" cy="0"/>
-        </a:xfrm>
-      </p:grpSpPr>
-      <p:sp>
-        <p:nvSpPr>
-          <p:cNvPr id="28" name="Rectángulo 27">
-            <a:extLst>
-              <a:ext uri="{FF2B5EF4-FFF2-40B4-BE49-F238E27FC236}">
-                <a16:creationId xmlns:a16="http://schemas.microsoft.com/office/drawing/2014/main" id="{014C88B9-B93A-4509-9F92-6D4A3E9B3E46}"/>
-              </a:ext>
-            </a:extLst>
-          </p:cNvPr>
-          <p:cNvSpPr>
-            <a:spLocks noGrp="1"/>
-          </p:cNvSpPr>
-          <p:nvPr/>
-        </p:nvSpPr>
-        <p:spPr>
-          <a:xfrm>
-            <a:off x="0" y="0"/>
-            <a:ext cx="171450" cy="6858000"/>
-          </a:xfrm>
-          <a:prstGeom prst="rect">
-            <a:avLst/>
-          </a:prstGeom>
-          <a:solidFill>
-            <a:srgbClr val="BD1F36"/>
-          </a:solidFill>
-          <a:ln w="0">
-            <a:solidFill>
-              <a:srgbClr val="BD1F36"/>
-            </a:solidFill>
-            <a:prstDash val="solid"/>
-          </a:ln>
-        </p:spPr>
-      </p:sp>
-      <p:sp>
-        <p:nvSpPr>
-          <p:cNvPr id="2" name="Rectángulo 1">
-            <a:extLst>
-              <a:ext uri="{FF2B5EF4-FFF2-40B4-BE49-F238E27FC236}">
-                <a16:creationId xmlns:a16="http://schemas.microsoft.com/office/drawing/2014/main" id="{E933A7B0-81E5-4531-B97F-B1C335F4D7B9}"/>
-              </a:ext>
-            </a:extLst>
-          </p:cNvPr>
-          <p:cNvSpPr>
-            <a:spLocks noGrp="1"/>
-          </p:cNvSpPr>
-          <p:nvPr/>
-        </p:nvSpPr>
-        <p:spPr>
-          <a:xfrm>
-            <a:off x="666750" y="533400"/>
-            <a:ext cx="1143000" cy="190500"/>
-          </a:xfrm>
-          <a:prstGeom prst="rect">
-            <a:avLst/>
-          </a:prstGeom>
-          <a:noFill/>
-          <a:ln w="0">
-            <a:noFill/>
-            <a:prstDash val="solid"/>
-          </a:ln>
-        </p:spPr>
-        <p:txBody>
-          <a:bodyPr wrap="square" lIns="0" tIns="0" rIns="0" bIns="0" anchor="t"/>
-          <a:lstStyle/>
-          <a:p>
-            <a:pPr algn="l">
-              <a:lnSpc>
-                <a:spcPct val="108000"/>
-              </a:lnSpc>
-              <a:buNone/>
-              <a:defRPr sz="825" b="1">
-                <a:solidFill>
-                  <a:srgbClr val="7D8592"/>
-                </a:solidFill>
-                <a:latin typeface="Calibri"/>
-                <a:ea typeface="Calibri"/>
-                <a:cs typeface="Calibri"/>
-              </a:defRPr>
-            </a:pPr>
-            <a:r>
-              <a:rPr lang="es-ES_tradnl" sz="825" b="1">
-                <a:solidFill>
-                  <a:srgbClr val="7D8592"/>
-                </a:solidFill>
-                <a:latin typeface="Calibri"/>
-                <a:ea typeface="Calibri"/>
-                <a:cs typeface="Calibri"/>
-              </a:rPr>
-              <a:t>CIERRE</a:t>
-            </a:r>
-          </a:p>
-        </p:txBody>
-      </p:sp>
-      <p:sp>
-        <p:nvSpPr>
-          <p:cNvPr id="3" name="Rectángulo 2">
-            <a:extLst>
-              <a:ext uri="{FF2B5EF4-FFF2-40B4-BE49-F238E27FC236}">
-                <a16:creationId xmlns:a16="http://schemas.microsoft.com/office/drawing/2014/main" id="{6E82F44F-06EC-494D-B910-D182A7B1395A}"/>
-              </a:ext>
-            </a:extLst>
-          </p:cNvPr>
-          <p:cNvSpPr>
-            <a:spLocks noGrp="1"/>
-          </p:cNvSpPr>
-          <p:nvPr/>
-        </p:nvSpPr>
-        <p:spPr>
-          <a:xfrm>
-            <a:off x="666750" y="1066800"/>
-            <a:ext cx="6667500" cy="895350"/>
-          </a:xfrm>
-          <a:prstGeom prst="rect">
-            <a:avLst/>
-          </a:prstGeom>
-          <a:noFill/>
-          <a:ln w="0">
-            <a:noFill/>
-            <a:prstDash val="solid"/>
-          </a:ln>
-        </p:spPr>
-        <p:txBody>
-          <a:bodyPr wrap="square" lIns="0" tIns="0" rIns="0" bIns="0" anchor="t"/>
-          <a:lstStyle/>
-          <a:p>
-            <a:pPr algn="l">
-              <a:lnSpc>
-                <a:spcPct val="108000"/>
-              </a:lnSpc>
-              <a:buNone/>
-              <a:defRPr sz="2700" b="1">
-                <a:solidFill>
-                  <a:srgbClr val="F3F4F6"/>
-                </a:solidFill>
-                <a:latin typeface="Calibri"/>
-                <a:ea typeface="Calibri"/>
-                <a:cs typeface="Calibri"/>
-              </a:defRPr>
-            </a:pPr>
-            <a:r>
-              <a:rPr lang="es-ES_tradnl" sz="2700" b="1">
-                <a:solidFill>
-                  <a:srgbClr val="F3F4F6"/>
-                </a:solidFill>
-                <a:latin typeface="Calibri"/>
-                <a:ea typeface="Calibri"/>
-                <a:cs typeface="Calibri"/>
-              </a:rPr>
-              <a:t>MockupTool convierte revision manual en evidencia visual recuperable.</a:t>
-            </a:r>
-          </a:p>
-        </p:txBody>
-      </p:sp>
-      <p:sp>
-        <p:nvSpPr>
-          <p:cNvPr id="4" name="Rectángulo redondeado 3">
-            <a:extLst>
-              <a:ext uri="{FF2B5EF4-FFF2-40B4-BE49-F238E27FC236}">
-                <a16:creationId xmlns:a16="http://schemas.microsoft.com/office/drawing/2014/main" id="{564C223B-D1EE-4BB3-8869-BE2B4F33505F}"/>
-              </a:ext>
-            </a:extLst>
-          </p:cNvPr>
-          <p:cNvSpPr>
-            <a:spLocks noGrp="1"/>
-          </p:cNvSpPr>
-          <p:nvPr/>
-        </p:nvSpPr>
-        <p:spPr>
-          <a:xfrm>
-            <a:off x="781050" y="2514600"/>
-            <a:ext cx="2381250" cy="990600"/>
-          </a:xfrm>
-          <a:prstGeom prst="roundRect">
-            <a:avLst>
-              <a:gd name="adj" fmla="val 7692"/>
-            </a:avLst>
-          </a:prstGeom>
-          <a:solidFill>
-            <a:srgbClr val="2B2F35"/>
-          </a:solidFill>
-          <a:ln w="9525">
-            <a:solidFill>
-              <a:srgbClr val="3A3F47"/>
-            </a:solidFill>
-            <a:prstDash val="solid"/>
-          </a:ln>
-        </p:spPr>
-      </p:sp>
-      <p:sp>
-        <p:nvSpPr>
-          <p:cNvPr id="5" name="Rectángulo 4">
-            <a:extLst>
-              <a:ext uri="{FF2B5EF4-FFF2-40B4-BE49-F238E27FC236}">
-                <a16:creationId xmlns:a16="http://schemas.microsoft.com/office/drawing/2014/main" id="{15678DC5-749B-470F-8815-68AAF14CEE70}"/>
-              </a:ext>
-            </a:extLst>
-          </p:cNvPr>
-          <p:cNvSpPr>
-            <a:spLocks noGrp="1"/>
-          </p:cNvSpPr>
-          <p:nvPr/>
-        </p:nvSpPr>
-        <p:spPr>
-          <a:xfrm>
-            <a:off x="781050" y="2514600"/>
-            <a:ext cx="47625" cy="990600"/>
-          </a:xfrm>
-          <a:prstGeom prst="rect">
-            <a:avLst/>
-          </a:prstGeom>
-          <a:solidFill>
-            <a:srgbClr val="BD1F36"/>
-          </a:solidFill>
-          <a:ln w="0">
-            <a:solidFill>
-              <a:srgbClr val="BD1F36"/>
-            </a:solidFill>
-            <a:prstDash val="solid"/>
-          </a:ln>
-        </p:spPr>
-      </p:sp>
-      <p:sp>
-        <p:nvSpPr>
-          <p:cNvPr id="6" name="Rectángulo 5">
-            <a:extLst>
-              <a:ext uri="{FF2B5EF4-FFF2-40B4-BE49-F238E27FC236}">
-                <a16:creationId xmlns:a16="http://schemas.microsoft.com/office/drawing/2014/main" id="{50A226D6-6E71-4F4C-A8AA-EB7D91A61751}"/>
-              </a:ext>
-            </a:extLst>
-          </p:cNvPr>
-          <p:cNvSpPr>
-            <a:spLocks noGrp="1"/>
-          </p:cNvSpPr>
-          <p:nvPr/>
-        </p:nvSpPr>
-        <p:spPr>
-          <a:xfrm>
-            <a:off x="952500" y="2667000"/>
-            <a:ext cx="2095500" cy="247650"/>
-          </a:xfrm>
-          <a:prstGeom prst="rect">
-            <a:avLst/>
-          </a:prstGeom>
-          <a:noFill/>
-          <a:ln w="0">
-            <a:noFill/>
-            <a:prstDash val="solid"/>
-          </a:ln>
-        </p:spPr>
-        <p:txBody>
-          <a:bodyPr wrap="square" lIns="0" tIns="0" rIns="0" bIns="0" anchor="t"/>
-          <a:lstStyle/>
-          <a:p>
-            <a:pPr algn="l">
-              <a:lnSpc>
-                <a:spcPct val="108000"/>
-              </a:lnSpc>
-              <a:buNone/>
-              <a:defRPr sz="1350" b="1">
-                <a:solidFill>
-                  <a:srgbClr val="F3F4F6"/>
-                </a:solidFill>
-                <a:latin typeface="Calibri"/>
-                <a:ea typeface="Calibri"/>
-                <a:cs typeface="Calibri"/>
-              </a:defRPr>
-            </a:pPr>
-            <a:r>
-              <a:rPr lang="es-ES_tradnl" sz="1350" b="1">
-                <a:solidFill>
-                  <a:srgbClr val="F3F4F6"/>
-                </a:solidFill>
-                <a:latin typeface="Calibri"/>
-                <a:ea typeface="Calibri"/>
-                <a:cs typeface="Calibri"/>
-              </a:rPr>
-              <a:t>Produccion</a:t>
-            </a:r>
-          </a:p>
-        </p:txBody>
-      </p:sp>
-      <p:sp>
-        <p:nvSpPr>
-          <p:cNvPr id="7" name="Rectángulo 6">
-            <a:extLst>
-              <a:ext uri="{FF2B5EF4-FFF2-40B4-BE49-F238E27FC236}">
-                <a16:creationId xmlns:a16="http://schemas.microsoft.com/office/drawing/2014/main" id="{A39D8C00-D04D-436B-B8C9-62685D15BE2C}"/>
-              </a:ext>
-            </a:extLst>
-          </p:cNvPr>
-          <p:cNvSpPr>
-            <a:spLocks noGrp="1"/>
-          </p:cNvSpPr>
-          <p:nvPr/>
-        </p:nvSpPr>
-        <p:spPr>
-          <a:xfrm>
-            <a:off x="952500" y="2971800"/>
-            <a:ext cx="2057400" cy="438150"/>
-          </a:xfrm>
-          <a:prstGeom prst="rect">
-            <a:avLst/>
-          </a:prstGeom>
-          <a:noFill/>
-          <a:ln w="0">
-            <a:noFill/>
-            <a:prstDash val="solid"/>
-          </a:ln>
-        </p:spPr>
-        <p:txBody>
-          <a:bodyPr wrap="square" lIns="0" tIns="0" rIns="0" bIns="0" anchor="t"/>
-          <a:lstStyle/>
-          <a:p>
-            <a:pPr algn="l">
-              <a:lnSpc>
-                <a:spcPct val="114000"/>
-              </a:lnSpc>
-              <a:buNone/>
-              <a:defRPr sz="938" b="0">
-                <a:solidFill>
-                  <a:srgbClr val="B8BEC8"/>
-                </a:solidFill>
-                <a:latin typeface="Calibri"/>
-                <a:ea typeface="Calibri"/>
-                <a:cs typeface="Calibri"/>
-              </a:defRPr>
-            </a:pPr>
-            <a:r>
-              <a:rPr lang="es-ES_tradnl" sz="938" b="0">
-                <a:solidFill>
-                  <a:srgbClr val="B8BEC8"/>
-                </a:solidFill>
-                <a:latin typeface="Calibri"/>
-                <a:ea typeface="Calibri"/>
-                <a:cs typeface="Calibri"/>
-              </a:rPr>
-              <a:t>Sabe que falta, que existe y que se omite.</a:t>
-            </a:r>
-          </a:p>
-        </p:txBody>
-      </p:sp>
-      <p:sp>
-        <p:nvSpPr>
-          <p:cNvPr id="8" name="Rectángulo redondeado 7">
-            <a:extLst>
-              <a:ext uri="{FF2B5EF4-FFF2-40B4-BE49-F238E27FC236}">
-                <a16:creationId xmlns:a16="http://schemas.microsoft.com/office/drawing/2014/main" id="{0D8BAB8A-9964-41F3-8934-8DADCAB3BFAC}"/>
-              </a:ext>
-            </a:extLst>
-          </p:cNvPr>
-          <p:cNvSpPr>
-            <a:spLocks noGrp="1"/>
-          </p:cNvSpPr>
-          <p:nvPr/>
-        </p:nvSpPr>
-        <p:spPr>
-          <a:xfrm>
-            <a:off x="3638550" y="2514600"/>
-            <a:ext cx="2381250" cy="990600"/>
-          </a:xfrm>
-          <a:prstGeom prst="roundRect">
-            <a:avLst>
-              <a:gd name="adj" fmla="val 7692"/>
-            </a:avLst>
-          </a:prstGeom>
-          <a:solidFill>
-            <a:srgbClr val="2B2F35"/>
-          </a:solidFill>
-          <a:ln w="9525">
-            <a:solidFill>
-              <a:srgbClr val="3A3F47"/>
-            </a:solidFill>
-            <a:prstDash val="solid"/>
-          </a:ln>
-        </p:spPr>
-      </p:sp>
-      <p:sp>
-        <p:nvSpPr>
-          <p:cNvPr id="9" name="Rectángulo 8">
-            <a:extLst>
-              <a:ext uri="{FF2B5EF4-FFF2-40B4-BE49-F238E27FC236}">
-                <a16:creationId xmlns:a16="http://schemas.microsoft.com/office/drawing/2014/main" id="{9890EA00-3444-4D47-B7C2-96DBFC435C3E}"/>
-              </a:ext>
-            </a:extLst>
-          </p:cNvPr>
-          <p:cNvSpPr>
-            <a:spLocks noGrp="1"/>
-          </p:cNvSpPr>
-          <p:nvPr/>
-        </p:nvSpPr>
-        <p:spPr>
-          <a:xfrm>
-            <a:off x="3638550" y="2514600"/>
-            <a:ext cx="47625" cy="990600"/>
-          </a:xfrm>
-          <a:prstGeom prst="rect">
-            <a:avLst/>
-          </a:prstGeom>
-          <a:solidFill>
-            <a:srgbClr val="2D7FF9"/>
-          </a:solidFill>
-          <a:ln w="0">
-            <a:solidFill>
-              <a:srgbClr val="2D7FF9"/>
-            </a:solidFill>
-            <a:prstDash val="solid"/>
-          </a:ln>
-        </p:spPr>
-      </p:sp>
-      <p:sp>
-        <p:nvSpPr>
-          <p:cNvPr id="10" name="Rectángulo 9">
-            <a:extLst>
-              <a:ext uri="{FF2B5EF4-FFF2-40B4-BE49-F238E27FC236}">
-                <a16:creationId xmlns:a16="http://schemas.microsoft.com/office/drawing/2014/main" id="{9A283BB3-B6C6-463B-B41D-9E836D01261F}"/>
-              </a:ext>
-            </a:extLst>
-          </p:cNvPr>
-          <p:cNvSpPr>
-            <a:spLocks noGrp="1"/>
-          </p:cNvSpPr>
-          <p:nvPr/>
-        </p:nvSpPr>
-        <p:spPr>
-          <a:xfrm>
-            <a:off x="3810000" y="2667000"/>
-            <a:ext cx="2095500" cy="247650"/>
-          </a:xfrm>
-          <a:prstGeom prst="rect">
-            <a:avLst/>
-          </a:prstGeom>
-          <a:noFill/>
-          <a:ln w="0">
-            <a:noFill/>
-            <a:prstDash val="solid"/>
-          </a:ln>
-        </p:spPr>
-        <p:txBody>
-          <a:bodyPr wrap="square" lIns="0" tIns="0" rIns="0" bIns="0" anchor="t"/>
-          <a:lstStyle/>
-          <a:p>
-            <a:pPr algn="l">
-              <a:lnSpc>
-                <a:spcPct val="108000"/>
-              </a:lnSpc>
-              <a:buNone/>
-              <a:defRPr sz="1350" b="1">
-                <a:solidFill>
-                  <a:srgbClr val="F3F4F6"/>
-                </a:solidFill>
-                <a:latin typeface="Calibri"/>
-                <a:ea typeface="Calibri"/>
-                <a:cs typeface="Calibri"/>
-              </a:defRPr>
-            </a:pPr>
-            <a:r>
-              <a:rPr lang="es-ES_tradnl" sz="1350" b="1">
-                <a:solidFill>
-                  <a:srgbClr val="F3F4F6"/>
-                </a:solidFill>
-                <a:latin typeface="Calibri"/>
-                <a:ea typeface="Calibri"/>
-                <a:cs typeface="Calibri"/>
-              </a:rPr>
-              <a:t>Diseno</a:t>
-            </a:r>
-          </a:p>
-        </p:txBody>
-      </p:sp>
-      <p:sp>
-        <p:nvSpPr>
-          <p:cNvPr id="11" name="Rectángulo 10">
-            <a:extLst>
-              <a:ext uri="{FF2B5EF4-FFF2-40B4-BE49-F238E27FC236}">
-                <a16:creationId xmlns:a16="http://schemas.microsoft.com/office/drawing/2014/main" id="{1D6EC483-A091-4062-9DC6-CA2D57060748}"/>
-              </a:ext>
-            </a:extLst>
-          </p:cNvPr>
-          <p:cNvSpPr>
-            <a:spLocks noGrp="1"/>
-          </p:cNvSpPr>
-          <p:nvPr/>
-        </p:nvSpPr>
-        <p:spPr>
-          <a:xfrm>
-            <a:off x="3810000" y="2971800"/>
-            <a:ext cx="2057400" cy="438150"/>
-          </a:xfrm>
-          <a:prstGeom prst="rect">
-            <a:avLst/>
-          </a:prstGeom>
-          <a:noFill/>
-          <a:ln w="0">
-            <a:noFill/>
-            <a:prstDash val="solid"/>
-          </a:ln>
-        </p:spPr>
-        <p:txBody>
-          <a:bodyPr wrap="square" lIns="0" tIns="0" rIns="0" bIns="0" anchor="t"/>
-          <a:lstStyle/>
-          <a:p>
-            <a:pPr algn="l">
-              <a:lnSpc>
-                <a:spcPct val="114000"/>
-              </a:lnSpc>
-              <a:buNone/>
-              <a:defRPr sz="938" b="0">
-                <a:solidFill>
-                  <a:srgbClr val="B8BEC8"/>
-                </a:solidFill>
-                <a:latin typeface="Calibri"/>
-                <a:ea typeface="Calibri"/>
-                <a:cs typeface="Calibri"/>
-              </a:defRPr>
-            </a:pPr>
-            <a:r>
-              <a:rPr lang="es-ES_tradnl" sz="938" b="0">
-                <a:solidFill>
-                  <a:srgbClr val="B8BEC8"/>
-                </a:solidFill>
-                <a:latin typeface="Calibri"/>
-                <a:ea typeface="Calibri"/>
-                <a:cs typeface="Calibri"/>
-              </a:rPr>
-              <a:t>Revisa datos anotados sin abrir multiples fuentes.</a:t>
-            </a:r>
-          </a:p>
-        </p:txBody>
-      </p:sp>
-      <p:sp>
-        <p:nvSpPr>
-          <p:cNvPr id="12" name="Rectángulo redondeado 11">
-            <a:extLst>
-              <a:ext uri="{FF2B5EF4-FFF2-40B4-BE49-F238E27FC236}">
-                <a16:creationId xmlns:a16="http://schemas.microsoft.com/office/drawing/2014/main" id="{D6B94287-7CE9-4160-938A-E82C2991B378}"/>
-              </a:ext>
-            </a:extLst>
-          </p:cNvPr>
-          <p:cNvSpPr>
-            <a:spLocks noGrp="1"/>
-          </p:cNvSpPr>
-          <p:nvPr/>
-        </p:nvSpPr>
-        <p:spPr>
-          <a:xfrm>
-            <a:off x="6496050" y="2514600"/>
-            <a:ext cx="2381250" cy="990600"/>
-          </a:xfrm>
-          <a:prstGeom prst="roundRect">
-            <a:avLst>
-              <a:gd name="adj" fmla="val 7692"/>
-            </a:avLst>
-          </a:prstGeom>
-          <a:solidFill>
-            <a:srgbClr val="2B2F35"/>
-          </a:solidFill>
-          <a:ln w="9525">
-            <a:solidFill>
-              <a:srgbClr val="3A3F47"/>
-            </a:solidFill>
-            <a:prstDash val="solid"/>
-          </a:ln>
-        </p:spPr>
-      </p:sp>
-      <p:sp>
-        <p:nvSpPr>
-          <p:cNvPr id="13" name="Rectángulo 12">
-            <a:extLst>
-              <a:ext uri="{FF2B5EF4-FFF2-40B4-BE49-F238E27FC236}">
-                <a16:creationId xmlns:a16="http://schemas.microsoft.com/office/drawing/2014/main" id="{B2A77FA2-D01C-44AA-A6E8-F025B92B62EC}"/>
-              </a:ext>
-            </a:extLst>
-          </p:cNvPr>
-          <p:cNvSpPr>
-            <a:spLocks noGrp="1"/>
-          </p:cNvSpPr>
-          <p:nvPr/>
-        </p:nvSpPr>
-        <p:spPr>
-          <a:xfrm>
-            <a:off x="6496050" y="2514600"/>
-            <a:ext cx="47625" cy="990600"/>
-          </a:xfrm>
-          <a:prstGeom prst="rect">
-            <a:avLst/>
-          </a:prstGeom>
-          <a:solidFill>
-            <a:srgbClr val="20B26B"/>
-          </a:solidFill>
-          <a:ln w="0">
-            <a:solidFill>
-              <a:srgbClr val="20B26B"/>
-            </a:solidFill>
-            <a:prstDash val="solid"/>
-          </a:ln>
-        </p:spPr>
-      </p:sp>
-      <p:sp>
-        <p:nvSpPr>
-          <p:cNvPr id="14" name="Rectángulo 13">
-            <a:extLst>
-              <a:ext uri="{FF2B5EF4-FFF2-40B4-BE49-F238E27FC236}">
-                <a16:creationId xmlns:a16="http://schemas.microsoft.com/office/drawing/2014/main" id="{73E0DAD5-DD8B-4031-A740-AF62C32310E9}"/>
-              </a:ext>
-            </a:extLst>
-          </p:cNvPr>
-          <p:cNvSpPr>
-            <a:spLocks noGrp="1"/>
-          </p:cNvSpPr>
-          <p:nvPr/>
-        </p:nvSpPr>
-        <p:spPr>
-          <a:xfrm>
-            <a:off x="6667500" y="2667000"/>
-            <a:ext cx="2095500" cy="247650"/>
-          </a:xfrm>
-          <a:prstGeom prst="rect">
-            <a:avLst/>
-          </a:prstGeom>
-          <a:noFill/>
-          <a:ln w="0">
-            <a:noFill/>
-            <a:prstDash val="solid"/>
-          </a:ln>
-        </p:spPr>
-        <p:txBody>
-          <a:bodyPr wrap="square" lIns="0" tIns="0" rIns="0" bIns="0" anchor="t"/>
-          <a:lstStyle/>
-          <a:p>
-            <a:pPr algn="l">
-              <a:lnSpc>
-                <a:spcPct val="108000"/>
-              </a:lnSpc>
-              <a:buNone/>
-              <a:defRPr sz="1350" b="1">
-                <a:solidFill>
-                  <a:srgbClr val="F3F4F6"/>
-                </a:solidFill>
-                <a:latin typeface="Calibri"/>
-                <a:ea typeface="Calibri"/>
-                <a:cs typeface="Calibri"/>
-              </a:defRPr>
-            </a:pPr>
-            <a:r>
-              <a:rPr lang="es-ES_tradnl" sz="1350" b="1">
-                <a:solidFill>
-                  <a:srgbClr val="F3F4F6"/>
-                </a:solidFill>
-                <a:latin typeface="Calibri"/>
-                <a:ea typeface="Calibri"/>
-                <a:cs typeface="Calibri"/>
-              </a:rPr>
-              <a:t>Seguimiento</a:t>
-            </a:r>
-          </a:p>
-        </p:txBody>
-      </p:sp>
-      <p:sp>
-        <p:nvSpPr>
-          <p:cNvPr id="15" name="Rectángulo 14">
-            <a:extLst>
-              <a:ext uri="{FF2B5EF4-FFF2-40B4-BE49-F238E27FC236}">
-                <a16:creationId xmlns:a16="http://schemas.microsoft.com/office/drawing/2014/main" id="{E40717E0-BBC4-4035-AB02-499D15BC2084}"/>
-              </a:ext>
-            </a:extLst>
-          </p:cNvPr>
-          <p:cNvSpPr>
-            <a:spLocks noGrp="1"/>
-          </p:cNvSpPr>
-          <p:nvPr/>
-        </p:nvSpPr>
-        <p:spPr>
-          <a:xfrm>
-            <a:off x="6667500" y="2971800"/>
-            <a:ext cx="2057400" cy="438150"/>
-          </a:xfrm>
-          <a:prstGeom prst="rect">
-            <a:avLst/>
-          </a:prstGeom>
-          <a:noFill/>
-          <a:ln w="0">
-            <a:noFill/>
-            <a:prstDash val="solid"/>
-          </a:ln>
-        </p:spPr>
-        <p:txBody>
-          <a:bodyPr wrap="square" lIns="0" tIns="0" rIns="0" bIns="0" anchor="t"/>
-          <a:lstStyle/>
-          <a:p>
-            <a:pPr algn="l">
-              <a:lnSpc>
-                <a:spcPct val="114000"/>
-              </a:lnSpc>
-              <a:buNone/>
-              <a:defRPr sz="938" b="0">
-                <a:solidFill>
-                  <a:srgbClr val="B8BEC8"/>
-                </a:solidFill>
-                <a:latin typeface="Calibri"/>
-                <a:ea typeface="Calibri"/>
-                <a:cs typeface="Calibri"/>
-              </a:defRPr>
-            </a:pPr>
-            <a:r>
-              <a:rPr lang="es-ES_tradnl" sz="938" b="0">
-                <a:solidFill>
-                  <a:srgbClr val="B8BEC8"/>
-                </a:solidFill>
-                <a:latin typeface="Calibri"/>
-                <a:ea typeface="Calibri"/>
-                <a:cs typeface="Calibri"/>
-              </a:rPr>
-              <a:t>Consulta path, fecha, clave e impreso.</a:t>
-            </a:r>
-          </a:p>
-        </p:txBody>
-      </p:sp>
-      <p:sp>
-        <p:nvSpPr>
-          <p:cNvPr id="16" name="Rectángulo redondeado 15">
-            <a:extLst>
-              <a:ext uri="{FF2B5EF4-FFF2-40B4-BE49-F238E27FC236}">
-                <a16:creationId xmlns:a16="http://schemas.microsoft.com/office/drawing/2014/main" id="{84F555C2-63D8-4949-98BB-8C7FEC3B7EDF}"/>
-              </a:ext>
-            </a:extLst>
-          </p:cNvPr>
-          <p:cNvSpPr>
-            <a:spLocks noGrp="1"/>
-          </p:cNvSpPr>
-          <p:nvPr/>
-        </p:nvSpPr>
-        <p:spPr>
-          <a:xfrm>
-            <a:off x="9353550" y="2514600"/>
-            <a:ext cx="2000250" cy="990600"/>
-          </a:xfrm>
-          <a:prstGeom prst="roundRect">
-            <a:avLst>
-              <a:gd name="adj" fmla="val 7692"/>
-            </a:avLst>
-          </a:prstGeom>
-          <a:solidFill>
-            <a:srgbClr val="2B2F35"/>
-          </a:solidFill>
-          <a:ln w="9525">
-            <a:solidFill>
-              <a:srgbClr val="3A3F47"/>
-            </a:solidFill>
-            <a:prstDash val="solid"/>
-          </a:ln>
-        </p:spPr>
-      </p:sp>
-      <p:sp>
-        <p:nvSpPr>
-          <p:cNvPr id="17" name="Rectángulo 16">
-            <a:extLst>
-              <a:ext uri="{FF2B5EF4-FFF2-40B4-BE49-F238E27FC236}">
-                <a16:creationId xmlns:a16="http://schemas.microsoft.com/office/drawing/2014/main" id="{5AF99CC5-5B6A-42D8-9B76-EBA5661EF653}"/>
-              </a:ext>
-            </a:extLst>
-          </p:cNvPr>
-          <p:cNvSpPr>
-            <a:spLocks noGrp="1"/>
-          </p:cNvSpPr>
-          <p:nvPr/>
-        </p:nvSpPr>
-        <p:spPr>
-          <a:xfrm>
-            <a:off x="9353550" y="2514600"/>
-            <a:ext cx="47625" cy="990600"/>
-          </a:xfrm>
-          <a:prstGeom prst="rect">
-            <a:avLst/>
-          </a:prstGeom>
-          <a:solidFill>
-            <a:srgbClr val="F3C747"/>
-          </a:solidFill>
-          <a:ln w="0">
-            <a:solidFill>
-              <a:srgbClr val="F3C747"/>
-            </a:solidFill>
-            <a:prstDash val="solid"/>
-          </a:ln>
-        </p:spPr>
-      </p:sp>
-      <p:sp>
-        <p:nvSpPr>
-          <p:cNvPr id="18" name="Rectángulo 17">
-            <a:extLst>
-              <a:ext uri="{FF2B5EF4-FFF2-40B4-BE49-F238E27FC236}">
-                <a16:creationId xmlns:a16="http://schemas.microsoft.com/office/drawing/2014/main" id="{7BCB836E-5AF8-48AF-BD5A-B226063B57CC}"/>
-              </a:ext>
-            </a:extLst>
-          </p:cNvPr>
-          <p:cNvSpPr>
-            <a:spLocks noGrp="1"/>
-          </p:cNvSpPr>
-          <p:nvPr/>
-        </p:nvSpPr>
-        <p:spPr>
-          <a:xfrm>
-            <a:off x="9525000" y="2667000"/>
-            <a:ext cx="1714500" cy="247650"/>
-          </a:xfrm>
-          <a:prstGeom prst="rect">
-            <a:avLst/>
-          </a:prstGeom>
-          <a:noFill/>
-          <a:ln w="0">
-            <a:noFill/>
-            <a:prstDash val="solid"/>
-          </a:ln>
-        </p:spPr>
-        <p:txBody>
-          <a:bodyPr wrap="square" lIns="0" tIns="0" rIns="0" bIns="0" anchor="t"/>
-          <a:lstStyle/>
-          <a:p>
-            <a:pPr algn="l">
-              <a:lnSpc>
-                <a:spcPct val="108000"/>
-              </a:lnSpc>
-              <a:buNone/>
-              <a:defRPr sz="1350" b="1">
-                <a:solidFill>
-                  <a:srgbClr val="F3F4F6"/>
-                </a:solidFill>
-                <a:latin typeface="Calibri"/>
-                <a:ea typeface="Calibri"/>
-                <a:cs typeface="Calibri"/>
-              </a:defRPr>
-            </a:pPr>
-            <a:r>
-              <a:rPr lang="es-ES_tradnl" sz="1350" b="1">
-                <a:solidFill>
-                  <a:srgbClr val="F3F4F6"/>
-                </a:solidFill>
-                <a:latin typeface="Calibri"/>
-                <a:ea typeface="Calibri"/>
-                <a:cs typeface="Calibri"/>
-              </a:rPr>
-              <a:t>Control</a:t>
-            </a:r>
-          </a:p>
-        </p:txBody>
-      </p:sp>
-      <p:sp>
-        <p:nvSpPr>
-          <p:cNvPr id="19" name="Rectángulo 18">
-            <a:extLst>
-              <a:ext uri="{FF2B5EF4-FFF2-40B4-BE49-F238E27FC236}">
-                <a16:creationId xmlns:a16="http://schemas.microsoft.com/office/drawing/2014/main" id="{4AA10D1E-1BF5-4D36-9191-68EEC05CB9EA}"/>
-              </a:ext>
-            </a:extLst>
-          </p:cNvPr>
-          <p:cNvSpPr>
-            <a:spLocks noGrp="1"/>
-          </p:cNvSpPr>
-          <p:nvPr/>
-        </p:nvSpPr>
-        <p:spPr>
-          <a:xfrm>
-            <a:off x="9525000" y="2971800"/>
-            <a:ext cx="1676400" cy="438150"/>
-          </a:xfrm>
-          <a:prstGeom prst="rect">
-            <a:avLst/>
-          </a:prstGeom>
-          <a:noFill/>
-          <a:ln w="0">
-            <a:noFill/>
-            <a:prstDash val="solid"/>
-          </a:ln>
-        </p:spPr>
-        <p:txBody>
-          <a:bodyPr wrap="square" lIns="0" tIns="0" rIns="0" bIns="0" anchor="t"/>
-          <a:lstStyle/>
-          <a:p>
-            <a:pPr algn="l">
-              <a:lnSpc>
-                <a:spcPct val="114000"/>
-              </a:lnSpc>
-              <a:buNone/>
-              <a:defRPr sz="938" b="0">
-                <a:solidFill>
-                  <a:srgbClr val="B8BEC8"/>
-                </a:solidFill>
-                <a:latin typeface="Calibri"/>
-                <a:ea typeface="Calibri"/>
-                <a:cs typeface="Calibri"/>
-              </a:defRPr>
-            </a:pPr>
-            <a:r>
-              <a:rPr lang="es-ES_tradnl" sz="938" b="0">
-                <a:solidFill>
-                  <a:srgbClr val="B8BEC8"/>
-                </a:solidFill>
-                <a:latin typeface="Calibri"/>
-                <a:ea typeface="Calibri"/>
-                <a:cs typeface="Calibri"/>
-              </a:rPr>
-              <a:t>Evita duplicados con clave UNIQUE.</a:t>
-            </a:r>
-          </a:p>
-        </p:txBody>
-      </p:sp>
-      <p:sp>
-        <p:nvSpPr>
-          <p:cNvPr id="20" name="Rectángulo 19">
-            <a:extLst>
-              <a:ext uri="{FF2B5EF4-FFF2-40B4-BE49-F238E27FC236}">
-                <a16:creationId xmlns:a16="http://schemas.microsoft.com/office/drawing/2014/main" id="{382BDB34-238E-4D48-AA56-A152FF97A7F7}"/>
-              </a:ext>
-            </a:extLst>
-          </p:cNvPr>
-          <p:cNvSpPr>
-            <a:spLocks noGrp="1"/>
-          </p:cNvSpPr>
-          <p:nvPr/>
-        </p:nvSpPr>
-        <p:spPr>
-          <a:xfrm>
-            <a:off x="800100" y="4362450"/>
-            <a:ext cx="2476500" cy="285750"/>
-          </a:xfrm>
-          <a:prstGeom prst="rect">
-            <a:avLst/>
-          </a:prstGeom>
-          <a:noFill/>
-          <a:ln w="0">
-            <a:noFill/>
-            <a:prstDash val="solid"/>
-          </a:ln>
-        </p:spPr>
-        <p:txBody>
-          <a:bodyPr wrap="square" lIns="0" tIns="0" rIns="0" bIns="0" anchor="t"/>
-          <a:lstStyle/>
-          <a:p>
-            <a:pPr algn="l">
-              <a:lnSpc>
-                <a:spcPct val="108000"/>
-              </a:lnSpc>
-              <a:buNone/>
-              <a:defRPr sz="1725" b="1">
-                <a:solidFill>
-                  <a:srgbClr val="F3F4F6"/>
-                </a:solidFill>
-                <a:latin typeface="Calibri"/>
-                <a:ea typeface="Calibri"/>
-                <a:cs typeface="Calibri"/>
-              </a:defRPr>
-            </a:pPr>
-            <a:r>
-              <a:rPr lang="es-ES_tradnl" sz="1725" b="1">
-                <a:solidFill>
-                  <a:srgbClr val="F3F4F6"/>
-                </a:solidFill>
-                <a:latin typeface="Calibri"/>
-                <a:ea typeface="Calibri"/>
-                <a:cs typeface="Calibri"/>
-              </a:rPr>
-              <a:t>Mejoras abiertas</a:t>
-            </a:r>
-          </a:p>
-        </p:txBody>
-      </p:sp>
-      <p:sp>
-        <p:nvSpPr>
-          <p:cNvPr id="21" name="Rectángulo 20">
-            <a:extLst>
-              <a:ext uri="{FF2B5EF4-FFF2-40B4-BE49-F238E27FC236}">
-                <a16:creationId xmlns:a16="http://schemas.microsoft.com/office/drawing/2014/main" id="{EE670D6E-99F4-45FE-8B1D-38BBD3ECC3E6}"/>
-              </a:ext>
-            </a:extLst>
-          </p:cNvPr>
-          <p:cNvSpPr>
-            <a:spLocks noGrp="1"/>
-          </p:cNvSpPr>
-          <p:nvPr/>
-        </p:nvSpPr>
-        <p:spPr>
-          <a:xfrm>
-            <a:off x="819150" y="4876800"/>
-            <a:ext cx="7239000" cy="1047750"/>
-          </a:xfrm>
-          <a:prstGeom prst="rect">
-            <a:avLst/>
-          </a:prstGeom>
-          <a:noFill/>
-          <a:ln w="0">
-            <a:noFill/>
-            <a:prstDash val="solid"/>
-          </a:ln>
-        </p:spPr>
-        <p:txBody>
-          <a:bodyPr wrap="square" lIns="0" tIns="0" rIns="0" bIns="0" anchor="t"/>
-          <a:lstStyle/>
-          <a:p>
-            <a:pPr algn="l">
-              <a:lnSpc>
-                <a:spcPct val="122000"/>
-              </a:lnSpc>
-              <a:buNone/>
-              <a:defRPr sz="1350" b="0">
-                <a:solidFill>
-                  <a:srgbClr val="B8BEC8"/>
-                </a:solidFill>
-                <a:latin typeface="Calibri"/>
-                <a:ea typeface="Calibri"/>
-                <a:cs typeface="Calibri"/>
-              </a:defRPr>
-            </a:pPr>
-            <a:r>
-              <a:rPr lang="es-ES_tradnl" sz="1350" b="0">
-                <a:solidFill>
-                  <a:srgbClr val="B8BEC8"/>
-                </a:solidFill>
-                <a:latin typeface="Calibri"/>
-                <a:ea typeface="Calibri"/>
-                <a:cs typeface="Calibri"/>
-              </a:rPr>
-              <a:t>1. Separar historial inmutable, assets y print_events.</a:t>
-            </a:r>
-          </a:p>
-          <a:p>
-            <a:pPr algn="l">
-              <a:lnSpc>
-                <a:spcPct val="122000"/>
-              </a:lnSpc>
-              <a:buNone/>
-              <a:defRPr sz="1350" b="0">
-                <a:solidFill>
-                  <a:srgbClr val="B8BEC8"/>
-                </a:solidFill>
-                <a:latin typeface="Calibri"/>
-                <a:ea typeface="Calibri"/>
-                <a:cs typeface="Calibri"/>
-              </a:defRPr>
-            </a:pPr>
-            <a:r>
-              <a:rPr lang="es-ES_tradnl" sz="1350" b="0">
-                <a:solidFill>
-                  <a:srgbClr val="B8BEC8"/>
-                </a:solidFill>
-                <a:latin typeface="Calibri"/>
-                <a:ea typeface="Calibri"/>
-                <a:cs typeface="Calibri"/>
-              </a:rPr>
-              <a:t>2. Completar flujo para fuentes JPG.</a:t>
-            </a:r>
-          </a:p>
-          <a:p>
-            <a:pPr algn="l">
-              <a:lnSpc>
-                <a:spcPct val="122000"/>
-              </a:lnSpc>
-              <a:buNone/>
-              <a:defRPr sz="1350" b="0">
-                <a:solidFill>
-                  <a:srgbClr val="B8BEC8"/>
-                </a:solidFill>
-                <a:latin typeface="Calibri"/>
-                <a:ea typeface="Calibri"/>
-                <a:cs typeface="Calibri"/>
-              </a:defRPr>
-            </a:pPr>
-            <a:r>
-              <a:rPr lang="es-ES_tradnl" sz="1350" b="0">
-                <a:solidFill>
-                  <a:srgbClr val="B8BEC8"/>
-                </a:solidFill>
-                <a:latin typeface="Calibri"/>
-                <a:ea typeface="Calibri"/>
-                <a:cs typeface="Calibri"/>
-              </a:rPr>
-              <a:t>3. Diagnostico agrupado de mockups faltantes.</a:t>
-            </a:r>
-          </a:p>
-          <a:p>
-            <a:pPr algn="l">
-              <a:lnSpc>
-                <a:spcPct val="122000"/>
-              </a:lnSpc>
-              <a:buNone/>
-              <a:defRPr sz="1350" b="0">
-                <a:solidFill>
-                  <a:srgbClr val="B8BEC8"/>
-                </a:solidFill>
-                <a:latin typeface="Calibri"/>
-                <a:ea typeface="Calibri"/>
-                <a:cs typeface="Calibri"/>
-              </a:defRPr>
-            </a:pPr>
-            <a:r>
-              <a:rPr lang="es-ES_tradnl" sz="1350" b="0">
-                <a:solidFill>
-                  <a:srgbClr val="B8BEC8"/>
-                </a:solidFill>
-                <a:latin typeface="Calibri"/>
-                <a:ea typeface="Calibri"/>
-                <a:cs typeface="Calibri"/>
-              </a:rPr>
-              <a:t>4. Consulta visual mas directa desde Control Center.</a:t>
-            </a:r>
-          </a:p>
-        </p:txBody>
-      </p:sp>
-      <p:sp>
-        <p:nvSpPr>
-          <p:cNvPr id="22" name="Rectángulo redondeado 21">
-            <a:extLst>
-              <a:ext uri="{FF2B5EF4-FFF2-40B4-BE49-F238E27FC236}">
-                <a16:creationId xmlns:a16="http://schemas.microsoft.com/office/drawing/2014/main" id="{C6D7BB21-7AD9-41F4-85FD-73070F8BB459}"/>
-              </a:ext>
-            </a:extLst>
-          </p:cNvPr>
-          <p:cNvSpPr>
-            <a:spLocks noGrp="1"/>
-          </p:cNvSpPr>
-          <p:nvPr/>
-        </p:nvSpPr>
-        <p:spPr>
-          <a:xfrm>
-            <a:off x="8648700" y="4552950"/>
-            <a:ext cx="2381250" cy="1104900"/>
-          </a:xfrm>
-          <a:prstGeom prst="roundRect">
-            <a:avLst>
-              <a:gd name="adj" fmla="val 6897"/>
-            </a:avLst>
-          </a:prstGeom>
-          <a:solidFill>
-            <a:srgbClr val="202329"/>
-          </a:solidFill>
-          <a:ln w="9525">
-            <a:solidFill>
-              <a:srgbClr val="3A3F47"/>
-            </a:solidFill>
-            <a:prstDash val="solid"/>
-          </a:ln>
-        </p:spPr>
-      </p:sp>
-      <p:sp>
-        <p:nvSpPr>
-          <p:cNvPr id="23" name="Rectángulo 22">
-            <a:extLst>
-              <a:ext uri="{FF2B5EF4-FFF2-40B4-BE49-F238E27FC236}">
-                <a16:creationId xmlns:a16="http://schemas.microsoft.com/office/drawing/2014/main" id="{37DE90E9-DDBE-40AC-ACFF-61ABA24E0895}"/>
-              </a:ext>
-            </a:extLst>
-          </p:cNvPr>
-          <p:cNvSpPr>
-            <a:spLocks noGrp="1"/>
-          </p:cNvSpPr>
-          <p:nvPr/>
-        </p:nvSpPr>
-        <p:spPr>
-          <a:xfrm>
-            <a:off x="8648700" y="4552950"/>
-            <a:ext cx="57150" cy="1104900"/>
-          </a:xfrm>
-          <a:prstGeom prst="rect">
-            <a:avLst/>
-          </a:prstGeom>
-          <a:solidFill>
-            <a:srgbClr val="BD1F36"/>
-          </a:solidFill>
-          <a:ln w="0">
-            <a:solidFill>
-              <a:srgbClr val="BD1F36"/>
-            </a:solidFill>
-            <a:prstDash val="solid"/>
-          </a:ln>
-        </p:spPr>
-      </p:sp>
-      <p:sp>
-        <p:nvSpPr>
-          <p:cNvPr id="24" name="Rectángulo 23">
-            <a:extLst>
-              <a:ext uri="{FF2B5EF4-FFF2-40B4-BE49-F238E27FC236}">
-                <a16:creationId xmlns:a16="http://schemas.microsoft.com/office/drawing/2014/main" id="{7F444E79-1AF7-4D5A-A8EE-C07623C0C0B1}"/>
-              </a:ext>
-            </a:extLst>
-          </p:cNvPr>
-          <p:cNvSpPr>
-            <a:spLocks noGrp="1"/>
-          </p:cNvSpPr>
-          <p:nvPr/>
-        </p:nvSpPr>
-        <p:spPr>
-          <a:xfrm>
-            <a:off x="8877300" y="4994910"/>
-            <a:ext cx="1924050" cy="342900"/>
-          </a:xfrm>
-          <a:prstGeom prst="rect">
-            <a:avLst/>
-          </a:prstGeom>
-          <a:noFill/>
-          <a:ln w="0">
-            <a:noFill/>
-            <a:prstDash val="solid"/>
-          </a:ln>
-        </p:spPr>
-        <p:txBody>
-          <a:bodyPr wrap="square" lIns="0" tIns="0" rIns="0" bIns="0" anchor="ctr"/>
-          <a:lstStyle/>
-          <a:p>
-            <a:pPr algn="ctr">
-              <a:lnSpc>
-                <a:spcPct val="108000"/>
-              </a:lnSpc>
-              <a:buNone/>
-              <a:defRPr sz="1200" b="1">
-                <a:solidFill>
-                  <a:srgbClr val="F3F4F6"/>
-                </a:solidFill>
-                <a:latin typeface="Calibri"/>
-                <a:ea typeface="Calibri"/>
-                <a:cs typeface="Calibri"/>
-              </a:defRPr>
-            </a:pPr>
-            <a:r>
-              <a:rPr lang="es-ES_tradnl" sz="1200" b="1">
-                <a:solidFill>
-                  <a:srgbClr val="F3F4F6"/>
-                </a:solidFill>
-                <a:latin typeface="Calibri"/>
-                <a:ea typeface="Calibri"/>
-                <a:cs typeface="Calibri"/>
-              </a:rPr>
-              <a:t>[INSERTAR MOCKUP REAL]</a:t>
-            </a:r>
-          </a:p>
-        </p:txBody>
-      </p:sp>
-      <p:sp>
-        <p:nvSpPr>
-          <p:cNvPr id="25" name="Rectángulo 24">
-            <a:extLst>
-              <a:ext uri="{FF2B5EF4-FFF2-40B4-BE49-F238E27FC236}">
-                <a16:creationId xmlns:a16="http://schemas.microsoft.com/office/drawing/2014/main" id="{002A4FBF-47C1-42D1-B198-867E1E23ADE1}"/>
-              </a:ext>
-            </a:extLst>
-          </p:cNvPr>
-          <p:cNvSpPr>
-            <a:spLocks noGrp="1"/>
-          </p:cNvSpPr>
-          <p:nvPr/>
-        </p:nvSpPr>
-        <p:spPr>
-          <a:xfrm>
-            <a:off x="9029700" y="5138547"/>
-            <a:ext cx="1619250" cy="381000"/>
-          </a:xfrm>
-          <a:prstGeom prst="rect">
-            <a:avLst/>
-          </a:prstGeom>
-          <a:noFill/>
-          <a:ln w="0">
-            <a:noFill/>
-            <a:prstDash val="solid"/>
-          </a:ln>
-        </p:spPr>
-        <p:txBody>
-          <a:bodyPr wrap="square" lIns="0" tIns="0" rIns="0" bIns="0" anchor="t"/>
-          <a:lstStyle/>
-          <a:p>
-            <a:pPr algn="ctr">
-              <a:lnSpc>
-                <a:spcPct val="110000"/>
-              </a:lnSpc>
-              <a:buNone/>
-              <a:defRPr sz="825" b="0">
-                <a:solidFill>
-                  <a:srgbClr val="B8BEC8"/>
-                </a:solidFill>
-                <a:latin typeface="Calibri"/>
-                <a:ea typeface="Calibri"/>
-                <a:cs typeface="Calibri"/>
-              </a:defRPr>
-            </a:pPr>
-            <a:r>
-              <a:rPr lang="es-ES_tradnl" sz="825" b="0">
-                <a:solidFill>
-                  <a:srgbClr val="B8BEC8"/>
-                </a:solidFill>
-                <a:latin typeface="Calibri"/>
-                <a:ea typeface="Calibri"/>
-                <a:cs typeface="Calibri"/>
-              </a:rPr>
-              <a:t>Ejemplo final para cierre ejecutivo.</a:t>
-            </a:r>
-          </a:p>
-        </p:txBody>
-      </p:sp>
-      <p:sp>
-        <p:nvSpPr>
-          <p:cNvPr id="26" name="Rectángulo 25">
-            <a:extLst>
-              <a:ext uri="{FF2B5EF4-FFF2-40B4-BE49-F238E27FC236}">
-                <a16:creationId xmlns:a16="http://schemas.microsoft.com/office/drawing/2014/main" id="{950AE0FC-5943-49F6-9A64-F46725461993}"/>
-              </a:ext>
-            </a:extLst>
-          </p:cNvPr>
-          <p:cNvSpPr>
-            <a:spLocks noGrp="1"/>
-          </p:cNvSpPr>
-          <p:nvPr/>
-        </p:nvSpPr>
-        <p:spPr>
-          <a:xfrm>
-            <a:off x="533400" y="6515100"/>
-            <a:ext cx="3429000" cy="190500"/>
-          </a:xfrm>
-          <a:prstGeom prst="rect">
-            <a:avLst/>
-          </a:prstGeom>
-          <a:noFill/>
-          <a:ln w="0">
-            <a:noFill/>
-            <a:prstDash val="solid"/>
-          </a:ln>
-        </p:spPr>
-        <p:txBody>
-          <a:bodyPr wrap="square" lIns="0" tIns="0" rIns="0" bIns="0" anchor="t"/>
-          <a:lstStyle/>
-          <a:p>
-            <a:pPr algn="l">
-              <a:lnSpc>
-                <a:spcPct val="108000"/>
-              </a:lnSpc>
-              <a:buNone/>
-              <a:defRPr sz="675" b="0">
-                <a:solidFill>
-                  <a:srgbClr val="7D8592"/>
-                </a:solidFill>
-                <a:latin typeface="Calibri"/>
-                <a:ea typeface="Calibri"/>
-                <a:cs typeface="Calibri"/>
-              </a:defRPr>
-            </a:pPr>
-            <a:r>
-              <a:rPr lang="es-ES_tradnl" sz="675" b="0">
-                <a:solidFill>
-                  <a:srgbClr val="7D8592"/>
-                </a:solidFill>
-                <a:latin typeface="Calibri"/>
-                <a:ea typeface="Calibri"/>
-                <a:cs typeface="Calibri"/>
-              </a:rPr>
-              <a:t>RMC Control System | RMC MockupTool</a:t>
-            </a:r>
-          </a:p>
-        </p:txBody>
-      </p:sp>
-      <p:sp>
-        <p:nvSpPr>
-          <p:cNvPr id="27" name="Rectángulo 26">
-            <a:extLst>
-              <a:ext uri="{FF2B5EF4-FFF2-40B4-BE49-F238E27FC236}">
-                <a16:creationId xmlns:a16="http://schemas.microsoft.com/office/drawing/2014/main" id="{1B457B12-C058-4BBA-AD29-5C6F9CFA5AA8}"/>
-              </a:ext>
-            </a:extLst>
-          </p:cNvPr>
-          <p:cNvSpPr>
-            <a:spLocks noGrp="1"/>
-          </p:cNvSpPr>
-          <p:nvPr/>
-        </p:nvSpPr>
-        <p:spPr>
-          <a:xfrm>
-            <a:off x="11334750" y="6496050"/>
-            <a:ext cx="323850" cy="190500"/>
-          </a:xfrm>
-          <a:prstGeom prst="rect">
-            <a:avLst/>
-          </a:prstGeom>
-          <a:noFill/>
-          <a:ln w="0">
-            <a:noFill/>
-            <a:prstDash val="solid"/>
-          </a:ln>
-        </p:spPr>
-        <p:txBody>
-          <a:bodyPr wrap="square" lIns="0" tIns="0" rIns="0" bIns="0" anchor="t"/>
-          <a:lstStyle/>
-          <a:p>
-            <a:pPr algn="r">
-              <a:lnSpc>
-                <a:spcPct val="108000"/>
-              </a:lnSpc>
-              <a:buNone/>
-              <a:defRPr sz="750" b="0">
-                <a:solidFill>
-                  <a:srgbClr val="7D8592"/>
-                </a:solidFill>
-                <a:latin typeface="Calibri"/>
-                <a:ea typeface="Calibri"/>
-                <a:cs typeface="Calibri"/>
-              </a:defRPr>
-            </a:pPr>
-            <a:r>
-              <a:rPr lang="es-ES_tradnl" sz="750" b="0">
-                <a:solidFill>
-                  <a:srgbClr val="7D8592"/>
-                </a:solidFill>
-                <a:latin typeface="Calibri"/>
-                <a:ea typeface="Calibri"/>
-                <a:cs typeface="Calibri"/>
-              </a:rPr>
-              <a:t>11</a:t>
-            </a:r>
-          </a:p>
-        </p:txBody>
-      </p:sp>
-    </p:spTree>
-    <p:extLst>
-      <p:ext uri="{BB962C8B-B14F-4D97-AF65-F5344CB8AC3E}">
-        <p14:creationId xmlns:p14="http://schemas.microsoft.com/office/powerpoint/2010/main" val="1888519977"/>
-      </p:ext>
-    </p:extLst>
-  </p:cSld>
-  <p:clrMapOvr>
-    <a:masterClrMapping/>
-  </p:clrMapOvr>
-</p:sld>
-</file>
-
 <file path=ppt/slides/slide2.xml><?xml version="1.0" encoding="utf-8"?>
 <p:sld xmlns:a="http://schemas.openxmlformats.org/drawingml/2006/main" xmlns:r="http://schemas.openxmlformats.org/officeDocument/2006/relationships" xmlns:p="http://schemas.openxmlformats.org/presentationml/2006/main">
   <p:cSld>
@@ -10903,6 +9368,49 @@
           </a:effectLst>
         </p:spPr>
       </p:pic>
+      <p:sp>
+        <p:nvSpPr>
+          <p:cNvPr id="5" name="Rectángulo 4">
+            <a:extLst>
+              <a:ext uri="{FF2B5EF4-FFF2-40B4-BE49-F238E27FC236}">
+                <a16:creationId xmlns:a16="http://schemas.microsoft.com/office/drawing/2014/main" id="{82634F4B-7DF8-0FE0-81F9-604E63C1C651}"/>
+              </a:ext>
+            </a:extLst>
+          </p:cNvPr>
+          <p:cNvSpPr>
+            <a:spLocks noGrp="1"/>
+          </p:cNvSpPr>
+          <p:nvPr/>
+        </p:nvSpPr>
+        <p:spPr>
+          <a:xfrm>
+            <a:off x="1173884" y="1454641"/>
+            <a:ext cx="2571750" cy="247650"/>
+          </a:xfrm>
+          <a:prstGeom prst="rect">
+            <a:avLst/>
+          </a:prstGeom>
+          <a:noFill/>
+          <a:ln w="0">
+            <a:noFill/>
+            <a:prstDash val="solid"/>
+          </a:ln>
+        </p:spPr>
+        <p:txBody>
+          <a:bodyPr/>
+          <a:lstStyle/>
+          <a:p>
+            <a:r>
+              <a:rPr lang="es-ES_tradnl" sz="1100" b="1" dirty="0">
+                <a:solidFill>
+                  <a:schemeClr val="bg1"/>
+                </a:solidFill>
+              </a:rPr>
+              <a:t>Ejemplo: Personalizada</a:t>
+            </a:r>
+          </a:p>
+        </p:txBody>
+      </p:sp>
     </p:spTree>
     <p:extLst>
       <p:ext uri="{BB962C8B-B14F-4D97-AF65-F5344CB8AC3E}">
@@ -11119,7 +9627,7 @@
         </p:nvSpPr>
         <p:spPr>
           <a:xfrm>
-            <a:off x="685800" y="1762125"/>
+            <a:off x="685800" y="1660529"/>
             <a:ext cx="5048250" cy="2364331"/>
           </a:xfrm>
           <a:prstGeom prst="roundRect">
@@ -11154,7 +9662,7 @@
         </p:nvSpPr>
         <p:spPr>
           <a:xfrm>
-            <a:off x="685800" y="1762125"/>
+            <a:off x="685800" y="1660529"/>
             <a:ext cx="5048250" cy="76200"/>
           </a:xfrm>
           <a:prstGeom prst="rect">
@@ -11187,7 +9695,7 @@
         </p:nvSpPr>
         <p:spPr>
           <a:xfrm>
-            <a:off x="829252" y="1908001"/>
+            <a:off x="829252" y="1806405"/>
             <a:ext cx="2095500" cy="266700"/>
           </a:xfrm>
           <a:prstGeom prst="rect">
@@ -11230,7 +9738,7 @@
         </p:nvSpPr>
         <p:spPr>
           <a:xfrm>
-            <a:off x="972127" y="2441401"/>
+            <a:off x="972127" y="2339805"/>
             <a:ext cx="4095750" cy="1714500"/>
           </a:xfrm>
           <a:prstGeom prst="rect">
@@ -11477,7 +9985,7 @@
         </p:nvSpPr>
         <p:spPr>
           <a:xfrm>
-            <a:off x="6457950" y="1762125"/>
+            <a:off x="6457950" y="1660529"/>
             <a:ext cx="5048250" cy="2364331"/>
           </a:xfrm>
           <a:prstGeom prst="roundRect">
@@ -11512,7 +10020,7 @@
         </p:nvSpPr>
         <p:spPr>
           <a:xfrm>
-            <a:off x="6457950" y="1762125"/>
+            <a:off x="6457950" y="1660529"/>
             <a:ext cx="5048250" cy="76200"/>
           </a:xfrm>
           <a:prstGeom prst="rect">
@@ -11545,7 +10053,7 @@
         </p:nvSpPr>
         <p:spPr>
           <a:xfrm>
-            <a:off x="6696652" y="1908001"/>
+            <a:off x="6696652" y="1806405"/>
             <a:ext cx="2095500" cy="266700"/>
           </a:xfrm>
           <a:prstGeom prst="rect">
@@ -11588,7 +10096,7 @@
         </p:nvSpPr>
         <p:spPr>
           <a:xfrm>
-            <a:off x="6744277" y="2431006"/>
+            <a:off x="6744277" y="2329410"/>
             <a:ext cx="4095750" cy="1695450"/>
           </a:xfrm>
           <a:prstGeom prst="rect">
@@ -11991,7 +10499,7 @@
         </p:blipFill>
         <p:spPr>
           <a:xfrm>
-            <a:off x="2081645" y="4243216"/>
+            <a:off x="2081645" y="4215508"/>
             <a:ext cx="7772400" cy="2184569"/>
           </a:xfrm>
           <a:prstGeom prst="roundRect">
@@ -13410,202 +11918,22 @@
       </p:grpSpPr>
       <p:sp>
         <p:nvSpPr>
-          <p:cNvPr id="26" name="Rectángulo 25">
-            <a:extLst>
-              <a:ext uri="{FF2B5EF4-FFF2-40B4-BE49-F238E27FC236}">
-                <a16:creationId xmlns:a16="http://schemas.microsoft.com/office/drawing/2014/main" id="{9910E5AC-AF93-4C24-8451-B172063BAC00}"/>
-              </a:ext>
-            </a:extLst>
-          </p:cNvPr>
-          <p:cNvSpPr>
-            <a:spLocks noGrp="1"/>
-          </p:cNvSpPr>
-          <p:nvPr/>
-        </p:nvSpPr>
-        <p:spPr>
-          <a:xfrm>
-            <a:off x="590550" y="419100"/>
-            <a:ext cx="4000500" cy="190500"/>
-          </a:xfrm>
-          <a:prstGeom prst="rect">
-            <a:avLst/>
-          </a:prstGeom>
-          <a:noFill/>
-          <a:ln w="0">
-            <a:noFill/>
-            <a:prstDash val="solid"/>
-          </a:ln>
-        </p:spPr>
-        <p:txBody>
-          <a:bodyPr wrap="square" lIns="0" tIns="0" rIns="0" bIns="0" anchor="t"/>
-          <a:lstStyle/>
-          <a:p>
-            <a:pPr algn="l">
-              <a:lnSpc>
-                <a:spcPct val="108000"/>
-              </a:lnSpc>
-              <a:buNone/>
-              <a:defRPr sz="750" b="1">
-                <a:solidFill>
-                  <a:srgbClr val="7D8592"/>
-                </a:solidFill>
-                <a:latin typeface="Calibri"/>
-                <a:ea typeface="Calibri"/>
-                <a:cs typeface="Calibri"/>
-              </a:defRPr>
-            </a:pPr>
-            <a:r>
-              <a:rPr lang="es-ES_tradnl" sz="750" b="1">
-                <a:solidFill>
-                  <a:srgbClr val="7D8592"/>
-                </a:solidFill>
-                <a:latin typeface="Calibri"/>
-                <a:ea typeface="Calibri"/>
-                <a:cs typeface="Calibri"/>
-              </a:rPr>
-              <a:t>INTEGRACION RMC</a:t>
-            </a:r>
-          </a:p>
-        </p:txBody>
-      </p:sp>
-      <p:sp>
-        <p:nvSpPr>
-          <p:cNvPr id="2" name="Rectángulo 1">
-            <a:extLst>
-              <a:ext uri="{FF2B5EF4-FFF2-40B4-BE49-F238E27FC236}">
-                <a16:creationId xmlns:a16="http://schemas.microsoft.com/office/drawing/2014/main" id="{AE1AB351-167A-46EB-B4DB-40C129186456}"/>
-              </a:ext>
-            </a:extLst>
-          </p:cNvPr>
-          <p:cNvSpPr>
-            <a:spLocks noGrp="1"/>
-          </p:cNvSpPr>
-          <p:nvPr/>
-        </p:nvSpPr>
-        <p:spPr>
-          <a:xfrm>
-            <a:off x="590550" y="666750"/>
-            <a:ext cx="7239000" cy="723900"/>
-          </a:xfrm>
-          <a:prstGeom prst="rect">
-            <a:avLst/>
-          </a:prstGeom>
-          <a:noFill/>
-          <a:ln w="0">
-            <a:noFill/>
-            <a:prstDash val="solid"/>
-          </a:ln>
-        </p:spPr>
-        <p:txBody>
-          <a:bodyPr wrap="square" lIns="0" tIns="0" rIns="0" bIns="0" anchor="t"/>
-          <a:lstStyle/>
-          <a:p>
-            <a:pPr algn="l">
-              <a:lnSpc>
-                <a:spcPct val="103000"/>
-              </a:lnSpc>
-              <a:buNone/>
-              <a:defRPr sz="2325" b="1">
-                <a:solidFill>
-                  <a:srgbClr val="F3F4F6"/>
-                </a:solidFill>
-                <a:latin typeface="Calibri"/>
-                <a:ea typeface="Calibri"/>
-                <a:cs typeface="Calibri"/>
-              </a:defRPr>
-            </a:pPr>
-            <a:r>
-              <a:rPr lang="es-ES_tradnl" sz="2325" b="1">
-                <a:solidFill>
-                  <a:srgbClr val="F3F4F6"/>
-                </a:solidFill>
-                <a:latin typeface="Calibri"/>
-                <a:ea typeface="Calibri"/>
-                <a:cs typeface="Calibri"/>
-              </a:rPr>
-              <a:t>Se integra por datos, no mezclando reglas entre herramientas.</a:t>
-            </a:r>
-          </a:p>
-        </p:txBody>
-      </p:sp>
-      <p:sp>
-        <p:nvSpPr>
-          <p:cNvPr id="3" name="Rectángulo 2">
-            <a:extLst>
-              <a:ext uri="{FF2B5EF4-FFF2-40B4-BE49-F238E27FC236}">
-                <a16:creationId xmlns:a16="http://schemas.microsoft.com/office/drawing/2014/main" id="{1BEAF51B-2B5F-47CB-A2E4-C1EF845C6533}"/>
-              </a:ext>
-            </a:extLst>
-          </p:cNvPr>
-          <p:cNvSpPr>
-            <a:spLocks noGrp="1"/>
-          </p:cNvSpPr>
-          <p:nvPr/>
-        </p:nvSpPr>
-        <p:spPr>
-          <a:xfrm>
-            <a:off x="609600" y="1390650"/>
-            <a:ext cx="7334250" cy="457200"/>
-          </a:xfrm>
-          <a:prstGeom prst="rect">
-            <a:avLst/>
-          </a:prstGeom>
-          <a:noFill/>
-          <a:ln w="0">
-            <a:noFill/>
-            <a:prstDash val="solid"/>
-          </a:ln>
-        </p:spPr>
-        <p:txBody>
-          <a:bodyPr wrap="square" lIns="0" tIns="0" rIns="0" bIns="0" anchor="t"/>
-          <a:lstStyle/>
-          <a:p>
-            <a:pPr algn="l">
-              <a:lnSpc>
-                <a:spcPct val="118000"/>
-              </a:lnSpc>
-              <a:buNone/>
-              <a:defRPr sz="1125" b="0">
-                <a:solidFill>
-                  <a:srgbClr val="B8BEC8"/>
-                </a:solidFill>
-                <a:latin typeface="Calibri"/>
-                <a:ea typeface="Calibri"/>
-                <a:cs typeface="Calibri"/>
-              </a:defRPr>
-            </a:pPr>
-            <a:r>
-              <a:rPr lang="es-ES_tradnl" sz="1125" b="0">
-                <a:solidFill>
-                  <a:srgbClr val="B8BEC8"/>
-                </a:solidFill>
-                <a:latin typeface="Calibri"/>
-                <a:ea typeface="Calibri"/>
-                <a:cs typeface="Calibri"/>
-              </a:rPr>
-              <a:t>Control Center puede consultar rutas, claves, fechas e impresion sin que MockupTool toque tablas de RMCOp-Nike.</a:t>
-            </a:r>
-          </a:p>
-        </p:txBody>
-      </p:sp>
-      <p:sp>
-        <p:nvSpPr>
-          <p:cNvPr id="4" name="Rectángulo 3">
-            <a:extLst>
-              <a:ext uri="{FF2B5EF4-FFF2-40B4-BE49-F238E27FC236}">
-                <a16:creationId xmlns:a16="http://schemas.microsoft.com/office/drawing/2014/main" id="{AC33DAE6-DABA-49C8-8D56-928FA3B4EAF3}"/>
-              </a:ext>
-            </a:extLst>
-          </p:cNvPr>
-          <p:cNvSpPr>
-            <a:spLocks noGrp="1"/>
-          </p:cNvSpPr>
-          <p:nvPr/>
-        </p:nvSpPr>
-        <p:spPr>
-          <a:xfrm>
-            <a:off x="590550" y="323850"/>
-            <a:ext cx="514350" cy="38100"/>
+          <p:cNvPr id="28" name="Rectángulo 27">
+            <a:extLst>
+              <a:ext uri="{FF2B5EF4-FFF2-40B4-BE49-F238E27FC236}">
+                <a16:creationId xmlns:a16="http://schemas.microsoft.com/office/drawing/2014/main" id="{014C88B9-B93A-4509-9F92-6D4A3E9B3E46}"/>
+              </a:ext>
+            </a:extLst>
+          </p:cNvPr>
+          <p:cNvSpPr>
+            <a:spLocks noGrp="1"/>
+          </p:cNvSpPr>
+          <p:nvPr/>
+        </p:nvSpPr>
+        <p:spPr>
+          <a:xfrm>
+            <a:off x="0" y="0"/>
+            <a:ext cx="171450" cy="6858000"/>
           </a:xfrm>
           <a:prstGeom prst="rect">
             <a:avLst/>
@@ -13623,34 +11951,128 @@
       </p:sp>
       <p:sp>
         <p:nvSpPr>
-          <p:cNvPr id="5" name="Rectángulo redondeado 4">
-            <a:extLst>
-              <a:ext uri="{FF2B5EF4-FFF2-40B4-BE49-F238E27FC236}">
-                <a16:creationId xmlns:a16="http://schemas.microsoft.com/office/drawing/2014/main" id="{2B5EC554-034C-434A-80C1-E91FB5CDC3C9}"/>
-              </a:ext>
-            </a:extLst>
-          </p:cNvPr>
-          <p:cNvSpPr>
-            <a:spLocks noGrp="1"/>
-          </p:cNvSpPr>
-          <p:nvPr/>
-        </p:nvSpPr>
-        <p:spPr>
-          <a:xfrm>
-            <a:off x="876300" y="2457450"/>
-            <a:ext cx="2381250" cy="1123950"/>
+          <p:cNvPr id="2" name="Rectángulo 1">
+            <a:extLst>
+              <a:ext uri="{FF2B5EF4-FFF2-40B4-BE49-F238E27FC236}">
+                <a16:creationId xmlns:a16="http://schemas.microsoft.com/office/drawing/2014/main" id="{E933A7B0-81E5-4531-B97F-B1C335F4D7B9}"/>
+              </a:ext>
+            </a:extLst>
+          </p:cNvPr>
+          <p:cNvSpPr>
+            <a:spLocks noGrp="1"/>
+          </p:cNvSpPr>
+          <p:nvPr/>
+        </p:nvSpPr>
+        <p:spPr>
+          <a:xfrm>
+            <a:off x="533400" y="508004"/>
+            <a:ext cx="1143000" cy="190500"/>
+          </a:xfrm>
+          <a:prstGeom prst="rect">
+            <a:avLst/>
+          </a:prstGeom>
+          <a:noFill/>
+          <a:ln w="0">
+            <a:noFill/>
+            <a:prstDash val="solid"/>
+          </a:ln>
+        </p:spPr>
+        <p:txBody>
+          <a:bodyPr anchor="t"/>
+          <a:lstStyle/>
+          <a:p>
+            <a:r>
+              <a:rPr lang="es-ES_tradnl" sz="975" b="1" dirty="0">
+                <a:solidFill>
+                  <a:srgbClr val="AEB4BF"/>
+                </a:solidFill>
+              </a:rPr>
+              <a:t>CIERRE</a:t>
+            </a:r>
+          </a:p>
+        </p:txBody>
+      </p:sp>
+      <p:sp>
+        <p:nvSpPr>
+          <p:cNvPr id="3" name="Rectángulo 2">
+            <a:extLst>
+              <a:ext uri="{FF2B5EF4-FFF2-40B4-BE49-F238E27FC236}">
+                <a16:creationId xmlns:a16="http://schemas.microsoft.com/office/drawing/2014/main" id="{6E82F44F-06EC-494D-B910-D182A7B1395A}"/>
+              </a:ext>
+            </a:extLst>
+          </p:cNvPr>
+          <p:cNvSpPr>
+            <a:spLocks noGrp="1"/>
+          </p:cNvSpPr>
+          <p:nvPr/>
+        </p:nvSpPr>
+        <p:spPr>
+          <a:xfrm>
+            <a:off x="533400" y="667451"/>
+            <a:ext cx="9243579" cy="895350"/>
+          </a:xfrm>
+          <a:prstGeom prst="rect">
+            <a:avLst/>
+          </a:prstGeom>
+          <a:noFill/>
+          <a:ln w="0">
+            <a:noFill/>
+            <a:prstDash val="solid"/>
+          </a:ln>
+        </p:spPr>
+        <p:txBody>
+          <a:bodyPr/>
+          <a:lstStyle/>
+          <a:p>
+            <a:r>
+              <a:rPr lang="es-ES_tradnl" sz="2700" b="1" dirty="0" err="1">
+                <a:solidFill>
+                  <a:schemeClr val="bg1"/>
+                </a:solidFill>
+              </a:rPr>
+              <a:t>MockupTool</a:t>
+            </a:r>
+            <a:r>
+              <a:rPr lang="es-ES_tradnl" sz="2700" b="1" dirty="0">
+                <a:solidFill>
+                  <a:schemeClr val="bg1"/>
+                </a:solidFill>
+              </a:rPr>
+              <a:t> convierte revisión manual en evidencia visual recuperable.</a:t>
+            </a:r>
+          </a:p>
+        </p:txBody>
+      </p:sp>
+      <p:sp>
+        <p:nvSpPr>
+          <p:cNvPr id="4" name="Rectángulo redondeado 3">
+            <a:extLst>
+              <a:ext uri="{FF2B5EF4-FFF2-40B4-BE49-F238E27FC236}">
+                <a16:creationId xmlns:a16="http://schemas.microsoft.com/office/drawing/2014/main" id="{564C223B-D1EE-4BB3-8869-BE2B4F33505F}"/>
+              </a:ext>
+            </a:extLst>
+          </p:cNvPr>
+          <p:cNvSpPr>
+            <a:spLocks noGrp="1"/>
+          </p:cNvSpPr>
+          <p:nvPr/>
+        </p:nvSpPr>
+        <p:spPr>
+          <a:xfrm>
+            <a:off x="923925" y="3029301"/>
+            <a:ext cx="2381250" cy="990600"/>
           </a:xfrm>
           <a:prstGeom prst="roundRect">
             <a:avLst>
-              <a:gd name="adj" fmla="val 6780"/>
+              <a:gd name="adj" fmla="val 7692"/>
             </a:avLst>
           </a:prstGeom>
           <a:solidFill>
-            <a:srgbClr val="2B2F35"/>
+            <a:srgbClr val="292B30"/>
           </a:solidFill>
           <a:ln w="9525">
             <a:solidFill>
-              <a:srgbClr val="3A3F47"/>
+              <a:srgbClr val="444952"/>
             </a:solidFill>
             <a:prstDash val="solid"/>
           </a:ln>
@@ -13658,60 +12080,76 @@
       </p:sp>
       <p:sp>
         <p:nvSpPr>
+          <p:cNvPr id="5" name="Rectángulo 4">
+            <a:extLst>
+              <a:ext uri="{FF2B5EF4-FFF2-40B4-BE49-F238E27FC236}">
+                <a16:creationId xmlns:a16="http://schemas.microsoft.com/office/drawing/2014/main" id="{15678DC5-749B-470F-8815-68AAF14CEE70}"/>
+              </a:ext>
+            </a:extLst>
+          </p:cNvPr>
+          <p:cNvSpPr>
+            <a:spLocks noGrp="1"/>
+          </p:cNvSpPr>
+          <p:nvPr/>
+        </p:nvSpPr>
+        <p:spPr>
+          <a:xfrm>
+            <a:off x="923925" y="3029301"/>
+            <a:ext cx="47625" cy="990600"/>
+          </a:xfrm>
+          <a:prstGeom prst="rect">
+            <a:avLst/>
+          </a:prstGeom>
+          <a:solidFill>
+            <a:srgbClr val="BD1F36"/>
+          </a:solidFill>
+          <a:ln w="0">
+            <a:solidFill>
+              <a:srgbClr val="BD1F36"/>
+            </a:solidFill>
+            <a:prstDash val="solid"/>
+          </a:ln>
+        </p:spPr>
+      </p:sp>
+      <p:sp>
+        <p:nvSpPr>
           <p:cNvPr id="6" name="Rectángulo 5">
             <a:extLst>
               <a:ext uri="{FF2B5EF4-FFF2-40B4-BE49-F238E27FC236}">
-                <a16:creationId xmlns:a16="http://schemas.microsoft.com/office/drawing/2014/main" id="{F8B51E9C-18C5-4CB2-8B82-23D77B6FB0BB}"/>
-              </a:ext>
-            </a:extLst>
-          </p:cNvPr>
-          <p:cNvSpPr>
-            <a:spLocks noGrp="1"/>
-          </p:cNvSpPr>
-          <p:nvPr/>
-        </p:nvSpPr>
-        <p:spPr>
-          <a:xfrm>
-            <a:off x="1143000" y="2724150"/>
-            <a:ext cx="1809750" cy="266700"/>
-          </a:xfrm>
-          <a:prstGeom prst="rect">
-            <a:avLst/>
-          </a:prstGeom>
-          <a:noFill/>
-          <a:ln w="0">
-            <a:noFill/>
-            <a:prstDash val="solid"/>
-          </a:ln>
-        </p:spPr>
-        <p:txBody>
-          <a:bodyPr wrap="square" lIns="0" tIns="0" rIns="0" bIns="0" anchor="t"/>
-          <a:lstStyle/>
-          <a:p>
-            <a:pPr algn="ctr">
-              <a:lnSpc>
-                <a:spcPct val="108000"/>
-              </a:lnSpc>
-              <a:buNone/>
-              <a:defRPr sz="1650" b="1">
-                <a:solidFill>
-                  <a:srgbClr val="F3F4F6"/>
-                </a:solidFill>
-                <a:latin typeface="Calibri"/>
-                <a:ea typeface="Calibri"/>
-                <a:cs typeface="Calibri"/>
-              </a:defRPr>
-            </a:pPr>
-            <a:r>
-              <a:rPr lang="es-ES_tradnl" sz="1650" b="1">
-                <a:solidFill>
-                  <a:srgbClr val="F3F4F6"/>
-                </a:solidFill>
-                <a:latin typeface="Calibri"/>
-                <a:ea typeface="Calibri"/>
-                <a:cs typeface="Calibri"/>
-              </a:rPr>
-              <a:t>RMC MockupTool</a:t>
+                <a16:creationId xmlns:a16="http://schemas.microsoft.com/office/drawing/2014/main" id="{50A226D6-6E71-4F4C-A8AA-EB7D91A61751}"/>
+              </a:ext>
+            </a:extLst>
+          </p:cNvPr>
+          <p:cNvSpPr>
+            <a:spLocks noGrp="1"/>
+          </p:cNvSpPr>
+          <p:nvPr/>
+        </p:nvSpPr>
+        <p:spPr>
+          <a:xfrm>
+            <a:off x="1095375" y="3080105"/>
+            <a:ext cx="2095500" cy="247650"/>
+          </a:xfrm>
+          <a:prstGeom prst="rect">
+            <a:avLst/>
+          </a:prstGeom>
+          <a:noFill/>
+          <a:ln w="0">
+            <a:noFill/>
+            <a:prstDash val="solid"/>
+          </a:ln>
+        </p:spPr>
+        <p:txBody>
+          <a:bodyPr/>
+          <a:lstStyle/>
+          <a:p>
+            <a:r>
+              <a:rPr lang="es-ES_tradnl" b="1" dirty="0">
+                <a:solidFill>
+                  <a:schemeClr val="bg1"/>
+                </a:solidFill>
+              </a:rPr>
+              <a:t>Producción</a:t>
             </a:r>
           </a:p>
         </p:txBody>
@@ -13721,57 +12159,40 @@
           <p:cNvPr id="7" name="Rectángulo 6">
             <a:extLst>
               <a:ext uri="{FF2B5EF4-FFF2-40B4-BE49-F238E27FC236}">
-                <a16:creationId xmlns:a16="http://schemas.microsoft.com/office/drawing/2014/main" id="{CB61BD9F-5F49-4D6B-8417-51A772E2EAAB}"/>
-              </a:ext>
-            </a:extLst>
-          </p:cNvPr>
-          <p:cNvSpPr>
-            <a:spLocks noGrp="1"/>
-          </p:cNvSpPr>
-          <p:nvPr/>
-        </p:nvSpPr>
-        <p:spPr>
-          <a:xfrm>
-            <a:off x="1162050" y="3143250"/>
-            <a:ext cx="1771650" cy="209550"/>
-          </a:xfrm>
-          <a:prstGeom prst="rect">
-            <a:avLst/>
-          </a:prstGeom>
-          <a:noFill/>
-          <a:ln w="0">
-            <a:noFill/>
-            <a:prstDash val="solid"/>
-          </a:ln>
-        </p:spPr>
-        <p:txBody>
-          <a:bodyPr wrap="square" lIns="0" tIns="0" rIns="0" bIns="0" anchor="t"/>
-          <a:lstStyle/>
-          <a:p>
-            <a:pPr algn="ctr">
-              <a:lnSpc>
-                <a:spcPct val="108000"/>
-              </a:lnSpc>
-              <a:buNone/>
-              <a:defRPr sz="975" b="0">
-                <a:solidFill>
-                  <a:srgbClr val="B8BEC8"/>
-                </a:solidFill>
-                <a:latin typeface="Calibri"/>
-                <a:ea typeface="Calibri"/>
-                <a:cs typeface="Calibri"/>
-              </a:defRPr>
-            </a:pPr>
-            <a:r>
-              <a:rPr lang="es-ES_tradnl" sz="975" b="0">
-                <a:solidFill>
-                  <a:srgbClr val="B8BEC8"/>
-                </a:solidFill>
-                <a:latin typeface="Calibri"/>
-                <a:ea typeface="Calibri"/>
-                <a:cs typeface="Calibri"/>
-              </a:rPr>
-              <a:t>Genera PDFs anotados</a:t>
+                <a16:creationId xmlns:a16="http://schemas.microsoft.com/office/drawing/2014/main" id="{A39D8C00-D04D-436B-B8C9-62685D15BE2C}"/>
+              </a:ext>
+            </a:extLst>
+          </p:cNvPr>
+          <p:cNvSpPr>
+            <a:spLocks noGrp="1"/>
+          </p:cNvSpPr>
+          <p:nvPr/>
+        </p:nvSpPr>
+        <p:spPr>
+          <a:xfrm>
+            <a:off x="1095375" y="3384905"/>
+            <a:ext cx="2057400" cy="438150"/>
+          </a:xfrm>
+          <a:prstGeom prst="rect">
+            <a:avLst/>
+          </a:prstGeom>
+          <a:noFill/>
+          <a:ln w="0">
+            <a:noFill/>
+            <a:prstDash val="solid"/>
+          </a:ln>
+        </p:spPr>
+        <p:txBody>
+          <a:bodyPr anchor="t"/>
+          <a:lstStyle/>
+          <a:p>
+            <a:r>
+              <a:rPr lang="es-ES_tradnl" sz="1200" dirty="0">
+                <a:solidFill>
+                  <a:srgbClr val="AEB4BF"/>
+                </a:solidFill>
+              </a:rPr>
+              <a:t>Sabe que falta, que existe y que se omite.</a:t>
             </a:r>
           </a:p>
         </p:txBody>
@@ -13781,31 +12202,31 @@
           <p:cNvPr id="8" name="Rectángulo redondeado 7">
             <a:extLst>
               <a:ext uri="{FF2B5EF4-FFF2-40B4-BE49-F238E27FC236}">
-                <a16:creationId xmlns:a16="http://schemas.microsoft.com/office/drawing/2014/main" id="{433D4C2C-2BC5-4490-A1D4-7ED27A649686}"/>
-              </a:ext>
-            </a:extLst>
-          </p:cNvPr>
-          <p:cNvSpPr>
-            <a:spLocks noGrp="1"/>
-          </p:cNvSpPr>
-          <p:nvPr/>
-        </p:nvSpPr>
-        <p:spPr>
-          <a:xfrm>
-            <a:off x="4857750" y="1962150"/>
-            <a:ext cx="2381250" cy="2133600"/>
+                <a16:creationId xmlns:a16="http://schemas.microsoft.com/office/drawing/2014/main" id="{0D8BAB8A-9964-41F3-8934-8DADCAB3BFAC}"/>
+              </a:ext>
+            </a:extLst>
+          </p:cNvPr>
+          <p:cNvSpPr>
+            <a:spLocks noGrp="1"/>
+          </p:cNvSpPr>
+          <p:nvPr/>
+        </p:nvSpPr>
+        <p:spPr>
+          <a:xfrm>
+            <a:off x="3781425" y="3029301"/>
+            <a:ext cx="2381250" cy="990600"/>
           </a:xfrm>
           <a:prstGeom prst="roundRect">
             <a:avLst>
-              <a:gd name="adj" fmla="val 3571"/>
+              <a:gd name="adj" fmla="val 7692"/>
             </a:avLst>
           </a:prstGeom>
           <a:solidFill>
-            <a:srgbClr val="202329"/>
+            <a:srgbClr val="292B30"/>
           </a:solidFill>
           <a:ln w="9525">
             <a:solidFill>
-              <a:srgbClr val="3A3F47"/>
+              <a:srgbClr val="444952"/>
             </a:solidFill>
             <a:prstDash val="solid"/>
           </a:ln>
@@ -13816,232 +12237,150 @@
           <p:cNvPr id="9" name="Rectángulo 8">
             <a:extLst>
               <a:ext uri="{FF2B5EF4-FFF2-40B4-BE49-F238E27FC236}">
-                <a16:creationId xmlns:a16="http://schemas.microsoft.com/office/drawing/2014/main" id="{3C4F14E1-36D6-437A-9105-E1C0345A2175}"/>
-              </a:ext>
-            </a:extLst>
-          </p:cNvPr>
-          <p:cNvSpPr>
-            <a:spLocks noGrp="1"/>
-          </p:cNvSpPr>
-          <p:nvPr/>
-        </p:nvSpPr>
-        <p:spPr>
-          <a:xfrm>
-            <a:off x="5124450" y="2266950"/>
-            <a:ext cx="1809750" cy="266700"/>
-          </a:xfrm>
-          <a:prstGeom prst="rect">
-            <a:avLst/>
-          </a:prstGeom>
-          <a:noFill/>
-          <a:ln w="0">
-            <a:noFill/>
-            <a:prstDash val="solid"/>
-          </a:ln>
-        </p:spPr>
-        <p:txBody>
-          <a:bodyPr wrap="square" lIns="0" tIns="0" rIns="0" bIns="0" anchor="t"/>
-          <a:lstStyle/>
-          <a:p>
-            <a:pPr algn="ctr">
-              <a:lnSpc>
-                <a:spcPct val="108000"/>
-              </a:lnSpc>
-              <a:buNone/>
-              <a:defRPr sz="1800" b="1">
-                <a:solidFill>
-                  <a:srgbClr val="F3C747"/>
-                </a:solidFill>
-                <a:latin typeface="Calibri"/>
-                <a:ea typeface="Calibri"/>
-                <a:cs typeface="Calibri"/>
-              </a:defRPr>
-            </a:pPr>
-            <a:r>
-              <a:rPr lang="es-ES_tradnl" sz="1800" b="1">
-                <a:solidFill>
-                  <a:srgbClr val="F3C747"/>
-                </a:solidFill>
-                <a:latin typeface="Calibri"/>
-                <a:ea typeface="Calibri"/>
-                <a:cs typeface="Calibri"/>
-              </a:rPr>
-              <a:t>RMC_CEP.sqlite</a:t>
-            </a:r>
-          </a:p>
-        </p:txBody>
+                <a16:creationId xmlns:a16="http://schemas.microsoft.com/office/drawing/2014/main" id="{9890EA00-3444-4D47-B7C2-96DBFC435C3E}"/>
+              </a:ext>
+            </a:extLst>
+          </p:cNvPr>
+          <p:cNvSpPr>
+            <a:spLocks noGrp="1"/>
+          </p:cNvSpPr>
+          <p:nvPr/>
+        </p:nvSpPr>
+        <p:spPr>
+          <a:xfrm>
+            <a:off x="3781425" y="3029301"/>
+            <a:ext cx="47625" cy="990600"/>
+          </a:xfrm>
+          <a:prstGeom prst="rect">
+            <a:avLst/>
+          </a:prstGeom>
+          <a:solidFill>
+            <a:srgbClr val="2D7FF9"/>
+          </a:solidFill>
+          <a:ln w="0">
+            <a:solidFill>
+              <a:srgbClr val="2D7FF9"/>
+            </a:solidFill>
+            <a:prstDash val="solid"/>
+          </a:ln>
+        </p:spPr>
       </p:sp>
       <p:sp>
         <p:nvSpPr>
           <p:cNvPr id="10" name="Rectángulo 9">
             <a:extLst>
               <a:ext uri="{FF2B5EF4-FFF2-40B4-BE49-F238E27FC236}">
-                <a16:creationId xmlns:a16="http://schemas.microsoft.com/office/drawing/2014/main" id="{D2CC4EFD-DB1A-4CB2-BBEE-8C1EED14C738}"/>
-              </a:ext>
-            </a:extLst>
-          </p:cNvPr>
-          <p:cNvSpPr>
-            <a:spLocks noGrp="1"/>
-          </p:cNvSpPr>
-          <p:nvPr/>
-        </p:nvSpPr>
-        <p:spPr>
-          <a:xfrm>
-            <a:off x="5314950" y="2857500"/>
-            <a:ext cx="1428750" cy="1047750"/>
-          </a:xfrm>
-          <a:prstGeom prst="rect">
-            <a:avLst/>
-          </a:prstGeom>
-          <a:noFill/>
-          <a:ln w="0">
-            <a:noFill/>
-            <a:prstDash val="solid"/>
-          </a:ln>
-        </p:spPr>
-        <p:txBody>
-          <a:bodyPr wrap="square" lIns="0" tIns="0" rIns="0" bIns="0" anchor="t"/>
-          <a:lstStyle/>
-          <a:p>
-            <a:pPr algn="ctr">
-              <a:lnSpc>
-                <a:spcPct val="118000"/>
-              </a:lnSpc>
-              <a:buNone/>
-              <a:defRPr sz="1500" b="0">
-                <a:solidFill>
-                  <a:srgbClr val="F3F4F6"/>
-                </a:solidFill>
-                <a:latin typeface="Calibri"/>
-                <a:ea typeface="Calibri"/>
-                <a:cs typeface="Calibri"/>
-              </a:defRPr>
-            </a:pPr>
-            <a:r>
-              <a:rPr lang="es-ES_tradnl" sz="1500" b="0">
-                <a:solidFill>
-                  <a:srgbClr val="F3F4F6"/>
-                </a:solidFill>
-                <a:latin typeface="Calibri"/>
-                <a:ea typeface="Calibri"/>
-                <a:cs typeface="Calibri"/>
-              </a:rPr>
-              <a:t>runs</a:t>
-            </a:r>
-          </a:p>
-          <a:p>
-            <a:pPr algn="ctr">
-              <a:lnSpc>
-                <a:spcPct val="118000"/>
-              </a:lnSpc>
-              <a:buNone/>
-              <a:defRPr sz="1500" b="0">
-                <a:solidFill>
-                  <a:srgbClr val="F3F4F6"/>
-                </a:solidFill>
-                <a:latin typeface="Calibri"/>
-                <a:ea typeface="Calibri"/>
-                <a:cs typeface="Calibri"/>
-              </a:defRPr>
-            </a:pPr>
-            <a:r>
-              <a:rPr lang="es-ES_tradnl" sz="1500" b="0">
-                <a:solidFill>
-                  <a:srgbClr val="F3F4F6"/>
-                </a:solidFill>
-                <a:latin typeface="Calibri"/>
-                <a:ea typeface="Calibri"/>
-                <a:cs typeface="Calibri"/>
-              </a:rPr>
-              <a:t>items</a:t>
-            </a:r>
-          </a:p>
-          <a:p>
-            <a:pPr algn="ctr">
-              <a:lnSpc>
-                <a:spcPct val="118000"/>
-              </a:lnSpc>
-              <a:buNone/>
-              <a:defRPr sz="1500" b="0">
-                <a:solidFill>
-                  <a:srgbClr val="F3F4F6"/>
-                </a:solidFill>
-                <a:latin typeface="Calibri"/>
-                <a:ea typeface="Calibri"/>
-                <a:cs typeface="Calibri"/>
-              </a:defRPr>
-            </a:pPr>
-            <a:r>
-              <a:rPr lang="es-ES_tradnl" sz="1500" b="0">
-                <a:solidFill>
-                  <a:srgbClr val="F3F4F6"/>
-                </a:solidFill>
-                <a:latin typeface="Calibri"/>
-                <a:ea typeface="Calibri"/>
-                <a:cs typeface="Calibri"/>
-              </a:rPr>
-              <a:t>cep_registry</a:t>
-            </a:r>
-          </a:p>
-          <a:p>
-            <a:pPr algn="ctr">
-              <a:lnSpc>
-                <a:spcPct val="118000"/>
-              </a:lnSpc>
-              <a:buNone/>
-              <a:defRPr sz="1500" b="0">
-                <a:solidFill>
-                  <a:srgbClr val="F3F4F6"/>
-                </a:solidFill>
-                <a:latin typeface="Calibri"/>
-                <a:ea typeface="Calibri"/>
-                <a:cs typeface="Calibri"/>
-              </a:defRPr>
-            </a:pPr>
-            <a:r>
-              <a:rPr lang="es-ES_tradnl" sz="1500" b="0">
-                <a:solidFill>
-                  <a:srgbClr val="F3F4F6"/>
-                </a:solidFill>
-                <a:latin typeface="Calibri"/>
-                <a:ea typeface="Calibri"/>
-                <a:cs typeface="Calibri"/>
-              </a:rPr>
-              <a:t>variants leidas</a:t>
-            </a:r>
-          </a:p>
-        </p:txBody>
-      </p:sp>
-      <p:sp>
-        <p:nvSpPr>
-          <p:cNvPr id="11" name="Rectángulo redondeado 10">
-            <a:extLst>
-              <a:ext uri="{FF2B5EF4-FFF2-40B4-BE49-F238E27FC236}">
-                <a16:creationId xmlns:a16="http://schemas.microsoft.com/office/drawing/2014/main" id="{5E71290C-6962-4AE9-BFEF-0F783A689B41}"/>
-              </a:ext>
-            </a:extLst>
-          </p:cNvPr>
-          <p:cNvSpPr>
-            <a:spLocks noGrp="1"/>
-          </p:cNvSpPr>
-          <p:nvPr/>
-        </p:nvSpPr>
-        <p:spPr>
-          <a:xfrm>
-            <a:off x="8896350" y="2457450"/>
-            <a:ext cx="2381250" cy="1123950"/>
+                <a16:creationId xmlns:a16="http://schemas.microsoft.com/office/drawing/2014/main" id="{9A283BB3-B6C6-463B-B41D-9E836D01261F}"/>
+              </a:ext>
+            </a:extLst>
+          </p:cNvPr>
+          <p:cNvSpPr>
+            <a:spLocks noGrp="1"/>
+          </p:cNvSpPr>
+          <p:nvPr/>
+        </p:nvSpPr>
+        <p:spPr>
+          <a:xfrm>
+            <a:off x="3952875" y="3080105"/>
+            <a:ext cx="2095500" cy="247650"/>
+          </a:xfrm>
+          <a:prstGeom prst="rect">
+            <a:avLst/>
+          </a:prstGeom>
+          <a:noFill/>
+          <a:ln w="0">
+            <a:noFill/>
+            <a:prstDash val="solid"/>
+          </a:ln>
+        </p:spPr>
+        <p:txBody>
+          <a:bodyPr/>
+          <a:lstStyle/>
+          <a:p>
+            <a:r>
+              <a:rPr lang="es-ES_tradnl" b="1" dirty="0">
+                <a:solidFill>
+                  <a:schemeClr val="bg1"/>
+                </a:solidFill>
+              </a:rPr>
+              <a:t>Diseño</a:t>
+            </a:r>
+          </a:p>
+        </p:txBody>
+      </p:sp>
+      <p:sp>
+        <p:nvSpPr>
+          <p:cNvPr id="11" name="Rectángulo 10">
+            <a:extLst>
+              <a:ext uri="{FF2B5EF4-FFF2-40B4-BE49-F238E27FC236}">
+                <a16:creationId xmlns:a16="http://schemas.microsoft.com/office/drawing/2014/main" id="{1D6EC483-A091-4062-9DC6-CA2D57060748}"/>
+              </a:ext>
+            </a:extLst>
+          </p:cNvPr>
+          <p:cNvSpPr>
+            <a:spLocks noGrp="1"/>
+          </p:cNvSpPr>
+          <p:nvPr/>
+        </p:nvSpPr>
+        <p:spPr>
+          <a:xfrm>
+            <a:off x="3952875" y="3384905"/>
+            <a:ext cx="2057400" cy="438150"/>
+          </a:xfrm>
+          <a:prstGeom prst="rect">
+            <a:avLst/>
+          </a:prstGeom>
+          <a:noFill/>
+          <a:ln w="0">
+            <a:noFill/>
+            <a:prstDash val="solid"/>
+          </a:ln>
+        </p:spPr>
+        <p:txBody>
+          <a:bodyPr anchor="t"/>
+          <a:lstStyle/>
+          <a:p>
+            <a:r>
+              <a:rPr lang="es-ES_tradnl" sz="1200" dirty="0">
+                <a:solidFill>
+                  <a:srgbClr val="AEB4BF"/>
+                </a:solidFill>
+              </a:rPr>
+              <a:t>Revisa datos anotados sin abrir múltiples fuentes.</a:t>
+            </a:r>
+          </a:p>
+        </p:txBody>
+      </p:sp>
+      <p:sp>
+        <p:nvSpPr>
+          <p:cNvPr id="12" name="Rectángulo redondeado 11">
+            <a:extLst>
+              <a:ext uri="{FF2B5EF4-FFF2-40B4-BE49-F238E27FC236}">
+                <a16:creationId xmlns:a16="http://schemas.microsoft.com/office/drawing/2014/main" id="{D6B94287-7CE9-4160-938A-E82C2991B378}"/>
+              </a:ext>
+            </a:extLst>
+          </p:cNvPr>
+          <p:cNvSpPr>
+            <a:spLocks noGrp="1"/>
+          </p:cNvSpPr>
+          <p:nvPr/>
+        </p:nvSpPr>
+        <p:spPr>
+          <a:xfrm>
+            <a:off x="6638925" y="3029301"/>
+            <a:ext cx="2381250" cy="990600"/>
           </a:xfrm>
           <a:prstGeom prst="roundRect">
             <a:avLst>
-              <a:gd name="adj" fmla="val 6780"/>
+              <a:gd name="adj" fmla="val 7692"/>
             </a:avLst>
           </a:prstGeom>
           <a:solidFill>
-            <a:srgbClr val="2B2F35"/>
+            <a:srgbClr val="292B30"/>
           </a:solidFill>
           <a:ln w="9525">
             <a:solidFill>
-              <a:srgbClr val="3A3F47"/>
+              <a:srgbClr val="444952"/>
             </a:solidFill>
             <a:prstDash val="solid"/>
           </a:ln>
@@ -14049,180 +12388,76 @@
       </p:sp>
       <p:sp>
         <p:nvSpPr>
-          <p:cNvPr id="12" name="Rectángulo 11">
-            <a:extLst>
-              <a:ext uri="{FF2B5EF4-FFF2-40B4-BE49-F238E27FC236}">
-                <a16:creationId xmlns:a16="http://schemas.microsoft.com/office/drawing/2014/main" id="{D98CB3FD-E6C2-40B7-A901-2B4AF26739C9}"/>
-              </a:ext>
-            </a:extLst>
-          </p:cNvPr>
-          <p:cNvSpPr>
-            <a:spLocks noGrp="1"/>
-          </p:cNvSpPr>
-          <p:nvPr/>
-        </p:nvSpPr>
-        <p:spPr>
-          <a:xfrm>
-            <a:off x="9163050" y="2724150"/>
-            <a:ext cx="1809750" cy="266700"/>
-          </a:xfrm>
-          <a:prstGeom prst="rect">
-            <a:avLst/>
-          </a:prstGeom>
-          <a:noFill/>
-          <a:ln w="0">
-            <a:noFill/>
-            <a:prstDash val="solid"/>
-          </a:ln>
-        </p:spPr>
-        <p:txBody>
-          <a:bodyPr wrap="square" lIns="0" tIns="0" rIns="0" bIns="0" anchor="t"/>
-          <a:lstStyle/>
-          <a:p>
-            <a:pPr algn="ctr">
-              <a:lnSpc>
-                <a:spcPct val="108000"/>
-              </a:lnSpc>
-              <a:buNone/>
-              <a:defRPr sz="1650" b="1">
-                <a:solidFill>
-                  <a:srgbClr val="F3F4F6"/>
-                </a:solidFill>
-                <a:latin typeface="Calibri"/>
-                <a:ea typeface="Calibri"/>
-                <a:cs typeface="Calibri"/>
-              </a:defRPr>
-            </a:pPr>
-            <a:r>
-              <a:rPr lang="es-ES_tradnl" sz="1650" b="1">
-                <a:solidFill>
-                  <a:srgbClr val="F3F4F6"/>
-                </a:solidFill>
-                <a:latin typeface="Calibri"/>
-                <a:ea typeface="Calibri"/>
-                <a:cs typeface="Calibri"/>
-              </a:rPr>
-              <a:t>Control Center</a:t>
-            </a:r>
-          </a:p>
-        </p:txBody>
-      </p:sp>
-      <p:sp>
-        <p:nvSpPr>
           <p:cNvPr id="13" name="Rectángulo 12">
             <a:extLst>
               <a:ext uri="{FF2B5EF4-FFF2-40B4-BE49-F238E27FC236}">
-                <a16:creationId xmlns:a16="http://schemas.microsoft.com/office/drawing/2014/main" id="{5EA110A2-3B6F-4273-8930-701591E98603}"/>
-              </a:ext>
-            </a:extLst>
-          </p:cNvPr>
-          <p:cNvSpPr>
-            <a:spLocks noGrp="1"/>
-          </p:cNvSpPr>
-          <p:nvPr/>
-        </p:nvSpPr>
-        <p:spPr>
-          <a:xfrm>
-            <a:off x="9182100" y="3143250"/>
-            <a:ext cx="1771650" cy="209550"/>
-          </a:xfrm>
-          <a:prstGeom prst="rect">
-            <a:avLst/>
-          </a:prstGeom>
-          <a:noFill/>
-          <a:ln w="0">
-            <a:noFill/>
-            <a:prstDash val="solid"/>
-          </a:ln>
-        </p:spPr>
-        <p:txBody>
-          <a:bodyPr wrap="square" lIns="0" tIns="0" rIns="0" bIns="0" anchor="t"/>
-          <a:lstStyle/>
-          <a:p>
-            <a:pPr algn="ctr">
-              <a:lnSpc>
-                <a:spcPct val="108000"/>
-              </a:lnSpc>
-              <a:buNone/>
-              <a:defRPr sz="975" b="0">
-                <a:solidFill>
-                  <a:srgbClr val="B8BEC8"/>
-                </a:solidFill>
-                <a:latin typeface="Calibri"/>
-                <a:ea typeface="Calibri"/>
-                <a:cs typeface="Calibri"/>
-              </a:defRPr>
-            </a:pPr>
-            <a:r>
-              <a:rPr lang="es-ES_tradnl" sz="975" b="0">
-                <a:solidFill>
-                  <a:srgbClr val="B8BEC8"/>
-                </a:solidFill>
-                <a:latin typeface="Calibri"/>
-                <a:ea typeface="Calibri"/>
-                <a:cs typeface="Calibri"/>
-              </a:rPr>
-              <a:t>Consulta paths y estado</a:t>
-            </a:r>
-          </a:p>
-        </p:txBody>
+                <a16:creationId xmlns:a16="http://schemas.microsoft.com/office/drawing/2014/main" id="{B2A77FA2-D01C-44AA-A6E8-F025B92B62EC}"/>
+              </a:ext>
+            </a:extLst>
+          </p:cNvPr>
+          <p:cNvSpPr>
+            <a:spLocks noGrp="1"/>
+          </p:cNvSpPr>
+          <p:nvPr/>
+        </p:nvSpPr>
+        <p:spPr>
+          <a:xfrm>
+            <a:off x="6638925" y="3029301"/>
+            <a:ext cx="47625" cy="990600"/>
+          </a:xfrm>
+          <a:prstGeom prst="rect">
+            <a:avLst/>
+          </a:prstGeom>
+          <a:solidFill>
+            <a:srgbClr val="20B26B"/>
+          </a:solidFill>
+          <a:ln w="0">
+            <a:solidFill>
+              <a:srgbClr val="20B26B"/>
+            </a:solidFill>
+            <a:prstDash val="solid"/>
+          </a:ln>
+        </p:spPr>
       </p:sp>
       <p:sp>
         <p:nvSpPr>
           <p:cNvPr id="14" name="Rectángulo 13">
             <a:extLst>
               <a:ext uri="{FF2B5EF4-FFF2-40B4-BE49-F238E27FC236}">
-                <a16:creationId xmlns:a16="http://schemas.microsoft.com/office/drawing/2014/main" id="{6DE0FA37-54DA-49D8-9EE3-30CBCD62783E}"/>
-              </a:ext>
-            </a:extLst>
-          </p:cNvPr>
-          <p:cNvSpPr>
-            <a:spLocks noGrp="1"/>
-          </p:cNvSpPr>
-          <p:nvPr/>
-        </p:nvSpPr>
-        <p:spPr>
-          <a:xfrm>
-            <a:off x="3505200" y="2857500"/>
-            <a:ext cx="952500" cy="266700"/>
-          </a:xfrm>
-          <a:prstGeom prst="rect">
-            <a:avLst/>
-          </a:prstGeom>
-          <a:noFill/>
-          <a:ln w="0">
-            <a:noFill/>
-            <a:prstDash val="solid"/>
-          </a:ln>
-        </p:spPr>
-        <p:txBody>
-          <a:bodyPr wrap="square" lIns="0" tIns="0" rIns="0" bIns="0" anchor="t"/>
-          <a:lstStyle/>
-          <a:p>
-            <a:pPr algn="ctr">
-              <a:lnSpc>
-                <a:spcPct val="108000"/>
-              </a:lnSpc>
-              <a:buNone/>
-              <a:defRPr sz="1800" b="1">
-                <a:solidFill>
-                  <a:srgbClr val="7D8592"/>
-                </a:solidFill>
-                <a:latin typeface="Calibri"/>
-                <a:ea typeface="Calibri"/>
-                <a:cs typeface="Calibri"/>
-              </a:defRPr>
-            </a:pPr>
-            <a:r>
-              <a:rPr lang="es-ES_tradnl" sz="1800" b="1">
-                <a:solidFill>
-                  <a:srgbClr val="7D8592"/>
-                </a:solidFill>
-                <a:latin typeface="Calibri"/>
-                <a:ea typeface="Calibri"/>
-                <a:cs typeface="Calibri"/>
-              </a:rPr>
-              <a:t>----&gt;</a:t>
+                <a16:creationId xmlns:a16="http://schemas.microsoft.com/office/drawing/2014/main" id="{73E0DAD5-DD8B-4031-A740-AF62C32310E9}"/>
+              </a:ext>
+            </a:extLst>
+          </p:cNvPr>
+          <p:cNvSpPr>
+            <a:spLocks noGrp="1"/>
+          </p:cNvSpPr>
+          <p:nvPr/>
+        </p:nvSpPr>
+        <p:spPr>
+          <a:xfrm>
+            <a:off x="6810375" y="3080105"/>
+            <a:ext cx="2095500" cy="247650"/>
+          </a:xfrm>
+          <a:prstGeom prst="rect">
+            <a:avLst/>
+          </a:prstGeom>
+          <a:noFill/>
+          <a:ln w="0">
+            <a:noFill/>
+            <a:prstDash val="solid"/>
+          </a:ln>
+        </p:spPr>
+        <p:txBody>
+          <a:bodyPr/>
+          <a:lstStyle/>
+          <a:p>
+            <a:r>
+              <a:rPr lang="es-ES_tradnl" b="1" dirty="0">
+                <a:solidFill>
+                  <a:schemeClr val="bg1"/>
+                </a:solidFill>
+              </a:rPr>
+              <a:t>Seguimiento</a:t>
             </a:r>
           </a:p>
         </p:txBody>
@@ -14232,57 +12467,56 @@
           <p:cNvPr id="15" name="Rectángulo 14">
             <a:extLst>
               <a:ext uri="{FF2B5EF4-FFF2-40B4-BE49-F238E27FC236}">
-                <a16:creationId xmlns:a16="http://schemas.microsoft.com/office/drawing/2014/main" id="{D5B100C9-B43C-4ED6-982C-1404A19255D5}"/>
-              </a:ext>
-            </a:extLst>
-          </p:cNvPr>
-          <p:cNvSpPr>
-            <a:spLocks noGrp="1"/>
-          </p:cNvSpPr>
-          <p:nvPr/>
-        </p:nvSpPr>
-        <p:spPr>
-          <a:xfrm>
-            <a:off x="7524750" y="2857500"/>
-            <a:ext cx="952500" cy="266700"/>
-          </a:xfrm>
-          <a:prstGeom prst="rect">
-            <a:avLst/>
-          </a:prstGeom>
-          <a:noFill/>
-          <a:ln w="0">
-            <a:noFill/>
-            <a:prstDash val="solid"/>
-          </a:ln>
-        </p:spPr>
-        <p:txBody>
-          <a:bodyPr wrap="square" lIns="0" tIns="0" rIns="0" bIns="0" anchor="t"/>
-          <a:lstStyle/>
-          <a:p>
-            <a:pPr algn="ctr">
-              <a:lnSpc>
-                <a:spcPct val="108000"/>
-              </a:lnSpc>
-              <a:buNone/>
-              <a:defRPr sz="1800" b="1">
-                <a:solidFill>
-                  <a:srgbClr val="7D8592"/>
-                </a:solidFill>
-                <a:latin typeface="Calibri"/>
-                <a:ea typeface="Calibri"/>
-                <a:cs typeface="Calibri"/>
-              </a:defRPr>
-            </a:pPr>
-            <a:r>
-              <a:rPr lang="es-ES_tradnl" sz="1800" b="1">
-                <a:solidFill>
-                  <a:srgbClr val="7D8592"/>
-                </a:solidFill>
-                <a:latin typeface="Calibri"/>
-                <a:ea typeface="Calibri"/>
-                <a:cs typeface="Calibri"/>
-              </a:rPr>
-              <a:t>----&gt;</a:t>
+                <a16:creationId xmlns:a16="http://schemas.microsoft.com/office/drawing/2014/main" id="{E40717E0-BBC4-4035-AB02-499D15BC2084}"/>
+              </a:ext>
+            </a:extLst>
+          </p:cNvPr>
+          <p:cNvSpPr>
+            <a:spLocks noGrp="1"/>
+          </p:cNvSpPr>
+          <p:nvPr/>
+        </p:nvSpPr>
+        <p:spPr>
+          <a:xfrm>
+            <a:off x="6810375" y="3384905"/>
+            <a:ext cx="2057400" cy="438150"/>
+          </a:xfrm>
+          <a:prstGeom prst="rect">
+            <a:avLst/>
+          </a:prstGeom>
+          <a:noFill/>
+          <a:ln w="0">
+            <a:noFill/>
+            <a:prstDash val="solid"/>
+          </a:ln>
+        </p:spPr>
+        <p:txBody>
+          <a:bodyPr anchor="t"/>
+          <a:lstStyle/>
+          <a:p>
+            <a:r>
+              <a:rPr lang="es-ES_tradnl" sz="1200" dirty="0">
+                <a:solidFill>
+                  <a:srgbClr val="AEB4BF"/>
+                </a:solidFill>
+              </a:rPr>
+              <a:t>Consulta </a:t>
+            </a:r>
+            <a:r>
+              <a:rPr lang="es-ES_tradnl" sz="1200" dirty="0" err="1">
+                <a:solidFill>
+                  <a:srgbClr val="AEB4BF"/>
+                </a:solidFill>
+              </a:rPr>
+              <a:t>path</a:t>
+            </a:r>
+            <a:r>
+              <a:rPr lang="es-ES_tradnl" sz="1200" dirty="0">
+                <a:solidFill>
+                  <a:srgbClr val="AEB4BF"/>
+                </a:solidFill>
+              </a:rPr>
+              <a:t>, fecha, clave e impreso.</a:t>
             </a:r>
           </a:p>
         </p:txBody>
@@ -14292,31 +12526,31 @@
           <p:cNvPr id="16" name="Rectángulo redondeado 15">
             <a:extLst>
               <a:ext uri="{FF2B5EF4-FFF2-40B4-BE49-F238E27FC236}">
-                <a16:creationId xmlns:a16="http://schemas.microsoft.com/office/drawing/2014/main" id="{0E275BEB-F9B7-4D07-B6EC-847065505F1A}"/>
-              </a:ext>
-            </a:extLst>
-          </p:cNvPr>
-          <p:cNvSpPr>
-            <a:spLocks noGrp="1"/>
-          </p:cNvSpPr>
-          <p:nvPr/>
-        </p:nvSpPr>
-        <p:spPr>
-          <a:xfrm>
-            <a:off x="1676400" y="4895850"/>
-            <a:ext cx="3143250" cy="742950"/>
+                <a16:creationId xmlns:a16="http://schemas.microsoft.com/office/drawing/2014/main" id="{84F555C2-63D8-4949-98BB-8C7FEC3B7EDF}"/>
+              </a:ext>
+            </a:extLst>
+          </p:cNvPr>
+          <p:cNvSpPr>
+            <a:spLocks noGrp="1"/>
+          </p:cNvSpPr>
+          <p:nvPr/>
+        </p:nvSpPr>
+        <p:spPr>
+          <a:xfrm>
+            <a:off x="9496425" y="3029301"/>
+            <a:ext cx="2000250" cy="990600"/>
           </a:xfrm>
           <a:prstGeom prst="roundRect">
             <a:avLst>
-              <a:gd name="adj" fmla="val 10256"/>
+              <a:gd name="adj" fmla="val 7692"/>
             </a:avLst>
           </a:prstGeom>
           <a:solidFill>
-            <a:srgbClr val="2B2F35"/>
+            <a:srgbClr val="292B30"/>
           </a:solidFill>
           <a:ln w="9525">
             <a:solidFill>
-              <a:srgbClr val="3A3F47"/>
+              <a:srgbClr val="444952"/>
             </a:solidFill>
             <a:prstDash val="solid"/>
           </a:ln>
@@ -14327,29 +12561,29 @@
           <p:cNvPr id="17" name="Rectángulo 16">
             <a:extLst>
               <a:ext uri="{FF2B5EF4-FFF2-40B4-BE49-F238E27FC236}">
-                <a16:creationId xmlns:a16="http://schemas.microsoft.com/office/drawing/2014/main" id="{6528D271-A71C-4915-896F-11C22AB7BD6C}"/>
-              </a:ext>
-            </a:extLst>
-          </p:cNvPr>
-          <p:cNvSpPr>
-            <a:spLocks noGrp="1"/>
-          </p:cNvSpPr>
-          <p:nvPr/>
-        </p:nvSpPr>
-        <p:spPr>
-          <a:xfrm>
-            <a:off x="1676400" y="4895850"/>
-            <a:ext cx="47625" cy="742950"/>
+                <a16:creationId xmlns:a16="http://schemas.microsoft.com/office/drawing/2014/main" id="{5AF99CC5-5B6A-42D8-9B76-EBA5661EF653}"/>
+              </a:ext>
+            </a:extLst>
+          </p:cNvPr>
+          <p:cNvSpPr>
+            <a:spLocks noGrp="1"/>
+          </p:cNvSpPr>
+          <p:nvPr/>
+        </p:nvSpPr>
+        <p:spPr>
+          <a:xfrm>
+            <a:off x="9496425" y="3029301"/>
+            <a:ext cx="47625" cy="990600"/>
           </a:xfrm>
           <a:prstGeom prst="rect">
             <a:avLst/>
           </a:prstGeom>
           <a:solidFill>
-            <a:srgbClr val="BD1F36"/>
+            <a:srgbClr val="F3C747"/>
           </a:solidFill>
           <a:ln w="0">
             <a:solidFill>
-              <a:srgbClr val="BD1F36"/>
+              <a:srgbClr val="F3C747"/>
             </a:solidFill>
             <a:prstDash val="solid"/>
           </a:ln>
@@ -14360,57 +12594,40 @@
           <p:cNvPr id="18" name="Rectángulo 17">
             <a:extLst>
               <a:ext uri="{FF2B5EF4-FFF2-40B4-BE49-F238E27FC236}">
-                <a16:creationId xmlns:a16="http://schemas.microsoft.com/office/drawing/2014/main" id="{DA4E09CD-6650-41F8-B421-AEF247B9EDFD}"/>
-              </a:ext>
-            </a:extLst>
-          </p:cNvPr>
-          <p:cNvSpPr>
-            <a:spLocks noGrp="1"/>
-          </p:cNvSpPr>
-          <p:nvPr/>
-        </p:nvSpPr>
-        <p:spPr>
-          <a:xfrm>
-            <a:off x="1847850" y="5048250"/>
-            <a:ext cx="2857500" cy="247650"/>
-          </a:xfrm>
-          <a:prstGeom prst="rect">
-            <a:avLst/>
-          </a:prstGeom>
-          <a:noFill/>
-          <a:ln w="0">
-            <a:noFill/>
-            <a:prstDash val="solid"/>
-          </a:ln>
-        </p:spPr>
-        <p:txBody>
-          <a:bodyPr wrap="square" lIns="0" tIns="0" rIns="0" bIns="0" anchor="t"/>
-          <a:lstStyle/>
-          <a:p>
-            <a:pPr algn="l">
-              <a:lnSpc>
-                <a:spcPct val="108000"/>
-              </a:lnSpc>
-              <a:buNone/>
-              <a:defRPr sz="1350" b="1">
-                <a:solidFill>
-                  <a:srgbClr val="F3F4F6"/>
-                </a:solidFill>
-                <a:latin typeface="Calibri"/>
-                <a:ea typeface="Calibri"/>
-                <a:cs typeface="Calibri"/>
-              </a:defRPr>
-            </a:pPr>
-            <a:r>
-              <a:rPr lang="es-ES_tradnl" sz="1350" b="1">
-                <a:solidFill>
-                  <a:srgbClr val="F3F4F6"/>
-                </a:solidFill>
-                <a:latin typeface="Calibri"/>
-                <a:ea typeface="Calibri"/>
-                <a:cs typeface="Calibri"/>
-              </a:rPr>
-              <a:t>Limite claro</a:t>
+                <a16:creationId xmlns:a16="http://schemas.microsoft.com/office/drawing/2014/main" id="{7BCB836E-5AF8-48AF-BD5A-B226063B57CC}"/>
+              </a:ext>
+            </a:extLst>
+          </p:cNvPr>
+          <p:cNvSpPr>
+            <a:spLocks noGrp="1"/>
+          </p:cNvSpPr>
+          <p:nvPr/>
+        </p:nvSpPr>
+        <p:spPr>
+          <a:xfrm>
+            <a:off x="9667875" y="3080105"/>
+            <a:ext cx="1714500" cy="247650"/>
+          </a:xfrm>
+          <a:prstGeom prst="rect">
+            <a:avLst/>
+          </a:prstGeom>
+          <a:noFill/>
+          <a:ln w="0">
+            <a:noFill/>
+            <a:prstDash val="solid"/>
+          </a:ln>
+        </p:spPr>
+        <p:txBody>
+          <a:bodyPr/>
+          <a:lstStyle/>
+          <a:p>
+            <a:r>
+              <a:rPr lang="es-ES_tradnl" b="1" dirty="0">
+                <a:solidFill>
+                  <a:schemeClr val="bg1"/>
+                </a:solidFill>
+              </a:rPr>
+              <a:t>Control</a:t>
             </a:r>
           </a:p>
         </p:txBody>
@@ -14420,255 +12637,50 @@
           <p:cNvPr id="19" name="Rectángulo 18">
             <a:extLst>
               <a:ext uri="{FF2B5EF4-FFF2-40B4-BE49-F238E27FC236}">
-                <a16:creationId xmlns:a16="http://schemas.microsoft.com/office/drawing/2014/main" id="{00A68344-DDD5-447B-9B73-54E89E8E6BC7}"/>
-              </a:ext>
-            </a:extLst>
-          </p:cNvPr>
-          <p:cNvSpPr>
-            <a:spLocks noGrp="1"/>
-          </p:cNvSpPr>
-          <p:nvPr/>
-        </p:nvSpPr>
-        <p:spPr>
-          <a:xfrm>
-            <a:off x="1847850" y="5353050"/>
-            <a:ext cx="2819400" cy="190500"/>
-          </a:xfrm>
-          <a:prstGeom prst="rect">
-            <a:avLst/>
-          </a:prstGeom>
-          <a:noFill/>
-          <a:ln w="0">
-            <a:noFill/>
-            <a:prstDash val="solid"/>
-          </a:ln>
-        </p:spPr>
-        <p:txBody>
-          <a:bodyPr wrap="square" lIns="0" tIns="0" rIns="0" bIns="0" anchor="t"/>
-          <a:lstStyle/>
-          <a:p>
-            <a:pPr algn="l">
-              <a:lnSpc>
-                <a:spcPct val="114000"/>
-              </a:lnSpc>
-              <a:buNone/>
-              <a:defRPr sz="938" b="0">
-                <a:solidFill>
-                  <a:srgbClr val="B8BEC8"/>
-                </a:solidFill>
-                <a:latin typeface="Calibri"/>
-                <a:ea typeface="Calibri"/>
-                <a:cs typeface="Calibri"/>
-              </a:defRPr>
-            </a:pPr>
-            <a:r>
-              <a:rPr lang="es-ES_tradnl" sz="938" b="0">
-                <a:solidFill>
-                  <a:srgbClr val="B8BEC8"/>
-                </a:solidFill>
-                <a:latin typeface="Calibri"/>
-                <a:ea typeface="Calibri"/>
-                <a:cs typeface="Calibri"/>
-              </a:rPr>
-              <a:t>No modifica tablas rmcop_nike_* ni comparte reglas de escritura.</a:t>
-            </a:r>
-          </a:p>
-        </p:txBody>
-      </p:sp>
-      <p:sp>
-        <p:nvSpPr>
-          <p:cNvPr id="20" name="Rectángulo redondeado 19">
-            <a:extLst>
-              <a:ext uri="{FF2B5EF4-FFF2-40B4-BE49-F238E27FC236}">
-                <a16:creationId xmlns:a16="http://schemas.microsoft.com/office/drawing/2014/main" id="{036B960B-E29F-4E8C-925B-67C5E9A2222B}"/>
-              </a:ext>
-            </a:extLst>
-          </p:cNvPr>
-          <p:cNvSpPr>
-            <a:spLocks noGrp="1"/>
-          </p:cNvSpPr>
-          <p:nvPr/>
-        </p:nvSpPr>
-        <p:spPr>
-          <a:xfrm>
-            <a:off x="6191250" y="4895850"/>
-            <a:ext cx="3143250" cy="742950"/>
-          </a:xfrm>
-          <a:prstGeom prst="roundRect">
-            <a:avLst>
-              <a:gd name="adj" fmla="val 10256"/>
-            </a:avLst>
-          </a:prstGeom>
-          <a:solidFill>
-            <a:srgbClr val="2B2F35"/>
-          </a:solidFill>
-          <a:ln w="9525">
-            <a:solidFill>
-              <a:srgbClr val="3A3F47"/>
-            </a:solidFill>
-            <a:prstDash val="solid"/>
-          </a:ln>
-        </p:spPr>
-      </p:sp>
-      <p:sp>
-        <p:nvSpPr>
-          <p:cNvPr id="21" name="Rectángulo 20">
-            <a:extLst>
-              <a:ext uri="{FF2B5EF4-FFF2-40B4-BE49-F238E27FC236}">
-                <a16:creationId xmlns:a16="http://schemas.microsoft.com/office/drawing/2014/main" id="{788E27C3-5CA4-46DA-8810-DF411FEC9ED1}"/>
-              </a:ext>
-            </a:extLst>
-          </p:cNvPr>
-          <p:cNvSpPr>
-            <a:spLocks noGrp="1"/>
-          </p:cNvSpPr>
-          <p:nvPr/>
-        </p:nvSpPr>
-        <p:spPr>
-          <a:xfrm>
-            <a:off x="6191250" y="4895850"/>
-            <a:ext cx="47625" cy="742950"/>
-          </a:xfrm>
-          <a:prstGeom prst="rect">
-            <a:avLst/>
-          </a:prstGeom>
-          <a:solidFill>
-            <a:srgbClr val="20B26B"/>
-          </a:solidFill>
-          <a:ln w="0">
-            <a:solidFill>
-              <a:srgbClr val="20B26B"/>
-            </a:solidFill>
-            <a:prstDash val="solid"/>
-          </a:ln>
-        </p:spPr>
-      </p:sp>
-      <p:sp>
-        <p:nvSpPr>
-          <p:cNvPr id="22" name="Rectángulo 21">
-            <a:extLst>
-              <a:ext uri="{FF2B5EF4-FFF2-40B4-BE49-F238E27FC236}">
-                <a16:creationId xmlns:a16="http://schemas.microsoft.com/office/drawing/2014/main" id="{1641D752-07F4-4E3D-B558-CA39579DE9B5}"/>
-              </a:ext>
-            </a:extLst>
-          </p:cNvPr>
-          <p:cNvSpPr>
-            <a:spLocks noGrp="1"/>
-          </p:cNvSpPr>
-          <p:nvPr/>
-        </p:nvSpPr>
-        <p:spPr>
-          <a:xfrm>
-            <a:off x="6362700" y="5048250"/>
-            <a:ext cx="2857500" cy="247650"/>
-          </a:xfrm>
-          <a:prstGeom prst="rect">
-            <a:avLst/>
-          </a:prstGeom>
-          <a:noFill/>
-          <a:ln w="0">
-            <a:noFill/>
-            <a:prstDash val="solid"/>
-          </a:ln>
-        </p:spPr>
-        <p:txBody>
-          <a:bodyPr wrap="square" lIns="0" tIns="0" rIns="0" bIns="0" anchor="t"/>
-          <a:lstStyle/>
-          <a:p>
-            <a:pPr algn="l">
-              <a:lnSpc>
-                <a:spcPct val="108000"/>
-              </a:lnSpc>
-              <a:buNone/>
-              <a:defRPr sz="1350" b="1">
-                <a:solidFill>
-                  <a:srgbClr val="F3F4F6"/>
-                </a:solidFill>
-                <a:latin typeface="Calibri"/>
-                <a:ea typeface="Calibri"/>
-                <a:cs typeface="Calibri"/>
-              </a:defRPr>
-            </a:pPr>
-            <a:r>
-              <a:rPr lang="es-ES_tradnl" sz="1350" b="1">
-                <a:solidFill>
-                  <a:srgbClr val="F3F4F6"/>
-                </a:solidFill>
-                <a:latin typeface="Calibri"/>
-                <a:ea typeface="Calibri"/>
-                <a:cs typeface="Calibri"/>
-              </a:rPr>
-              <a:t>Contrato util</a:t>
-            </a:r>
-          </a:p>
-        </p:txBody>
-      </p:sp>
-      <p:sp>
-        <p:nvSpPr>
-          <p:cNvPr id="23" name="Rectángulo 22">
-            <a:extLst>
-              <a:ext uri="{FF2B5EF4-FFF2-40B4-BE49-F238E27FC236}">
-                <a16:creationId xmlns:a16="http://schemas.microsoft.com/office/drawing/2014/main" id="{29C73D38-9E13-4CFD-8276-CB42476D0373}"/>
-              </a:ext>
-            </a:extLst>
-          </p:cNvPr>
-          <p:cNvSpPr>
-            <a:spLocks noGrp="1"/>
-          </p:cNvSpPr>
-          <p:nvPr/>
-        </p:nvSpPr>
-        <p:spPr>
-          <a:xfrm>
-            <a:off x="6362700" y="5353050"/>
-            <a:ext cx="2819400" cy="190500"/>
-          </a:xfrm>
-          <a:prstGeom prst="rect">
-            <a:avLst/>
-          </a:prstGeom>
-          <a:noFill/>
-          <a:ln w="0">
-            <a:noFill/>
-            <a:prstDash val="solid"/>
-          </a:ln>
-        </p:spPr>
-        <p:txBody>
-          <a:bodyPr wrap="square" lIns="0" tIns="0" rIns="0" bIns="0" anchor="t"/>
-          <a:lstStyle/>
-          <a:p>
-            <a:pPr algn="l">
-              <a:lnSpc>
-                <a:spcPct val="114000"/>
-              </a:lnSpc>
-              <a:buNone/>
-              <a:defRPr sz="938" b="0">
-                <a:solidFill>
-                  <a:srgbClr val="B8BEC8"/>
-                </a:solidFill>
-                <a:latin typeface="Calibri"/>
-                <a:ea typeface="Calibri"/>
-                <a:cs typeface="Calibri"/>
-              </a:defRPr>
-            </a:pPr>
-            <a:r>
-              <a:rPr lang="es-ES_tradnl" sz="938" b="0">
-                <a:solidFill>
-                  <a:srgbClr val="B8BEC8"/>
-                </a:solidFill>
-                <a:latin typeface="Calibri"/>
-                <a:ea typeface="Calibri"/>
-                <a:cs typeface="Calibri"/>
-              </a:rPr>
-              <a:t>Control Center debe usar path persistido cuando exista.</a:t>
-            </a:r>
-          </a:p>
-        </p:txBody>
-      </p:sp>
-      <p:sp>
-        <p:nvSpPr>
-          <p:cNvPr id="24" name="Rectángulo 23">
-            <a:extLst>
-              <a:ext uri="{FF2B5EF4-FFF2-40B4-BE49-F238E27FC236}">
-                <a16:creationId xmlns:a16="http://schemas.microsoft.com/office/drawing/2014/main" id="{BBE366D6-91FE-46A8-B3EC-EC1BC112F27A}"/>
+                <a16:creationId xmlns:a16="http://schemas.microsoft.com/office/drawing/2014/main" id="{4AA10D1E-1BF5-4D36-9191-68EEC05CB9EA}"/>
+              </a:ext>
+            </a:extLst>
+          </p:cNvPr>
+          <p:cNvSpPr>
+            <a:spLocks noGrp="1"/>
+          </p:cNvSpPr>
+          <p:nvPr/>
+        </p:nvSpPr>
+        <p:spPr>
+          <a:xfrm>
+            <a:off x="9667875" y="3384905"/>
+            <a:ext cx="1676400" cy="438150"/>
+          </a:xfrm>
+          <a:prstGeom prst="rect">
+            <a:avLst/>
+          </a:prstGeom>
+          <a:noFill/>
+          <a:ln w="0">
+            <a:noFill/>
+            <a:prstDash val="solid"/>
+          </a:ln>
+        </p:spPr>
+        <p:txBody>
+          <a:bodyPr anchor="t"/>
+          <a:lstStyle/>
+          <a:p>
+            <a:r>
+              <a:rPr lang="es-ES_tradnl" sz="1200" dirty="0">
+                <a:solidFill>
+                  <a:srgbClr val="AEB4BF"/>
+                </a:solidFill>
+              </a:rPr>
+              <a:t>Evita duplicados con clave UNIQUE.</a:t>
+            </a:r>
+          </a:p>
+        </p:txBody>
+      </p:sp>
+      <p:sp>
+        <p:nvSpPr>
+          <p:cNvPr id="26" name="Rectángulo 25">
+            <a:extLst>
+              <a:ext uri="{FF2B5EF4-FFF2-40B4-BE49-F238E27FC236}">
+                <a16:creationId xmlns:a16="http://schemas.microsoft.com/office/drawing/2014/main" id="{950AE0FC-5943-49F6-9A64-F46725461993}"/>
               </a:ext>
             </a:extLst>
           </p:cNvPr>
@@ -14725,10 +12737,10 @@
       </p:sp>
       <p:sp>
         <p:nvSpPr>
-          <p:cNvPr id="25" name="Rectángulo 24">
-            <a:extLst>
-              <a:ext uri="{FF2B5EF4-FFF2-40B4-BE49-F238E27FC236}">
-                <a16:creationId xmlns:a16="http://schemas.microsoft.com/office/drawing/2014/main" id="{3EB2AAE8-07CC-4EA7-A271-3416883165A6}"/>
+          <p:cNvPr id="27" name="Rectángulo 26">
+            <a:extLst>
+              <a:ext uri="{FF2B5EF4-FFF2-40B4-BE49-F238E27FC236}">
+                <a16:creationId xmlns:a16="http://schemas.microsoft.com/office/drawing/2014/main" id="{1B457B12-C058-4BBA-AD29-5C6F9CFA5AA8}"/>
               </a:ext>
             </a:extLst>
           </p:cNvPr>
@@ -14778,7 +12790,7 @@
                 <a:ea typeface="Calibri"/>
                 <a:cs typeface="Calibri"/>
               </a:rPr>
-              <a:t>10</a:t>
+              <a:t>11</a:t>
             </a:r>
           </a:p>
         </p:txBody>
@@ -14786,7 +12798,7 @@
     </p:spTree>
     <p:extLst>
       <p:ext uri="{BB962C8B-B14F-4D97-AF65-F5344CB8AC3E}">
-        <p14:creationId xmlns:p14="http://schemas.microsoft.com/office/powerpoint/2010/main" val="965332522"/>
+        <p14:creationId xmlns:p14="http://schemas.microsoft.com/office/powerpoint/2010/main" val="1888519977"/>
       </p:ext>
     </p:extLst>
   </p:cSld>
